--- a/thesis/2026_М_ПІ_ІПЗм-24-1_Нестеренко_В_В.pptx
+++ b/thesis/2026_М_ПІ_ІПЗм-24-1_Нестеренко_В_В.pptx
@@ -5367,7 +5367,7 @@
           <a:lstStyle/>
           <a:p>
             <a:r>
-              <a:t>⏱ ~25 сек  ·  слайд 1/18</a:t>
+              <a:t>⏱ 0:00 – 0:19  ·  слайд 1/18</a:t>
             </a:r>
             <a:endParaRPr lang="en-US" dirty="0"/>
           </a:p>
@@ -5459,7 +5459,7 @@
           <a:lstStyle/>
           <a:p>
             <a:r>
-              <a:t>⏱ ~20 сек  ·  слайд 10/18</a:t>
+              <a:t>⏱ 4:47 – 4:59  ·  слайд 10/18</a:t>
             </a:r>
             <a:endParaRPr lang="en-US" dirty="0"/>
           </a:p>
@@ -5551,7 +5551,7 @@
           <a:lstStyle/>
           <a:p>
             <a:r>
-              <a:t>⏱ ~45 сек  ·  слайд 11/18</a:t>
+              <a:t>⏱ 4:59 – 5:34  ·  слайд 11/18</a:t>
             </a:r>
             <a:endParaRPr lang="en-US" dirty="0"/>
           </a:p>
@@ -5658,7 +5658,7 @@
           <a:lstStyle/>
           <a:p>
             <a:r>
-              <a:t>⏱ ~15 сек  ·  слайд 12/18</a:t>
+              <a:t>⏱ 5:34 – 5:47  ·  слайд 12/18</a:t>
             </a:r>
             <a:endParaRPr lang="en-US" dirty="0"/>
           </a:p>
@@ -5750,7 +5750,7 @@
           <a:lstStyle/>
           <a:p>
             <a:r>
-              <a:t>⏱ ~70 сек  ·  слайд 13/18</a:t>
+              <a:t>⏱ 5:47 – 6:33  ·  слайд 13/18</a:t>
             </a:r>
             <a:endParaRPr lang="en-US" dirty="0"/>
           </a:p>
@@ -5857,7 +5857,7 @@
           <a:lstStyle/>
           <a:p>
             <a:r>
-              <a:t>⏱ ~25 сек  ·  слайд 14/18</a:t>
+              <a:t>⏱ 6:33 – 6:50  ·  слайд 14/18</a:t>
             </a:r>
             <a:endParaRPr lang="en-US" dirty="0"/>
           </a:p>
@@ -5949,7 +5949,7 @@
           <a:lstStyle/>
           <a:p>
             <a:r>
-              <a:t>⏱ ~35 сек  ·  слайд 15/18</a:t>
+              <a:t>⏱ 6:50 – 7:17  ·  слайд 15/18</a:t>
             </a:r>
             <a:endParaRPr lang="en-US" dirty="0"/>
           </a:p>
@@ -6041,7 +6041,7 @@
           <a:lstStyle/>
           <a:p>
             <a:r>
-              <a:t>⏱ ~55 сек  ·  слайд 16/18</a:t>
+              <a:t>⏱ 7:17 – 7:51  ·  слайд 16/18</a:t>
             </a:r>
             <a:endParaRPr lang="en-US" dirty="0"/>
           </a:p>
@@ -6153,7 +6153,7 @@
           <a:lstStyle/>
           <a:p>
             <a:r>
-              <a:t>⏱ ~25 сек  ·  слайд 17/18</a:t>
+              <a:t>⏱ 7:51 – 8:13  ·  слайд 17/18</a:t>
             </a:r>
             <a:endParaRPr lang="en-US" dirty="0"/>
           </a:p>
@@ -6245,7 +6245,7 @@
           <a:lstStyle/>
           <a:p>
             <a:r>
-              <a:t>⏱ ~60 сек  ·  слайд 18/18</a:t>
+              <a:t>⏱ 8:13 – 8:51  ·  слайд 18/18</a:t>
             </a:r>
             <a:endParaRPr lang="en-US" dirty="0"/>
           </a:p>
@@ -6367,7 +6367,7 @@
           <a:lstStyle/>
           <a:p>
             <a:r>
-              <a:t>⏱ ~70 сек  ·  слайд 2/18</a:t>
+              <a:t>⏱ 0:19 – 1:11  ·  слайд 2/18</a:t>
             </a:r>
             <a:endParaRPr lang="en-US" dirty="0"/>
           </a:p>
@@ -6474,7 +6474,7 @@
           <a:lstStyle/>
           <a:p>
             <a:r>
-              <a:t>⏱ ~35 сек  ·  слайд 3/18</a:t>
+              <a:t>⏱ 1:11 – 1:29  ·  слайд 3/18</a:t>
             </a:r>
             <a:endParaRPr lang="en-US" dirty="0"/>
           </a:p>
@@ -6566,7 +6566,7 @@
           <a:lstStyle/>
           <a:p>
             <a:r>
-              <a:t>⏱ ~50 сек  ·  слайд 4/18</a:t>
+              <a:t>⏱ 1:29 – 2:09  ·  слайд 4/18</a:t>
             </a:r>
             <a:endParaRPr lang="en-US" dirty="0"/>
           </a:p>
@@ -6663,7 +6663,7 @@
           <a:lstStyle/>
           <a:p>
             <a:r>
-              <a:t>⏱ ~45 сек  ·  слайд 5/18</a:t>
+              <a:t>⏱ 2:09 – 2:37  ·  слайд 5/18</a:t>
             </a:r>
             <a:endParaRPr lang="en-US" dirty="0"/>
           </a:p>
@@ -6755,7 +6755,7 @@
           <a:lstStyle/>
           <a:p>
             <a:r>
-              <a:t>⏱ ~50 сек  ·  слайд 6/18</a:t>
+              <a:t>⏱ 2:37 – 3:15  ·  слайд 6/18</a:t>
             </a:r>
             <a:endParaRPr lang="en-US" dirty="0"/>
           </a:p>
@@ -6852,7 +6852,7 @@
           <a:lstStyle/>
           <a:p>
             <a:r>
-              <a:t>⏱ ~35 сек  ·  слайд 7/18</a:t>
+              <a:t>⏱ 3:15 – 3:38  ·  слайд 7/18</a:t>
             </a:r>
             <a:endParaRPr lang="en-US" dirty="0"/>
           </a:p>
@@ -6944,7 +6944,7 @@
           <a:lstStyle/>
           <a:p>
             <a:r>
-              <a:t>⏱ ~40 сек  ·  слайд 8/18</a:t>
+              <a:t>⏱ 3:38 – 4:07  ·  слайд 8/18</a:t>
             </a:r>
             <a:endParaRPr lang="en-US" dirty="0"/>
           </a:p>
@@ -7036,7 +7036,7 @@
           <a:lstStyle/>
           <a:p>
             <a:r>
-              <a:t>⏱ ~50 сек  ·  слайд 9/18</a:t>
+              <a:t>⏱ 4:07 – 4:47  ·  слайд 9/18</a:t>
             </a:r>
             <a:endParaRPr lang="en-US" dirty="0"/>
           </a:p>

--- a/thesis/2026_М_ПІ_ІПЗм-24-1_Нестеренко_В_В.pptx
+++ b/thesis/2026_М_ПІ_ІПЗм-24-1_Нестеренко_В_В.pptx
@@ -5459,7 +5459,7 @@
           <a:lstStyle/>
           <a:p>
             <a:r>
-              <a:t>⏱ 4:47 – 4:59  ·  слайд 10/18</a:t>
+              <a:t>⏱ 3:51 – 4:03  ·  слайд 10/18</a:t>
             </a:r>
             <a:endParaRPr lang="en-US" dirty="0"/>
           </a:p>
@@ -5551,7 +5551,7 @@
           <a:lstStyle/>
           <a:p>
             <a:r>
-              <a:t>⏱ 4:59 – 5:34  ·  слайд 11/18</a:t>
+              <a:t>⏱ 4:03 – 4:38  ·  слайд 11/18</a:t>
             </a:r>
             <a:endParaRPr lang="en-US" dirty="0"/>
           </a:p>
@@ -5658,7 +5658,7 @@
           <a:lstStyle/>
           <a:p>
             <a:r>
-              <a:t>⏱ 5:34 – 5:47  ·  слайд 12/18</a:t>
+              <a:t>⏱ 4:38 – 4:51  ·  слайд 12/18</a:t>
             </a:r>
             <a:endParaRPr lang="en-US" dirty="0"/>
           </a:p>
@@ -5750,28 +5750,24 @@
           <a:lstStyle/>
           <a:p>
             <a:r>
-              <a:t>⏱ 5:47 – 6:33  ·  слайд 13/18</a:t>
+              <a:t>⏱ 4:51 – 5:23  ·  слайд 13/18</a:t>
             </a:r>
             <a:endParaRPr lang="en-US" dirty="0"/>
           </a:p>
-          <a:p>
-            <a:r>
-              <a:t>Перейдемо до головних результатів експерименту. У таблиці — середнє значення nDCG@10 по всіх трьох доменах.</a:t>
-            </a:r>
-          </a:p>
-          <a:p>
-            <a:r>
-              <a:t>Перше місце посідає BGE-M3 з результатом 0.4708. Друге — Qwen3 з результатом 0.4385. Третє — E5-base з 0.4199. Четверте — лексична baseline BM25 з результатом 0.3319. На останньому місці — nomic з результатом 0.2128, що навіть нижче BM25.</a:t>
-            </a:r>
-          </a:p>
-          <a:p>
-            <a:r>
-              <a:t>Ключовий висновок: три з чотирьох embedding-моделей перевершують лексичну baseline BM25.</a:t>
-            </a:r>
-          </a:p>
-          <a:p>
-            <a:r>
-              <a:t>Достовірність підтверджена бутстреп-аналізом: 2000 повторних вибірок з поверненням. На технічному домені 95% довірчий інтервал для BGE-M3 склав від 0.606 до 0.737, а для BM25 — від 0.431 до 0.541. Інтервали не перетинаються, отже перевага семантичного пошуку над лексичним є статистично значущою.</a:t>
+          <a:p/>
+          <a:p>
+            <a:r>
+              <a:t>Головні результати. У таблиці — середнє nDCG@10 по трьох доменах. Перше — BGE-M3 з 0.4708. Друге — Qwen3 з 0.4385. Третє — E5-base з 0.4199. Четверте — BM25 з 0.3319. Останнє — nomic з 0.2128, навіть нижче BM25.</a:t>
+            </a:r>
+          </a:p>
+          <a:p>
+            <a:r>
+              <a:t>Ключовий висновок: три з чотирьох embedding-моделей перевершують BM25.</a:t>
+            </a:r>
+          </a:p>
+          <a:p>
+            <a:r>
+              <a:t>Достовірність підтверджена бутстрепом (2000 вибірок). На технічному домені 95% CI для BGE-M3 — 0.606–0.737, для BM25 — 0.431–0.541. Інтервали не перетинаються — перевага семантичного пошуку статистично значуща.</a:t>
             </a:r>
           </a:p>
         </p:txBody>
@@ -5857,7 +5853,7 @@
           <a:lstStyle/>
           <a:p>
             <a:r>
-              <a:t>⏱ 6:33 – 6:50  ·  слайд 14/18</a:t>
+              <a:t>⏱ 5:23 – 5:40  ·  слайд 14/18</a:t>
             </a:r>
             <a:endParaRPr lang="en-US" dirty="0"/>
           </a:p>
@@ -5949,7 +5945,7 @@
           <a:lstStyle/>
           <a:p>
             <a:r>
-              <a:t>⏱ 6:50 – 7:17  ·  слайд 15/18</a:t>
+              <a:t>⏱ 5:40 – 6:07  ·  слайд 15/18</a:t>
             </a:r>
             <a:endParaRPr lang="en-US" dirty="0"/>
           </a:p>
@@ -6041,7 +6037,7 @@
           <a:lstStyle/>
           <a:p>
             <a:r>
-              <a:t>⏱ 7:17 – 7:51  ·  слайд 16/18</a:t>
+              <a:t>⏱ 6:07 – 6:42  ·  слайд 16/18</a:t>
             </a:r>
             <a:endParaRPr lang="en-US" dirty="0"/>
           </a:p>
@@ -6153,7 +6149,7 @@
           <a:lstStyle/>
           <a:p>
             <a:r>
-              <a:t>⏱ 7:51 – 8:13  ·  слайд 17/18</a:t>
+              <a:t>⏱ 6:42 – 7:03  ·  слайд 17/18</a:t>
             </a:r>
             <a:endParaRPr lang="en-US" dirty="0"/>
           </a:p>
@@ -6245,7 +6241,7 @@
           <a:lstStyle/>
           <a:p>
             <a:r>
-              <a:t>⏱ 8:13 – 8:51  ·  слайд 18/18</a:t>
+              <a:t>⏱ 7:03 – 7:41  ·  слайд 18/18</a:t>
             </a:r>
             <a:endParaRPr lang="en-US" dirty="0"/>
           </a:p>
@@ -6367,28 +6363,29 @@
           <a:lstStyle/>
           <a:p>
             <a:r>
-              <a:t>⏱ 0:19 – 1:11  ·  слайд 2/18</a:t>
+              <a:t>⏱ 0:19 – 0:57  ·  слайд 2/18</a:t>
             </a:r>
             <a:endParaRPr lang="en-US" dirty="0"/>
           </a:p>
-          <a:p>
-            <a:r>
-              <a:t>Актуальність роботи зумовлена тим, що обсяги корпоративної текстової інформації стрімко зростають, а традиційний лексичний пошук — за ключовими словами — погано працює з синонімією, перефразуванням і мультимовним контентом. Сучасні моделі векторних ембеддінгів дозволяють шукати за змістом, а не за збігом слів.</a:t>
-            </a:r>
-          </a:p>
-          <a:p>
-            <a:r>
-              <a:t>Мета дослідження — визначити доцільність застосування сучасних embedding-моделей для підвищення ефективності семантичного пошуку у корпоративних базах знань шляхом порівняльного експериментального дослідження.</a:t>
-            </a:r>
-          </a:p>
-          <a:p>
-            <a:r>
-              <a:t>Об'єктом дослідження є процеси формування та використання векторних подань текстових даних у системах семантичного пошуку. Предметом — самі моделі векторних ембеддінгів для застосування в корпоративних базах знань.</a:t>
-            </a:r>
-          </a:p>
-          <a:p>
-            <a:r>
-              <a:t>Для досягнення мети поставлено шість задач: проаналізувати предметну галузь; здійснити огляд сучасних embedding-моделей; сформувати україномовний benchmark-набір; реалізувати систему пошуку; оцінити якість моделей за стандартними метриками; та обґрунтовано обрати оптимальну модель.</a:t>
+          <a:p/>
+          <a:p>
+            <a:r>
+              <a:t>Обсяги корпоративної текстової інформації стрімко зростають, а традиційний лексичний пошук погано працює з синонімією, перефразуванням і мультимовним контентом. Сучасні embedding-моделі дозволяють шукати за змістом, а не за збігом слів.</a:t>
+            </a:r>
+          </a:p>
+          <a:p>
+            <a:r>
+              <a:t>Мета — визначити доцільність застосування сучасних embedding-моделей для семантичного пошуку у корпоративних базах знань шляхом порівняльного експериментального дослідження.</a:t>
+            </a:r>
+          </a:p>
+          <a:p>
+            <a:r>
+              <a:t>Об'єкт дослідження — процеси векторних подань тексту; предмет — самі embedding-моделі для корпоративних баз знань.</a:t>
+            </a:r>
+          </a:p>
+          <a:p>
+            <a:r>
+              <a:t>Поставлено шість задач: проаналізувати предметну галузь; здійснити огляд embedding-моделей; сформувати україномовний benchmark; реалізувати систему пошуку; оцінити моделі за стандартними метриками; обґрунтовано обрати оптимальну модель.</a:t>
             </a:r>
           </a:p>
         </p:txBody>
@@ -6474,7 +6471,7 @@
           <a:lstStyle/>
           <a:p>
             <a:r>
-              <a:t>⏱ 1:11 – 1:29  ·  слайд 3/18</a:t>
+              <a:t>⏱ 0:57 – 1:14  ·  слайд 3/18</a:t>
             </a:r>
             <a:endParaRPr lang="en-US" dirty="0"/>
           </a:p>
@@ -6566,18 +6563,19 @@
           <a:lstStyle/>
           <a:p>
             <a:r>
-              <a:t>⏱ 1:29 – 2:09  ·  слайд 4/18</a:t>
+              <a:t>⏱ 1:14 – 1:40  ·  слайд 4/18</a:t>
             </a:r>
             <a:endParaRPr lang="en-US" dirty="0"/>
           </a:p>
-          <a:p>
-            <a:r>
-              <a:t>З огляду на виявлену прогалину сформульовано постановку задачі. Просто застосувати сучасну embedding-модель недостатньо — необхідно обґрунтовано вибрати модель, яка забезпечує оптимальний баланс між якістю пошуку, швидкодією, вимогами до ресурсів, мовною підтримкою та типом колекції документів.</a:t>
-            </a:r>
-          </a:p>
-          <a:p>
-            <a:r>
-              <a:t>Очікувані результати роботи: перше — повноцінна система семантичного пошуку з підтримкою форматів PDF, DOCX, TXT та Markdown. Друге — власноруч сформований україномовний benchmark з трьох доменів. Третє — кількісне порівняння чотирьох embedding-моделей та лексичної baseline-моделі BM25. Четверте — багатокритеріальний вибір моделі за Парето-фронтом і лінійною згорткою. І п'яте — обґрунтовані практичні рекомендації для впровадження у виробничі системи.</a:t>
+          <a:p/>
+          <a:p>
+            <a:r>
+              <a:t>Постановка задачі: просто застосувати embedding-модель недостатньо — треба обґрунтовано обрати ту, що забезпечує баланс між якістю пошуку, швидкодією, ресурсами, мовною підтримкою та типом колекції.</a:t>
+            </a:r>
+          </a:p>
+          <a:p>
+            <a:r>
+              <a:t>П'ять очікуваних результатів: повноцінна система семантичного пошуку з підтримкою PDF, DOCX, TXT, Markdown; україномовний benchmark з трьох доменів; кількісне порівняння чотирьох embedding-моделей та BM25; багатокритеріальний вибір за Парето-фронтом і лінійною згорткою; обґрунтовані рекомендації для впровадження.</a:t>
             </a:r>
           </a:p>
         </p:txBody>
@@ -6663,7 +6661,7 @@
           <a:lstStyle/>
           <a:p>
             <a:r>
-              <a:t>⏱ 2:09 – 2:37  ·  слайд 5/18</a:t>
+              <a:t>⏱ 1:40 – 2:08  ·  слайд 5/18</a:t>
             </a:r>
             <a:endParaRPr lang="en-US" dirty="0"/>
           </a:p>
@@ -6755,18 +6753,19 @@
           <a:lstStyle/>
           <a:p>
             <a:r>
-              <a:t>⏱ 2:37 – 3:15  ·  слайд 6/18</a:t>
+              <a:t>⏱ 2:08 – 2:31  ·  слайд 6/18</a:t>
             </a:r>
             <a:endParaRPr lang="en-US" dirty="0"/>
           </a:p>
-          <a:p>
-            <a:r>
-              <a:t>Методологія оцінювання базується на чотирьох метриках retrieval-якості, які є стандартом у сфері інформаційного пошуку: nDCG@10 — основна метрика якості ранжування; MRR@10 — позиція першого релевантного документа; Recall@10 — повнота пошуку; та Precision@10 — точність видачі. Окремо вимірюється швидкодія в мілісекундах на запит.</a:t>
-            </a:r>
-          </a:p>
-          <a:p>
-            <a:r>
-              <a:t>Для забезпечення достовірності результатів застосовано три методи аналізу. Перший — бутстреп-довірчі інтервали: 2000 повторних вибірок із поверненням, що дозволяє оцінити 95% довірчий інтервал для nDCG@10. Другий — Парето-домінування для виявлення недомінованих альтернатив. Третій — лінійна адитивна згортка для обчислення інтегральної оцінки корисності з ваговими коефіцієнтами критеріїв.</a:t>
+          <a:p/>
+          <a:p>
+            <a:r>
+              <a:t>Оцінювання базується на чотирьох стандартних метриках retrieval-якості: nDCG@10 — якість ранжування; MRR@10 — позиція першого релевантного; Recall@10 — повнота; Precision@10 — точність. Окремо вимірюється швидкодія в мілісекундах.</a:t>
+            </a:r>
+          </a:p>
+          <a:p>
+            <a:r>
+              <a:t>Для достовірності — три методи аналізу: бутстреп-довірчі інтервали (2000 повторних вибірок, 95% CI); Парето-домінування для виявлення недомінованих альтернатив; лінійна адитивна згортка для інтегральної оцінки з ваговими коефіцієнтами.</a:t>
             </a:r>
           </a:p>
         </p:txBody>
@@ -6852,7 +6851,7 @@
           <a:lstStyle/>
           <a:p>
             <a:r>
-              <a:t>⏱ 3:15 – 3:38  ·  слайд 7/18</a:t>
+              <a:t>⏱ 2:31 – 2:54  ·  слайд 7/18</a:t>
             </a:r>
             <a:endParaRPr lang="en-US" dirty="0"/>
           </a:p>
@@ -6944,7 +6943,7 @@
           <a:lstStyle/>
           <a:p>
             <a:r>
-              <a:t>⏱ 3:38 – 4:07  ·  слайд 8/18</a:t>
+              <a:t>⏱ 2:54 – 3:23  ·  слайд 8/18</a:t>
             </a:r>
             <a:endParaRPr lang="en-US" dirty="0"/>
           </a:p>
@@ -7036,23 +7035,14 @@
           <a:lstStyle/>
           <a:p>
             <a:r>
-              <a:t>⏱ 4:07 – 4:47  ·  слайд 9/18</a:t>
+              <a:t>⏱ 3:23 – 3:51  ·  слайд 9/18</a:t>
             </a:r>
             <a:endParaRPr lang="en-US" dirty="0"/>
           </a:p>
-          <a:p>
-            <a:r>
-              <a:t>Архітектура системи побудована у вигляді pipeline. На вході — документи у форматах PDF, DOCX, TXT або Markdown. Документи розбиваються на чанки приблизно по 600 слів з перекриттям, що зберігає контекстну зв'язність.</a:t>
-            </a:r>
-          </a:p>
-          <a:p>
-            <a:r>
-              <a:t>Далі кожен чанк перетворюється на вектор за допомогою однієї з чотирьох embedding-моделей. Вектори L2-нормалізуються та індексуються у FAISS — використовується точний індекс IndexFlatIP, який обчислює внутрішній добуток, що для нормалізованих векторів еквівалентне косинусній мірі.</a:t>
-            </a:r>
-          </a:p>
-          <a:p>
-            <a:r>
-              <a:t>Запит користувача проходить ту саму обробку, і за косинусною схожістю повертаються топ-K найрелевантніших чанків. Усе це обгорнуто у Flask веб-застосунок. Основні модулі — build_index, evaluate_benchmark, embedding_models та app.</a:t>
+          <a:p/>
+          <a:p>
+            <a:r>
+              <a:t>Архітектура у вигляді pipeline. На вході — PDF, DOCX, TXT або Markdown. Документи розбиваються на чанки ~600 слів з перекриттям. Далі чанк перетворюється на вектор однією з чотирьох embedding-моделей, L2-нормалізується та індексується у FAISS — точний IndexFlatIP, що для нормалізованих векторів еквівалентне косинусній мірі. Запит проходить ту саму обробку — повертаються топ-K найрелевантніших чанків. Усе обгорнуто у Flask. Основні модулі: build_index, evaluate_benchmark, embedding_models, app.</a:t>
             </a:r>
           </a:p>
         </p:txBody>

--- a/thesis/2026_М_ПІ_ІПЗм-24-1_Нестеренко_В_В.pptx
+++ b/thesis/2026_М_ПІ_ІПЗм-24-1_Нестеренко_В_В.pptx
@@ -24,8 +24,8 @@
     <p:sldId id="269" r:id="rId15"/>
     <p:sldId id="270" r:id="rId16"/>
     <p:sldId id="271" r:id="rId17"/>
-    <p:sldId id="272" r:id="rId18"/>
-    <p:sldId id="273" r:id="rId19"/>
+    <p:sldId id="273" r:id="rId18"/>
+    <p:sldId id="272" r:id="rId19"/>
   </p:sldIdLst>
   <p:sldSz cx="9144000" cy="5143500" type="screen16x9"/>
   <p:notesSz cx="5143500" cy="9144000"/>
@@ -5754,7 +5754,9 @@
             </a:r>
             <a:endParaRPr lang="en-US" dirty="0"/>
           </a:p>
-          <a:p/>
+          <a:p>
+            <a:endParaRPr lang="en-US" dirty="0"/>
+          </a:p>
           <a:p>
             <a:r>
               <a:t>Головні результати. У таблиці — середнє nDCG@10 по трьох доменах. Перше — BGE-M3 з 0.4708. Друге — Qwen3 з 0.4385. Третє — E5-base з 0.4199. Четверте — BM25 з 0.3319. Останнє — nomic з 0.2128, навіть нижче BM25.</a:t>
@@ -6149,13 +6151,43 @@
           <a:lstStyle/>
           <a:p>
             <a:r>
-              <a:t>⏱ 6:42 – 7:03  ·  слайд 17/18</a:t>
+              <a:t>⏱ 7:03 – 7:41  ·  слайд 18/18</a:t>
             </a:r>
             <a:endParaRPr lang="en-US" dirty="0"/>
           </a:p>
           <a:p>
             <a:r>
-              <a:t>Апробація: опубліковано дві наукові праці у співавторстві з науковим керівником. Перша — стаття на 2-й конференції «Innovative Research in Science and Economy» з benchmark-методологією. Друга — тези на 30-му форумі «Радіоелектроніка та молодь у XXI столітті» в ХНУРЕ про підвищення якості retrieval. Загалом — два виступи на міжнародних конференціях.</a:t>
+              <a:t>Підсумовуючи: у роботі обґрунтовано доцільність застосування сучасних embedding-моделей для семантичного пошуку у корпоративних базах знань. Сформульовано практичні рекомендації щодо вибору моделі.</a:t>
+            </a:r>
+          </a:p>
+          <a:p>
+            <a:r>
+              <a:t>BGE-M3 — основна модель для впровадження: найкраща якість і стабільність у різних доменах.</a:t>
+            </a:r>
+          </a:p>
+          <a:p>
+            <a:r>
+              <a:t>E5-base — швидка альтернатива з прийнятною якістю та триразовою перевагою за швидкодією.</a:t>
+            </a:r>
+          </a:p>
+          <a:p>
+            <a:r>
+              <a:t>Qwen3 — оптимальний вибір для юридичних колекцій, де він демонструє найвищу якість.</a:t>
+            </a:r>
+          </a:p>
+          <a:p>
+            <a:r>
+              <a:t>BM25 — залишається конкурентним baseline у певних доменах і за дуже жорстких вимог до швидкості.</a:t>
+            </a:r>
+          </a:p>
+          <a:p>
+            <a:r>
+              <a:t>Усі задачі, поставлені в роботі, виконано. Мета досягнута.</a:t>
+            </a:r>
+          </a:p>
+          <a:p>
+            <a:r>
+              <a:t>Дякую за увагу! Готовий відповісти на запитання.</a:t>
             </a:r>
           </a:p>
         </p:txBody>
@@ -6241,43 +6273,13 @@
           <a:lstStyle/>
           <a:p>
             <a:r>
-              <a:t>⏱ 7:03 – 7:41  ·  слайд 18/18</a:t>
+              <a:t>⏱ 6:42 – 7:03  ·  слайд 17/18</a:t>
             </a:r>
             <a:endParaRPr lang="en-US" dirty="0"/>
           </a:p>
           <a:p>
             <a:r>
-              <a:t>Підсумовуючи: у роботі обґрунтовано доцільність застосування сучасних embedding-моделей для семантичного пошуку у корпоративних базах знань. Сформульовано практичні рекомендації щодо вибору моделі.</a:t>
-            </a:r>
-          </a:p>
-          <a:p>
-            <a:r>
-              <a:t>BGE-M3 — основна модель для впровадження: найкраща якість і стабільність у різних доменах.</a:t>
-            </a:r>
-          </a:p>
-          <a:p>
-            <a:r>
-              <a:t>E5-base — швидка альтернатива з прийнятною якістю та триразовою перевагою за швидкодією.</a:t>
-            </a:r>
-          </a:p>
-          <a:p>
-            <a:r>
-              <a:t>Qwen3 — оптимальний вибір для юридичних колекцій, де він демонструє найвищу якість.</a:t>
-            </a:r>
-          </a:p>
-          <a:p>
-            <a:r>
-              <a:t>BM25 — залишається конкурентним baseline у певних доменах і за дуже жорстких вимог до швидкості.</a:t>
-            </a:r>
-          </a:p>
-          <a:p>
-            <a:r>
-              <a:t>Усі задачі, поставлені в роботі, виконано. Мета досягнута.</a:t>
-            </a:r>
-          </a:p>
-          <a:p>
-            <a:r>
-              <a:t>Дякую за увагу! Готовий відповісти на запитання.</a:t>
+              <a:t>Апробація: опубліковано дві наукові праці у співавторстві з науковим керівником. Перша — стаття на 2-й конференції «Innovative Research in Science and Economy» з benchmark-методологією. Друга — тези на 30-му форумі «Радіоелектроніка та молодь у XXI столітті» в ХНУРЕ про підвищення якості retrieval. Загалом — два виступи на міжнародних конференціях.</a:t>
             </a:r>
           </a:p>
         </p:txBody>
@@ -6367,7 +6369,9 @@
             </a:r>
             <a:endParaRPr lang="en-US" dirty="0"/>
           </a:p>
-          <a:p/>
+          <a:p>
+            <a:endParaRPr lang="en-US" dirty="0"/>
+          </a:p>
           <a:p>
             <a:r>
               <a:t>Обсяги корпоративної текстової інформації стрімко зростають, а традиційний лексичний пошук погано працює з синонімією, перефразуванням і мультимовним контентом. Сучасні embedding-моделі дозволяють шукати за змістом, а не за збігом слів.</a:t>
@@ -6567,7 +6571,9 @@
             </a:r>
             <a:endParaRPr lang="en-US" dirty="0"/>
           </a:p>
-          <a:p/>
+          <a:p>
+            <a:endParaRPr lang="en-US" dirty="0"/>
+          </a:p>
           <a:p>
             <a:r>
               <a:t>Постановка задачі: просто застосувати embedding-модель недостатньо — треба обґрунтовано обрати ту, що забезпечує баланс між якістю пошуку, швидкодією, ресурсами, мовною підтримкою та типом колекції.</a:t>
@@ -6757,7 +6763,9 @@
             </a:r>
             <a:endParaRPr lang="en-US" dirty="0"/>
           </a:p>
-          <a:p/>
+          <a:p>
+            <a:endParaRPr lang="en-US" dirty="0"/>
+          </a:p>
           <a:p>
             <a:r>
               <a:t>Оцінювання базується на чотирьох стандартних метриках retrieval-якості: nDCG@10 — якість ранжування; MRR@10 — позиція першого релевантного; Recall@10 — повнота; Precision@10 — точність. Окремо вимірюється швидкодія в мілісекундах.</a:t>
@@ -7039,7 +7047,9 @@
             </a:r>
             <a:endParaRPr lang="en-US" dirty="0"/>
           </a:p>
-          <a:p/>
+          <a:p>
+            <a:endParaRPr lang="en-US" dirty="0"/>
+          </a:p>
           <a:p>
             <a:r>
               <a:t>Архітектура у вигляді pipeline. На вході — PDF, DOCX, TXT або Markdown. Документи розбиваються на чанки ~600 слів з перекриттям. Далі чанк перетворюється на вектор однією з чотирьох embedding-моделей, L2-нормалізується та індексується у FAISS — точний IndexFlatIP, що для нормалізованих векторів еквівалентне косинусній мірі. Запит проходить ту саму обробку — повертаються топ-K найрелевантніших чанків. Усе обгорнуто у Flask. Основні модулі: build_index, evaluate_benchmark, embedding_models, app.</a:t>
@@ -18438,6 +18448,1371 @@
 
 <file path=ppt/slides/slide17.xml><?xml version="1.0" encoding="utf-8"?>
 <p:sld xmlns:a="http://schemas.openxmlformats.org/drawingml/2006/main" xmlns:r="http://schemas.openxmlformats.org/officeDocument/2006/relationships" xmlns:p="http://schemas.openxmlformats.org/presentationml/2006/main">
+  <p:cSld name="Slide 18">
+    <p:bg>
+      <p:bgPr>
+        <a:solidFill>
+          <a:srgbClr val="FFFFFF"/>
+        </a:solidFill>
+        <a:effectLst/>
+      </p:bgPr>
+    </p:bg>
+    <p:spTree>
+      <p:nvGrpSpPr>
+        <p:cNvPr id="1" name=""/>
+        <p:cNvGrpSpPr/>
+        <p:nvPr/>
+      </p:nvGrpSpPr>
+      <p:grpSpPr>
+        <a:xfrm>
+          <a:off x="0" y="0"/>
+          <a:ext cx="0" cy="0"/>
+          <a:chOff x="0" y="0"/>
+          <a:chExt cx="0" cy="0"/>
+        </a:xfrm>
+      </p:grpSpPr>
+      <p:sp>
+        <p:nvSpPr>
+          <p:cNvPr id="2" name="Shape 0"/>
+          <p:cNvSpPr/>
+          <p:nvPr/>
+        </p:nvSpPr>
+        <p:spPr>
+          <a:xfrm>
+            <a:off x="-914400" y="-914400"/>
+            <a:ext cx="3657600" cy="3657600"/>
+          </a:xfrm>
+          <a:prstGeom prst="ellipse">
+            <a:avLst/>
+          </a:prstGeom>
+          <a:solidFill>
+            <a:srgbClr val="EFF6FF"/>
+          </a:solidFill>
+          <a:ln/>
+        </p:spPr>
+        <p:txBody>
+          <a:bodyPr/>
+          <a:lstStyle/>
+          <a:p>
+            <a:endParaRPr lang="en-US"/>
+          </a:p>
+        </p:txBody>
+      </p:sp>
+      <p:sp>
+        <p:nvSpPr>
+          <p:cNvPr id="3" name="Shape 1"/>
+          <p:cNvSpPr/>
+          <p:nvPr/>
+        </p:nvSpPr>
+        <p:spPr>
+          <a:xfrm>
+            <a:off x="7315200" y="3657600"/>
+            <a:ext cx="3200400" cy="3200400"/>
+          </a:xfrm>
+          <a:prstGeom prst="ellipse">
+            <a:avLst/>
+          </a:prstGeom>
+          <a:solidFill>
+            <a:srgbClr val="F59E0B">
+              <a:alpha val="20000"/>
+            </a:srgbClr>
+          </a:solidFill>
+          <a:ln/>
+        </p:spPr>
+        <p:txBody>
+          <a:bodyPr/>
+          <a:lstStyle/>
+          <a:p>
+            <a:endParaRPr lang="en-US"/>
+          </a:p>
+        </p:txBody>
+      </p:sp>
+      <p:sp>
+        <p:nvSpPr>
+          <p:cNvPr id="4" name="Text 2"/>
+          <p:cNvSpPr/>
+          <p:nvPr/>
+        </p:nvSpPr>
+        <p:spPr>
+          <a:xfrm>
+            <a:off x="411480" y="91440"/>
+            <a:ext cx="8321040" cy="182880"/>
+          </a:xfrm>
+          <a:prstGeom prst="rect">
+            <a:avLst/>
+          </a:prstGeom>
+          <a:noFill/>
+          <a:ln/>
+        </p:spPr>
+        <p:txBody>
+          <a:bodyPr wrap="square" lIns="0" tIns="0" rIns="0" bIns="0" rtlCol="0" anchor="ctr"/>
+          <a:lstStyle/>
+          <a:p>
+            <a:pPr marL="0" indent="0" algn="l">
+              <a:buNone/>
+            </a:pPr>
+            <a:r>
+              <a:rPr lang="en-US" sz="850" b="1" kern="0" spc="300" dirty="0">
+                <a:solidFill>
+                  <a:srgbClr val="64748B"/>
+                </a:solidFill>
+                <a:latin typeface="Calibri" pitchFamily="34" charset="0"/>
+                <a:ea typeface="Calibri" pitchFamily="34" charset="-122"/>
+                <a:cs typeface="Calibri" pitchFamily="34" charset="-120"/>
+              </a:rPr>
+              <a:t>РОЗДІЛ 11 · ПІДСУМКИ</a:t>
+            </a:r>
+            <a:endParaRPr lang="en-US" sz="850" dirty="0"/>
+          </a:p>
+        </p:txBody>
+      </p:sp>
+      <p:sp>
+        <p:nvSpPr>
+          <p:cNvPr id="5" name="Shape 3"/>
+          <p:cNvSpPr/>
+          <p:nvPr/>
+        </p:nvSpPr>
+        <p:spPr>
+          <a:xfrm>
+            <a:off x="411480" y="420624"/>
+            <a:ext cx="201168" cy="201168"/>
+          </a:xfrm>
+          <a:prstGeom prst="ellipse">
+            <a:avLst/>
+          </a:prstGeom>
+          <a:solidFill>
+            <a:srgbClr val="F59E0B"/>
+          </a:solidFill>
+          <a:ln/>
+        </p:spPr>
+        <p:txBody>
+          <a:bodyPr/>
+          <a:lstStyle/>
+          <a:p>
+            <a:endParaRPr lang="en-US"/>
+          </a:p>
+        </p:txBody>
+      </p:sp>
+      <p:sp>
+        <p:nvSpPr>
+          <p:cNvPr id="6" name="Text 4"/>
+          <p:cNvSpPr/>
+          <p:nvPr/>
+        </p:nvSpPr>
+        <p:spPr>
+          <a:xfrm>
+            <a:off x="722376" y="292608"/>
+            <a:ext cx="6858000" cy="502920"/>
+          </a:xfrm>
+          <a:prstGeom prst="rect">
+            <a:avLst/>
+          </a:prstGeom>
+          <a:noFill/>
+          <a:ln/>
+        </p:spPr>
+        <p:txBody>
+          <a:bodyPr wrap="square" lIns="0" tIns="0" rIns="0" bIns="0" rtlCol="0" anchor="ctr"/>
+          <a:lstStyle/>
+          <a:p>
+            <a:pPr marL="0" indent="0" algn="l">
+              <a:buNone/>
+            </a:pPr>
+            <a:r>
+              <a:rPr lang="uk-UA" sz="2200" b="1" dirty="0">
+                <a:solidFill>
+                  <a:srgbClr val="0F172A"/>
+                </a:solidFill>
+                <a:latin typeface="Calibri" pitchFamily="34" charset="0"/>
+                <a:ea typeface="Calibri" pitchFamily="34" charset="-122"/>
+                <a:cs typeface="Calibri" pitchFamily="34" charset="-120"/>
+              </a:rPr>
+              <a:t>Висновка</a:t>
+            </a:r>
+            <a:r>
+              <a:rPr lang="en-US" sz="2200" b="1" dirty="0">
+                <a:solidFill>
+                  <a:srgbClr val="0F172A"/>
+                </a:solidFill>
+                <a:latin typeface="Calibri" pitchFamily="34" charset="0"/>
+                <a:ea typeface="Calibri" pitchFamily="34" charset="-122"/>
+                <a:cs typeface="Calibri" pitchFamily="34" charset="-120"/>
+              </a:rPr>
+              <a:t> </a:t>
+            </a:r>
+            <a:r>
+              <a:rPr lang="en-US" sz="2200" b="1" dirty="0" err="1">
+                <a:solidFill>
+                  <a:srgbClr val="0F172A"/>
+                </a:solidFill>
+                <a:latin typeface="Calibri" pitchFamily="34" charset="0"/>
+                <a:ea typeface="Calibri" pitchFamily="34" charset="-122"/>
+                <a:cs typeface="Calibri" pitchFamily="34" charset="-120"/>
+              </a:rPr>
+              <a:t>та</a:t>
+            </a:r>
+            <a:r>
+              <a:rPr lang="en-US" sz="2200" b="1" dirty="0">
+                <a:solidFill>
+                  <a:srgbClr val="0F172A"/>
+                </a:solidFill>
+                <a:latin typeface="Calibri" pitchFamily="34" charset="0"/>
+                <a:ea typeface="Calibri" pitchFamily="34" charset="-122"/>
+                <a:cs typeface="Calibri" pitchFamily="34" charset="-120"/>
+              </a:rPr>
+              <a:t> </a:t>
+            </a:r>
+            <a:r>
+              <a:rPr lang="uk-UA" sz="2200" b="1" dirty="0">
+                <a:solidFill>
+                  <a:srgbClr val="0F172A"/>
+                </a:solidFill>
+                <a:latin typeface="Calibri" pitchFamily="34" charset="0"/>
+                <a:ea typeface="Calibri" pitchFamily="34" charset="-122"/>
+                <a:cs typeface="Calibri" pitchFamily="34" charset="-120"/>
+              </a:rPr>
+              <a:t>результати дослідження</a:t>
+            </a:r>
+            <a:endParaRPr lang="en-US" sz="2200" dirty="0"/>
+          </a:p>
+        </p:txBody>
+      </p:sp>
+      <p:sp>
+        <p:nvSpPr>
+          <p:cNvPr id="7" name="Shape 5"/>
+          <p:cNvSpPr/>
+          <p:nvPr/>
+        </p:nvSpPr>
+        <p:spPr>
+          <a:xfrm>
+            <a:off x="411480" y="960120"/>
+            <a:ext cx="8321040" cy="502920"/>
+          </a:xfrm>
+          <a:prstGeom prst="roundRect">
+            <a:avLst>
+              <a:gd name="adj" fmla="val 10909"/>
+            </a:avLst>
+          </a:prstGeom>
+          <a:solidFill>
+            <a:srgbClr val="F59E0B"/>
+          </a:solidFill>
+          <a:ln w="9525">
+            <a:solidFill>
+              <a:srgbClr val="F59E0B"/>
+            </a:solidFill>
+            <a:prstDash val="solid"/>
+          </a:ln>
+          <a:effectLst>
+            <a:outerShdw blurRad="76200" dist="12700" dir="5400000" algn="bl" rotWithShape="0">
+              <a:srgbClr val="000000">
+                <a:alpha val="7000"/>
+              </a:srgbClr>
+            </a:outerShdw>
+          </a:effectLst>
+        </p:spPr>
+        <p:txBody>
+          <a:bodyPr/>
+          <a:lstStyle/>
+          <a:p>
+            <a:endParaRPr lang="en-US"/>
+          </a:p>
+        </p:txBody>
+      </p:sp>
+      <p:pic>
+        <p:nvPicPr>
+          <p:cNvPr id="8" name="Image 0" descr="preencoded.png"/>
+          <p:cNvPicPr>
+            <a:picLocks noChangeAspect="1"/>
+          </p:cNvPicPr>
+          <p:nvPr/>
+        </p:nvPicPr>
+        <p:blipFill>
+          <a:blip r:embed="rId3"/>
+          <a:stretch>
+            <a:fillRect/>
+          </a:stretch>
+        </p:blipFill>
+        <p:spPr>
+          <a:xfrm>
+            <a:off x="594360" y="1078992"/>
+            <a:ext cx="274320" cy="274320"/>
+          </a:xfrm>
+          <a:prstGeom prst="rect">
+            <a:avLst/>
+          </a:prstGeom>
+        </p:spPr>
+      </p:pic>
+      <p:sp>
+        <p:nvSpPr>
+          <p:cNvPr id="9" name="Text 6"/>
+          <p:cNvSpPr/>
+          <p:nvPr/>
+        </p:nvSpPr>
+        <p:spPr>
+          <a:xfrm>
+            <a:off x="1005840" y="960120"/>
+            <a:ext cx="7635240" cy="502920"/>
+          </a:xfrm>
+          <a:prstGeom prst="rect">
+            <a:avLst/>
+          </a:prstGeom>
+          <a:noFill/>
+          <a:ln/>
+        </p:spPr>
+        <p:txBody>
+          <a:bodyPr wrap="square" lIns="0" tIns="0" rIns="0" bIns="0" rtlCol="0" anchor="ctr"/>
+          <a:lstStyle/>
+          <a:p>
+            <a:pPr marL="0" indent="0" algn="l">
+              <a:buNone/>
+            </a:pPr>
+            <a:r>
+              <a:rPr lang="uk-UA" sz="1100" b="1" dirty="0">
+                <a:solidFill>
+                  <a:srgbClr val="0F172A"/>
+                </a:solidFill>
+                <a:latin typeface="Calibri" pitchFamily="34" charset="0"/>
+                <a:ea typeface="Calibri" pitchFamily="34" charset="-122"/>
+                <a:cs typeface="Calibri" pitchFamily="34" charset="-120"/>
+              </a:rPr>
+              <a:t>О</a:t>
+            </a:r>
+            <a:r>
+              <a:rPr lang="en-US" sz="1100" b="1" dirty="0" err="1">
+                <a:solidFill>
+                  <a:srgbClr val="0F172A"/>
+                </a:solidFill>
+                <a:latin typeface="Calibri" pitchFamily="34" charset="0"/>
+                <a:ea typeface="Calibri" pitchFamily="34" charset="-122"/>
+                <a:cs typeface="Calibri" pitchFamily="34" charset="-120"/>
+              </a:rPr>
+              <a:t>бґрунтовано</a:t>
+            </a:r>
+            <a:r>
+              <a:rPr lang="en-US" sz="1100" b="1" dirty="0">
+                <a:solidFill>
+                  <a:srgbClr val="0F172A"/>
+                </a:solidFill>
+                <a:latin typeface="Calibri" pitchFamily="34" charset="0"/>
+                <a:ea typeface="Calibri" pitchFamily="34" charset="-122"/>
+                <a:cs typeface="Calibri" pitchFamily="34" charset="-120"/>
+              </a:rPr>
+              <a:t> доцільність застосування embedding-моделей для семантичного пошуку у корпоративних базах знань</a:t>
+            </a:r>
+            <a:endParaRPr lang="en-US" sz="1100" dirty="0"/>
+          </a:p>
+        </p:txBody>
+      </p:sp>
+      <p:sp>
+        <p:nvSpPr>
+          <p:cNvPr id="10" name="Shape 7"/>
+          <p:cNvSpPr/>
+          <p:nvPr/>
+        </p:nvSpPr>
+        <p:spPr>
+          <a:xfrm>
+            <a:off x="411480" y="1645920"/>
+            <a:ext cx="4069080" cy="1257300"/>
+          </a:xfrm>
+          <a:prstGeom prst="roundRect">
+            <a:avLst>
+              <a:gd name="adj" fmla="val 4364"/>
+            </a:avLst>
+          </a:prstGeom>
+          <a:solidFill>
+            <a:srgbClr val="FFFFFF"/>
+          </a:solidFill>
+          <a:ln w="15875">
+            <a:solidFill>
+              <a:srgbClr val="F59E0B"/>
+            </a:solidFill>
+            <a:prstDash val="solid"/>
+          </a:ln>
+        </p:spPr>
+        <p:txBody>
+          <a:bodyPr/>
+          <a:lstStyle/>
+          <a:p>
+            <a:endParaRPr lang="en-US"/>
+          </a:p>
+        </p:txBody>
+      </p:sp>
+      <p:sp>
+        <p:nvSpPr>
+          <p:cNvPr id="11" name="Shape 8"/>
+          <p:cNvSpPr/>
+          <p:nvPr/>
+        </p:nvSpPr>
+        <p:spPr>
+          <a:xfrm>
+            <a:off x="411480" y="1645920"/>
+            <a:ext cx="91440" cy="1257300"/>
+          </a:xfrm>
+          <a:prstGeom prst="rect">
+            <a:avLst/>
+          </a:prstGeom>
+          <a:solidFill>
+            <a:srgbClr val="F59E0B"/>
+          </a:solidFill>
+          <a:ln/>
+        </p:spPr>
+        <p:txBody>
+          <a:bodyPr/>
+          <a:lstStyle/>
+          <a:p>
+            <a:endParaRPr lang="en-US"/>
+          </a:p>
+        </p:txBody>
+      </p:sp>
+      <p:sp>
+        <p:nvSpPr>
+          <p:cNvPr id="12" name="Shape 9"/>
+          <p:cNvSpPr/>
+          <p:nvPr/>
+        </p:nvSpPr>
+        <p:spPr>
+          <a:xfrm>
+            <a:off x="640080" y="1810512"/>
+            <a:ext cx="502920" cy="502920"/>
+          </a:xfrm>
+          <a:prstGeom prst="ellipse">
+            <a:avLst/>
+          </a:prstGeom>
+          <a:solidFill>
+            <a:srgbClr val="F59E0B"/>
+          </a:solidFill>
+          <a:ln/>
+        </p:spPr>
+        <p:txBody>
+          <a:bodyPr/>
+          <a:lstStyle/>
+          <a:p>
+            <a:endParaRPr lang="en-US"/>
+          </a:p>
+        </p:txBody>
+      </p:sp>
+      <p:pic>
+        <p:nvPicPr>
+          <p:cNvPr id="13" name="Image 1" descr="preencoded.png"/>
+          <p:cNvPicPr>
+            <a:picLocks noChangeAspect="1"/>
+          </p:cNvPicPr>
+          <p:nvPr/>
+        </p:nvPicPr>
+        <p:blipFill>
+          <a:blip r:embed="rId4"/>
+          <a:stretch>
+            <a:fillRect/>
+          </a:stretch>
+        </p:blipFill>
+        <p:spPr>
+          <a:xfrm>
+            <a:off x="740664" y="1911096"/>
+            <a:ext cx="292608" cy="292608"/>
+          </a:xfrm>
+          <a:prstGeom prst="rect">
+            <a:avLst/>
+          </a:prstGeom>
+        </p:spPr>
+      </p:pic>
+      <p:sp>
+        <p:nvSpPr>
+          <p:cNvPr id="14" name="Text 10"/>
+          <p:cNvSpPr/>
+          <p:nvPr/>
+        </p:nvSpPr>
+        <p:spPr>
+          <a:xfrm>
+            <a:off x="1234440" y="1737360"/>
+            <a:ext cx="3108960" cy="320040"/>
+          </a:xfrm>
+          <a:prstGeom prst="rect">
+            <a:avLst/>
+          </a:prstGeom>
+          <a:noFill/>
+          <a:ln/>
+        </p:spPr>
+        <p:txBody>
+          <a:bodyPr wrap="square" lIns="0" tIns="0" rIns="0" bIns="0" rtlCol="0" anchor="ctr"/>
+          <a:lstStyle/>
+          <a:p>
+            <a:pPr marL="0" indent="0" algn="l">
+              <a:buNone/>
+            </a:pPr>
+            <a:r>
+              <a:rPr lang="en-US" sz="1600" b="1" dirty="0">
+                <a:solidFill>
+                  <a:srgbClr val="F59E0B"/>
+                </a:solidFill>
+                <a:latin typeface="Calibri" pitchFamily="34" charset="0"/>
+                <a:ea typeface="Calibri" pitchFamily="34" charset="-122"/>
+                <a:cs typeface="Calibri" pitchFamily="34" charset="-120"/>
+              </a:rPr>
+              <a:t>BGE-M3</a:t>
+            </a:r>
+            <a:endParaRPr lang="en-US" sz="1600" dirty="0"/>
+          </a:p>
+        </p:txBody>
+      </p:sp>
+      <p:sp>
+        <p:nvSpPr>
+          <p:cNvPr id="15" name="Text 11"/>
+          <p:cNvSpPr/>
+          <p:nvPr/>
+        </p:nvSpPr>
+        <p:spPr>
+          <a:xfrm>
+            <a:off x="1234440" y="2066544"/>
+            <a:ext cx="3108960" cy="228600"/>
+          </a:xfrm>
+          <a:prstGeom prst="rect">
+            <a:avLst/>
+          </a:prstGeom>
+          <a:noFill/>
+          <a:ln/>
+        </p:spPr>
+        <p:txBody>
+          <a:bodyPr wrap="square" lIns="0" tIns="0" rIns="0" bIns="0" rtlCol="0" anchor="ctr"/>
+          <a:lstStyle/>
+          <a:p>
+            <a:pPr marL="0" indent="0" algn="l">
+              <a:buNone/>
+            </a:pPr>
+            <a:r>
+              <a:rPr lang="en-US" sz="1000" b="1" dirty="0">
+                <a:solidFill>
+                  <a:srgbClr val="1E293B"/>
+                </a:solidFill>
+                <a:latin typeface="Calibri" pitchFamily="34" charset="0"/>
+                <a:ea typeface="Calibri" pitchFamily="34" charset="-122"/>
+                <a:cs typeface="Calibri" pitchFamily="34" charset="-120"/>
+              </a:rPr>
+              <a:t>Основна модель для впровадження</a:t>
+            </a:r>
+            <a:endParaRPr lang="en-US" sz="1000" dirty="0"/>
+          </a:p>
+        </p:txBody>
+      </p:sp>
+      <p:sp>
+        <p:nvSpPr>
+          <p:cNvPr id="16" name="Text 12"/>
+          <p:cNvSpPr/>
+          <p:nvPr/>
+        </p:nvSpPr>
+        <p:spPr>
+          <a:xfrm>
+            <a:off x="640080" y="2423160"/>
+            <a:ext cx="3657600" cy="388620"/>
+          </a:xfrm>
+          <a:prstGeom prst="rect">
+            <a:avLst/>
+          </a:prstGeom>
+          <a:noFill/>
+          <a:ln/>
+        </p:spPr>
+        <p:txBody>
+          <a:bodyPr wrap="square" lIns="0" tIns="0" rIns="0" bIns="0" rtlCol="0" anchor="t"/>
+          <a:lstStyle/>
+          <a:p>
+            <a:pPr marL="0" indent="0" algn="l">
+              <a:buNone/>
+            </a:pPr>
+            <a:r>
+              <a:rPr lang="en-US" sz="1000" dirty="0">
+                <a:solidFill>
+                  <a:srgbClr val="475569"/>
+                </a:solidFill>
+                <a:latin typeface="Calibri" pitchFamily="34" charset="0"/>
+                <a:ea typeface="Calibri" pitchFamily="34" charset="-122"/>
+                <a:cs typeface="Calibri" pitchFamily="34" charset="-120"/>
+              </a:rPr>
+              <a:t>Лідер за nDCG@10 у tech (0.672) і medical (0.434), топ-2 у legal</a:t>
+            </a:r>
+            <a:endParaRPr lang="en-US" sz="1000" dirty="0"/>
+          </a:p>
+        </p:txBody>
+      </p:sp>
+      <p:sp>
+        <p:nvSpPr>
+          <p:cNvPr id="17" name="Shape 13"/>
+          <p:cNvSpPr/>
+          <p:nvPr/>
+        </p:nvSpPr>
+        <p:spPr>
+          <a:xfrm>
+            <a:off x="4663440" y="1645920"/>
+            <a:ext cx="4069080" cy="1257300"/>
+          </a:xfrm>
+          <a:prstGeom prst="roundRect">
+            <a:avLst>
+              <a:gd name="adj" fmla="val 4364"/>
+            </a:avLst>
+          </a:prstGeom>
+          <a:solidFill>
+            <a:srgbClr val="FFFFFF"/>
+          </a:solidFill>
+          <a:ln w="15875">
+            <a:solidFill>
+              <a:srgbClr val="0891B2"/>
+            </a:solidFill>
+            <a:prstDash val="solid"/>
+          </a:ln>
+        </p:spPr>
+        <p:txBody>
+          <a:bodyPr/>
+          <a:lstStyle/>
+          <a:p>
+            <a:endParaRPr lang="en-US"/>
+          </a:p>
+        </p:txBody>
+      </p:sp>
+      <p:sp>
+        <p:nvSpPr>
+          <p:cNvPr id="18" name="Shape 14"/>
+          <p:cNvSpPr/>
+          <p:nvPr/>
+        </p:nvSpPr>
+        <p:spPr>
+          <a:xfrm>
+            <a:off x="4663440" y="1645920"/>
+            <a:ext cx="91440" cy="1257300"/>
+          </a:xfrm>
+          <a:prstGeom prst="rect">
+            <a:avLst/>
+          </a:prstGeom>
+          <a:solidFill>
+            <a:srgbClr val="0891B2"/>
+          </a:solidFill>
+          <a:ln/>
+        </p:spPr>
+        <p:txBody>
+          <a:bodyPr/>
+          <a:lstStyle/>
+          <a:p>
+            <a:endParaRPr lang="en-US"/>
+          </a:p>
+        </p:txBody>
+      </p:sp>
+      <p:sp>
+        <p:nvSpPr>
+          <p:cNvPr id="19" name="Shape 15"/>
+          <p:cNvSpPr/>
+          <p:nvPr/>
+        </p:nvSpPr>
+        <p:spPr>
+          <a:xfrm>
+            <a:off x="4892040" y="1810512"/>
+            <a:ext cx="502920" cy="502920"/>
+          </a:xfrm>
+          <a:prstGeom prst="ellipse">
+            <a:avLst/>
+          </a:prstGeom>
+          <a:solidFill>
+            <a:srgbClr val="0891B2"/>
+          </a:solidFill>
+          <a:ln/>
+        </p:spPr>
+        <p:txBody>
+          <a:bodyPr/>
+          <a:lstStyle/>
+          <a:p>
+            <a:endParaRPr lang="en-US"/>
+          </a:p>
+        </p:txBody>
+      </p:sp>
+      <p:pic>
+        <p:nvPicPr>
+          <p:cNvPr id="20" name="Image 2" descr="preencoded.png"/>
+          <p:cNvPicPr>
+            <a:picLocks noChangeAspect="1"/>
+          </p:cNvPicPr>
+          <p:nvPr/>
+        </p:nvPicPr>
+        <p:blipFill>
+          <a:blip r:embed="rId5"/>
+          <a:stretch>
+            <a:fillRect/>
+          </a:stretch>
+        </p:blipFill>
+        <p:spPr>
+          <a:xfrm>
+            <a:off x="4992624" y="1911096"/>
+            <a:ext cx="292608" cy="292608"/>
+          </a:xfrm>
+          <a:prstGeom prst="rect">
+            <a:avLst/>
+          </a:prstGeom>
+        </p:spPr>
+      </p:pic>
+      <p:sp>
+        <p:nvSpPr>
+          <p:cNvPr id="21" name="Text 16"/>
+          <p:cNvSpPr/>
+          <p:nvPr/>
+        </p:nvSpPr>
+        <p:spPr>
+          <a:xfrm>
+            <a:off x="5486400" y="1737360"/>
+            <a:ext cx="3108960" cy="320040"/>
+          </a:xfrm>
+          <a:prstGeom prst="rect">
+            <a:avLst/>
+          </a:prstGeom>
+          <a:noFill/>
+          <a:ln/>
+        </p:spPr>
+        <p:txBody>
+          <a:bodyPr wrap="square" lIns="0" tIns="0" rIns="0" bIns="0" rtlCol="0" anchor="ctr"/>
+          <a:lstStyle/>
+          <a:p>
+            <a:pPr marL="0" indent="0" algn="l">
+              <a:buNone/>
+            </a:pPr>
+            <a:r>
+              <a:rPr lang="en-US" sz="1600" b="1" dirty="0">
+                <a:solidFill>
+                  <a:srgbClr val="0891B2"/>
+                </a:solidFill>
+                <a:latin typeface="Calibri" pitchFamily="34" charset="0"/>
+                <a:ea typeface="Calibri" pitchFamily="34" charset="-122"/>
+                <a:cs typeface="Calibri" pitchFamily="34" charset="-120"/>
+              </a:rPr>
+              <a:t>E5-base</a:t>
+            </a:r>
+            <a:endParaRPr lang="en-US" sz="1600" dirty="0"/>
+          </a:p>
+        </p:txBody>
+      </p:sp>
+      <p:sp>
+        <p:nvSpPr>
+          <p:cNvPr id="22" name="Text 17"/>
+          <p:cNvSpPr/>
+          <p:nvPr/>
+        </p:nvSpPr>
+        <p:spPr>
+          <a:xfrm>
+            <a:off x="5486400" y="2066544"/>
+            <a:ext cx="3108960" cy="228600"/>
+          </a:xfrm>
+          <a:prstGeom prst="rect">
+            <a:avLst/>
+          </a:prstGeom>
+          <a:noFill/>
+          <a:ln/>
+        </p:spPr>
+        <p:txBody>
+          <a:bodyPr wrap="square" lIns="0" tIns="0" rIns="0" bIns="0" rtlCol="0" anchor="ctr"/>
+          <a:lstStyle/>
+          <a:p>
+            <a:pPr marL="0" indent="0" algn="l">
+              <a:buNone/>
+            </a:pPr>
+            <a:r>
+              <a:rPr lang="en-US" sz="1000" b="1" dirty="0">
+                <a:solidFill>
+                  <a:srgbClr val="1E293B"/>
+                </a:solidFill>
+                <a:latin typeface="Calibri" pitchFamily="34" charset="0"/>
+                <a:ea typeface="Calibri" pitchFamily="34" charset="-122"/>
+                <a:cs typeface="Calibri" pitchFamily="34" charset="-120"/>
+              </a:rPr>
+              <a:t>Швидка альтернатива</a:t>
+            </a:r>
+            <a:endParaRPr lang="en-US" sz="1000" dirty="0"/>
+          </a:p>
+        </p:txBody>
+      </p:sp>
+      <p:sp>
+        <p:nvSpPr>
+          <p:cNvPr id="23" name="Text 18"/>
+          <p:cNvSpPr/>
+          <p:nvPr/>
+        </p:nvSpPr>
+        <p:spPr>
+          <a:xfrm>
+            <a:off x="4892040" y="2423160"/>
+            <a:ext cx="3657600" cy="388620"/>
+          </a:xfrm>
+          <a:prstGeom prst="rect">
+            <a:avLst/>
+          </a:prstGeom>
+          <a:noFill/>
+          <a:ln/>
+        </p:spPr>
+        <p:txBody>
+          <a:bodyPr wrap="square" lIns="0" tIns="0" rIns="0" bIns="0" rtlCol="0" anchor="t"/>
+          <a:lstStyle/>
+          <a:p>
+            <a:pPr marL="0" indent="0" algn="l">
+              <a:buNone/>
+            </a:pPr>
+            <a:r>
+              <a:rPr lang="en-US" sz="1000" dirty="0">
+                <a:solidFill>
+                  <a:srgbClr val="475569"/>
+                </a:solidFill>
+                <a:latin typeface="Calibri" pitchFamily="34" charset="0"/>
+                <a:ea typeface="Calibri" pitchFamily="34" charset="-122"/>
+                <a:cs typeface="Calibri" pitchFamily="34" charset="-120"/>
+              </a:rPr>
+              <a:t>Прийнятна якість + ~3× швидше за BGE-M3</a:t>
+            </a:r>
+            <a:endParaRPr lang="en-US" sz="1000" dirty="0"/>
+          </a:p>
+        </p:txBody>
+      </p:sp>
+      <p:sp>
+        <p:nvSpPr>
+          <p:cNvPr id="24" name="Shape 19"/>
+          <p:cNvSpPr/>
+          <p:nvPr/>
+        </p:nvSpPr>
+        <p:spPr>
+          <a:xfrm>
+            <a:off x="411480" y="3040380"/>
+            <a:ext cx="4069080" cy="1257300"/>
+          </a:xfrm>
+          <a:prstGeom prst="roundRect">
+            <a:avLst>
+              <a:gd name="adj" fmla="val 4364"/>
+            </a:avLst>
+          </a:prstGeom>
+          <a:solidFill>
+            <a:srgbClr val="FFFFFF"/>
+          </a:solidFill>
+          <a:ln w="15875">
+            <a:solidFill>
+              <a:srgbClr val="1E40AF"/>
+            </a:solidFill>
+            <a:prstDash val="solid"/>
+          </a:ln>
+        </p:spPr>
+        <p:txBody>
+          <a:bodyPr/>
+          <a:lstStyle/>
+          <a:p>
+            <a:endParaRPr lang="en-US"/>
+          </a:p>
+        </p:txBody>
+      </p:sp>
+      <p:sp>
+        <p:nvSpPr>
+          <p:cNvPr id="25" name="Shape 20"/>
+          <p:cNvSpPr/>
+          <p:nvPr/>
+        </p:nvSpPr>
+        <p:spPr>
+          <a:xfrm>
+            <a:off x="411480" y="3040380"/>
+            <a:ext cx="91440" cy="1257300"/>
+          </a:xfrm>
+          <a:prstGeom prst="rect">
+            <a:avLst/>
+          </a:prstGeom>
+          <a:solidFill>
+            <a:srgbClr val="1E40AF"/>
+          </a:solidFill>
+          <a:ln/>
+        </p:spPr>
+        <p:txBody>
+          <a:bodyPr/>
+          <a:lstStyle/>
+          <a:p>
+            <a:endParaRPr lang="en-US"/>
+          </a:p>
+        </p:txBody>
+      </p:sp>
+      <p:sp>
+        <p:nvSpPr>
+          <p:cNvPr id="26" name="Shape 21"/>
+          <p:cNvSpPr/>
+          <p:nvPr/>
+        </p:nvSpPr>
+        <p:spPr>
+          <a:xfrm>
+            <a:off x="640080" y="3204972"/>
+            <a:ext cx="502920" cy="502920"/>
+          </a:xfrm>
+          <a:prstGeom prst="ellipse">
+            <a:avLst/>
+          </a:prstGeom>
+          <a:solidFill>
+            <a:srgbClr val="1E40AF"/>
+          </a:solidFill>
+          <a:ln/>
+        </p:spPr>
+        <p:txBody>
+          <a:bodyPr/>
+          <a:lstStyle/>
+          <a:p>
+            <a:endParaRPr lang="en-US"/>
+          </a:p>
+        </p:txBody>
+      </p:sp>
+      <p:pic>
+        <p:nvPicPr>
+          <p:cNvPr id="27" name="Image 3" descr="preencoded.png"/>
+          <p:cNvPicPr>
+            <a:picLocks noChangeAspect="1"/>
+          </p:cNvPicPr>
+          <p:nvPr/>
+        </p:nvPicPr>
+        <p:blipFill>
+          <a:blip r:embed="rId6"/>
+          <a:stretch>
+            <a:fillRect/>
+          </a:stretch>
+        </p:blipFill>
+        <p:spPr>
+          <a:xfrm>
+            <a:off x="740664" y="3305556"/>
+            <a:ext cx="292608" cy="292608"/>
+          </a:xfrm>
+          <a:prstGeom prst="rect">
+            <a:avLst/>
+          </a:prstGeom>
+        </p:spPr>
+      </p:pic>
+      <p:sp>
+        <p:nvSpPr>
+          <p:cNvPr id="28" name="Text 22"/>
+          <p:cNvSpPr/>
+          <p:nvPr/>
+        </p:nvSpPr>
+        <p:spPr>
+          <a:xfrm>
+            <a:off x="1234440" y="3131820"/>
+            <a:ext cx="3108960" cy="320040"/>
+          </a:xfrm>
+          <a:prstGeom prst="rect">
+            <a:avLst/>
+          </a:prstGeom>
+          <a:noFill/>
+          <a:ln/>
+        </p:spPr>
+        <p:txBody>
+          <a:bodyPr wrap="square" lIns="0" tIns="0" rIns="0" bIns="0" rtlCol="0" anchor="ctr"/>
+          <a:lstStyle/>
+          <a:p>
+            <a:pPr marL="0" indent="0" algn="l">
+              <a:buNone/>
+            </a:pPr>
+            <a:r>
+              <a:rPr lang="en-US" sz="1600" b="1" dirty="0">
+                <a:solidFill>
+                  <a:srgbClr val="1E40AF"/>
+                </a:solidFill>
+                <a:latin typeface="Calibri" pitchFamily="34" charset="0"/>
+                <a:ea typeface="Calibri" pitchFamily="34" charset="-122"/>
+                <a:cs typeface="Calibri" pitchFamily="34" charset="-120"/>
+              </a:rPr>
+              <a:t>Qwen3</a:t>
+            </a:r>
+            <a:endParaRPr lang="en-US" sz="1600" dirty="0"/>
+          </a:p>
+        </p:txBody>
+      </p:sp>
+      <p:sp>
+        <p:nvSpPr>
+          <p:cNvPr id="29" name="Text 23"/>
+          <p:cNvSpPr/>
+          <p:nvPr/>
+        </p:nvSpPr>
+        <p:spPr>
+          <a:xfrm>
+            <a:off x="1234440" y="3461004"/>
+            <a:ext cx="3108960" cy="228600"/>
+          </a:xfrm>
+          <a:prstGeom prst="rect">
+            <a:avLst/>
+          </a:prstGeom>
+          <a:noFill/>
+          <a:ln/>
+        </p:spPr>
+        <p:txBody>
+          <a:bodyPr wrap="square" lIns="0" tIns="0" rIns="0" bIns="0" rtlCol="0" anchor="ctr"/>
+          <a:lstStyle/>
+          <a:p>
+            <a:pPr marL="0" indent="0" algn="l">
+              <a:buNone/>
+            </a:pPr>
+            <a:r>
+              <a:rPr lang="en-US" sz="1000" b="1" dirty="0">
+                <a:solidFill>
+                  <a:srgbClr val="1E293B"/>
+                </a:solidFill>
+                <a:latin typeface="Calibri" pitchFamily="34" charset="0"/>
+                <a:ea typeface="Calibri" pitchFamily="34" charset="-122"/>
+                <a:cs typeface="Calibri" pitchFamily="34" charset="-120"/>
+              </a:rPr>
+              <a:t>Лідер на юридичному домені</a:t>
+            </a:r>
+            <a:endParaRPr lang="en-US" sz="1000" dirty="0"/>
+          </a:p>
+        </p:txBody>
+      </p:sp>
+      <p:sp>
+        <p:nvSpPr>
+          <p:cNvPr id="30" name="Text 24"/>
+          <p:cNvSpPr/>
+          <p:nvPr/>
+        </p:nvSpPr>
+        <p:spPr>
+          <a:xfrm>
+            <a:off x="640080" y="3817620"/>
+            <a:ext cx="3657600" cy="388620"/>
+          </a:xfrm>
+          <a:prstGeom prst="rect">
+            <a:avLst/>
+          </a:prstGeom>
+          <a:noFill/>
+          <a:ln/>
+        </p:spPr>
+        <p:txBody>
+          <a:bodyPr wrap="square" lIns="0" tIns="0" rIns="0" bIns="0" rtlCol="0" anchor="t"/>
+          <a:lstStyle/>
+          <a:p>
+            <a:pPr marL="0" indent="0" algn="l">
+              <a:buNone/>
+            </a:pPr>
+            <a:r>
+              <a:rPr lang="en-US" sz="1000" dirty="0">
+                <a:solidFill>
+                  <a:srgbClr val="475569"/>
+                </a:solidFill>
+                <a:latin typeface="Calibri" pitchFamily="34" charset="0"/>
+                <a:ea typeface="Calibri" pitchFamily="34" charset="-122"/>
+                <a:cs typeface="Calibri" pitchFamily="34" charset="-120"/>
+              </a:rPr>
+              <a:t>Найвища nDCG@10 на Legal (0.320), ~2× повільніший</a:t>
+            </a:r>
+            <a:endParaRPr lang="en-US" sz="1000" dirty="0"/>
+          </a:p>
+        </p:txBody>
+      </p:sp>
+      <p:sp>
+        <p:nvSpPr>
+          <p:cNvPr id="31" name="Shape 25"/>
+          <p:cNvSpPr/>
+          <p:nvPr/>
+        </p:nvSpPr>
+        <p:spPr>
+          <a:xfrm>
+            <a:off x="4663440" y="3040380"/>
+            <a:ext cx="4069080" cy="1257300"/>
+          </a:xfrm>
+          <a:prstGeom prst="roundRect">
+            <a:avLst>
+              <a:gd name="adj" fmla="val 4364"/>
+            </a:avLst>
+          </a:prstGeom>
+          <a:solidFill>
+            <a:srgbClr val="FFFFFF"/>
+          </a:solidFill>
+          <a:ln w="15875">
+            <a:solidFill>
+              <a:srgbClr val="64748B"/>
+            </a:solidFill>
+            <a:prstDash val="solid"/>
+          </a:ln>
+        </p:spPr>
+        <p:txBody>
+          <a:bodyPr/>
+          <a:lstStyle/>
+          <a:p>
+            <a:endParaRPr lang="en-US"/>
+          </a:p>
+        </p:txBody>
+      </p:sp>
+      <p:sp>
+        <p:nvSpPr>
+          <p:cNvPr id="32" name="Shape 26"/>
+          <p:cNvSpPr/>
+          <p:nvPr/>
+        </p:nvSpPr>
+        <p:spPr>
+          <a:xfrm>
+            <a:off x="4663440" y="3040380"/>
+            <a:ext cx="91440" cy="1257300"/>
+          </a:xfrm>
+          <a:prstGeom prst="rect">
+            <a:avLst/>
+          </a:prstGeom>
+          <a:solidFill>
+            <a:srgbClr val="64748B"/>
+          </a:solidFill>
+          <a:ln/>
+        </p:spPr>
+        <p:txBody>
+          <a:bodyPr/>
+          <a:lstStyle/>
+          <a:p>
+            <a:endParaRPr lang="en-US"/>
+          </a:p>
+        </p:txBody>
+      </p:sp>
+      <p:sp>
+        <p:nvSpPr>
+          <p:cNvPr id="33" name="Shape 27"/>
+          <p:cNvSpPr/>
+          <p:nvPr/>
+        </p:nvSpPr>
+        <p:spPr>
+          <a:xfrm>
+            <a:off x="4892040" y="3204972"/>
+            <a:ext cx="502920" cy="502920"/>
+          </a:xfrm>
+          <a:prstGeom prst="ellipse">
+            <a:avLst/>
+          </a:prstGeom>
+          <a:solidFill>
+            <a:srgbClr val="64748B"/>
+          </a:solidFill>
+          <a:ln/>
+        </p:spPr>
+        <p:txBody>
+          <a:bodyPr/>
+          <a:lstStyle/>
+          <a:p>
+            <a:endParaRPr lang="en-US"/>
+          </a:p>
+        </p:txBody>
+      </p:sp>
+      <p:pic>
+        <p:nvPicPr>
+          <p:cNvPr id="34" name="Image 4" descr="preencoded.png"/>
+          <p:cNvPicPr>
+            <a:picLocks noChangeAspect="1"/>
+          </p:cNvPicPr>
+          <p:nvPr/>
+        </p:nvPicPr>
+        <p:blipFill>
+          <a:blip r:embed="rId7"/>
+          <a:stretch>
+            <a:fillRect/>
+          </a:stretch>
+        </p:blipFill>
+        <p:spPr>
+          <a:xfrm>
+            <a:off x="4992624" y="3305556"/>
+            <a:ext cx="292608" cy="292608"/>
+          </a:xfrm>
+          <a:prstGeom prst="rect">
+            <a:avLst/>
+          </a:prstGeom>
+        </p:spPr>
+      </p:pic>
+      <p:sp>
+        <p:nvSpPr>
+          <p:cNvPr id="35" name="Text 28"/>
+          <p:cNvSpPr/>
+          <p:nvPr/>
+        </p:nvSpPr>
+        <p:spPr>
+          <a:xfrm>
+            <a:off x="5486400" y="3131820"/>
+            <a:ext cx="3108960" cy="320040"/>
+          </a:xfrm>
+          <a:prstGeom prst="rect">
+            <a:avLst/>
+          </a:prstGeom>
+          <a:noFill/>
+          <a:ln/>
+        </p:spPr>
+        <p:txBody>
+          <a:bodyPr wrap="square" lIns="0" tIns="0" rIns="0" bIns="0" rtlCol="0" anchor="ctr"/>
+          <a:lstStyle/>
+          <a:p>
+            <a:pPr marL="0" indent="0" algn="l">
+              <a:buNone/>
+            </a:pPr>
+            <a:r>
+              <a:rPr lang="en-US" sz="1600" b="1" dirty="0">
+                <a:solidFill>
+                  <a:srgbClr val="64748B"/>
+                </a:solidFill>
+                <a:latin typeface="Calibri" pitchFamily="34" charset="0"/>
+                <a:ea typeface="Calibri" pitchFamily="34" charset="-122"/>
+                <a:cs typeface="Calibri" pitchFamily="34" charset="-120"/>
+              </a:rPr>
+              <a:t>BM25</a:t>
+            </a:r>
+            <a:endParaRPr lang="en-US" sz="1600" dirty="0"/>
+          </a:p>
+        </p:txBody>
+      </p:sp>
+      <p:sp>
+        <p:nvSpPr>
+          <p:cNvPr id="36" name="Text 29"/>
+          <p:cNvSpPr/>
+          <p:nvPr/>
+        </p:nvSpPr>
+        <p:spPr>
+          <a:xfrm>
+            <a:off x="5486400" y="3461004"/>
+            <a:ext cx="3108960" cy="228600"/>
+          </a:xfrm>
+          <a:prstGeom prst="rect">
+            <a:avLst/>
+          </a:prstGeom>
+          <a:noFill/>
+          <a:ln/>
+        </p:spPr>
+        <p:txBody>
+          <a:bodyPr wrap="square" lIns="0" tIns="0" rIns="0" bIns="0" rtlCol="0" anchor="ctr"/>
+          <a:lstStyle/>
+          <a:p>
+            <a:pPr marL="0" indent="0" algn="l">
+              <a:buNone/>
+            </a:pPr>
+            <a:r>
+              <a:rPr lang="en-US" sz="1000" b="1" dirty="0">
+                <a:solidFill>
+                  <a:srgbClr val="1E293B"/>
+                </a:solidFill>
+                <a:latin typeface="Calibri" pitchFamily="34" charset="0"/>
+                <a:ea typeface="Calibri" pitchFamily="34" charset="-122"/>
+                <a:cs typeface="Calibri" pitchFamily="34" charset="-120"/>
+              </a:rPr>
+              <a:t>Конкурентний baseline</a:t>
+            </a:r>
+            <a:endParaRPr lang="en-US" sz="1000" dirty="0"/>
+          </a:p>
+        </p:txBody>
+      </p:sp>
+      <p:sp>
+        <p:nvSpPr>
+          <p:cNvPr id="37" name="Text 30"/>
+          <p:cNvSpPr/>
+          <p:nvPr/>
+        </p:nvSpPr>
+        <p:spPr>
+          <a:xfrm>
+            <a:off x="4892040" y="3817620"/>
+            <a:ext cx="3657600" cy="388620"/>
+          </a:xfrm>
+          <a:prstGeom prst="rect">
+            <a:avLst/>
+          </a:prstGeom>
+          <a:noFill/>
+          <a:ln/>
+        </p:spPr>
+        <p:txBody>
+          <a:bodyPr wrap="square" lIns="0" tIns="0" rIns="0" bIns="0" rtlCol="0" anchor="t"/>
+          <a:lstStyle/>
+          <a:p>
+            <a:pPr marL="0" indent="0" algn="l">
+              <a:buNone/>
+            </a:pPr>
+            <a:r>
+              <a:rPr lang="en-US" sz="1000" dirty="0">
+                <a:solidFill>
+                  <a:srgbClr val="475569"/>
+                </a:solidFill>
+                <a:latin typeface="Calibri" pitchFamily="34" charset="0"/>
+                <a:ea typeface="Calibri" pitchFamily="34" charset="-122"/>
+                <a:cs typeface="Calibri" pitchFamily="34" charset="-120"/>
+              </a:rPr>
+              <a:t>Найшвидша (1–3 мс/запит) — у &gt;100× швидше за BGE-M3</a:t>
+            </a:r>
+            <a:endParaRPr lang="en-US" sz="1000" dirty="0"/>
+          </a:p>
+        </p:txBody>
+      </p:sp>
+      <p:pic>
+        <p:nvPicPr>
+          <p:cNvPr id="39" name="Image 5" descr="D:\repos\kb-semantic-search-benchmark\thesis\scripts\_logo_hex.png"/>
+          <p:cNvPicPr>
+            <a:picLocks noChangeAspect="1"/>
+          </p:cNvPicPr>
+          <p:nvPr/>
+        </p:nvPicPr>
+        <p:blipFill>
+          <a:blip r:embed="rId8"/>
+          <a:stretch>
+            <a:fillRect/>
+          </a:stretch>
+        </p:blipFill>
+        <p:spPr>
+          <a:xfrm>
+            <a:off x="411480" y="4686300"/>
+            <a:ext cx="502920" cy="338328"/>
+          </a:xfrm>
+          <a:prstGeom prst="rect">
+            <a:avLst/>
+          </a:prstGeom>
+        </p:spPr>
+      </p:pic>
+      <p:sp>
+        <p:nvSpPr>
+          <p:cNvPr id="40" name="Text 32"/>
+          <p:cNvSpPr/>
+          <p:nvPr/>
+        </p:nvSpPr>
+        <p:spPr>
+          <a:xfrm>
+            <a:off x="7955280" y="4850892"/>
+            <a:ext cx="960120" cy="228600"/>
+          </a:xfrm>
+          <a:prstGeom prst="rect">
+            <a:avLst/>
+          </a:prstGeom>
+          <a:noFill/>
+          <a:ln/>
+        </p:spPr>
+        <p:txBody>
+          <a:bodyPr wrap="square" lIns="0" tIns="0" rIns="0" bIns="0" rtlCol="0" anchor="ctr"/>
+          <a:lstStyle/>
+          <a:p>
+            <a:pPr marL="0" indent="0" algn="r">
+              <a:buNone/>
+            </a:pPr>
+            <a:r>
+              <a:rPr lang="en-US" sz="900" dirty="0">
+                <a:solidFill>
+                  <a:srgbClr val="64748B"/>
+                </a:solidFill>
+                <a:latin typeface="Calibri" pitchFamily="34" charset="0"/>
+                <a:ea typeface="Calibri" pitchFamily="34" charset="-122"/>
+                <a:cs typeface="Calibri" pitchFamily="34" charset="-120"/>
+              </a:rPr>
+              <a:t>1</a:t>
+            </a:r>
+            <a:r>
+              <a:rPr lang="uk-UA" sz="900" dirty="0">
+                <a:solidFill>
+                  <a:srgbClr val="64748B"/>
+                </a:solidFill>
+                <a:latin typeface="Calibri" pitchFamily="34" charset="0"/>
+                <a:ea typeface="Calibri" pitchFamily="34" charset="-122"/>
+                <a:cs typeface="Calibri" pitchFamily="34" charset="-120"/>
+              </a:rPr>
+              <a:t>7</a:t>
+            </a:r>
+            <a:r>
+              <a:rPr lang="en-US" sz="900" dirty="0">
+                <a:solidFill>
+                  <a:srgbClr val="64748B"/>
+                </a:solidFill>
+                <a:latin typeface="Calibri" pitchFamily="34" charset="0"/>
+                <a:ea typeface="Calibri" pitchFamily="34" charset="-122"/>
+                <a:cs typeface="Calibri" pitchFamily="34" charset="-120"/>
+              </a:rPr>
+              <a:t> / 18</a:t>
+            </a:r>
+            <a:endParaRPr lang="en-US" sz="900" dirty="0"/>
+          </a:p>
+        </p:txBody>
+      </p:sp>
+    </p:spTree>
+  </p:cSld>
+  <p:clrMapOvr>
+    <a:masterClrMapping/>
+  </p:clrMapOvr>
+</p:sld>
+</file>
+
+<file path=ppt/slides/slide18.xml><?xml version="1.0" encoding="utf-8"?>
+<p:sld xmlns:a="http://schemas.openxmlformats.org/drawingml/2006/main" xmlns:r="http://schemas.openxmlformats.org/officeDocument/2006/relationships" xmlns:p="http://schemas.openxmlformats.org/presentationml/2006/main">
   <p:cSld name="Slide 17">
     <p:bg>
       <p:bgPr>
@@ -19440,127 +20815,10 @@
                 <a:ea typeface="Calibri" pitchFamily="34" charset="-122"/>
                 <a:cs typeface="Calibri" pitchFamily="34" charset="-120"/>
               </a:rPr>
-              <a:t>17 / 18</a:t>
-            </a:r>
-            <a:endParaRPr lang="en-US" sz="900" dirty="0"/>
-          </a:p>
-        </p:txBody>
-      </p:sp>
-    </p:spTree>
-  </p:cSld>
-  <p:clrMapOvr>
-    <a:masterClrMapping/>
-  </p:clrMapOvr>
-</p:sld>
-</file>
-
-<file path=ppt/slides/slide18.xml><?xml version="1.0" encoding="utf-8"?>
-<p:sld xmlns:a="http://schemas.openxmlformats.org/drawingml/2006/main" xmlns:r="http://schemas.openxmlformats.org/officeDocument/2006/relationships" xmlns:p="http://schemas.openxmlformats.org/presentationml/2006/main">
-  <p:cSld name="Slide 18">
-    <p:bg>
-      <p:bgPr>
-        <a:solidFill>
-          <a:srgbClr val="FFFFFF"/>
-        </a:solidFill>
-        <a:effectLst/>
-      </p:bgPr>
-    </p:bg>
-    <p:spTree>
-      <p:nvGrpSpPr>
-        <p:cNvPr id="1" name=""/>
-        <p:cNvGrpSpPr/>
-        <p:nvPr/>
-      </p:nvGrpSpPr>
-      <p:grpSpPr>
-        <a:xfrm>
-          <a:off x="0" y="0"/>
-          <a:ext cx="0" cy="0"/>
-          <a:chOff x="0" y="0"/>
-          <a:chExt cx="0" cy="0"/>
-        </a:xfrm>
-      </p:grpSpPr>
-      <p:sp>
-        <p:nvSpPr>
-          <p:cNvPr id="2" name="Shape 0"/>
-          <p:cNvSpPr/>
-          <p:nvPr/>
-        </p:nvSpPr>
-        <p:spPr>
-          <a:xfrm>
-            <a:off x="-914400" y="-914400"/>
-            <a:ext cx="3657600" cy="3657600"/>
-          </a:xfrm>
-          <a:prstGeom prst="ellipse">
-            <a:avLst/>
-          </a:prstGeom>
-          <a:solidFill>
-            <a:srgbClr val="EFF6FF"/>
-          </a:solidFill>
-          <a:ln/>
-        </p:spPr>
-        <p:txBody>
-          <a:bodyPr/>
-          <a:lstStyle/>
-          <a:p>
-            <a:endParaRPr lang="en-US"/>
-          </a:p>
-        </p:txBody>
-      </p:sp>
-      <p:sp>
-        <p:nvSpPr>
-          <p:cNvPr id="3" name="Shape 1"/>
-          <p:cNvSpPr/>
-          <p:nvPr/>
-        </p:nvSpPr>
-        <p:spPr>
-          <a:xfrm>
-            <a:off x="7315200" y="3657600"/>
-            <a:ext cx="3200400" cy="3200400"/>
-          </a:xfrm>
-          <a:prstGeom prst="ellipse">
-            <a:avLst/>
-          </a:prstGeom>
-          <a:solidFill>
-            <a:srgbClr val="F59E0B">
-              <a:alpha val="20000"/>
-            </a:srgbClr>
-          </a:solidFill>
-          <a:ln/>
-        </p:spPr>
-        <p:txBody>
-          <a:bodyPr/>
-          <a:lstStyle/>
-          <a:p>
-            <a:endParaRPr lang="en-US"/>
-          </a:p>
-        </p:txBody>
-      </p:sp>
-      <p:sp>
-        <p:nvSpPr>
-          <p:cNvPr id="4" name="Text 2"/>
-          <p:cNvSpPr/>
-          <p:nvPr/>
-        </p:nvSpPr>
-        <p:spPr>
-          <a:xfrm>
-            <a:off x="411480" y="91440"/>
-            <a:ext cx="8321040" cy="182880"/>
-          </a:xfrm>
-          <a:prstGeom prst="rect">
-            <a:avLst/>
-          </a:prstGeom>
-          <a:noFill/>
-          <a:ln/>
-        </p:spPr>
-        <p:txBody>
-          <a:bodyPr wrap="square" lIns="0" tIns="0" rIns="0" bIns="0" rtlCol="0" anchor="ctr"/>
-          <a:lstStyle/>
-          <a:p>
-            <a:pPr marL="0" indent="0" algn="l">
-              <a:buNone/>
-            </a:pPr>
-            <a:r>
-              <a:rPr lang="en-US" sz="850" b="1" kern="0" spc="300" dirty="0">
+              <a:t>1</a:t>
+            </a:r>
+            <a:r>
+              <a:rPr lang="uk-UA" sz="900" dirty="0">
                 <a:solidFill>
                   <a:srgbClr val="64748B"/>
                 </a:solidFill>
@@ -19568,1029 +20826,10 @@
                 <a:ea typeface="Calibri" pitchFamily="34" charset="-122"/>
                 <a:cs typeface="Calibri" pitchFamily="34" charset="-120"/>
               </a:rPr>
-              <a:t>РОЗДІЛ 11 · ПІДСУМКИ</a:t>
-            </a:r>
-            <a:endParaRPr lang="en-US" sz="850" dirty="0"/>
-          </a:p>
-        </p:txBody>
-      </p:sp>
-      <p:sp>
-        <p:nvSpPr>
-          <p:cNvPr id="5" name="Shape 3"/>
-          <p:cNvSpPr/>
-          <p:nvPr/>
-        </p:nvSpPr>
-        <p:spPr>
-          <a:xfrm>
-            <a:off x="411480" y="420624"/>
-            <a:ext cx="201168" cy="201168"/>
-          </a:xfrm>
-          <a:prstGeom prst="ellipse">
-            <a:avLst/>
-          </a:prstGeom>
-          <a:solidFill>
-            <a:srgbClr val="F59E0B"/>
-          </a:solidFill>
-          <a:ln/>
-        </p:spPr>
-        <p:txBody>
-          <a:bodyPr/>
-          <a:lstStyle/>
-          <a:p>
-            <a:endParaRPr lang="en-US"/>
-          </a:p>
-        </p:txBody>
-      </p:sp>
-      <p:sp>
-        <p:nvSpPr>
-          <p:cNvPr id="6" name="Text 4"/>
-          <p:cNvSpPr/>
-          <p:nvPr/>
-        </p:nvSpPr>
-        <p:spPr>
-          <a:xfrm>
-            <a:off x="722376" y="292608"/>
-            <a:ext cx="6858000" cy="502920"/>
-          </a:xfrm>
-          <a:prstGeom prst="rect">
-            <a:avLst/>
-          </a:prstGeom>
-          <a:noFill/>
-          <a:ln/>
-        </p:spPr>
-        <p:txBody>
-          <a:bodyPr wrap="square" lIns="0" tIns="0" rIns="0" bIns="0" rtlCol="0" anchor="ctr"/>
-          <a:lstStyle/>
-          <a:p>
-            <a:pPr marL="0" indent="0" algn="l">
-              <a:buNone/>
-            </a:pPr>
-            <a:r>
-              <a:rPr lang="en-US" sz="2200" b="1" dirty="0">
-                <a:solidFill>
-                  <a:srgbClr val="0F172A"/>
-                </a:solidFill>
-                <a:latin typeface="Calibri" pitchFamily="34" charset="0"/>
-                <a:ea typeface="Calibri" pitchFamily="34" charset="-122"/>
-                <a:cs typeface="Calibri" pitchFamily="34" charset="-120"/>
-              </a:rPr>
-              <a:t>Підсумки та практичні рекомендації</a:t>
-            </a:r>
-            <a:endParaRPr lang="en-US" sz="2200" dirty="0"/>
-          </a:p>
-        </p:txBody>
-      </p:sp>
-      <p:sp>
-        <p:nvSpPr>
-          <p:cNvPr id="7" name="Shape 5"/>
-          <p:cNvSpPr/>
-          <p:nvPr/>
-        </p:nvSpPr>
-        <p:spPr>
-          <a:xfrm>
-            <a:off x="411480" y="960120"/>
-            <a:ext cx="8321040" cy="502920"/>
-          </a:xfrm>
-          <a:prstGeom prst="roundRect">
-            <a:avLst>
-              <a:gd name="adj" fmla="val 10909"/>
-            </a:avLst>
-          </a:prstGeom>
-          <a:solidFill>
-            <a:srgbClr val="F59E0B"/>
-          </a:solidFill>
-          <a:ln w="9525">
-            <a:solidFill>
-              <a:srgbClr val="F59E0B"/>
-            </a:solidFill>
-            <a:prstDash val="solid"/>
-          </a:ln>
-          <a:effectLst>
-            <a:outerShdw blurRad="76200" dist="12700" dir="5400000" algn="bl" rotWithShape="0">
-              <a:srgbClr val="000000">
-                <a:alpha val="7000"/>
-              </a:srgbClr>
-            </a:outerShdw>
-          </a:effectLst>
-        </p:spPr>
-        <p:txBody>
-          <a:bodyPr/>
-          <a:lstStyle/>
-          <a:p>
-            <a:endParaRPr lang="en-US"/>
-          </a:p>
-        </p:txBody>
-      </p:sp>
-      <p:pic>
-        <p:nvPicPr>
-          <p:cNvPr id="8" name="Image 0" descr="preencoded.png"/>
-          <p:cNvPicPr>
-            <a:picLocks noChangeAspect="1"/>
-          </p:cNvPicPr>
-          <p:nvPr/>
-        </p:nvPicPr>
-        <p:blipFill>
-          <a:blip r:embed="rId3"/>
-          <a:stretch>
-            <a:fillRect/>
-          </a:stretch>
-        </p:blipFill>
-        <p:spPr>
-          <a:xfrm>
-            <a:off x="594360" y="1078992"/>
-            <a:ext cx="274320" cy="274320"/>
-          </a:xfrm>
-          <a:prstGeom prst="rect">
-            <a:avLst/>
-          </a:prstGeom>
-        </p:spPr>
-      </p:pic>
-      <p:sp>
-        <p:nvSpPr>
-          <p:cNvPr id="9" name="Text 6"/>
-          <p:cNvSpPr/>
-          <p:nvPr/>
-        </p:nvSpPr>
-        <p:spPr>
-          <a:xfrm>
-            <a:off x="1005840" y="960120"/>
-            <a:ext cx="7635240" cy="502920"/>
-          </a:xfrm>
-          <a:prstGeom prst="rect">
-            <a:avLst/>
-          </a:prstGeom>
-          <a:noFill/>
-          <a:ln/>
-        </p:spPr>
-        <p:txBody>
-          <a:bodyPr wrap="square" lIns="0" tIns="0" rIns="0" bIns="0" rtlCol="0" anchor="ctr"/>
-          <a:lstStyle/>
-          <a:p>
-            <a:pPr marL="0" indent="0" algn="l">
-              <a:buNone/>
-            </a:pPr>
-            <a:r>
-              <a:rPr lang="uk-UA" sz="1100" b="1" dirty="0">
-                <a:solidFill>
-                  <a:srgbClr val="0F172A"/>
-                </a:solidFill>
-                <a:latin typeface="Calibri" pitchFamily="34" charset="0"/>
-                <a:ea typeface="Calibri" pitchFamily="34" charset="-122"/>
-                <a:cs typeface="Calibri" pitchFamily="34" charset="-120"/>
-              </a:rPr>
-              <a:t>О</a:t>
-            </a:r>
-            <a:r>
-              <a:rPr lang="en-US" sz="1100" b="1" dirty="0" err="1">
-                <a:solidFill>
-                  <a:srgbClr val="0F172A"/>
-                </a:solidFill>
-                <a:latin typeface="Calibri" pitchFamily="34" charset="0"/>
-                <a:ea typeface="Calibri" pitchFamily="34" charset="-122"/>
-                <a:cs typeface="Calibri" pitchFamily="34" charset="-120"/>
-              </a:rPr>
-              <a:t>бґрунтовано</a:t>
-            </a:r>
-            <a:r>
-              <a:rPr lang="en-US" sz="1100" b="1" dirty="0">
-                <a:solidFill>
-                  <a:srgbClr val="0F172A"/>
-                </a:solidFill>
-                <a:latin typeface="Calibri" pitchFamily="34" charset="0"/>
-                <a:ea typeface="Calibri" pitchFamily="34" charset="-122"/>
-                <a:cs typeface="Calibri" pitchFamily="34" charset="-120"/>
-              </a:rPr>
-              <a:t> доцільність застосування embedding-моделей для семантичного пошуку у корпоративних базах знань</a:t>
-            </a:r>
-            <a:endParaRPr lang="en-US" sz="1100" dirty="0"/>
-          </a:p>
-        </p:txBody>
-      </p:sp>
-      <p:sp>
-        <p:nvSpPr>
-          <p:cNvPr id="10" name="Shape 7"/>
-          <p:cNvSpPr/>
-          <p:nvPr/>
-        </p:nvSpPr>
-        <p:spPr>
-          <a:xfrm>
-            <a:off x="411480" y="1645920"/>
-            <a:ext cx="4069080" cy="1257300"/>
-          </a:xfrm>
-          <a:prstGeom prst="roundRect">
-            <a:avLst>
-              <a:gd name="adj" fmla="val 4364"/>
-            </a:avLst>
-          </a:prstGeom>
-          <a:solidFill>
-            <a:srgbClr val="FFFFFF"/>
-          </a:solidFill>
-          <a:ln w="15875">
-            <a:solidFill>
-              <a:srgbClr val="F59E0B"/>
-            </a:solidFill>
-            <a:prstDash val="solid"/>
-          </a:ln>
-        </p:spPr>
-        <p:txBody>
-          <a:bodyPr/>
-          <a:lstStyle/>
-          <a:p>
-            <a:endParaRPr lang="en-US"/>
-          </a:p>
-        </p:txBody>
-      </p:sp>
-      <p:sp>
-        <p:nvSpPr>
-          <p:cNvPr id="11" name="Shape 8"/>
-          <p:cNvSpPr/>
-          <p:nvPr/>
-        </p:nvSpPr>
-        <p:spPr>
-          <a:xfrm>
-            <a:off x="411480" y="1645920"/>
-            <a:ext cx="91440" cy="1257300"/>
-          </a:xfrm>
-          <a:prstGeom prst="rect">
-            <a:avLst/>
-          </a:prstGeom>
-          <a:solidFill>
-            <a:srgbClr val="F59E0B"/>
-          </a:solidFill>
-          <a:ln/>
-        </p:spPr>
-        <p:txBody>
-          <a:bodyPr/>
-          <a:lstStyle/>
-          <a:p>
-            <a:endParaRPr lang="en-US"/>
-          </a:p>
-        </p:txBody>
-      </p:sp>
-      <p:sp>
-        <p:nvSpPr>
-          <p:cNvPr id="12" name="Shape 9"/>
-          <p:cNvSpPr/>
-          <p:nvPr/>
-        </p:nvSpPr>
-        <p:spPr>
-          <a:xfrm>
-            <a:off x="640080" y="1810512"/>
-            <a:ext cx="502920" cy="502920"/>
-          </a:xfrm>
-          <a:prstGeom prst="ellipse">
-            <a:avLst/>
-          </a:prstGeom>
-          <a:solidFill>
-            <a:srgbClr val="F59E0B"/>
-          </a:solidFill>
-          <a:ln/>
-        </p:spPr>
-        <p:txBody>
-          <a:bodyPr/>
-          <a:lstStyle/>
-          <a:p>
-            <a:endParaRPr lang="en-US"/>
-          </a:p>
-        </p:txBody>
-      </p:sp>
-      <p:pic>
-        <p:nvPicPr>
-          <p:cNvPr id="13" name="Image 1" descr="preencoded.png"/>
-          <p:cNvPicPr>
-            <a:picLocks noChangeAspect="1"/>
-          </p:cNvPicPr>
-          <p:nvPr/>
-        </p:nvPicPr>
-        <p:blipFill>
-          <a:blip r:embed="rId4"/>
-          <a:stretch>
-            <a:fillRect/>
-          </a:stretch>
-        </p:blipFill>
-        <p:spPr>
-          <a:xfrm>
-            <a:off x="740664" y="1911096"/>
-            <a:ext cx="292608" cy="292608"/>
-          </a:xfrm>
-          <a:prstGeom prst="rect">
-            <a:avLst/>
-          </a:prstGeom>
-        </p:spPr>
-      </p:pic>
-      <p:sp>
-        <p:nvSpPr>
-          <p:cNvPr id="14" name="Text 10"/>
-          <p:cNvSpPr/>
-          <p:nvPr/>
-        </p:nvSpPr>
-        <p:spPr>
-          <a:xfrm>
-            <a:off x="1234440" y="1737360"/>
-            <a:ext cx="3108960" cy="320040"/>
-          </a:xfrm>
-          <a:prstGeom prst="rect">
-            <a:avLst/>
-          </a:prstGeom>
-          <a:noFill/>
-          <a:ln/>
-        </p:spPr>
-        <p:txBody>
-          <a:bodyPr wrap="square" lIns="0" tIns="0" rIns="0" bIns="0" rtlCol="0" anchor="ctr"/>
-          <a:lstStyle/>
-          <a:p>
-            <a:pPr marL="0" indent="0" algn="l">
-              <a:buNone/>
-            </a:pPr>
-            <a:r>
-              <a:rPr lang="en-US" sz="1600" b="1" dirty="0">
-                <a:solidFill>
-                  <a:srgbClr val="F59E0B"/>
-                </a:solidFill>
-                <a:latin typeface="Calibri" pitchFamily="34" charset="0"/>
-                <a:ea typeface="Calibri" pitchFamily="34" charset="-122"/>
-                <a:cs typeface="Calibri" pitchFamily="34" charset="-120"/>
-              </a:rPr>
-              <a:t>BGE-M3</a:t>
-            </a:r>
-            <a:endParaRPr lang="en-US" sz="1600" dirty="0"/>
-          </a:p>
-        </p:txBody>
-      </p:sp>
-      <p:sp>
-        <p:nvSpPr>
-          <p:cNvPr id="15" name="Text 11"/>
-          <p:cNvSpPr/>
-          <p:nvPr/>
-        </p:nvSpPr>
-        <p:spPr>
-          <a:xfrm>
-            <a:off x="1234440" y="2066544"/>
-            <a:ext cx="3108960" cy="228600"/>
-          </a:xfrm>
-          <a:prstGeom prst="rect">
-            <a:avLst/>
-          </a:prstGeom>
-          <a:noFill/>
-          <a:ln/>
-        </p:spPr>
-        <p:txBody>
-          <a:bodyPr wrap="square" lIns="0" tIns="0" rIns="0" bIns="0" rtlCol="0" anchor="ctr"/>
-          <a:lstStyle/>
-          <a:p>
-            <a:pPr marL="0" indent="0" algn="l">
-              <a:buNone/>
-            </a:pPr>
-            <a:r>
-              <a:rPr lang="en-US" sz="1000" b="1" dirty="0">
-                <a:solidFill>
-                  <a:srgbClr val="1E293B"/>
-                </a:solidFill>
-                <a:latin typeface="Calibri" pitchFamily="34" charset="0"/>
-                <a:ea typeface="Calibri" pitchFamily="34" charset="-122"/>
-                <a:cs typeface="Calibri" pitchFamily="34" charset="-120"/>
-              </a:rPr>
-              <a:t>Основна модель для впровадження</a:t>
-            </a:r>
-            <a:endParaRPr lang="en-US" sz="1000" dirty="0"/>
-          </a:p>
-        </p:txBody>
-      </p:sp>
-      <p:sp>
-        <p:nvSpPr>
-          <p:cNvPr id="16" name="Text 12"/>
-          <p:cNvSpPr/>
-          <p:nvPr/>
-        </p:nvSpPr>
-        <p:spPr>
-          <a:xfrm>
-            <a:off x="640080" y="2423160"/>
-            <a:ext cx="3657600" cy="388620"/>
-          </a:xfrm>
-          <a:prstGeom prst="rect">
-            <a:avLst/>
-          </a:prstGeom>
-          <a:noFill/>
-          <a:ln/>
-        </p:spPr>
-        <p:txBody>
-          <a:bodyPr wrap="square" lIns="0" tIns="0" rIns="0" bIns="0" rtlCol="0" anchor="t"/>
-          <a:lstStyle/>
-          <a:p>
-            <a:pPr marL="0" indent="0" algn="l">
-              <a:buNone/>
-            </a:pPr>
-            <a:r>
-              <a:rPr lang="en-US" sz="1000" dirty="0">
-                <a:solidFill>
-                  <a:srgbClr val="475569"/>
-                </a:solidFill>
-                <a:latin typeface="Calibri" pitchFamily="34" charset="0"/>
-                <a:ea typeface="Calibri" pitchFamily="34" charset="-122"/>
-                <a:cs typeface="Calibri" pitchFamily="34" charset="-120"/>
-              </a:rPr>
-              <a:t>Найкраща якість, стабільність у різних доменах</a:t>
-            </a:r>
-            <a:endParaRPr lang="en-US" sz="1000" dirty="0"/>
-          </a:p>
-        </p:txBody>
-      </p:sp>
-      <p:sp>
-        <p:nvSpPr>
-          <p:cNvPr id="17" name="Shape 13"/>
-          <p:cNvSpPr/>
-          <p:nvPr/>
-        </p:nvSpPr>
-        <p:spPr>
-          <a:xfrm>
-            <a:off x="4663440" y="1645920"/>
-            <a:ext cx="4069080" cy="1257300"/>
-          </a:xfrm>
-          <a:prstGeom prst="roundRect">
-            <a:avLst>
-              <a:gd name="adj" fmla="val 4364"/>
-            </a:avLst>
-          </a:prstGeom>
-          <a:solidFill>
-            <a:srgbClr val="FFFFFF"/>
-          </a:solidFill>
-          <a:ln w="15875">
-            <a:solidFill>
-              <a:srgbClr val="0891B2"/>
-            </a:solidFill>
-            <a:prstDash val="solid"/>
-          </a:ln>
-        </p:spPr>
-        <p:txBody>
-          <a:bodyPr/>
-          <a:lstStyle/>
-          <a:p>
-            <a:endParaRPr lang="en-US"/>
-          </a:p>
-        </p:txBody>
-      </p:sp>
-      <p:sp>
-        <p:nvSpPr>
-          <p:cNvPr id="18" name="Shape 14"/>
-          <p:cNvSpPr/>
-          <p:nvPr/>
-        </p:nvSpPr>
-        <p:spPr>
-          <a:xfrm>
-            <a:off x="4663440" y="1645920"/>
-            <a:ext cx="91440" cy="1257300"/>
-          </a:xfrm>
-          <a:prstGeom prst="rect">
-            <a:avLst/>
-          </a:prstGeom>
-          <a:solidFill>
-            <a:srgbClr val="0891B2"/>
-          </a:solidFill>
-          <a:ln/>
-        </p:spPr>
-        <p:txBody>
-          <a:bodyPr/>
-          <a:lstStyle/>
-          <a:p>
-            <a:endParaRPr lang="en-US"/>
-          </a:p>
-        </p:txBody>
-      </p:sp>
-      <p:sp>
-        <p:nvSpPr>
-          <p:cNvPr id="19" name="Shape 15"/>
-          <p:cNvSpPr/>
-          <p:nvPr/>
-        </p:nvSpPr>
-        <p:spPr>
-          <a:xfrm>
-            <a:off x="4892040" y="1810512"/>
-            <a:ext cx="502920" cy="502920"/>
-          </a:xfrm>
-          <a:prstGeom prst="ellipse">
-            <a:avLst/>
-          </a:prstGeom>
-          <a:solidFill>
-            <a:srgbClr val="0891B2"/>
-          </a:solidFill>
-          <a:ln/>
-        </p:spPr>
-        <p:txBody>
-          <a:bodyPr/>
-          <a:lstStyle/>
-          <a:p>
-            <a:endParaRPr lang="en-US"/>
-          </a:p>
-        </p:txBody>
-      </p:sp>
-      <p:pic>
-        <p:nvPicPr>
-          <p:cNvPr id="20" name="Image 2" descr="preencoded.png"/>
-          <p:cNvPicPr>
-            <a:picLocks noChangeAspect="1"/>
-          </p:cNvPicPr>
-          <p:nvPr/>
-        </p:nvPicPr>
-        <p:blipFill>
-          <a:blip r:embed="rId5"/>
-          <a:stretch>
-            <a:fillRect/>
-          </a:stretch>
-        </p:blipFill>
-        <p:spPr>
-          <a:xfrm>
-            <a:off x="4992624" y="1911096"/>
-            <a:ext cx="292608" cy="292608"/>
-          </a:xfrm>
-          <a:prstGeom prst="rect">
-            <a:avLst/>
-          </a:prstGeom>
-        </p:spPr>
-      </p:pic>
-      <p:sp>
-        <p:nvSpPr>
-          <p:cNvPr id="21" name="Text 16"/>
-          <p:cNvSpPr/>
-          <p:nvPr/>
-        </p:nvSpPr>
-        <p:spPr>
-          <a:xfrm>
-            <a:off x="5486400" y="1737360"/>
-            <a:ext cx="3108960" cy="320040"/>
-          </a:xfrm>
-          <a:prstGeom prst="rect">
-            <a:avLst/>
-          </a:prstGeom>
-          <a:noFill/>
-          <a:ln/>
-        </p:spPr>
-        <p:txBody>
-          <a:bodyPr wrap="square" lIns="0" tIns="0" rIns="0" bIns="0" rtlCol="0" anchor="ctr"/>
-          <a:lstStyle/>
-          <a:p>
-            <a:pPr marL="0" indent="0" algn="l">
-              <a:buNone/>
-            </a:pPr>
-            <a:r>
-              <a:rPr lang="en-US" sz="1600" b="1" dirty="0">
-                <a:solidFill>
-                  <a:srgbClr val="0891B2"/>
-                </a:solidFill>
-                <a:latin typeface="Calibri" pitchFamily="34" charset="0"/>
-                <a:ea typeface="Calibri" pitchFamily="34" charset="-122"/>
-                <a:cs typeface="Calibri" pitchFamily="34" charset="-120"/>
-              </a:rPr>
-              <a:t>E5-base</a:t>
-            </a:r>
-            <a:endParaRPr lang="en-US" sz="1600" dirty="0"/>
-          </a:p>
-        </p:txBody>
-      </p:sp>
-      <p:sp>
-        <p:nvSpPr>
-          <p:cNvPr id="22" name="Text 17"/>
-          <p:cNvSpPr/>
-          <p:nvPr/>
-        </p:nvSpPr>
-        <p:spPr>
-          <a:xfrm>
-            <a:off x="5486400" y="2066544"/>
-            <a:ext cx="3108960" cy="228600"/>
-          </a:xfrm>
-          <a:prstGeom prst="rect">
-            <a:avLst/>
-          </a:prstGeom>
-          <a:noFill/>
-          <a:ln/>
-        </p:spPr>
-        <p:txBody>
-          <a:bodyPr wrap="square" lIns="0" tIns="0" rIns="0" bIns="0" rtlCol="0" anchor="ctr"/>
-          <a:lstStyle/>
-          <a:p>
-            <a:pPr marL="0" indent="0" algn="l">
-              <a:buNone/>
-            </a:pPr>
-            <a:r>
-              <a:rPr lang="en-US" sz="1000" b="1" dirty="0">
-                <a:solidFill>
-                  <a:srgbClr val="1E293B"/>
-                </a:solidFill>
-                <a:latin typeface="Calibri" pitchFamily="34" charset="0"/>
-                <a:ea typeface="Calibri" pitchFamily="34" charset="-122"/>
-                <a:cs typeface="Calibri" pitchFamily="34" charset="-120"/>
-              </a:rPr>
-              <a:t>Швидка альтернатива</a:t>
-            </a:r>
-            <a:endParaRPr lang="en-US" sz="1000" dirty="0"/>
-          </a:p>
-        </p:txBody>
-      </p:sp>
-      <p:sp>
-        <p:nvSpPr>
-          <p:cNvPr id="23" name="Text 18"/>
-          <p:cNvSpPr/>
-          <p:nvPr/>
-        </p:nvSpPr>
-        <p:spPr>
-          <a:xfrm>
-            <a:off x="4892040" y="2423160"/>
-            <a:ext cx="3657600" cy="388620"/>
-          </a:xfrm>
-          <a:prstGeom prst="rect">
-            <a:avLst/>
-          </a:prstGeom>
-          <a:noFill/>
-          <a:ln/>
-        </p:spPr>
-        <p:txBody>
-          <a:bodyPr wrap="square" lIns="0" tIns="0" rIns="0" bIns="0" rtlCol="0" anchor="t"/>
-          <a:lstStyle/>
-          <a:p>
-            <a:pPr marL="0" indent="0" algn="l">
-              <a:buNone/>
-            </a:pPr>
-            <a:r>
-              <a:rPr lang="en-US" sz="1000" dirty="0">
-                <a:solidFill>
-                  <a:srgbClr val="475569"/>
-                </a:solidFill>
-                <a:latin typeface="Calibri" pitchFamily="34" charset="0"/>
-                <a:ea typeface="Calibri" pitchFamily="34" charset="-122"/>
-                <a:cs typeface="Calibri" pitchFamily="34" charset="-120"/>
-              </a:rPr>
-              <a:t>Прийнятна якість + ~3× швидше за BGE-M3</a:t>
-            </a:r>
-            <a:endParaRPr lang="en-US" sz="1000" dirty="0"/>
-          </a:p>
-        </p:txBody>
-      </p:sp>
-      <p:sp>
-        <p:nvSpPr>
-          <p:cNvPr id="24" name="Shape 19"/>
-          <p:cNvSpPr/>
-          <p:nvPr/>
-        </p:nvSpPr>
-        <p:spPr>
-          <a:xfrm>
-            <a:off x="411480" y="3040380"/>
-            <a:ext cx="4069080" cy="1257300"/>
-          </a:xfrm>
-          <a:prstGeom prst="roundRect">
-            <a:avLst>
-              <a:gd name="adj" fmla="val 4364"/>
-            </a:avLst>
-          </a:prstGeom>
-          <a:solidFill>
-            <a:srgbClr val="FFFFFF"/>
-          </a:solidFill>
-          <a:ln w="15875">
-            <a:solidFill>
-              <a:srgbClr val="1E40AF"/>
-            </a:solidFill>
-            <a:prstDash val="solid"/>
-          </a:ln>
-        </p:spPr>
-        <p:txBody>
-          <a:bodyPr/>
-          <a:lstStyle/>
-          <a:p>
-            <a:endParaRPr lang="en-US"/>
-          </a:p>
-        </p:txBody>
-      </p:sp>
-      <p:sp>
-        <p:nvSpPr>
-          <p:cNvPr id="25" name="Shape 20"/>
-          <p:cNvSpPr/>
-          <p:nvPr/>
-        </p:nvSpPr>
-        <p:spPr>
-          <a:xfrm>
-            <a:off x="411480" y="3040380"/>
-            <a:ext cx="91440" cy="1257300"/>
-          </a:xfrm>
-          <a:prstGeom prst="rect">
-            <a:avLst/>
-          </a:prstGeom>
-          <a:solidFill>
-            <a:srgbClr val="1E40AF"/>
-          </a:solidFill>
-          <a:ln/>
-        </p:spPr>
-        <p:txBody>
-          <a:bodyPr/>
-          <a:lstStyle/>
-          <a:p>
-            <a:endParaRPr lang="en-US"/>
-          </a:p>
-        </p:txBody>
-      </p:sp>
-      <p:sp>
-        <p:nvSpPr>
-          <p:cNvPr id="26" name="Shape 21"/>
-          <p:cNvSpPr/>
-          <p:nvPr/>
-        </p:nvSpPr>
-        <p:spPr>
-          <a:xfrm>
-            <a:off x="640080" y="3204972"/>
-            <a:ext cx="502920" cy="502920"/>
-          </a:xfrm>
-          <a:prstGeom prst="ellipse">
-            <a:avLst/>
-          </a:prstGeom>
-          <a:solidFill>
-            <a:srgbClr val="1E40AF"/>
-          </a:solidFill>
-          <a:ln/>
-        </p:spPr>
-        <p:txBody>
-          <a:bodyPr/>
-          <a:lstStyle/>
-          <a:p>
-            <a:endParaRPr lang="en-US"/>
-          </a:p>
-        </p:txBody>
-      </p:sp>
-      <p:pic>
-        <p:nvPicPr>
-          <p:cNvPr id="27" name="Image 3" descr="preencoded.png"/>
-          <p:cNvPicPr>
-            <a:picLocks noChangeAspect="1"/>
-          </p:cNvPicPr>
-          <p:nvPr/>
-        </p:nvPicPr>
-        <p:blipFill>
-          <a:blip r:embed="rId6"/>
-          <a:stretch>
-            <a:fillRect/>
-          </a:stretch>
-        </p:blipFill>
-        <p:spPr>
-          <a:xfrm>
-            <a:off x="740664" y="3305556"/>
-            <a:ext cx="292608" cy="292608"/>
-          </a:xfrm>
-          <a:prstGeom prst="rect">
-            <a:avLst/>
-          </a:prstGeom>
-        </p:spPr>
-      </p:pic>
-      <p:sp>
-        <p:nvSpPr>
-          <p:cNvPr id="28" name="Text 22"/>
-          <p:cNvSpPr/>
-          <p:nvPr/>
-        </p:nvSpPr>
-        <p:spPr>
-          <a:xfrm>
-            <a:off x="1234440" y="3131820"/>
-            <a:ext cx="3108960" cy="320040"/>
-          </a:xfrm>
-          <a:prstGeom prst="rect">
-            <a:avLst/>
-          </a:prstGeom>
-          <a:noFill/>
-          <a:ln/>
-        </p:spPr>
-        <p:txBody>
-          <a:bodyPr wrap="square" lIns="0" tIns="0" rIns="0" bIns="0" rtlCol="0" anchor="ctr"/>
-          <a:lstStyle/>
-          <a:p>
-            <a:pPr marL="0" indent="0" algn="l">
-              <a:buNone/>
-            </a:pPr>
-            <a:r>
-              <a:rPr lang="en-US" sz="1600" b="1" dirty="0">
-                <a:solidFill>
-                  <a:srgbClr val="1E40AF"/>
-                </a:solidFill>
-                <a:latin typeface="Calibri" pitchFamily="34" charset="0"/>
-                <a:ea typeface="Calibri" pitchFamily="34" charset="-122"/>
-                <a:cs typeface="Calibri" pitchFamily="34" charset="-120"/>
-              </a:rPr>
-              <a:t>Qwen3</a:t>
-            </a:r>
-            <a:endParaRPr lang="en-US" sz="1600" dirty="0"/>
-          </a:p>
-        </p:txBody>
-      </p:sp>
-      <p:sp>
-        <p:nvSpPr>
-          <p:cNvPr id="29" name="Text 23"/>
-          <p:cNvSpPr/>
-          <p:nvPr/>
-        </p:nvSpPr>
-        <p:spPr>
-          <a:xfrm>
-            <a:off x="1234440" y="3461004"/>
-            <a:ext cx="3108960" cy="228600"/>
-          </a:xfrm>
-          <a:prstGeom prst="rect">
-            <a:avLst/>
-          </a:prstGeom>
-          <a:noFill/>
-          <a:ln/>
-        </p:spPr>
-        <p:txBody>
-          <a:bodyPr wrap="square" lIns="0" tIns="0" rIns="0" bIns="0" rtlCol="0" anchor="ctr"/>
-          <a:lstStyle/>
-          <a:p>
-            <a:pPr marL="0" indent="0" algn="l">
-              <a:buNone/>
-            </a:pPr>
-            <a:r>
-              <a:rPr lang="en-US" sz="1000" b="1" dirty="0">
-                <a:solidFill>
-                  <a:srgbClr val="1E293B"/>
-                </a:solidFill>
-                <a:latin typeface="Calibri" pitchFamily="34" charset="0"/>
-                <a:ea typeface="Calibri" pitchFamily="34" charset="-122"/>
-                <a:cs typeface="Calibri" pitchFamily="34" charset="-120"/>
-              </a:rPr>
-              <a:t>Лідер на юридичному домені</a:t>
-            </a:r>
-            <a:endParaRPr lang="en-US" sz="1000" dirty="0"/>
-          </a:p>
-        </p:txBody>
-      </p:sp>
-      <p:sp>
-        <p:nvSpPr>
-          <p:cNvPr id="30" name="Text 24"/>
-          <p:cNvSpPr/>
-          <p:nvPr/>
-        </p:nvSpPr>
-        <p:spPr>
-          <a:xfrm>
-            <a:off x="640080" y="3817620"/>
-            <a:ext cx="3657600" cy="388620"/>
-          </a:xfrm>
-          <a:prstGeom prst="rect">
-            <a:avLst/>
-          </a:prstGeom>
-          <a:noFill/>
-          <a:ln/>
-        </p:spPr>
-        <p:txBody>
-          <a:bodyPr wrap="square" lIns="0" tIns="0" rIns="0" bIns="0" rtlCol="0" anchor="t"/>
-          <a:lstStyle/>
-          <a:p>
-            <a:pPr marL="0" indent="0" algn="l">
-              <a:buNone/>
-            </a:pPr>
-            <a:r>
-              <a:rPr lang="en-US" sz="1000" dirty="0">
-                <a:solidFill>
-                  <a:srgbClr val="475569"/>
-                </a:solidFill>
-                <a:latin typeface="Calibri" pitchFamily="34" charset="0"/>
-                <a:ea typeface="Calibri" pitchFamily="34" charset="-122"/>
-                <a:cs typeface="Calibri" pitchFamily="34" charset="-120"/>
-              </a:rPr>
-              <a:t>Найвища nDCG@10 на Legal (0.320), ~2× повільніший</a:t>
-            </a:r>
-            <a:endParaRPr lang="en-US" sz="1000" dirty="0"/>
-          </a:p>
-        </p:txBody>
-      </p:sp>
-      <p:sp>
-        <p:nvSpPr>
-          <p:cNvPr id="31" name="Shape 25"/>
-          <p:cNvSpPr/>
-          <p:nvPr/>
-        </p:nvSpPr>
-        <p:spPr>
-          <a:xfrm>
-            <a:off x="4663440" y="3040380"/>
-            <a:ext cx="4069080" cy="1257300"/>
-          </a:xfrm>
-          <a:prstGeom prst="roundRect">
-            <a:avLst>
-              <a:gd name="adj" fmla="val 4364"/>
-            </a:avLst>
-          </a:prstGeom>
-          <a:solidFill>
-            <a:srgbClr val="FFFFFF"/>
-          </a:solidFill>
-          <a:ln w="15875">
-            <a:solidFill>
-              <a:srgbClr val="64748B"/>
-            </a:solidFill>
-            <a:prstDash val="solid"/>
-          </a:ln>
-        </p:spPr>
-        <p:txBody>
-          <a:bodyPr/>
-          <a:lstStyle/>
-          <a:p>
-            <a:endParaRPr lang="en-US"/>
-          </a:p>
-        </p:txBody>
-      </p:sp>
-      <p:sp>
-        <p:nvSpPr>
-          <p:cNvPr id="32" name="Shape 26"/>
-          <p:cNvSpPr/>
-          <p:nvPr/>
-        </p:nvSpPr>
-        <p:spPr>
-          <a:xfrm>
-            <a:off x="4663440" y="3040380"/>
-            <a:ext cx="91440" cy="1257300"/>
-          </a:xfrm>
-          <a:prstGeom prst="rect">
-            <a:avLst/>
-          </a:prstGeom>
-          <a:solidFill>
-            <a:srgbClr val="64748B"/>
-          </a:solidFill>
-          <a:ln/>
-        </p:spPr>
-        <p:txBody>
-          <a:bodyPr/>
-          <a:lstStyle/>
-          <a:p>
-            <a:endParaRPr lang="en-US"/>
-          </a:p>
-        </p:txBody>
-      </p:sp>
-      <p:sp>
-        <p:nvSpPr>
-          <p:cNvPr id="33" name="Shape 27"/>
-          <p:cNvSpPr/>
-          <p:nvPr/>
-        </p:nvSpPr>
-        <p:spPr>
-          <a:xfrm>
-            <a:off x="4892040" y="3204972"/>
-            <a:ext cx="502920" cy="502920"/>
-          </a:xfrm>
-          <a:prstGeom prst="ellipse">
-            <a:avLst/>
-          </a:prstGeom>
-          <a:solidFill>
-            <a:srgbClr val="64748B"/>
-          </a:solidFill>
-          <a:ln/>
-        </p:spPr>
-        <p:txBody>
-          <a:bodyPr/>
-          <a:lstStyle/>
-          <a:p>
-            <a:endParaRPr lang="en-US"/>
-          </a:p>
-        </p:txBody>
-      </p:sp>
-      <p:pic>
-        <p:nvPicPr>
-          <p:cNvPr id="34" name="Image 4" descr="preencoded.png"/>
-          <p:cNvPicPr>
-            <a:picLocks noChangeAspect="1"/>
-          </p:cNvPicPr>
-          <p:nvPr/>
-        </p:nvPicPr>
-        <p:blipFill>
-          <a:blip r:embed="rId7"/>
-          <a:stretch>
-            <a:fillRect/>
-          </a:stretch>
-        </p:blipFill>
-        <p:spPr>
-          <a:xfrm>
-            <a:off x="4992624" y="3305556"/>
-            <a:ext cx="292608" cy="292608"/>
-          </a:xfrm>
-          <a:prstGeom prst="rect">
-            <a:avLst/>
-          </a:prstGeom>
-        </p:spPr>
-      </p:pic>
-      <p:sp>
-        <p:nvSpPr>
-          <p:cNvPr id="35" name="Text 28"/>
-          <p:cNvSpPr/>
-          <p:nvPr/>
-        </p:nvSpPr>
-        <p:spPr>
-          <a:xfrm>
-            <a:off x="5486400" y="3131820"/>
-            <a:ext cx="3108960" cy="320040"/>
-          </a:xfrm>
-          <a:prstGeom prst="rect">
-            <a:avLst/>
-          </a:prstGeom>
-          <a:noFill/>
-          <a:ln/>
-        </p:spPr>
-        <p:txBody>
-          <a:bodyPr wrap="square" lIns="0" tIns="0" rIns="0" bIns="0" rtlCol="0" anchor="ctr"/>
-          <a:lstStyle/>
-          <a:p>
-            <a:pPr marL="0" indent="0" algn="l">
-              <a:buNone/>
-            </a:pPr>
-            <a:r>
-              <a:rPr lang="en-US" sz="1600" b="1" dirty="0">
+              <a:t>8</a:t>
+            </a:r>
+            <a:r>
+              <a:rPr lang="en-US" sz="900" dirty="0">
                 <a:solidFill>
                   <a:srgbClr val="64748B"/>
                 </a:solidFill>
@@ -20598,187 +20837,7 @@
                 <a:ea typeface="Calibri" pitchFamily="34" charset="-122"/>
                 <a:cs typeface="Calibri" pitchFamily="34" charset="-120"/>
               </a:rPr>
-              <a:t>BM25</a:t>
-            </a:r>
-            <a:endParaRPr lang="en-US" sz="1600" dirty="0"/>
-          </a:p>
-        </p:txBody>
-      </p:sp>
-      <p:sp>
-        <p:nvSpPr>
-          <p:cNvPr id="36" name="Text 29"/>
-          <p:cNvSpPr/>
-          <p:nvPr/>
-        </p:nvSpPr>
-        <p:spPr>
-          <a:xfrm>
-            <a:off x="5486400" y="3461004"/>
-            <a:ext cx="3108960" cy="228600"/>
-          </a:xfrm>
-          <a:prstGeom prst="rect">
-            <a:avLst/>
-          </a:prstGeom>
-          <a:noFill/>
-          <a:ln/>
-        </p:spPr>
-        <p:txBody>
-          <a:bodyPr wrap="square" lIns="0" tIns="0" rIns="0" bIns="0" rtlCol="0" anchor="ctr"/>
-          <a:lstStyle/>
-          <a:p>
-            <a:pPr marL="0" indent="0" algn="l">
-              <a:buNone/>
-            </a:pPr>
-            <a:r>
-              <a:rPr lang="en-US" sz="1000" b="1" dirty="0">
-                <a:solidFill>
-                  <a:srgbClr val="1E293B"/>
-                </a:solidFill>
-                <a:latin typeface="Calibri" pitchFamily="34" charset="0"/>
-                <a:ea typeface="Calibri" pitchFamily="34" charset="-122"/>
-                <a:cs typeface="Calibri" pitchFamily="34" charset="-120"/>
-              </a:rPr>
-              <a:t>Конкурентний baseline</a:t>
-            </a:r>
-            <a:endParaRPr lang="en-US" sz="1000" dirty="0"/>
-          </a:p>
-        </p:txBody>
-      </p:sp>
-      <p:sp>
-        <p:nvSpPr>
-          <p:cNvPr id="37" name="Text 30"/>
-          <p:cNvSpPr/>
-          <p:nvPr/>
-        </p:nvSpPr>
-        <p:spPr>
-          <a:xfrm>
-            <a:off x="4892040" y="3817620"/>
-            <a:ext cx="3657600" cy="388620"/>
-          </a:xfrm>
-          <a:prstGeom prst="rect">
-            <a:avLst/>
-          </a:prstGeom>
-          <a:noFill/>
-          <a:ln/>
-        </p:spPr>
-        <p:txBody>
-          <a:bodyPr wrap="square" lIns="0" tIns="0" rIns="0" bIns="0" rtlCol="0" anchor="t"/>
-          <a:lstStyle/>
-          <a:p>
-            <a:pPr marL="0" indent="0" algn="l">
-              <a:buNone/>
-            </a:pPr>
-            <a:r>
-              <a:rPr lang="en-US" sz="1000" dirty="0">
-                <a:solidFill>
-                  <a:srgbClr val="475569"/>
-                </a:solidFill>
-                <a:latin typeface="Calibri" pitchFamily="34" charset="0"/>
-                <a:ea typeface="Calibri" pitchFamily="34" charset="-122"/>
-                <a:cs typeface="Calibri" pitchFamily="34" charset="-120"/>
-              </a:rPr>
-              <a:t>Залишається сильним у певних доменах</a:t>
-            </a:r>
-            <a:endParaRPr lang="en-US" sz="1000" dirty="0"/>
-          </a:p>
-        </p:txBody>
-      </p:sp>
-      <p:sp>
-        <p:nvSpPr>
-          <p:cNvPr id="38" name="Text 31"/>
-          <p:cNvSpPr/>
-          <p:nvPr/>
-        </p:nvSpPr>
-        <p:spPr>
-          <a:xfrm>
-            <a:off x="0" y="4366260"/>
-            <a:ext cx="9144000" cy="502920"/>
-          </a:xfrm>
-          <a:prstGeom prst="rect">
-            <a:avLst/>
-          </a:prstGeom>
-          <a:noFill/>
-          <a:ln/>
-        </p:spPr>
-        <p:txBody>
-          <a:bodyPr wrap="square" lIns="0" tIns="0" rIns="0" bIns="0" rtlCol="0" anchor="ctr"/>
-          <a:lstStyle/>
-          <a:p>
-            <a:pPr marL="0" indent="0" algn="ctr">
-              <a:buNone/>
-            </a:pPr>
-            <a:r>
-              <a:rPr lang="en-US" sz="2400" b="1" i="1" dirty="0">
-                <a:solidFill>
-                  <a:srgbClr val="D97706"/>
-                </a:solidFill>
-                <a:latin typeface="Cambria" pitchFamily="34" charset="0"/>
-                <a:ea typeface="Cambria" pitchFamily="34" charset="-122"/>
-                <a:cs typeface="Cambria" pitchFamily="34" charset="-120"/>
-              </a:rPr>
-              <a:t>Дякую за увагу!</a:t>
-            </a:r>
-            <a:endParaRPr lang="en-US" sz="2400" dirty="0"/>
-          </a:p>
-        </p:txBody>
-      </p:sp>
-      <p:pic>
-        <p:nvPicPr>
-          <p:cNvPr id="39" name="Image 5" descr="D:\repos\kb-semantic-search-benchmark\thesis\scripts\_logo_hex.png"/>
-          <p:cNvPicPr>
-            <a:picLocks noChangeAspect="1"/>
-          </p:cNvPicPr>
-          <p:nvPr/>
-        </p:nvPicPr>
-        <p:blipFill>
-          <a:blip r:embed="rId8"/>
-          <a:stretch>
-            <a:fillRect/>
-          </a:stretch>
-        </p:blipFill>
-        <p:spPr>
-          <a:xfrm>
-            <a:off x="411480" y="4686300"/>
-            <a:ext cx="502920" cy="338328"/>
-          </a:xfrm>
-          <a:prstGeom prst="rect">
-            <a:avLst/>
-          </a:prstGeom>
-        </p:spPr>
-      </p:pic>
-      <p:sp>
-        <p:nvSpPr>
-          <p:cNvPr id="40" name="Text 32"/>
-          <p:cNvSpPr/>
-          <p:nvPr/>
-        </p:nvSpPr>
-        <p:spPr>
-          <a:xfrm>
-            <a:off x="7955280" y="4850892"/>
-            <a:ext cx="960120" cy="228600"/>
-          </a:xfrm>
-          <a:prstGeom prst="rect">
-            <a:avLst/>
-          </a:prstGeom>
-          <a:noFill/>
-          <a:ln/>
-        </p:spPr>
-        <p:txBody>
-          <a:bodyPr wrap="square" lIns="0" tIns="0" rIns="0" bIns="0" rtlCol="0" anchor="ctr"/>
-          <a:lstStyle/>
-          <a:p>
-            <a:pPr marL="0" indent="0" algn="r">
-              <a:buNone/>
-            </a:pPr>
-            <a:r>
-              <a:rPr lang="en-US" sz="900" dirty="0">
-                <a:solidFill>
-                  <a:srgbClr val="64748B"/>
-                </a:solidFill>
-                <a:latin typeface="Calibri" pitchFamily="34" charset="0"/>
-                <a:ea typeface="Calibri" pitchFamily="34" charset="-122"/>
-                <a:cs typeface="Calibri" pitchFamily="34" charset="-120"/>
-              </a:rPr>
-              <a:t>18 / 18</a:t>
+              <a:t> / 18</a:t>
             </a:r>
             <a:endParaRPr lang="en-US" sz="900" dirty="0"/>
           </a:p>

--- a/thesis/2026_М_ПІ_ІПЗм-24-1_Нестеренко_В_В.pptx
+++ b/thesis/2026_М_ПІ_ІПЗм-24-1_Нестеренко_В_В.pptx
@@ -5367,7 +5367,7 @@
           <a:lstStyle/>
           <a:p>
             <a:r>
-              <a:t>⏱ 0:00 – 0:19  ·  слайд 1/18</a:t>
+              <a:t>⏱ 0:00 – 0:25  ·  слайд 1/18</a:t>
             </a:r>
             <a:endParaRPr lang="en-US" dirty="0"/>
           </a:p>
@@ -5459,7 +5459,7 @@
           <a:lstStyle/>
           <a:p>
             <a:r>
-              <a:t>⏱ 3:51 – 4:03  ·  слайд 10/18</a:t>
+              <a:t>⏱ 5:00 – 5:16  ·  слайд 10/18</a:t>
             </a:r>
             <a:endParaRPr lang="en-US" dirty="0"/>
           </a:p>
@@ -5551,7 +5551,7 @@
           <a:lstStyle/>
           <a:p>
             <a:r>
-              <a:t>⏱ 4:03 – 4:38  ·  слайд 11/18</a:t>
+              <a:t>⏱ 5:16 – 6:02  ·  слайд 11/18</a:t>
             </a:r>
             <a:endParaRPr lang="en-US" dirty="0"/>
           </a:p>
@@ -5658,7 +5658,7 @@
           <a:lstStyle/>
           <a:p>
             <a:r>
-              <a:t>⏱ 4:38 – 4:51  ·  слайд 12/18</a:t>
+              <a:t>⏱ 6:02 – 6:19  ·  слайд 12/18</a:t>
             </a:r>
             <a:endParaRPr lang="en-US" dirty="0"/>
           </a:p>
@@ -5750,13 +5750,11 @@
           <a:lstStyle/>
           <a:p>
             <a:r>
-              <a:t>⏱ 4:51 – 5:23  ·  слайд 13/18</a:t>
+              <a:t>⏱ 6:19 – 7:00  ·  слайд 13/18</a:t>
             </a:r>
             <a:endParaRPr lang="en-US" dirty="0"/>
           </a:p>
-          <a:p>
-            <a:endParaRPr lang="en-US" dirty="0"/>
-          </a:p>
+          <a:p/>
           <a:p>
             <a:r>
               <a:t>Головні результати. У таблиці — середнє nDCG@10 по трьох доменах. Перше — BGE-M3 з 0.4708. Друге — Qwen3 з 0.4385. Третє — E5-base з 0.4199. Четверте — BM25 з 0.3319. Останнє — nomic з 0.2128, навіть нижче BM25.</a:t>
@@ -5855,7 +5853,7 @@
           <a:lstStyle/>
           <a:p>
             <a:r>
-              <a:t>⏱ 5:23 – 5:40  ·  слайд 14/18</a:t>
+              <a:t>⏱ 7:00 – 7:23  ·  слайд 14/18</a:t>
             </a:r>
             <a:endParaRPr lang="en-US" dirty="0"/>
           </a:p>
@@ -5947,7 +5945,7 @@
           <a:lstStyle/>
           <a:p>
             <a:r>
-              <a:t>⏱ 5:40 – 6:07  ·  слайд 15/18</a:t>
+              <a:t>⏱ 7:23 – 7:58  ·  слайд 15/18</a:t>
             </a:r>
             <a:endParaRPr lang="en-US" dirty="0"/>
           </a:p>
@@ -6039,7 +6037,7 @@
           <a:lstStyle/>
           <a:p>
             <a:r>
-              <a:t>⏱ 6:07 – 6:42  ·  слайд 16/18</a:t>
+              <a:t>⏱ 7:58 – 8:43  ·  слайд 16/18</a:t>
             </a:r>
             <a:endParaRPr lang="en-US" dirty="0"/>
           </a:p>
@@ -6151,7 +6149,7 @@
           <a:lstStyle/>
           <a:p>
             <a:r>
-              <a:t>⏱ 7:03 – 7:41  ·  слайд 18/18</a:t>
+              <a:t>⏱ 8:43 – 9:32  ·  слайд 17/18</a:t>
             </a:r>
             <a:endParaRPr lang="en-US" dirty="0"/>
           </a:p>
@@ -6273,7 +6271,7 @@
           <a:lstStyle/>
           <a:p>
             <a:r>
-              <a:t>⏱ 6:42 – 7:03  ·  слайд 17/18</a:t>
+              <a:t>⏱ 9:32 – 10:00  ·  слайд 18/18</a:t>
             </a:r>
             <a:endParaRPr lang="en-US" dirty="0"/>
           </a:p>
@@ -6365,13 +6363,11 @@
           <a:lstStyle/>
           <a:p>
             <a:r>
-              <a:t>⏱ 0:19 – 0:57  ·  слайд 2/18</a:t>
+              <a:t>⏱ 0:25 – 1:14  ·  слайд 2/18</a:t>
             </a:r>
             <a:endParaRPr lang="en-US" dirty="0"/>
           </a:p>
-          <a:p>
-            <a:endParaRPr lang="en-US" dirty="0"/>
-          </a:p>
+          <a:p/>
           <a:p>
             <a:r>
               <a:t>Обсяги корпоративної текстової інформації стрімко зростають, а традиційний лексичний пошук погано працює з синонімією, перефразуванням і мультимовним контентом. Сучасні embedding-моделі дозволяють шукати за змістом, а не за збігом слів.</a:t>
@@ -6475,7 +6471,7 @@
           <a:lstStyle/>
           <a:p>
             <a:r>
-              <a:t>⏱ 0:57 – 1:14  ·  слайд 3/18</a:t>
+              <a:t>⏱ 1:14 – 1:37  ·  слайд 3/18</a:t>
             </a:r>
             <a:endParaRPr lang="en-US" dirty="0"/>
           </a:p>
@@ -6567,13 +6563,11 @@
           <a:lstStyle/>
           <a:p>
             <a:r>
-              <a:t>⏱ 1:14 – 1:40  ·  слайд 4/18</a:t>
+              <a:t>⏱ 1:37 – 2:10  ·  слайд 4/18</a:t>
             </a:r>
             <a:endParaRPr lang="en-US" dirty="0"/>
           </a:p>
-          <a:p>
-            <a:endParaRPr lang="en-US" dirty="0"/>
-          </a:p>
+          <a:p/>
           <a:p>
             <a:r>
               <a:t>Постановка задачі: просто застосувати embedding-модель недостатньо — треба обґрунтовано обрати ту, що забезпечує баланс між якістю пошуку, швидкодією, ресурсами, мовною підтримкою та типом колекції.</a:t>
@@ -6667,7 +6661,7 @@
           <a:lstStyle/>
           <a:p>
             <a:r>
-              <a:t>⏱ 1:40 – 2:08  ·  слайд 5/18</a:t>
+              <a:t>⏱ 2:10 – 2:46  ·  слайд 5/18</a:t>
             </a:r>
             <a:endParaRPr lang="en-US" dirty="0"/>
           </a:p>
@@ -6759,13 +6753,11 @@
           <a:lstStyle/>
           <a:p>
             <a:r>
-              <a:t>⏱ 2:08 – 2:31  ·  слайд 6/18</a:t>
+              <a:t>⏱ 2:46 – 3:17  ·  слайд 6/18</a:t>
             </a:r>
             <a:endParaRPr lang="en-US" dirty="0"/>
           </a:p>
-          <a:p>
-            <a:endParaRPr lang="en-US" dirty="0"/>
-          </a:p>
+          <a:p/>
           <a:p>
             <a:r>
               <a:t>Оцінювання базується на чотирьох стандартних метриках retrieval-якості: nDCG@10 — якість ранжування; MRR@10 — позиція першого релевантного; Recall@10 — повнота; Precision@10 — точність. Окремо вимірюється швидкодія в мілісекундах.</a:t>
@@ -6859,7 +6851,7 @@
           <a:lstStyle/>
           <a:p>
             <a:r>
-              <a:t>⏱ 2:31 – 2:54  ·  слайд 7/18</a:t>
+              <a:t>⏱ 3:17 – 3:47  ·  слайд 7/18</a:t>
             </a:r>
             <a:endParaRPr lang="en-US" dirty="0"/>
           </a:p>
@@ -6951,7 +6943,7 @@
           <a:lstStyle/>
           <a:p>
             <a:r>
-              <a:t>⏱ 2:54 – 3:23  ·  слайд 8/18</a:t>
+              <a:t>⏱ 3:47 – 4:24  ·  слайд 8/18</a:t>
             </a:r>
             <a:endParaRPr lang="en-US" dirty="0"/>
           </a:p>
@@ -7043,13 +7035,11 @@
           <a:lstStyle/>
           <a:p>
             <a:r>
-              <a:t>⏱ 3:23 – 3:51  ·  слайд 9/18</a:t>
+              <a:t>⏱ 4:24 – 5:00  ·  слайд 9/18</a:t>
             </a:r>
             <a:endParaRPr lang="en-US" dirty="0"/>
           </a:p>
-          <a:p>
-            <a:endParaRPr lang="en-US" dirty="0"/>
-          </a:p>
+          <a:p/>
           <a:p>
             <a:r>
               <a:t>Архітектура у вигляді pipeline. На вході — PDF, DOCX, TXT або Markdown. Документи розбиваються на чанки ~600 слів з перекриттям. Далі чанк перетворюється на вектор однією з чотирьох embedding-моделей, L2-нормалізується та індексується у FAISS — точний IndexFlatIP, що для нормалізованих векторів еквівалентне косинусній мірі. Запит проходить ту саму обробку — повертаються топ-K найрелевантніших чанків. Усе обгорнуто у Flask. Основні модулі: build_index, evaluate_benchmark, embedding_models, app.</a:t>

--- a/thesis/2026_М_ПІ_ІПЗм-24-1_Нестеренко_В_В.pptx
+++ b/thesis/2026_М_ПІ_ІПЗм-24-1_Нестеренко_В_В.pptx
@@ -24,7 +24,7 @@
     <p:sldId id="269" r:id="rId15"/>
     <p:sldId id="270" r:id="rId16"/>
     <p:sldId id="271" r:id="rId17"/>
-    <p:sldId id="273" r:id="rId18"/>
+    <p:sldId id="274" r:id="rId18"/>
     <p:sldId id="272" r:id="rId19"/>
   </p:sldIdLst>
   <p:sldSz cx="9144000" cy="5143500" type="screen16x9"/>
@@ -5754,7 +5754,9 @@
             </a:r>
             <a:endParaRPr lang="en-US" dirty="0"/>
           </a:p>
-          <a:p/>
+          <a:p>
+            <a:endParaRPr lang="en-US" dirty="0"/>
+          </a:p>
           <a:p>
             <a:r>
               <a:t>Головні результати. У таблиці — середнє nDCG@10 по трьох доменах. Перше — BGE-M3 з 0.4708. Друге — Qwen3 з 0.4385. Третє — E5-base з 0.4199. Четверте — BM25 з 0.3319. Останнє — nomic з 0.2128, навіть нижче BM25.</a:t>
@@ -6367,7 +6369,9 @@
             </a:r>
             <a:endParaRPr lang="en-US" dirty="0"/>
           </a:p>
-          <a:p/>
+          <a:p>
+            <a:endParaRPr lang="en-US" dirty="0"/>
+          </a:p>
           <a:p>
             <a:r>
               <a:t>Обсяги корпоративної текстової інформації стрімко зростають, а традиційний лексичний пошук погано працює з синонімією, перефразуванням і мультимовним контентом. Сучасні embedding-моделі дозволяють шукати за змістом, а не за збігом слів.</a:t>
@@ -6567,7 +6571,9 @@
             </a:r>
             <a:endParaRPr lang="en-US" dirty="0"/>
           </a:p>
-          <a:p/>
+          <a:p>
+            <a:endParaRPr lang="en-US" dirty="0"/>
+          </a:p>
           <a:p>
             <a:r>
               <a:t>Постановка задачі: просто застосувати embedding-модель недостатньо — треба обґрунтовано обрати ту, що забезпечує баланс між якістю пошуку, швидкодією, ресурсами, мовною підтримкою та типом колекції.</a:t>
@@ -6757,7 +6763,9 @@
             </a:r>
             <a:endParaRPr lang="en-US" dirty="0"/>
           </a:p>
-          <a:p/>
+          <a:p>
+            <a:endParaRPr lang="en-US" dirty="0"/>
+          </a:p>
           <a:p>
             <a:r>
               <a:t>Оцінювання базується на чотирьох стандартних метриках retrieval-якості: nDCG@10 — якість ранжування; MRR@10 — позиція першого релевантного; Recall@10 — повнота; Precision@10 — точність. Окремо вимірюється швидкодія в мілісекундах.</a:t>
@@ -7039,7 +7047,9 @@
             </a:r>
             <a:endParaRPr lang="en-US" dirty="0"/>
           </a:p>
-          <a:p/>
+          <a:p>
+            <a:endParaRPr lang="en-US" dirty="0"/>
+          </a:p>
           <a:p>
             <a:r>
               <a:t>Архітектура у вигляді pipeline. На вході — PDF, DOCX, TXT або Markdown. Документи розбиваються на чанки ~600 слів з перекриттям. Далі чанк перетворюється на вектор однією з чотирьох embedding-моделей, L2-нормалізується та індексується у FAISS — точний IndexFlatIP, що для нормалізованих векторів еквівалентне косинусній мірі. Запит проходить ту саму обробку — повертаються топ-K найрелевантніших чанків. Усе обгорнуто у Flask. Основні модулі: build_index, evaluate_benchmark, embedding_models, app.</a:t>
@@ -18616,53 +18626,9 @@
                 <a:ea typeface="Calibri" pitchFamily="34" charset="-122"/>
                 <a:cs typeface="Calibri" pitchFamily="34" charset="-120"/>
               </a:rPr>
-              <a:t>Висновка</a:t>
-            </a:r>
-            <a:r>
-              <a:rPr lang="en-US" sz="2200" b="1" dirty="0">
-                <a:solidFill>
-                  <a:srgbClr val="0F172A"/>
-                </a:solidFill>
-                <a:latin typeface="Calibri" pitchFamily="34" charset="0"/>
-                <a:ea typeface="Calibri" pitchFamily="34" charset="-122"/>
-                <a:cs typeface="Calibri" pitchFamily="34" charset="-120"/>
-              </a:rPr>
-              <a:t> </a:t>
-            </a:r>
-            <a:r>
-              <a:rPr lang="en-US" sz="2200" b="1" dirty="0" err="1">
-                <a:solidFill>
-                  <a:srgbClr val="0F172A"/>
-                </a:solidFill>
-                <a:latin typeface="Calibri" pitchFamily="34" charset="0"/>
-                <a:ea typeface="Calibri" pitchFamily="34" charset="-122"/>
-                <a:cs typeface="Calibri" pitchFamily="34" charset="-120"/>
-              </a:rPr>
-              <a:t>та</a:t>
-            </a:r>
-            <a:r>
-              <a:rPr lang="en-US" sz="2200" b="1" dirty="0">
-                <a:solidFill>
-                  <a:srgbClr val="0F172A"/>
-                </a:solidFill>
-                <a:latin typeface="Calibri" pitchFamily="34" charset="0"/>
-                <a:ea typeface="Calibri" pitchFamily="34" charset="-122"/>
-                <a:cs typeface="Calibri" pitchFamily="34" charset="-120"/>
-              </a:rPr>
-              <a:t> </a:t>
-            </a:r>
-            <a:r>
-              <a:rPr lang="uk-UA" sz="2200" b="1" dirty="0">
-                <a:solidFill>
-                  <a:srgbClr val="0F172A"/>
-                </a:solidFill>
-                <a:latin typeface="Calibri" pitchFamily="34" charset="0"/>
-                <a:ea typeface="Calibri" pitchFamily="34" charset="-122"/>
-                <a:cs typeface="Calibri" pitchFamily="34" charset="-120"/>
-              </a:rPr>
-              <a:t>результати дослідження</a:t>
-            </a:r>
-            <a:endParaRPr lang="en-US" sz="2200" dirty="0"/>
+              <a:t>Висновки та результати дослідження</a:t>
+            </a:r>
+            <a:endParaRPr lang="uk-UA" sz="2200" dirty="0"/>
           </a:p>
         </p:txBody>
       </p:sp>
@@ -19794,6 +19760,11 @@
         </p:txBody>
       </p:sp>
     </p:spTree>
+    <p:extLst>
+      <p:ext uri="{BB962C8B-B14F-4D97-AF65-F5344CB8AC3E}">
+        <p14:creationId xmlns:p14="http://schemas.microsoft.com/office/powerpoint/2010/main" val="2769346672"/>
+      </p:ext>
+    </p:extLst>
   </p:cSld>
   <p:clrMapOvr>
     <a:masterClrMapping/>
@@ -35882,4 +35853,26 @@
     </a:ext>
   </a:extLst>
 </a:theme>
+</file>
+
+<file path=ppt/webextensions/taskpanes.xml><?xml version="1.0" encoding="utf-8"?>
+<wetp:taskpanes xmlns:wetp="http://schemas.microsoft.com/office/webextensions/taskpanes/2010/11">
+  <wetp:taskpane dockstate="right" visibility="0" width="438" row="0">
+    <wetp:webextensionref xmlns:r="http://schemas.openxmlformats.org/officeDocument/2006/relationships" r:id="rId1"/>
+  </wetp:taskpane>
+</wetp:taskpanes>
+</file>
+
+<file path=ppt/webextensions/webextension1.xml><?xml version="1.0" encoding="utf-8"?>
+<we:webextension xmlns:we="http://schemas.microsoft.com/office/webextensions/webextension/2010/11" id="{1B82B0C7-C83A-421B-B8E6-44C0B75292E9}">
+  <we:reference id="wa200010001" version="1.0.0.1" store="en-US" storeType="OMEX"/>
+  <we:alternateReferences>
+    <we:reference id="WA200010001" version="1.0.0.1" store="" storeType="OMEX"/>
+  </we:alternateReferences>
+  <we:properties>
+    <we:property name="claude.fileId" value="&quot;48b6b9b2-9153-4bc5-8b95-d349cce7ec1d&quot;"/>
+  </we:properties>
+  <we:bindings/>
+  <we:snapshot xmlns:r="http://schemas.openxmlformats.org/officeDocument/2006/relationships"/>
+</we:webextension>
 </file>
--- a/thesis/2026_М_ПІ_ІПЗм-24-1_Нестеренко_В_В.pptx
+++ b/thesis/2026_М_ПІ_ІПЗм-24-1_Нестеренко_В_В.pptx
@@ -5754,9 +5754,7 @@
             </a:r>
             <a:endParaRPr lang="en-US" dirty="0"/>
           </a:p>
-          <a:p>
-            <a:endParaRPr lang="en-US" dirty="0"/>
-          </a:p>
+          <a:p/>
           <a:p>
             <a:r>
               <a:t>Головні результати. У таблиці — середнє nDCG@10 по трьох доменах. Перше — BGE-M3 з 0.4708. Друге — Qwen3 з 0.4385. Третє — E5-base з 0.4199. Четверте — BM25 з 0.3319. Останнє — nomic з 0.2128, навіть нижче BM25.</a:t>
@@ -5855,7 +5853,7 @@
           <a:lstStyle/>
           <a:p>
             <a:r>
-              <a:t>⏱ 7:00 – 7:23  ·  слайд 14/18</a:t>
+              <a:t>⏱ 7:00 – 7:22  ·  слайд 14/18</a:t>
             </a:r>
             <a:endParaRPr lang="en-US" dirty="0"/>
           </a:p>
@@ -5947,13 +5945,13 @@
           <a:lstStyle/>
           <a:p>
             <a:r>
-              <a:t>⏱ 7:23 – 7:58  ·  слайд 15/18</a:t>
+              <a:t>⏱ 7:22 – 7:59  ·  слайд 15/18</a:t>
             </a:r>
             <a:endParaRPr lang="en-US" dirty="0"/>
           </a:p>
           <a:p>
             <a:r>
-              <a:t>Результати багатокритеріального вибору. Парето-оптимальна множина — BGE-M3, E5-base та BM25: три з п'яти моделей не домінуються жодною. BGE-M3 — лідер у трьох доменах за nDCG, MRR, Recall. E5-base — швидка альтернатива: 70 мілісекунд проти 228 у BGE-M3, тобто у три рази швидше. Qwen3 — лідер на юридичному (nDCG 0.320), але удвічі повільніший. Nomic — найслабші результати, в окремих доменах поступається навіть BM25.</a:t>
+              <a:t>Результати багатокритеріального вибору. Парето-оптимальна множина — BGE-M3, E5-base та BM25: три з п'яти моделей не домінуються жодною. BGE-M3 — лідер за nDCG, MRR, Recall на технічному і медичному доменах. E5-base — швидка альтернатива: 70 мілісекунд проти 228 у BGE-M3, тобто у три рази швидше. Qwen3 — лідер на юридичному (nDCG 0.320), але удвічі повільніший. Nomic — найслабші результати, в окремих доменах поступається навіть BM25.</a:t>
             </a:r>
           </a:p>
         </p:txBody>
@@ -6039,7 +6037,7 @@
           <a:lstStyle/>
           <a:p>
             <a:r>
-              <a:t>⏱ 7:58 – 8:43  ·  слайд 16/18</a:t>
+              <a:t>⏱ 7:59 – 8:43  ·  слайд 16/18</a:t>
             </a:r>
             <a:endParaRPr lang="en-US" dirty="0"/>
           </a:p>
@@ -6157,7 +6155,7 @@
           </a:p>
           <a:p>
             <a:r>
-              <a:t>Підсумовуючи: у роботі обґрунтовано доцільність застосування сучасних embedding-моделей для семантичного пошуку у корпоративних базах знань. Сформульовано практичні рекомендації щодо вибору моделі.</a:t>
+              <a:t>Підсумовуючи: embedding-моделі статистично значуще переважають BM25 для україномовного семантичного пошуку. Сформульовано практичні рекомендації щодо вибору моделі під конкретні умови.</a:t>
             </a:r>
           </a:p>
           <a:p>
@@ -6167,7 +6165,7 @@
           </a:p>
           <a:p>
             <a:r>
-              <a:t>E5-base — швидка альтернатива з прийнятною якістю та триразовою перевагою за швидкодією.</a:t>
+              <a:t>E5-base — швидка альтернатива: якість на ~10% нижча за BGE-M3, але утричі швидше.</a:t>
             </a:r>
           </a:p>
           <a:p>
@@ -6365,13 +6363,11 @@
           <a:lstStyle/>
           <a:p>
             <a:r>
-              <a:t>⏱ 0:25 – 1:14  ·  слайд 2/18</a:t>
+              <a:t>⏱ 0:25 – 1:13  ·  слайд 2/18</a:t>
             </a:r>
             <a:endParaRPr lang="en-US" dirty="0"/>
           </a:p>
-          <a:p>
-            <a:endParaRPr lang="en-US" dirty="0"/>
-          </a:p>
+          <a:p/>
           <a:p>
             <a:r>
               <a:t>Обсяги корпоративної текстової інформації стрімко зростають, а традиційний лексичний пошук погано працює з синонімією, перефразуванням і мультимовним контентом. Сучасні embedding-моделі дозволяють шукати за змістом, а не за збігом слів.</a:t>
@@ -6475,7 +6471,7 @@
           <a:lstStyle/>
           <a:p>
             <a:r>
-              <a:t>⏱ 1:14 – 1:37  ·  слайд 3/18</a:t>
+              <a:t>⏱ 1:13 – 1:37  ·  слайд 3/18</a:t>
             </a:r>
             <a:endParaRPr lang="en-US" dirty="0"/>
           </a:p>
@@ -6571,9 +6567,7 @@
             </a:r>
             <a:endParaRPr lang="en-US" dirty="0"/>
           </a:p>
-          <a:p>
-            <a:endParaRPr lang="en-US" dirty="0"/>
-          </a:p>
+          <a:p/>
           <a:p>
             <a:r>
               <a:t>Постановка задачі: просто застосувати embedding-модель недостатньо — треба обґрунтовано обрати ту, що забезпечує баланс між якістю пошуку, швидкодією, ресурсами, мовною підтримкою та типом колекції.</a:t>
@@ -6763,9 +6757,7 @@
             </a:r>
             <a:endParaRPr lang="en-US" dirty="0"/>
           </a:p>
-          <a:p>
-            <a:endParaRPr lang="en-US" dirty="0"/>
-          </a:p>
+          <a:p/>
           <a:p>
             <a:r>
               <a:t>Оцінювання базується на чотирьох стандартних метриках retrieval-якості: nDCG@10 — якість ранжування; MRR@10 — позиція першого релевантного; Recall@10 — повнота; Precision@10 — точність. Окремо вимірюється швидкодія в мілісекундах.</a:t>
@@ -7047,9 +7039,7 @@
             </a:r>
             <a:endParaRPr lang="en-US" dirty="0"/>
           </a:p>
-          <a:p>
-            <a:endParaRPr lang="en-US" dirty="0"/>
-          </a:p>
+          <a:p/>
           <a:p>
             <a:r>
               <a:t>Архітектура у вигляді pipeline. На вході — PDF, DOCX, TXT або Markdown. Документи розбиваються на чанки ~600 слів з перекриттям. Далі чанк перетворюється на вектор однією з чотирьох embedding-моделей, L2-нормалізується та індексується у FAISS — точний IndexFlatIP, що для нормалізованих векторів еквівалентне косинусній мірі. Запит проходить ту саму обробку — повертаються топ-K найрелевантніших чанків. Усе обгорнуто у Flask. Основні модулі: build_index, evaluate_benchmark, embedding_models, app.</a:t>
@@ -16268,7 +16258,7 @@
                 <a:ea typeface="Calibri" pitchFamily="34" charset="-122"/>
                 <a:cs typeface="Calibri" pitchFamily="34" charset="-120"/>
               </a:rPr>
-              <a:t>лідер у 3 доменах за nDCG, MRR, Recall</a:t>
+              <a:t>лідер за nDCG, MRR, Recall на технічному і медичному доменах</a:t>
             </a:r>
             <a:endParaRPr lang="en-US" sz="1000" dirty="0"/>
           </a:p>
@@ -17999,7 +17989,7 @@
                 <a:ea typeface="Calibri" pitchFamily="34" charset="-122"/>
                 <a:cs typeface="Calibri" pitchFamily="34" charset="-120"/>
               </a:rPr>
-              <a:t>&lt;3 мс  ·  стеля якості ~0.49 nDCG</a:t>
+              <a:t>&lt;3 мс  ·  найвища nDCG ~0.49</a:t>
             </a:r>
             <a:endParaRPr lang="en-US" sz="900" dirty="0"/>
           </a:p>
@@ -18560,7 +18550,7 @@
                 <a:ea typeface="Calibri" pitchFamily="34" charset="-122"/>
                 <a:cs typeface="Calibri" pitchFamily="34" charset="-120"/>
               </a:rPr>
-              <a:t>РОЗДІЛ 11 · ПІДСУМКИ</a:t>
+              <a:t>ПІДСУМКИ</a:t>
             </a:r>
             <a:endParaRPr lang="en-US" sz="850" dirty="0"/>
           </a:p>
@@ -18730,7 +18720,7 @@
                 <a:ea typeface="Calibri" pitchFamily="34" charset="-122"/>
                 <a:cs typeface="Calibri" pitchFamily="34" charset="-120"/>
               </a:rPr>
-              <a:t>О</a:t>
+              <a:t>Embedding-моделі статистично значуще переважають BM25 для україномовного семантичного пошуку</a:t>
             </a:r>
             <a:r>
               <a:rPr lang="en-US" sz="1100" b="1" dirty="0" err="1">
@@ -18741,7 +18731,7 @@
                 <a:ea typeface="Calibri" pitchFamily="34" charset="-122"/>
                 <a:cs typeface="Calibri" pitchFamily="34" charset="-120"/>
               </a:rPr>
-              <a:t>бґрунтовано</a:t>
+              <a:t/>
             </a:r>
             <a:r>
               <a:rPr lang="en-US" sz="1100" b="1" dirty="0">
@@ -18752,7 +18742,7 @@
                 <a:ea typeface="Calibri" pitchFamily="34" charset="-122"/>
                 <a:cs typeface="Calibri" pitchFamily="34" charset="-120"/>
               </a:rPr>
-              <a:t> доцільність застосування embedding-моделей для семантичного пошуку у корпоративних базах знань</a:t>
+              <a:t/>
             </a:r>
             <a:endParaRPr lang="en-US" sz="1100" dirty="0"/>
           </a:p>
@@ -19210,7 +19200,7 @@
                 <a:ea typeface="Calibri" pitchFamily="34" charset="-122"/>
                 <a:cs typeface="Calibri" pitchFamily="34" charset="-120"/>
               </a:rPr>
-              <a:t>Прийнятна якість + ~3× швидше за BGE-M3</a:t>
+              <a:t>Якість на ~10% нижча за BGE-M3, ~3× швидше</a:t>
             </a:r>
             <a:endParaRPr lang="en-US" sz="1000" dirty="0"/>
           </a:p>
@@ -19830,7 +19820,7 @@
                 <a:ea typeface="Calibri" pitchFamily="34" charset="-122"/>
                 <a:cs typeface="Calibri" pitchFamily="34" charset="-120"/>
               </a:rPr>
-              <a:t>РОЗДІЛ 10 · ПУБЛІКАЦІЯ РЕЗУЛЬТАТІВ</a:t>
+              <a:t>АПРОБАЦІЯ РЕЗУЛЬТАТІВ</a:t>
             </a:r>
             <a:endParaRPr lang="en-US" sz="850" dirty="0"/>
           </a:p>
@@ -22204,7 +22194,7 @@
                 <a:ea typeface="Calibri" pitchFamily="34" charset="-122"/>
                 <a:cs typeface="Calibri" pitchFamily="34" charset="-120"/>
               </a:rPr>
-              <a:t>Вибір оптимальної моделі</a:t>
+              <a:t>Багатокритеріальний вибір моделі</a:t>
             </a:r>
             <a:endParaRPr lang="en-US" sz="1100" dirty="0"/>
           </a:p>
@@ -24216,7 +24206,7 @@
                 <a:ea typeface="Calibri" pitchFamily="34" charset="-122"/>
                 <a:cs typeface="Calibri" pitchFamily="34" charset="-120"/>
               </a:rPr>
-              <a:t>Недостатньо просто застосувати сучасну embedding-модель — необхідно обґрунтовано визначити модель, що забезпечує оптимальний баланс між:</a:t>
+              <a:t>Недостатньо просто застосувати сучасну embedding-модель — необхідно обґрунтовано обрати модель методом багатокритеріального аналізу за балансом між:</a:t>
             </a:r>
             <a:endParaRPr lang="en-US" sz="1100" dirty="0"/>
           </a:p>
@@ -24282,7 +24272,7 @@
                 <a:ea typeface="Calibri" pitchFamily="34" charset="-122"/>
                 <a:cs typeface="Calibri" pitchFamily="34" charset="-120"/>
               </a:rPr>
-              <a:t>якість семантичного пошуку</a:t>
+              <a:t>якість ранжування (nDCG@10)</a:t>
             </a:r>
             <a:endParaRPr lang="en-US" sz="1100" dirty="0"/>
           </a:p>

--- a/thesis/2026_М_ПІ_ІПЗм-24-1_Нестеренко_В_В.pptx
+++ b/thesis/2026_М_ПІ_ІПЗм-24-1_Нестеренко_В_В.pptx
@@ -21041,7 +21041,7 @@
                 <a:ea typeface="Calibri" pitchFamily="34" charset="-122"/>
                 <a:cs typeface="Calibri" pitchFamily="34" charset="-120"/>
               </a:rPr>
-              <a:t>визначення доцільності застосування сучасних моделей векторних ембеддінгів для підвищення ефективності семантичного пошуку текстових документів у корпоративних базах знань шляхом порівняльного експериментального дослідження.</a:t>
+              <a:t>визначити найбільш придатну embedding-модель для україномовного семантичного пошуку у корпоративних базах знань на основі експериментального порівняння та багатокритеріального аналізу.</a:t>
             </a:r>
             <a:endParaRPr lang="en-US" sz="1200" dirty="0"/>
           </a:p>

--- a/thesis/2026_М_ПІ_ІПЗм-24-1_Нестеренко_В_В.pptx
+++ b/thesis/2026_М_ПІ_ІПЗм-24-1_Нестеренко_В_В.pptx
@@ -5459,7 +5459,7 @@
           <a:lstStyle/>
           <a:p>
             <a:r>
-              <a:t>⏱ 5:00 – 5:16  ·  слайд 10/18</a:t>
+              <a:t>⏱ 5:02 – 5:17  ·  слайд 10/18</a:t>
             </a:r>
             <a:endParaRPr lang="en-US" dirty="0"/>
           </a:p>
@@ -5551,7 +5551,7 @@
           <a:lstStyle/>
           <a:p>
             <a:r>
-              <a:t>⏱ 5:16 – 6:02  ·  слайд 11/18</a:t>
+              <a:t>⏱ 5:17 – 6:03  ·  слайд 11/18</a:t>
             </a:r>
             <a:endParaRPr lang="en-US" dirty="0"/>
           </a:p>
@@ -5658,7 +5658,7 @@
           <a:lstStyle/>
           <a:p>
             <a:r>
-              <a:t>⏱ 6:02 – 6:19  ·  слайд 12/18</a:t>
+              <a:t>⏱ 6:03 – 6:20  ·  слайд 12/18</a:t>
             </a:r>
             <a:endParaRPr lang="en-US" dirty="0"/>
           </a:p>
@@ -5750,7 +5750,7 @@
           <a:lstStyle/>
           <a:p>
             <a:r>
-              <a:t>⏱ 6:19 – 7:00  ·  слайд 13/18</a:t>
+              <a:t>⏱ 6:20 – 7:01  ·  слайд 13/18</a:t>
             </a:r>
             <a:endParaRPr lang="en-US" dirty="0"/>
           </a:p>
@@ -5767,7 +5767,7 @@
           </a:p>
           <a:p>
             <a:r>
-              <a:t>Достовірність підтверджена бутстрепом (2000 вибірок). На технічному домені 95% CI для BGE-M3 — 0.606–0.737, для BM25 — 0.431–0.541. Інтервали не перетинаються — перевага семантичного пошуку статистично значуща.</a:t>
+              <a:t>Статистична значущість підтверджена бутстрепом (2000 вибірок). На технічному домені 95% CI для BGE-M3 — 0.606–0.737, для BM25 — 0.431–0.541. Інтервали не перетинаються — перевага семантичного пошуку статистично значуща.</a:t>
             </a:r>
           </a:p>
         </p:txBody>
@@ -5853,7 +5853,7 @@
           <a:lstStyle/>
           <a:p>
             <a:r>
-              <a:t>⏱ 7:00 – 7:22  ·  слайд 14/18</a:t>
+              <a:t>⏱ 7:01 – 7:24  ·  слайд 14/18</a:t>
             </a:r>
             <a:endParaRPr lang="en-US" dirty="0"/>
           </a:p>
@@ -5945,7 +5945,7 @@
           <a:lstStyle/>
           <a:p>
             <a:r>
-              <a:t>⏱ 7:22 – 7:59  ·  слайд 15/18</a:t>
+              <a:t>⏱ 7:24 – 8:00  ·  слайд 15/18</a:t>
             </a:r>
             <a:endParaRPr lang="en-US" dirty="0"/>
           </a:p>
@@ -6037,7 +6037,7 @@
           <a:lstStyle/>
           <a:p>
             <a:r>
-              <a:t>⏱ 7:59 – 8:43  ·  слайд 16/18</a:t>
+              <a:t>⏱ 8:00 – 8:44  ·  слайд 16/18</a:t>
             </a:r>
             <a:endParaRPr lang="en-US" dirty="0"/>
           </a:p>
@@ -6053,12 +6053,12 @@
           </a:p>
           <a:p>
             <a:r>
-              <a:t>E5-base — Парето-оптимальна sweet spot: ~70 мілісекунд, утричі швидше за BGE-M3 при незначній втраті якості.</a:t>
-            </a:r>
-          </a:p>
-          <a:p>
-            <a:r>
-              <a:t>BM25 — Парето-оптимальна як baseline: менше 3 мілісекунд, але стеля якості ~0.49.</a:t>
+              <a:t>E5-base — Парето-оптимальна: ~70 мілісекунд, утричі швидше за BGE-M3 при якості на ~10% нижчій.</a:t>
+            </a:r>
+          </a:p>
+          <a:p>
+            <a:r>
+              <a:t>BM25 — Парето-оптимальна як baseline: менше 3 мілісекунд, найвища nDCG — ~0.49.</a:t>
             </a:r>
           </a:p>
           <a:p>
@@ -6149,7 +6149,7 @@
           <a:lstStyle/>
           <a:p>
             <a:r>
-              <a:t>⏱ 8:43 – 9:32  ·  слайд 17/18</a:t>
+              <a:t>⏱ 8:44 – 9:32  ·  слайд 17/18</a:t>
             </a:r>
             <a:endParaRPr lang="en-US" dirty="0"/>
           </a:p>
@@ -6363,7 +6363,7 @@
           <a:lstStyle/>
           <a:p>
             <a:r>
-              <a:t>⏱ 0:25 – 1:13  ·  слайд 2/18</a:t>
+              <a:t>⏱ 0:25 – 1:16  ·  слайд 2/18</a:t>
             </a:r>
             <a:endParaRPr lang="en-US" dirty="0"/>
           </a:p>
@@ -6375,7 +6375,7 @@
           </a:p>
           <a:p>
             <a:r>
-              <a:t>Мета — визначити доцільність застосування сучасних embedding-моделей для семантичного пошуку у корпоративних базах знань шляхом порівняльного експериментального дослідження.</a:t>
+              <a:t>Мета — визначити найбільш придатну embedding-модель для україномовного семантичного пошуку у корпоративних базах знань на основі експериментального порівняння та багатокритеріального аналізу.</a:t>
             </a:r>
           </a:p>
           <a:p>
@@ -6385,7 +6385,7 @@
           </a:p>
           <a:p>
             <a:r>
-              <a:t>Поставлено шість задач: проаналізувати предметну галузь; здійснити огляд embedding-моделей; сформувати україномовний benchmark; реалізувати систему пошуку; оцінити моделі за стандартними метриками; обґрунтовано обрати оптимальну модель.</a:t>
+              <a:t>Поставлено шість задач: проаналізувати предметну галузь; здійснити огляд embedding-моделей; сформувати україномовний benchmark; реалізувати систему пошуку; оцінити моделі за метриками retrieval-якості; обрати найкращу модель методом багатокритеріального аналізу.</a:t>
             </a:r>
           </a:p>
         </p:txBody>
@@ -6471,7 +6471,7 @@
           <a:lstStyle/>
           <a:p>
             <a:r>
-              <a:t>⏱ 1:13 – 1:37  ·  слайд 3/18</a:t>
+              <a:t>⏱ 1:16 – 1:39  ·  слайд 3/18</a:t>
             </a:r>
             <a:endParaRPr lang="en-US" dirty="0"/>
           </a:p>
@@ -6563,7 +6563,7 @@
           <a:lstStyle/>
           <a:p>
             <a:r>
-              <a:t>⏱ 1:37 – 2:10  ·  слайд 4/18</a:t>
+              <a:t>⏱ 1:39 – 2:12  ·  слайд 4/18</a:t>
             </a:r>
             <a:endParaRPr lang="en-US" dirty="0"/>
           </a:p>
@@ -6661,13 +6661,13 @@
           <a:lstStyle/>
           <a:p>
             <a:r>
-              <a:t>⏱ 2:10 – 2:46  ·  слайд 5/18</a:t>
+              <a:t>⏱ 2:12 – 2:49  ·  слайд 5/18</a:t>
             </a:r>
             <a:endParaRPr lang="en-US" dirty="0"/>
           </a:p>
           <a:p>
             <a:r>
-              <a:t>Для дослідження обрано чотири сучасні моделі. BGE-M3 від BAAI — 568 мільйонів параметрів, контекст 8192 токенів, мультифункціональна (dense, sparse, multi-vector). E5-base від intfloat — 278 мільйонів параметрів, контекст 512, з обов'язковими префіксами query та passage. Nomic-embed v1.5 — найменша, 137 мільйонів, з технікою Matryoshka. Qwen3-Embedding-0.6B від Alibaba — 596 мільйонів, контекст 32 тисячі токенів, єдина побудована на декодерній LLM-архітектурі. Як лексичну baseline використано BM25.</a:t>
+              <a:t>Для дослідження обрано чотири моделі різних архітектур. BGE-M3 від BAAI — 568 мільйонів параметрів, контекст 8192 токенів, мультифункціональна (dense, sparse, multi-vector). E5-base від intfloat — 278 мільйонів параметрів, контекст 512, з обов'язковими префіксами query та passage. Nomic-embed v1.5 — найменша, 137 мільйонів, з технікою Matryoshka. Qwen3-Embedding-0.6B від Alibaba — 596 мільйонів, контекст 32 тисячі токенів, єдина побудована на декодерній LLM-архітектурі. Як лексичну baseline використано BM25.</a:t>
             </a:r>
           </a:p>
         </p:txBody>
@@ -6753,19 +6753,19 @@
           <a:lstStyle/>
           <a:p>
             <a:r>
-              <a:t>⏱ 2:46 – 3:17  ·  слайд 6/18</a:t>
+              <a:t>⏱ 2:49 – 3:19  ·  слайд 6/18</a:t>
             </a:r>
             <a:endParaRPr lang="en-US" dirty="0"/>
           </a:p>
           <a:p/>
           <a:p>
             <a:r>
-              <a:t>Оцінювання базується на чотирьох стандартних метриках retrieval-якості: nDCG@10 — якість ранжування; MRR@10 — позиція першого релевантного; Recall@10 — повнота; Precision@10 — точність. Окремо вимірюється швидкодія в мілісекундах.</a:t>
-            </a:r>
-          </a:p>
-          <a:p>
-            <a:r>
-              <a:t>Для достовірності — три методи аналізу: бутстреп-довірчі інтервали (2000 повторних вибірок, 95% CI); Парето-домінування для виявлення недомінованих альтернатив; лінійна адитивна згортка для інтегральної оцінки з ваговими коефіцієнтами.</a:t>
+              <a:t>Оцінювання базується на чотирьох метриках retrieval-якості: nDCG@10 — якість ранжування; MRR@10 — позиція першого релевантного; Recall@10 — повнота; Precision@10 — точність. Окремо вимірюється швидкодія в мілісекундах.</a:t>
+            </a:r>
+          </a:p>
+          <a:p>
+            <a:r>
+              <a:t>Для статистичної значущості — три методи аналізу: бутстреп-довірчі інтервали (2000 повторних вибірок, 95% CI); Парето-домінування для виявлення недомінованих альтернатив; лінійна адитивна згортка для інтегральної оцінки з ваговими коефіцієнтами.</a:t>
             </a:r>
           </a:p>
         </p:txBody>
@@ -6851,7 +6851,7 @@
           <a:lstStyle/>
           <a:p>
             <a:r>
-              <a:t>⏱ 3:17 – 3:47  ·  слайд 7/18</a:t>
+              <a:t>⏱ 3:19 – 3:49  ·  слайд 7/18</a:t>
             </a:r>
             <a:endParaRPr lang="en-US" dirty="0"/>
           </a:p>
@@ -6943,7 +6943,7 @@
           <a:lstStyle/>
           <a:p>
             <a:r>
-              <a:t>⏱ 3:47 – 4:24  ·  слайд 8/18</a:t>
+              <a:t>⏱ 3:49 – 4:26  ·  слайд 8/18</a:t>
             </a:r>
             <a:endParaRPr lang="en-US" dirty="0"/>
           </a:p>
@@ -7035,7 +7035,7 @@
           <a:lstStyle/>
           <a:p>
             <a:r>
-              <a:t>⏱ 4:24 – 5:00  ·  слайд 9/18</a:t>
+              <a:t>⏱ 4:26 – 5:02  ·  слайд 9/18</a:t>
             </a:r>
             <a:endParaRPr lang="en-US" dirty="0"/>
           </a:p>

--- a/thesis/2026_М_ПІ_ІПЗм-24-1_Нестеренко_В_В.pptx
+++ b/thesis/2026_М_ПІ_ІПЗм-24-1_Нестеренко_В_В.pptx
@@ -5367,7 +5367,7 @@
           <a:lstStyle/>
           <a:p>
             <a:r>
-              <a:t>⏱ 0:00 – 0:25  ·  слайд 1/18</a:t>
+              <a:t>⏱ 0:00 – 0:23  ·  слайд 1/18</a:t>
             </a:r>
             <a:endParaRPr lang="en-US" dirty="0"/>
           </a:p>
@@ -5459,13 +5459,13 @@
           <a:lstStyle/>
           <a:p>
             <a:r>
-              <a:t>⏱ 5:02 – 5:17  ·  слайд 10/18</a:t>
+              <a:t>⏱ 5:01 – 5:19  ·  слайд 10/18</a:t>
             </a:r>
             <a:endParaRPr lang="en-US" dirty="0"/>
           </a:p>
           <a:p>
             <a:r>
-              <a:t>Програмне забезпечення: Python 3.11, sentence-transformers, transformers від Hugging Face, PyTorch у CPU-режимі, FAISS і rank_bm25 для retrieval, Flask для веб-частини, NumPy і scikit-learn для аналізу, бутстреп-CI власної реалізації.</a:t>
+              <a:t>Технологічний стек, на якому це побудовано. Програмне забезпечення: Python 3.11, sentence-transformers, transformers від Hugging Face, PyTorch у CPU-режимі, FAISS і rank_bm25 для retrieval, Flask для веб-частини, NumPy і scikit-learn для аналізу, бутстреп-CI власної реалізації.</a:t>
             </a:r>
           </a:p>
         </p:txBody>
@@ -5551,13 +5551,13 @@
           <a:lstStyle/>
           <a:p>
             <a:r>
-              <a:t>⏱ 5:17 – 6:03  ·  слайд 11/18</a:t>
+              <a:t>⏱ 5:19 – 6:04  ·  слайд 11/18</a:t>
             </a:r>
             <a:endParaRPr lang="en-US" dirty="0"/>
           </a:p>
           <a:p>
             <a:r>
-              <a:t>Власноруч сформовано україномовний benchmark з трьох предметних доменів. Усього — 32 документи, 300 запитів. Якорі релевантності — qrels — сформовано вручну.</a:t>
+              <a:t>На якому датасеті випробували методологію? Власноруч сформовано україномовний benchmark з трьох предметних доменів. Усього — 32 документи, 300 запитів. Якорі релевантності — qrels — сформовано вручну.</a:t>
             </a:r>
           </a:p>
           <a:p>
@@ -5658,7 +5658,7 @@
           <a:lstStyle/>
           <a:p>
             <a:r>
-              <a:t>⏱ 6:03 – 6:20  ·  слайд 12/18</a:t>
+              <a:t>⏱ 6:04 – 6:20  ·  слайд 12/18</a:t>
             </a:r>
             <a:endParaRPr lang="en-US" dirty="0"/>
           </a:p>
@@ -5750,14 +5750,14 @@
           <a:lstStyle/>
           <a:p>
             <a:r>
-              <a:t>⏱ 6:20 – 7:01  ·  слайд 13/18</a:t>
+              <a:t>⏱ 6:20 – 7:02  ·  слайд 13/18</a:t>
             </a:r>
             <a:endParaRPr lang="en-US" dirty="0"/>
           </a:p>
           <a:p/>
           <a:p>
             <a:r>
-              <a:t>Головні результати. У таблиці — середнє nDCG@10 по трьох доменах. Перше — BGE-M3 з 0.4708. Друге — Qwen3 з 0.4385. Третє — E5-base з 0.4199. Четверте — BM25 з 0.3319. Останнє — nomic з 0.2128, навіть нижче BM25.</a:t>
+              <a:t>Що дав запуск benchmark на 300 запитах? Головні результати. У таблиці — середнє nDCG@10 по трьох доменах. Перше — BGE-M3 з 0.4708. Друге — Qwen3 з 0.4385. Третє — E5-base з 0.4199. Четверте — BM25 з 0.3319. Останнє — nomic з 0.2128, навіть нижче BM25.</a:t>
             </a:r>
           </a:p>
           <a:p>
@@ -5853,13 +5853,13 @@
           <a:lstStyle/>
           <a:p>
             <a:r>
-              <a:t>⏱ 7:01 – 7:24  ·  слайд 14/18</a:t>
+              <a:t>⏱ 7:02 – 7:26  ·  слайд 14/18</a:t>
             </a:r>
             <a:endParaRPr lang="en-US" dirty="0"/>
           </a:p>
           <a:p>
             <a:r>
-              <a:t>Деталізовані метрики у розрізі трьох доменів — nDCG, MRR, Recall, Precision. Лідерство BGE-M3 послідовне за всіма чотирма метриками — це підтверджує робастність результату. На юридичному домені усі моделі показують нижчі значення — він складніший через формальний стиль і вузькоспеціалізовану термінологію.</a:t>
+              <a:t>За окремими доменами картина така. Деталізовані метрики у розрізі трьох доменів — nDCG, MRR, Recall, Precision. Лідерство BGE-M3 послідовне за всіма чотирма метриками — це підтверджує робастність результату. На юридичному домені усі моделі показують нижчі значення — він складніший через формальний стиль і вузькоспеціалізовану термінологію.</a:t>
             </a:r>
           </a:p>
         </p:txBody>
@@ -5945,13 +5945,13 @@
           <a:lstStyle/>
           <a:p>
             <a:r>
-              <a:t>⏱ 7:24 – 8:00  ·  слайд 15/18</a:t>
+              <a:t>⏱ 7:26 – 8:01  ·  слайд 15/18</a:t>
             </a:r>
             <a:endParaRPr lang="en-US" dirty="0"/>
           </a:p>
           <a:p>
             <a:r>
-              <a:t>Результати багатокритеріального вибору. Парето-оптимальна множина — BGE-M3, E5-base та BM25: три з п'яти моделей не домінуються жодною. BGE-M3 — лідер за nDCG, MRR, Recall на технічному і медичному доменах. E5-base — швидка альтернатива: 70 мілісекунд проти 228 у BGE-M3, тобто у три рази швидше. Qwen3 — лідер на юридичному (nDCG 0.320), але удвічі повільніший. Nomic — найслабші результати, в окремих доменах поступається навіть BM25.</a:t>
+              <a:t>Переходимо до інтегральної оцінки. Результати багатокритеріального вибору. Парето-оптимальна множина — BGE-M3, E5-base та BM25: три з п'яти моделей не домінуються жодною. BGE-M3 — лідер за nDCG, MRR, Recall на технічному і медичному доменах. E5-base — швидка альтернатива: 70 мілісекунд проти 228 у BGE-M3, тобто у три рази швидше. Qwen3 — лідер на юридичному (nDCG 0.320), але удвічі повільніший. Nomic — найслабші результати, в окремих доменах поступається навіть BM25.</a:t>
             </a:r>
           </a:p>
         </p:txBody>
@@ -6037,13 +6037,13 @@
           <a:lstStyle/>
           <a:p>
             <a:r>
-              <a:t>⏱ 8:00 – 8:44  ·  слайд 16/18</a:t>
+              <a:t>⏱ 8:01 – 8:46  ·  слайд 16/18</a:t>
             </a:r>
             <a:endParaRPr lang="en-US" dirty="0"/>
           </a:p>
           <a:p>
             <a:r>
-              <a:t>Компроміс якості та швидкодії на технічному домені. По осі X — час відповіді, по осі Y — nDCG@10. Парето-фронт виділено пунктиром.</a:t>
+              <a:t>Той самий аналіз — у вигляді графіка. Компроміс якості та швидкодії на технічному домені. По осі X — час відповіді, по осі Y — nDCG@10. Парето-фронт виділено пунктиром.</a:t>
             </a:r>
           </a:p>
           <a:p>
@@ -6149,7 +6149,7 @@
           <a:lstStyle/>
           <a:p>
             <a:r>
-              <a:t>⏱ 8:44 – 9:32  ·  слайд 17/18</a:t>
+              <a:t>⏱ 8:46 – 9:28  ·  слайд 17/18</a:t>
             </a:r>
             <a:endParaRPr lang="en-US" dirty="0"/>
           </a:p>
@@ -6181,11 +6181,6 @@
           <a:p>
             <a:r>
               <a:t>Усі задачі, поставлені в роботі, виконано. Мета досягнута.</a:t>
-            </a:r>
-          </a:p>
-          <a:p>
-            <a:r>
-              <a:t>Дякую за увагу! Готовий відповісти на запитання.</a:t>
             </a:r>
           </a:p>
         </p:txBody>
@@ -6271,13 +6266,18 @@
           <a:lstStyle/>
           <a:p>
             <a:r>
-              <a:t>⏱ 9:32 – 10:00  ·  слайд 18/18</a:t>
+              <a:t>⏱ 9:28 – 10:00  ·  слайд 18/18</a:t>
             </a:r>
             <a:endParaRPr lang="en-US" dirty="0"/>
           </a:p>
           <a:p>
             <a:r>
-              <a:t>Апробація: опубліковано дві наукові праці у співавторстві з науковим керівником. Перша — стаття на 2-й конференції «Innovative Research in Science and Economy» з benchmark-методологією. Друга — тези на 30-му форумі «Радіоелектроніка та молодь у XXI столітті» в ХНУРЕ про підвищення якості retrieval. Загалом — два виступи на міжнародних конференціях.</a:t>
+              <a:t>Окремо — про апробацію результатів роботи. Апробація: опубліковано дві наукові праці у співавторстві з науковим керівником. Перша — стаття на 2-й конференції «Innovative Research in Science and Economy» з benchmark-методологією. Друга — тези на 30-му форумі «Радіоелектроніка та молодь у XXI столітті» в ХНУРЕ про підвищення якості retrieval. Загалом — два виступи на міжнародних конференціях.</a:t>
+            </a:r>
+          </a:p>
+          <a:p>
+            <a:r>
+              <a:t>Дякую за увагу! Готовий відповісти на запитання.</a:t>
             </a:r>
           </a:p>
         </p:txBody>
@@ -6363,14 +6363,14 @@
           <a:lstStyle/>
           <a:p>
             <a:r>
-              <a:t>⏱ 0:25 – 1:16  ·  слайд 2/18</a:t>
+              <a:t>⏱ 0:23 – 1:12  ·  слайд 2/18</a:t>
             </a:r>
             <a:endParaRPr lang="en-US" dirty="0"/>
           </a:p>
           <a:p/>
           <a:p>
             <a:r>
-              <a:t>Обсяги корпоративної текстової інформації стрімко зростають, а традиційний лексичний пошук погано працює з синонімією, перефразуванням і мультимовним контентом. Сучасні embedding-моделі дозволяють шукати за змістом, а не за збігом слів.</a:t>
+              <a:t>Розпочнемо з актуальності. Обсяги корпоративної текстової інформації стрімко зростають, а традиційний лексичний пошук погано працює з синонімією, перефразуванням і мультимовним контентом. Сучасні embedding-моделі дозволяють шукати за змістом, а не за збігом слів.</a:t>
             </a:r>
           </a:p>
           <a:p>
@@ -6471,13 +6471,13 @@
           <a:lstStyle/>
           <a:p>
             <a:r>
-              <a:t>⏱ 1:16 – 1:39  ·  слайд 3/18</a:t>
+              <a:t>⏱ 1:12 – 1:37  ·  слайд 3/18</a:t>
             </a:r>
             <a:endParaRPr lang="en-US" dirty="0"/>
           </a:p>
           <a:p>
             <a:r>
-              <a:t>Огляд літератури охоплює період 2013–2025 — від статистичних подань Word2Vec через контекстний BERT і Sentence-BERT, до сучасних мультимовних моделей: E5, BGE-M3, nomic та Qwen3-Embedding. Усього опрацьовано 29 джерел. Виявлено ключову дослідницьку прогалину: відсутність порівняльних досліджень embedding-моделей саме на україномовних доменно-специфічних колекціях.</a:t>
+              <a:t>Які підходи вже досліджено в літературі? Огляд літератури охоплює період 2013–2025 — від статистичних подань Word2Vec через контекстний BERT і Sentence-BERT, до сучасних мультимовних моделей: E5, BGE-M3, nomic та Qwen3-Embedding. Усього опрацьовано 29 джерел. Виявлено ключову дослідницьку прогалину: відсутність порівняльних досліджень embedding-моделей саме на україномовних доменно-специфічних колекціях.</a:t>
             </a:r>
           </a:p>
         </p:txBody>
@@ -6563,14 +6563,14 @@
           <a:lstStyle/>
           <a:p>
             <a:r>
-              <a:t>⏱ 1:39 – 2:12  ·  слайд 4/18</a:t>
+              <a:t>⏱ 1:37 – 2:11  ·  слайд 4/18</a:t>
             </a:r>
             <a:endParaRPr lang="en-US" dirty="0"/>
           </a:p>
           <a:p/>
           <a:p>
             <a:r>
-              <a:t>Постановка задачі: просто застосувати embedding-модель недостатньо — треба обґрунтовано обрати ту, що забезпечує баланс між якістю пошуку, швидкодією, ресурсами, мовною підтримкою та типом колекції.</a:t>
+              <a:t>Виявлена прогалина веде до постановки задачі. Постановка задачі: просто застосувати embedding-модель недостатньо — треба обґрунтовано обрати ту, що забезпечує баланс між якістю пошуку, швидкодією, ресурсами, мовною підтримкою та типом колекції.</a:t>
             </a:r>
           </a:p>
           <a:p>
@@ -6661,13 +6661,13 @@
           <a:lstStyle/>
           <a:p>
             <a:r>
-              <a:t>⏱ 2:12 – 2:49  ·  слайд 5/18</a:t>
+              <a:t>⏱ 2:11 – 2:47  ·  слайд 5/18</a:t>
             </a:r>
             <a:endParaRPr lang="en-US" dirty="0"/>
           </a:p>
           <a:p>
             <a:r>
-              <a:t>Для дослідження обрано чотири моделі різних архітектур. BGE-M3 від BAAI — 568 мільйонів параметрів, контекст 8192 токенів, мультифункціональна (dense, sparse, multi-vector). E5-base від intfloat — 278 мільйонів параметрів, контекст 512, з обов'язковими префіксами query та passage. Nomic-embed v1.5 — найменша, 137 мільйонів, з технікою Matryoshka. Qwen3-Embedding-0.6B від Alibaba — 596 мільйонів, контекст 32 тисячі токенів, єдина побудована на декодерній LLM-архітектурі. Як лексичну baseline використано BM25.</a:t>
+              <a:t>Розглянемо, які саме моделі дослідимо. Для дослідження обрано чотири моделі різних архітектур. BGE-M3 від BAAI — 568 мільйонів параметрів, контекст 8192 токенів, мультифункціональна (dense, sparse, multi-vector). E5-base від intfloat — 278 мільйонів параметрів, контекст 512, з обов'язковими префіксами query та passage. Nomic-embed v1.5 — найменша, 137 мільйонів, з технікою Matryoshka. Qwen3-Embedding-0.6B від Alibaba — 596 мільйонів, контекст 32 тисячі токенів, єдина побудована на декодерній LLM-архітектурі. Як лексичну baseline використано BM25.</a:t>
             </a:r>
           </a:p>
         </p:txBody>
@@ -6753,14 +6753,14 @@
           <a:lstStyle/>
           <a:p>
             <a:r>
-              <a:t>⏱ 2:49 – 3:19  ·  слайд 6/18</a:t>
+              <a:t>⏱ 2:47 – 3:18  ·  слайд 6/18</a:t>
             </a:r>
             <a:endParaRPr lang="en-US" dirty="0"/>
           </a:p>
           <a:p/>
           <a:p>
             <a:r>
-              <a:t>Оцінювання базується на чотирьох метриках retrieval-якості: nDCG@10 — якість ранжування; MRR@10 — позиція першого релевантного; Recall@10 — повнота; Precision@10 — точність. Окремо вимірюється швидкодія в мілісекундах.</a:t>
+              <a:t>Як порівнюватимемо ці п'ять моделей? Оцінювання базується на чотирьох метриках retrieval-якості: nDCG@10 — якість ранжування; MRR@10 — позиція першого релевантного; Recall@10 — повнота; Precision@10 — точність. Окремо вимірюється швидкодія в мілісекундах.</a:t>
             </a:r>
           </a:p>
           <a:p>
@@ -6851,7 +6851,7 @@
           <a:lstStyle/>
           <a:p>
             <a:r>
-              <a:t>⏱ 3:19 – 3:49  ·  слайд 7/18</a:t>
+              <a:t>⏱ 3:18 – 3:46  ·  слайд 7/18</a:t>
             </a:r>
             <a:endParaRPr lang="en-US" dirty="0"/>
           </a:p>
@@ -6943,13 +6943,13 @@
           <a:lstStyle/>
           <a:p>
             <a:r>
-              <a:t>⏱ 3:49 – 4:26  ·  слайд 8/18</a:t>
+              <a:t>⏱ 3:46 – 4:26  ·  слайд 8/18</a:t>
             </a:r>
             <a:endParaRPr lang="en-US" dirty="0"/>
           </a:p>
           <a:p>
             <a:r>
-              <a:t>Багатокритеріальний вибір реалізовано у три кроки. Перший — Парето-домінування: відсіюємо альтернативи, які гірші за іншу одразу за всіма критеріями. Другий — нормалізація: приведення всіх критеріїв до спільної шкали від 0 до 1 з урахуванням напряму оптимізації. Третій — лінійна адитивна згортка: інтегральна оцінка U — це сума добутків ваг на нормалізовані значення; сума ваг дорівнює одиниці. Ваги задає користувач залежно від пріоритетів — якість, швидкодія, ресурси.</a:t>
+              <a:t>Окремих метрик недостатньо — потрібно об'єднати їх в одне число. Багатокритеріальний вибір реалізовано у три кроки. Перший — Парето-домінування: відсіюємо альтернативи, які гірші за іншу одразу за всіма критеріями. Другий — нормалізація: приведення всіх критеріїв до спільної шкали від 0 до 1 з урахуванням напряму оптимізації. Третій — лінійна адитивна згортка: інтегральна оцінка U — це сума добутків ваг на нормалізовані значення; сума ваг дорівнює одиниці. Ваги задає користувач залежно від пріоритетів — якість, швидкодія, ресурси.</a:t>
             </a:r>
           </a:p>
         </p:txBody>
@@ -7035,14 +7035,14 @@
           <a:lstStyle/>
           <a:p>
             <a:r>
-              <a:t>⏱ 4:26 – 5:02  ·  слайд 9/18</a:t>
+              <a:t>⏱ 4:26 – 5:01  ·  слайд 9/18</a:t>
             </a:r>
             <a:endParaRPr lang="en-US" dirty="0"/>
           </a:p>
           <a:p/>
           <a:p>
             <a:r>
-              <a:t>Архітектура у вигляді pipeline. На вході — PDF, DOCX, TXT або Markdown. Документи розбиваються на чанки ~600 слів з перекриттям. Далі чанк перетворюється на вектор однією з чотирьох embedding-моделей, L2-нормалізується та індексується у FAISS — точний IndexFlatIP, що для нормалізованих векторів еквівалентне косинусній мірі. Запит проходить ту саму обробку — повертаються топ-K найрелевантніших чанків. Усе обгорнуто у Flask. Основні модулі: build_index, evaluate_benchmark, embedding_models, app.</a:t>
+              <a:t>Як це реалізовано архітектурно? Архітектура у вигляді pipeline. На вході — PDF, DOCX, TXT або Markdown. Документи розбиваються на чанки ~600 слів з перекриттям. Далі чанк перетворюється на вектор однією з чотирьох embedding-моделей, L2-нормалізується та індексується у FAISS — точний IndexFlatIP, що для нормалізованих векторів еквівалентне косинусній мірі. Запит проходить ту саму обробку — повертаються топ-K найрелевантніших чанків. Усе обгорнуто у Flask. Основні модулі: build_index, evaluate_benchmark, embedding_models, app.</a:t>
             </a:r>
           </a:p>
         </p:txBody>

--- a/thesis/2026_М_ПІ_ІПЗм-24-1_Нестеренко_В_В.pptx
+++ b/thesis/2026_М_ПІ_ІПЗм-24-1_Нестеренко_В_В.pptx
@@ -5459,7 +5459,7 @@
           <a:lstStyle/>
           <a:p>
             <a:r>
-              <a:t>⏱ 5:01 – 5:19  ·  слайд 10/18</a:t>
+              <a:t>⏱ 5:03 – 5:21  ·  слайд 10/18</a:t>
             </a:r>
             <a:endParaRPr lang="en-US" dirty="0"/>
           </a:p>
@@ -5551,7 +5551,7 @@
           <a:lstStyle/>
           <a:p>
             <a:r>
-              <a:t>⏱ 5:19 – 6:04  ·  слайд 11/18</a:t>
+              <a:t>⏱ 5:21 – 6:06  ·  слайд 11/18</a:t>
             </a:r>
             <a:endParaRPr lang="en-US" dirty="0"/>
           </a:p>
@@ -5658,7 +5658,7 @@
           <a:lstStyle/>
           <a:p>
             <a:r>
-              <a:t>⏱ 6:04 – 6:20  ·  слайд 12/18</a:t>
+              <a:t>⏱ 6:06 – 6:22  ·  слайд 12/18</a:t>
             </a:r>
             <a:endParaRPr lang="en-US" dirty="0"/>
           </a:p>
@@ -5750,7 +5750,7 @@
           <a:lstStyle/>
           <a:p>
             <a:r>
-              <a:t>⏱ 6:20 – 7:02  ·  слайд 13/18</a:t>
+              <a:t>⏱ 6:22 – 7:05  ·  слайд 13/18</a:t>
             </a:r>
             <a:endParaRPr lang="en-US" dirty="0"/>
           </a:p>
@@ -5853,7 +5853,7 @@
           <a:lstStyle/>
           <a:p>
             <a:r>
-              <a:t>⏱ 7:02 – 7:26  ·  слайд 14/18</a:t>
+              <a:t>⏱ 7:05 – 7:28  ·  слайд 14/18</a:t>
             </a:r>
             <a:endParaRPr lang="en-US" dirty="0"/>
           </a:p>
@@ -5945,7 +5945,7 @@
           <a:lstStyle/>
           <a:p>
             <a:r>
-              <a:t>⏱ 7:26 – 8:01  ·  слайд 15/18</a:t>
+              <a:t>⏱ 7:28 – 8:04  ·  слайд 15/18</a:t>
             </a:r>
             <a:endParaRPr lang="en-US" dirty="0"/>
           </a:p>
@@ -6037,7 +6037,7 @@
           <a:lstStyle/>
           <a:p>
             <a:r>
-              <a:t>⏱ 8:01 – 8:46  ·  слайд 16/18</a:t>
+              <a:t>⏱ 8:04 – 8:49  ·  слайд 16/18</a:t>
             </a:r>
             <a:endParaRPr lang="en-US" dirty="0"/>
           </a:p>
@@ -6149,7 +6149,7 @@
           <a:lstStyle/>
           <a:p>
             <a:r>
-              <a:t>⏱ 8:46 – 9:28  ·  слайд 17/18</a:t>
+              <a:t>⏱ 8:49 – 9:31  ·  слайд 17/18</a:t>
             </a:r>
             <a:endParaRPr lang="en-US" dirty="0"/>
           </a:p>
@@ -6266,18 +6266,13 @@
           <a:lstStyle/>
           <a:p>
             <a:r>
-              <a:t>⏱ 9:28 – 10:00  ·  слайд 18/18</a:t>
+              <a:t>⏱ 9:31 – 10:00  ·  слайд 18/18</a:t>
             </a:r>
             <a:endParaRPr lang="en-US" dirty="0"/>
           </a:p>
           <a:p>
             <a:r>
               <a:t>Окремо — про апробацію результатів роботи. Апробація: опубліковано дві наукові праці у співавторстві з науковим керівником. Перша — стаття на 2-й конференції «Innovative Research in Science and Economy» з benchmark-методологією. Друга — тези на 30-му форумі «Радіоелектроніка та молодь у XXI столітті» в ХНУРЕ про підвищення якості retrieval. Загалом — два виступи на міжнародних конференціях.</a:t>
-            </a:r>
-          </a:p>
-          <a:p>
-            <a:r>
-              <a:t>Дякую за увагу! Готовий відповісти на запитання.</a:t>
             </a:r>
           </a:p>
         </p:txBody>
@@ -6363,7 +6358,7 @@
           <a:lstStyle/>
           <a:p>
             <a:r>
-              <a:t>⏱ 0:23 – 1:12  ·  слайд 2/18</a:t>
+              <a:t>⏱ 0:23 – 1:13  ·  слайд 2/18</a:t>
             </a:r>
             <a:endParaRPr lang="en-US" dirty="0"/>
           </a:p>
@@ -6471,7 +6466,7 @@
           <a:lstStyle/>
           <a:p>
             <a:r>
-              <a:t>⏱ 1:12 – 1:37  ·  слайд 3/18</a:t>
+              <a:t>⏱ 1:13 – 1:37  ·  слайд 3/18</a:t>
             </a:r>
             <a:endParaRPr lang="en-US" dirty="0"/>
           </a:p>
@@ -6563,7 +6558,7 @@
           <a:lstStyle/>
           <a:p>
             <a:r>
-              <a:t>⏱ 1:37 – 2:11  ·  слайд 4/18</a:t>
+              <a:t>⏱ 1:37 – 2:12  ·  слайд 4/18</a:t>
             </a:r>
             <a:endParaRPr lang="en-US" dirty="0"/>
           </a:p>
@@ -6661,7 +6656,7 @@
           <a:lstStyle/>
           <a:p>
             <a:r>
-              <a:t>⏱ 2:11 – 2:47  ·  слайд 5/18</a:t>
+              <a:t>⏱ 2:12 – 2:48  ·  слайд 5/18</a:t>
             </a:r>
             <a:endParaRPr lang="en-US" dirty="0"/>
           </a:p>
@@ -6753,7 +6748,7 @@
           <a:lstStyle/>
           <a:p>
             <a:r>
-              <a:t>⏱ 2:47 – 3:18  ·  слайд 6/18</a:t>
+              <a:t>⏱ 2:48 – 3:19  ·  слайд 6/18</a:t>
             </a:r>
             <a:endParaRPr lang="en-US" dirty="0"/>
           </a:p>
@@ -6851,7 +6846,7 @@
           <a:lstStyle/>
           <a:p>
             <a:r>
-              <a:t>⏱ 3:18 – 3:46  ·  слайд 7/18</a:t>
+              <a:t>⏱ 3:19 – 3:47  ·  слайд 7/18</a:t>
             </a:r>
             <a:endParaRPr lang="en-US" dirty="0"/>
           </a:p>
@@ -6943,7 +6938,7 @@
           <a:lstStyle/>
           <a:p>
             <a:r>
-              <a:t>⏱ 3:46 – 4:26  ·  слайд 8/18</a:t>
+              <a:t>⏱ 3:47 – 4:27  ·  слайд 8/18</a:t>
             </a:r>
             <a:endParaRPr lang="en-US" dirty="0"/>
           </a:p>
@@ -7035,7 +7030,7 @@
           <a:lstStyle/>
           <a:p>
             <a:r>
-              <a:t>⏱ 4:26 – 5:01  ·  слайд 9/18</a:t>
+              <a:t>⏱ 4:27 – 5:03  ·  слайд 9/18</a:t>
             </a:r>
             <a:endParaRPr lang="en-US" dirty="0"/>
           </a:p>

--- a/thesis/2026_М_ПІ_ІПЗм-24-1_Нестеренко_В_В.pptx
+++ b/thesis/2026_М_ПІ_ІПЗм-24-1_Нестеренко_В_В.pptx
@@ -5367,7 +5367,7 @@
           <a:lstStyle/>
           <a:p>
             <a:r>
-              <a:t>⏱ 0:00 – 0:23  ·  слайд 1/18</a:t>
+              <a:t>⏱ 0:00 – 0:24  ·  слайд 1/18</a:t>
             </a:r>
             <a:endParaRPr lang="en-US" dirty="0"/>
           </a:p>
@@ -5459,7 +5459,7 @@
           <a:lstStyle/>
           <a:p>
             <a:r>
-              <a:t>⏱ 5:03 – 5:21  ·  слайд 10/18</a:t>
+              <a:t>⏱ 4:54 – 5:12  ·  слайд 10/18</a:t>
             </a:r>
             <a:endParaRPr lang="en-US" dirty="0"/>
           </a:p>
@@ -5551,7 +5551,7 @@
           <a:lstStyle/>
           <a:p>
             <a:r>
-              <a:t>⏱ 5:21 – 6:06  ·  слайд 11/18</a:t>
+              <a:t>⏱ 5:12 – 5:59  ·  слайд 11/18</a:t>
             </a:r>
             <a:endParaRPr lang="en-US" dirty="0"/>
           </a:p>
@@ -5658,7 +5658,7 @@
           <a:lstStyle/>
           <a:p>
             <a:r>
-              <a:t>⏱ 6:06 – 6:22  ·  слайд 12/18</a:t>
+              <a:t>⏱ 5:59 – 6:15  ·  слайд 12/18</a:t>
             </a:r>
             <a:endParaRPr lang="en-US" dirty="0"/>
           </a:p>
@@ -5750,7 +5750,7 @@
           <a:lstStyle/>
           <a:p>
             <a:r>
-              <a:t>⏱ 6:22 – 7:05  ·  слайд 13/18</a:t>
+              <a:t>⏱ 6:15 – 6:59  ·  слайд 13/18</a:t>
             </a:r>
             <a:endParaRPr lang="en-US" dirty="0"/>
           </a:p>
@@ -5853,7 +5853,7 @@
           <a:lstStyle/>
           <a:p>
             <a:r>
-              <a:t>⏱ 7:05 – 7:28  ·  слайд 14/18</a:t>
+              <a:t>⏱ 6:59 – 7:24  ·  слайд 14/18</a:t>
             </a:r>
             <a:endParaRPr lang="en-US" dirty="0"/>
           </a:p>
@@ -5945,7 +5945,7 @@
           <a:lstStyle/>
           <a:p>
             <a:r>
-              <a:t>⏱ 7:28 – 8:04  ·  слайд 15/18</a:t>
+              <a:t>⏱ 7:24 – 8:01  ·  слайд 15/18</a:t>
             </a:r>
             <a:endParaRPr lang="en-US" dirty="0"/>
           </a:p>
@@ -6037,7 +6037,7 @@
           <a:lstStyle/>
           <a:p>
             <a:r>
-              <a:t>⏱ 8:04 – 8:49  ·  слайд 16/18</a:t>
+              <a:t>⏱ 8:01 – 8:47  ·  слайд 16/18</a:t>
             </a:r>
             <a:endParaRPr lang="en-US" dirty="0"/>
           </a:p>
@@ -6149,7 +6149,7 @@
           <a:lstStyle/>
           <a:p>
             <a:r>
-              <a:t>⏱ 8:49 – 9:31  ·  слайд 17/18</a:t>
+              <a:t>⏱ 8:47 – 9:30  ·  слайд 17/18</a:t>
             </a:r>
             <a:endParaRPr lang="en-US" dirty="0"/>
           </a:p>
@@ -6266,7 +6266,7 @@
           <a:lstStyle/>
           <a:p>
             <a:r>
-              <a:t>⏱ 9:31 – 10:00  ·  слайд 18/18</a:t>
+              <a:t>⏱ 9:30 – 10:00  ·  слайд 18/18</a:t>
             </a:r>
             <a:endParaRPr lang="en-US" dirty="0"/>
           </a:p>
@@ -6358,7 +6358,7 @@
           <a:lstStyle/>
           <a:p>
             <a:r>
-              <a:t>⏱ 0:23 – 1:13  ·  слайд 2/18</a:t>
+              <a:t>⏱ 0:24 – 1:02  ·  слайд 2/18</a:t>
             </a:r>
             <a:endParaRPr lang="en-US" dirty="0"/>
           </a:p>
@@ -6380,7 +6380,7 @@
           </a:p>
           <a:p>
             <a:r>
-              <a:t>Поставлено шість задач: проаналізувати предметну галузь; здійснити огляд embedding-моделей; сформувати україномовний benchmark; реалізувати систему пошуку; оцінити моделі за метриками retrieval-якості; обрати найкращу модель методом багатокритеріального аналізу.</a:t>
+              <a:t>Поставлено шість задач.</a:t>
             </a:r>
           </a:p>
         </p:txBody>
@@ -6466,7 +6466,7 @@
           <a:lstStyle/>
           <a:p>
             <a:r>
-              <a:t>⏱ 1:13 – 1:37  ·  слайд 3/18</a:t>
+              <a:t>⏱ 1:02 – 1:28  ·  слайд 3/18</a:t>
             </a:r>
             <a:endParaRPr lang="en-US" dirty="0"/>
           </a:p>
@@ -6558,7 +6558,7 @@
           <a:lstStyle/>
           <a:p>
             <a:r>
-              <a:t>⏱ 1:37 – 2:12  ·  слайд 4/18</a:t>
+              <a:t>⏱ 1:28 – 2:03  ·  слайд 4/18</a:t>
             </a:r>
             <a:endParaRPr lang="en-US" dirty="0"/>
           </a:p>
@@ -6656,13 +6656,13 @@
           <a:lstStyle/>
           <a:p>
             <a:r>
-              <a:t>⏱ 2:12 – 2:48  ·  слайд 5/18</a:t>
+              <a:t>⏱ 2:03 – 2:35  ·  слайд 5/18</a:t>
             </a:r>
             <a:endParaRPr lang="en-US" dirty="0"/>
           </a:p>
           <a:p>
             <a:r>
-              <a:t>Розглянемо, які саме моделі дослідимо. Для дослідження обрано чотири моделі різних архітектур. BGE-M3 від BAAI — 568 мільйонів параметрів, контекст 8192 токенів, мультифункціональна (dense, sparse, multi-vector). E5-base від intfloat — 278 мільйонів параметрів, контекст 512, з обов'язковими префіксами query та passage. Nomic-embed v1.5 — найменша, 137 мільйонів, з технікою Matryoshka. Qwen3-Embedding-0.6B від Alibaba — 596 мільйонів, контекст 32 тисячі токенів, єдина побудована на декодерній LLM-архітектурі. Як лексичну baseline використано BM25.</a:t>
+              <a:t>Розглянемо, які саме моделі дослідимо. Для дослідження обрано чотири моделі різних архітектур. BGE-M3 — 568 мільйонів параметрів, контекст 8192 токенів, мультифункціональна (dense, sparse, multi-vector). E5-base — 278 мільйонів параметрів, контекст 512, з обов'язковими префіксами query та passage. Nomic-embed v1.5 — найменша, 137 мільйонів, з технікою Matryoshka. Qwen3-Embedding-0.6B — 596 мільйонів, контекст 32 тисячі токенів, єдина побудована на декодерній LLM-архітектурі.</a:t>
             </a:r>
           </a:p>
         </p:txBody>
@@ -6748,7 +6748,7 @@
           <a:lstStyle/>
           <a:p>
             <a:r>
-              <a:t>⏱ 2:48 – 3:19  ·  слайд 6/18</a:t>
+              <a:t>⏱ 2:35 – 3:07  ·  слайд 6/18</a:t>
             </a:r>
             <a:endParaRPr lang="en-US" dirty="0"/>
           </a:p>
@@ -6846,7 +6846,7 @@
           <a:lstStyle/>
           <a:p>
             <a:r>
-              <a:t>⏱ 3:19 – 3:47  ·  слайд 7/18</a:t>
+              <a:t>⏱ 3:07 – 3:36  ·  слайд 7/18</a:t>
             </a:r>
             <a:endParaRPr lang="en-US" dirty="0"/>
           </a:p>
@@ -6938,7 +6938,7 @@
           <a:lstStyle/>
           <a:p>
             <a:r>
-              <a:t>⏱ 3:47 – 4:27  ·  слайд 8/18</a:t>
+              <a:t>⏱ 3:36 – 4:17  ·  слайд 8/18</a:t>
             </a:r>
             <a:endParaRPr lang="en-US" dirty="0"/>
           </a:p>
@@ -7030,7 +7030,7 @@
           <a:lstStyle/>
           <a:p>
             <a:r>
-              <a:t>⏱ 4:27 – 5:03  ·  слайд 9/18</a:t>
+              <a:t>⏱ 4:17 – 4:54  ·  слайд 9/18</a:t>
             </a:r>
             <a:endParaRPr lang="en-US" dirty="0"/>
           </a:p>
@@ -18716,28 +18716,6 @@
                 <a:cs typeface="Calibri" pitchFamily="34" charset="-120"/>
               </a:rPr>
               <a:t>Embedding-моделі статистично значуще переважають BM25 для україномовного семантичного пошуку</a:t>
-            </a:r>
-            <a:r>
-              <a:rPr lang="en-US" sz="1100" b="1" dirty="0" err="1">
-                <a:solidFill>
-                  <a:srgbClr val="0F172A"/>
-                </a:solidFill>
-                <a:latin typeface="Calibri" pitchFamily="34" charset="0"/>
-                <a:ea typeface="Calibri" pitchFamily="34" charset="-122"/>
-                <a:cs typeface="Calibri" pitchFamily="34" charset="-120"/>
-              </a:rPr>
-              <a:t/>
-            </a:r>
-            <a:r>
-              <a:rPr lang="en-US" sz="1100" b="1" dirty="0">
-                <a:solidFill>
-                  <a:srgbClr val="0F172A"/>
-                </a:solidFill>
-                <a:latin typeface="Calibri" pitchFamily="34" charset="0"/>
-                <a:ea typeface="Calibri" pitchFamily="34" charset="-122"/>
-                <a:cs typeface="Calibri" pitchFamily="34" charset="-120"/>
-              </a:rPr>
-              <a:t/>
             </a:r>
             <a:endParaRPr lang="en-US" sz="1100" dirty="0"/>
           </a:p>

--- a/thesis/2026_М_ПІ_ІПЗм-24-1_Нестеренко_В_В.pptx
+++ b/thesis/2026_М_ПІ_ІПЗм-24-1_Нестеренко_В_В.pptx
@@ -20,7 +20,6 @@
     <p:sldId id="265" r:id="rId11"/>
     <p:sldId id="266" r:id="rId12"/>
     <p:sldId id="267" r:id="rId13"/>
-    <p:sldId id="268" r:id="rId14"/>
     <p:sldId id="269" r:id="rId15"/>
     <p:sldId id="270" r:id="rId16"/>
     <p:sldId id="271" r:id="rId17"/>
@@ -5367,7 +5366,7 @@
           <a:lstStyle/>
           <a:p>
             <a:r>
-              <a:t>⏱ 0:00 – 0:24  ·  слайд 1/18</a:t>
+              <a:t>⏱ 0:00 – 0:26  ·  слайд 1/17</a:t>
             </a:r>
             <a:endParaRPr lang="en-US" dirty="0"/>
           </a:p>
@@ -5459,7 +5458,7 @@
           <a:lstStyle/>
           <a:p>
             <a:r>
-              <a:t>⏱ 4:54 – 5:12  ·  слайд 10/18</a:t>
+              <a:t>⏱ 5:17 – 5:37  ·  слайд 10/17</a:t>
             </a:r>
             <a:endParaRPr lang="en-US" dirty="0"/>
           </a:p>
@@ -5551,7 +5550,7 @@
           <a:lstStyle/>
           <a:p>
             <a:r>
-              <a:t>⏱ 5:12 – 5:59  ·  слайд 11/18</a:t>
+              <a:t>⏱ 5:37 – 6:28  ·  слайд 11/17</a:t>
             </a:r>
             <a:endParaRPr lang="en-US" dirty="0"/>
           </a:p>
@@ -5658,7 +5657,7 @@
           <a:lstStyle/>
           <a:p>
             <a:r>
-              <a:t>⏱ 5:59 – 6:15  ·  слайд 12/18</a:t>
+              <a:t>⏱ 6:28 – 6:45  ·  слайд 12/17</a:t>
             </a:r>
             <a:endParaRPr lang="en-US" dirty="0"/>
           </a:p>
@@ -5754,7 +5753,9 @@
             </a:r>
             <a:endParaRPr lang="en-US" dirty="0"/>
           </a:p>
-          <a:p/>
+          <a:p>
+            <a:endParaRPr lang="en-US" dirty="0"/>
+          </a:p>
           <a:p>
             <a:r>
               <a:t>Що дав запуск benchmark на 300 запитах? Головні результати. У таблиці — середнє nDCG@10 по трьох доменах. Перше — BGE-M3 з 0.4708. Друге — Qwen3 з 0.4385. Третє — E5-base з 0.4199. Четверте — BM25 з 0.3319. Останнє — nomic з 0.2128, навіть нижче BM25.</a:t>
@@ -5853,7 +5854,7 @@
           <a:lstStyle/>
           <a:p>
             <a:r>
-              <a:t>⏱ 6:59 – 7:24  ·  слайд 14/18</a:t>
+              <a:t>⏱ 6:45 – 7:11  ·  слайд 13/17</a:t>
             </a:r>
             <a:endParaRPr lang="en-US" dirty="0"/>
           </a:p>
@@ -5945,7 +5946,7 @@
           <a:lstStyle/>
           <a:p>
             <a:r>
-              <a:t>⏱ 7:24 – 8:01  ·  слайд 15/18</a:t>
+              <a:t>⏱ 7:11 – 7:51  ·  слайд 14/17</a:t>
             </a:r>
             <a:endParaRPr lang="en-US" dirty="0"/>
           </a:p>
@@ -6037,7 +6038,7 @@
           <a:lstStyle/>
           <a:p>
             <a:r>
-              <a:t>⏱ 8:01 – 8:47  ·  слайд 16/18</a:t>
+              <a:t>⏱ 7:51 – 8:41  ·  слайд 15/17</a:t>
             </a:r>
             <a:endParaRPr lang="en-US" dirty="0"/>
           </a:p>
@@ -6149,7 +6150,7 @@
           <a:lstStyle/>
           <a:p>
             <a:r>
-              <a:t>⏱ 8:47 – 9:30  ·  слайд 17/18</a:t>
+              <a:t>⏱ 8:41 – 9:28  ·  слайд 16/17</a:t>
             </a:r>
             <a:endParaRPr lang="en-US" dirty="0"/>
           </a:p>
@@ -6266,7 +6267,7 @@
           <a:lstStyle/>
           <a:p>
             <a:r>
-              <a:t>⏱ 9:30 – 10:00  ·  слайд 18/18</a:t>
+              <a:t>⏱ 9:28 – 10:00  ·  слайд 17/17</a:t>
             </a:r>
             <a:endParaRPr lang="en-US" dirty="0"/>
           </a:p>
@@ -6358,7 +6359,7 @@
           <a:lstStyle/>
           <a:p>
             <a:r>
-              <a:t>⏱ 0:24 – 1:02  ·  слайд 2/18</a:t>
+              <a:t>⏱ 0:26 – 1:07  ·  слайд 2/17</a:t>
             </a:r>
             <a:endParaRPr lang="en-US" dirty="0"/>
           </a:p>
@@ -6466,7 +6467,7 @@
           <a:lstStyle/>
           <a:p>
             <a:r>
-              <a:t>⏱ 1:02 – 1:28  ·  слайд 3/18</a:t>
+              <a:t>⏱ 1:07 – 1:35  ·  слайд 3/17</a:t>
             </a:r>
             <a:endParaRPr lang="en-US" dirty="0"/>
           </a:p>
@@ -6558,7 +6559,7 @@
           <a:lstStyle/>
           <a:p>
             <a:r>
-              <a:t>⏱ 1:28 – 2:03  ·  слайд 4/18</a:t>
+              <a:t>⏱ 1:35 – 2:13  ·  слайд 4/17</a:t>
             </a:r>
             <a:endParaRPr lang="en-US" dirty="0"/>
           </a:p>
@@ -6656,7 +6657,7 @@
           <a:lstStyle/>
           <a:p>
             <a:r>
-              <a:t>⏱ 2:03 – 2:35  ·  слайд 5/18</a:t>
+              <a:t>⏱ 2:13 – 2:47  ·  слайд 5/17</a:t>
             </a:r>
             <a:endParaRPr lang="en-US" dirty="0"/>
           </a:p>
@@ -6748,7 +6749,7 @@
           <a:lstStyle/>
           <a:p>
             <a:r>
-              <a:t>⏱ 2:35 – 3:07  ·  слайд 6/18</a:t>
+              <a:t>⏱ 2:47 – 3:22  ·  слайд 6/17</a:t>
             </a:r>
             <a:endParaRPr lang="en-US" dirty="0"/>
           </a:p>
@@ -6846,7 +6847,7 @@
           <a:lstStyle/>
           <a:p>
             <a:r>
-              <a:t>⏱ 3:07 – 3:36  ·  слайд 7/18</a:t>
+              <a:t>⏱ 3:22 – 3:53  ·  слайд 7/17</a:t>
             </a:r>
             <a:endParaRPr lang="en-US" dirty="0"/>
           </a:p>
@@ -6938,7 +6939,7 @@
           <a:lstStyle/>
           <a:p>
             <a:r>
-              <a:t>⏱ 3:36 – 4:17  ·  слайд 8/18</a:t>
+              <a:t>⏱ 3:53 – 4:37  ·  слайд 8/17</a:t>
             </a:r>
             <a:endParaRPr lang="en-US" dirty="0"/>
           </a:p>
@@ -7030,7 +7031,7 @@
           <a:lstStyle/>
           <a:p>
             <a:r>
-              <a:t>⏱ 4:17 – 4:54  ·  слайд 9/18</a:t>
+              <a:t>⏱ 4:37 – 5:17  ·  слайд 9/17</a:t>
             </a:r>
             <a:endParaRPr lang="en-US" dirty="0"/>
           </a:p>
@@ -9759,7 +9760,7 @@
                 <a:ea typeface="Calibri" pitchFamily="34" charset="-122"/>
                 <a:cs typeface="Calibri" pitchFamily="34" charset="-120"/>
               </a:rPr>
-              <a:t>10 / 18</a:t>
+              <a:t>10 / 17</a:t>
             </a:r>
             <a:endParaRPr lang="en-US" sz="900" dirty="0"/>
           </a:p>
@@ -11176,7 +11177,7 @@
                 <a:ea typeface="Calibri" pitchFamily="34" charset="-122"/>
                 <a:cs typeface="Calibri" pitchFamily="34" charset="-120"/>
               </a:rPr>
-              <a:t>11 / 18</a:t>
+              <a:t>11 / 17</a:t>
             </a:r>
             <a:endParaRPr lang="en-US" sz="900" dirty="0"/>
           </a:p>
@@ -13746,7 +13747,7 @@
                 <a:ea typeface="Calibri" pitchFamily="34" charset="-122"/>
                 <a:cs typeface="Calibri" pitchFamily="34" charset="-120"/>
               </a:rPr>
-              <a:t>12 / 18</a:t>
+              <a:t>12 / 17</a:t>
             </a:r>
             <a:endParaRPr lang="en-US" sz="900" dirty="0"/>
           </a:p>
@@ -13761,1486 +13762,6 @@
 </file>
 
 <file path=ppt/slides/slide13.xml><?xml version="1.0" encoding="utf-8"?>
-<p:sld xmlns:a="http://schemas.openxmlformats.org/drawingml/2006/main" xmlns:r="http://schemas.openxmlformats.org/officeDocument/2006/relationships" xmlns:p="http://schemas.openxmlformats.org/presentationml/2006/main">
-  <p:cSld name="Slide 13">
-    <p:bg>
-      <p:bgPr>
-        <a:solidFill>
-          <a:srgbClr val="FFFFFF"/>
-        </a:solidFill>
-        <a:effectLst/>
-      </p:bgPr>
-    </p:bg>
-    <p:spTree>
-      <p:nvGrpSpPr>
-        <p:cNvPr id="1" name=""/>
-        <p:cNvGrpSpPr/>
-        <p:nvPr/>
-      </p:nvGrpSpPr>
-      <p:grpSpPr>
-        <a:xfrm>
-          <a:off x="0" y="0"/>
-          <a:ext cx="0" cy="0"/>
-          <a:chOff x="0" y="0"/>
-          <a:chExt cx="0" cy="0"/>
-        </a:xfrm>
-      </p:grpSpPr>
-      <p:sp>
-        <p:nvSpPr>
-          <p:cNvPr id="2" name="Text 0"/>
-          <p:cNvSpPr/>
-          <p:nvPr/>
-        </p:nvSpPr>
-        <p:spPr>
-          <a:xfrm>
-            <a:off x="411480" y="91440"/>
-            <a:ext cx="8321040" cy="182880"/>
-          </a:xfrm>
-          <a:prstGeom prst="rect">
-            <a:avLst/>
-          </a:prstGeom>
-          <a:noFill/>
-          <a:ln/>
-        </p:spPr>
-        <p:txBody>
-          <a:bodyPr wrap="square" lIns="0" tIns="0" rIns="0" bIns="0" rtlCol="0" anchor="ctr"/>
-          <a:lstStyle/>
-          <a:p>
-            <a:pPr marL="0" indent="0" algn="l">
-              <a:buNone/>
-            </a:pPr>
-            <a:r>
-              <a:rPr lang="en-US" sz="850" b="1" kern="0" spc="300" dirty="0">
-                <a:solidFill>
-                  <a:srgbClr val="64748B"/>
-                </a:solidFill>
-                <a:latin typeface="Calibri" pitchFamily="34" charset="0"/>
-                <a:ea typeface="Calibri" pitchFamily="34" charset="-122"/>
-                <a:cs typeface="Calibri" pitchFamily="34" charset="-120"/>
-              </a:rPr>
-              <a:t>РОЗДІЛ 8 · РЕЗУЛЬТАТИ ЕКСПЕРИМЕНТУ</a:t>
-            </a:r>
-            <a:endParaRPr lang="en-US" sz="850" dirty="0"/>
-          </a:p>
-        </p:txBody>
-      </p:sp>
-      <p:sp>
-        <p:nvSpPr>
-          <p:cNvPr id="3" name="Shape 1"/>
-          <p:cNvSpPr/>
-          <p:nvPr/>
-        </p:nvSpPr>
-        <p:spPr>
-          <a:xfrm>
-            <a:off x="411480" y="420624"/>
-            <a:ext cx="201168" cy="201168"/>
-          </a:xfrm>
-          <a:prstGeom prst="ellipse">
-            <a:avLst/>
-          </a:prstGeom>
-          <a:solidFill>
-            <a:srgbClr val="F59E0B"/>
-          </a:solidFill>
-          <a:ln/>
-        </p:spPr>
-        <p:txBody>
-          <a:bodyPr/>
-          <a:lstStyle/>
-          <a:p>
-            <a:endParaRPr lang="en-US"/>
-          </a:p>
-        </p:txBody>
-      </p:sp>
-      <p:sp>
-        <p:nvSpPr>
-          <p:cNvPr id="4" name="Text 2"/>
-          <p:cNvSpPr/>
-          <p:nvPr/>
-        </p:nvSpPr>
-        <p:spPr>
-          <a:xfrm>
-            <a:off x="722376" y="292608"/>
-            <a:ext cx="6858000" cy="502920"/>
-          </a:xfrm>
-          <a:prstGeom prst="rect">
-            <a:avLst/>
-          </a:prstGeom>
-          <a:noFill/>
-          <a:ln/>
-        </p:spPr>
-        <p:txBody>
-          <a:bodyPr wrap="square" lIns="0" tIns="0" rIns="0" bIns="0" rtlCol="0" anchor="ctr"/>
-          <a:lstStyle/>
-          <a:p>
-            <a:pPr marL="0" indent="0" algn="l">
-              <a:buNone/>
-            </a:pPr>
-            <a:r>
-              <a:rPr lang="en-US" sz="2200" b="1" dirty="0">
-                <a:solidFill>
-                  <a:srgbClr val="0F172A"/>
-                </a:solidFill>
-                <a:latin typeface="Calibri" pitchFamily="34" charset="0"/>
-                <a:ea typeface="Calibri" pitchFamily="34" charset="-122"/>
-                <a:cs typeface="Calibri" pitchFamily="34" charset="-120"/>
-              </a:rPr>
-              <a:t>Результати експерименту: nDCG@10</a:t>
-            </a:r>
-            <a:endParaRPr lang="en-US" sz="2200" dirty="0"/>
-          </a:p>
-        </p:txBody>
-      </p:sp>
-      <p:sp>
-        <p:nvSpPr>
-          <p:cNvPr id="5" name="Shape 3"/>
-          <p:cNvSpPr/>
-          <p:nvPr/>
-        </p:nvSpPr>
-        <p:spPr>
-          <a:xfrm>
-            <a:off x="411480" y="1005840"/>
-            <a:ext cx="5760720" cy="3611880"/>
-          </a:xfrm>
-          <a:prstGeom prst="roundRect">
-            <a:avLst>
-              <a:gd name="adj" fmla="val 1519"/>
-            </a:avLst>
-          </a:prstGeom>
-          <a:solidFill>
-            <a:srgbClr val="F8FAFC"/>
-          </a:solidFill>
-          <a:ln w="9525">
-            <a:solidFill>
-              <a:srgbClr val="E2E8F0"/>
-            </a:solidFill>
-            <a:prstDash val="solid"/>
-          </a:ln>
-          <a:effectLst>
-            <a:outerShdw blurRad="76200" dist="12700" dir="5400000" algn="bl" rotWithShape="0">
-              <a:srgbClr val="000000">
-                <a:alpha val="7000"/>
-              </a:srgbClr>
-            </a:outerShdw>
-          </a:effectLst>
-        </p:spPr>
-        <p:txBody>
-          <a:bodyPr/>
-          <a:lstStyle/>
-          <a:p>
-            <a:endParaRPr lang="en-US"/>
-          </a:p>
-        </p:txBody>
-      </p:sp>
-      <p:sp>
-        <p:nvSpPr>
-          <p:cNvPr id="6" name="Text 4"/>
-          <p:cNvSpPr/>
-          <p:nvPr/>
-        </p:nvSpPr>
-        <p:spPr>
-          <a:xfrm>
-            <a:off x="594360" y="1078992"/>
-            <a:ext cx="5394960" cy="228600"/>
-          </a:xfrm>
-          <a:prstGeom prst="rect">
-            <a:avLst/>
-          </a:prstGeom>
-          <a:noFill/>
-          <a:ln/>
-        </p:spPr>
-        <p:txBody>
-          <a:bodyPr wrap="square" lIns="0" tIns="0" rIns="0" bIns="0" rtlCol="0" anchor="ctr"/>
-          <a:lstStyle/>
-          <a:p>
-            <a:pPr marL="0" indent="0" algn="l">
-              <a:buNone/>
-            </a:pPr>
-            <a:r>
-              <a:rPr lang="en-US" sz="900" b="1" kern="0" spc="200" dirty="0">
-                <a:solidFill>
-                  <a:srgbClr val="64748B"/>
-                </a:solidFill>
-                <a:latin typeface="Calibri" pitchFamily="34" charset="0"/>
-                <a:ea typeface="Calibri" pitchFamily="34" charset="-122"/>
-                <a:cs typeface="Calibri" pitchFamily="34" charset="-120"/>
-              </a:rPr>
-              <a:t>nDCG@10  ПО ДОМЕНАХ (вище — краще)</a:t>
-            </a:r>
-            <a:endParaRPr lang="en-US" sz="900" dirty="0"/>
-          </a:p>
-        </p:txBody>
-      </p:sp>
-      <p:graphicFrame>
-        <p:nvGraphicFramePr>
-          <p:cNvPr id="7" name="Chart 0"/>
-          <p:cNvGraphicFramePr/>
-          <p:nvPr>
-            <p:extLst>
-              <p:ext uri="{D42A27DB-BD31-4B8C-83A1-F6EECF244321}">
-                <p14:modId xmlns:p14="http://schemas.microsoft.com/office/powerpoint/2010/main" val="1647344352"/>
-              </p:ext>
-            </p:extLst>
-          </p:nvPr>
-        </p:nvGraphicFramePr>
-        <p:xfrm>
-          <a:off x="502920" y="1371600"/>
-          <a:ext cx="5577840" cy="3108960"/>
-        </p:xfrm>
-        <a:graphic>
-          <a:graphicData uri="http://schemas.openxmlformats.org/drawingml/2006/chart">
-            <c:chart xmlns:c="http://schemas.openxmlformats.org/drawingml/2006/chart" xmlns:r="http://schemas.openxmlformats.org/officeDocument/2006/relationships" r:id="rId3"/>
-          </a:graphicData>
-        </a:graphic>
-      </p:graphicFrame>
-      <p:sp>
-        <p:nvSpPr>
-          <p:cNvPr id="8" name="Shape 5"/>
-          <p:cNvSpPr/>
-          <p:nvPr/>
-        </p:nvSpPr>
-        <p:spPr>
-          <a:xfrm>
-            <a:off x="6355080" y="1005840"/>
-            <a:ext cx="2377440" cy="1920240"/>
-          </a:xfrm>
-          <a:prstGeom prst="roundRect">
-            <a:avLst>
-              <a:gd name="adj" fmla="val 2857"/>
-            </a:avLst>
-          </a:prstGeom>
-          <a:solidFill>
-            <a:srgbClr val="FFFFFF"/>
-          </a:solidFill>
-          <a:ln w="9525">
-            <a:solidFill>
-              <a:srgbClr val="E2E8F0"/>
-            </a:solidFill>
-            <a:prstDash val="solid"/>
-          </a:ln>
-          <a:effectLst>
-            <a:outerShdw blurRad="76200" dist="12700" dir="5400000" algn="bl" rotWithShape="0">
-              <a:srgbClr val="000000">
-                <a:alpha val="7000"/>
-              </a:srgbClr>
-            </a:outerShdw>
-          </a:effectLst>
-        </p:spPr>
-        <p:txBody>
-          <a:bodyPr/>
-          <a:lstStyle/>
-          <a:p>
-            <a:endParaRPr lang="en-US"/>
-          </a:p>
-        </p:txBody>
-      </p:sp>
-      <p:sp>
-        <p:nvSpPr>
-          <p:cNvPr id="9" name="Text 6"/>
-          <p:cNvSpPr/>
-          <p:nvPr/>
-        </p:nvSpPr>
-        <p:spPr>
-          <a:xfrm>
-            <a:off x="6492240" y="1097280"/>
-            <a:ext cx="2103120" cy="228600"/>
-          </a:xfrm>
-          <a:prstGeom prst="rect">
-            <a:avLst/>
-          </a:prstGeom>
-          <a:noFill/>
-          <a:ln/>
-        </p:spPr>
-        <p:txBody>
-          <a:bodyPr wrap="square" lIns="0" tIns="0" rIns="0" bIns="0" rtlCol="0" anchor="ctr"/>
-          <a:lstStyle/>
-          <a:p>
-            <a:pPr marL="0" indent="0" algn="l">
-              <a:buNone/>
-            </a:pPr>
-            <a:r>
-              <a:rPr lang="en-US" sz="850" b="1" kern="0" spc="200" dirty="0">
-                <a:solidFill>
-                  <a:srgbClr val="64748B"/>
-                </a:solidFill>
-                <a:latin typeface="Calibri" pitchFamily="34" charset="0"/>
-                <a:ea typeface="Calibri" pitchFamily="34" charset="-122"/>
-                <a:cs typeface="Calibri" pitchFamily="34" charset="-120"/>
-              </a:rPr>
-              <a:t>СЕРЕДНІЙ nDCG@10</a:t>
-            </a:r>
-            <a:endParaRPr lang="en-US" sz="850" dirty="0"/>
-          </a:p>
-        </p:txBody>
-      </p:sp>
-      <p:sp>
-        <p:nvSpPr>
-          <p:cNvPr id="10" name="Shape 7"/>
-          <p:cNvSpPr/>
-          <p:nvPr/>
-        </p:nvSpPr>
-        <p:spPr>
-          <a:xfrm>
-            <a:off x="6492240" y="1357884"/>
-            <a:ext cx="2103120" cy="256032"/>
-          </a:xfrm>
-          <a:prstGeom prst="rect">
-            <a:avLst/>
-          </a:prstGeom>
-          <a:solidFill>
-            <a:srgbClr val="FEF3C7"/>
-          </a:solidFill>
-          <a:ln/>
-        </p:spPr>
-        <p:txBody>
-          <a:bodyPr/>
-          <a:lstStyle/>
-          <a:p>
-            <a:endParaRPr lang="en-US"/>
-          </a:p>
-        </p:txBody>
-      </p:sp>
-      <p:sp>
-        <p:nvSpPr>
-          <p:cNvPr id="11" name="Text 8"/>
-          <p:cNvSpPr/>
-          <p:nvPr/>
-        </p:nvSpPr>
-        <p:spPr>
-          <a:xfrm>
-            <a:off x="6492240" y="1321308"/>
-            <a:ext cx="411480" cy="310896"/>
-          </a:xfrm>
-          <a:prstGeom prst="rect">
-            <a:avLst/>
-          </a:prstGeom>
-          <a:noFill/>
-          <a:ln/>
-        </p:spPr>
-        <p:txBody>
-          <a:bodyPr wrap="square" lIns="0" tIns="0" rIns="0" bIns="0" rtlCol="0" anchor="ctr"/>
-          <a:lstStyle/>
-          <a:p>
-            <a:pPr marL="0" indent="0" algn="ctr">
-              <a:buNone/>
-            </a:pPr>
-            <a:r>
-              <a:rPr lang="en-US" sz="1100" b="1" dirty="0">
-                <a:solidFill>
-                  <a:srgbClr val="F59E0B"/>
-                </a:solidFill>
-                <a:latin typeface="Calibri" pitchFamily="34" charset="0"/>
-                <a:ea typeface="Calibri" pitchFamily="34" charset="-122"/>
-                <a:cs typeface="Calibri" pitchFamily="34" charset="-120"/>
-              </a:rPr>
-              <a:t>#1</a:t>
-            </a:r>
-            <a:endParaRPr lang="en-US" sz="1100" dirty="0"/>
-          </a:p>
-        </p:txBody>
-      </p:sp>
-      <p:sp>
-        <p:nvSpPr>
-          <p:cNvPr id="12" name="Shape 9"/>
-          <p:cNvSpPr/>
-          <p:nvPr/>
-        </p:nvSpPr>
-        <p:spPr>
-          <a:xfrm>
-            <a:off x="6903720" y="1412748"/>
-            <a:ext cx="128016" cy="128016"/>
-          </a:xfrm>
-          <a:prstGeom prst="ellipse">
-            <a:avLst/>
-          </a:prstGeom>
-          <a:solidFill>
-            <a:srgbClr val="F59E0B"/>
-          </a:solidFill>
-          <a:ln/>
-        </p:spPr>
-        <p:txBody>
-          <a:bodyPr/>
-          <a:lstStyle/>
-          <a:p>
-            <a:endParaRPr lang="en-US"/>
-          </a:p>
-        </p:txBody>
-      </p:sp>
-      <p:sp>
-        <p:nvSpPr>
-          <p:cNvPr id="13" name="Text 10"/>
-          <p:cNvSpPr/>
-          <p:nvPr/>
-        </p:nvSpPr>
-        <p:spPr>
-          <a:xfrm>
-            <a:off x="7068312" y="1321308"/>
-            <a:ext cx="1051560" cy="310896"/>
-          </a:xfrm>
-          <a:prstGeom prst="rect">
-            <a:avLst/>
-          </a:prstGeom>
-          <a:noFill/>
-          <a:ln/>
-        </p:spPr>
-        <p:txBody>
-          <a:bodyPr wrap="square" lIns="0" tIns="0" rIns="0" bIns="0" rtlCol="0" anchor="ctr"/>
-          <a:lstStyle/>
-          <a:p>
-            <a:pPr marL="0" indent="0" algn="l">
-              <a:buNone/>
-            </a:pPr>
-            <a:r>
-              <a:rPr lang="en-US" sz="1050" b="1" dirty="0">
-                <a:solidFill>
-                  <a:srgbClr val="1E293B"/>
-                </a:solidFill>
-                <a:latin typeface="Calibri" pitchFamily="34" charset="0"/>
-                <a:ea typeface="Calibri" pitchFamily="34" charset="-122"/>
-                <a:cs typeface="Calibri" pitchFamily="34" charset="-120"/>
-              </a:rPr>
-              <a:t>BGE-M3</a:t>
-            </a:r>
-            <a:endParaRPr lang="en-US" sz="1050" dirty="0"/>
-          </a:p>
-        </p:txBody>
-      </p:sp>
-      <p:sp>
-        <p:nvSpPr>
-          <p:cNvPr id="14" name="Text 11"/>
-          <p:cNvSpPr/>
-          <p:nvPr/>
-        </p:nvSpPr>
-        <p:spPr>
-          <a:xfrm>
-            <a:off x="8138160" y="1321308"/>
-            <a:ext cx="457200" cy="310896"/>
-          </a:xfrm>
-          <a:prstGeom prst="rect">
-            <a:avLst/>
-          </a:prstGeom>
-          <a:noFill/>
-          <a:ln/>
-        </p:spPr>
-        <p:txBody>
-          <a:bodyPr wrap="square" lIns="0" tIns="0" rIns="0" bIns="0" rtlCol="0" anchor="ctr"/>
-          <a:lstStyle/>
-          <a:p>
-            <a:pPr marL="0" indent="0" algn="r">
-              <a:buNone/>
-            </a:pPr>
-            <a:r>
-              <a:rPr lang="en-US" sz="1050" b="1" dirty="0">
-                <a:solidFill>
-                  <a:srgbClr val="F59E0B"/>
-                </a:solidFill>
-                <a:latin typeface="Consolas" pitchFamily="34" charset="0"/>
-                <a:ea typeface="Consolas" pitchFamily="34" charset="-122"/>
-                <a:cs typeface="Consolas" pitchFamily="34" charset="-120"/>
-              </a:rPr>
-              <a:t>0.4708</a:t>
-            </a:r>
-            <a:endParaRPr lang="en-US" sz="1050" dirty="0"/>
-          </a:p>
-        </p:txBody>
-      </p:sp>
-      <p:sp>
-        <p:nvSpPr>
-          <p:cNvPr id="15" name="Shape 12"/>
-          <p:cNvSpPr/>
-          <p:nvPr/>
-        </p:nvSpPr>
-        <p:spPr>
-          <a:xfrm>
-            <a:off x="6492240" y="1668780"/>
-            <a:ext cx="2103120" cy="256032"/>
-          </a:xfrm>
-          <a:prstGeom prst="rect">
-            <a:avLst/>
-          </a:prstGeom>
-          <a:solidFill>
-            <a:srgbClr val="FFFFFF"/>
-          </a:solidFill>
-          <a:ln/>
-        </p:spPr>
-        <p:txBody>
-          <a:bodyPr/>
-          <a:lstStyle/>
-          <a:p>
-            <a:endParaRPr lang="en-US"/>
-          </a:p>
-        </p:txBody>
-      </p:sp>
-      <p:sp>
-        <p:nvSpPr>
-          <p:cNvPr id="16" name="Text 13"/>
-          <p:cNvSpPr/>
-          <p:nvPr/>
-        </p:nvSpPr>
-        <p:spPr>
-          <a:xfrm>
-            <a:off x="6492240" y="1632204"/>
-            <a:ext cx="411480" cy="310896"/>
-          </a:xfrm>
-          <a:prstGeom prst="rect">
-            <a:avLst/>
-          </a:prstGeom>
-          <a:noFill/>
-          <a:ln/>
-        </p:spPr>
-        <p:txBody>
-          <a:bodyPr wrap="square" lIns="0" tIns="0" rIns="0" bIns="0" rtlCol="0" anchor="ctr"/>
-          <a:lstStyle/>
-          <a:p>
-            <a:pPr marL="0" indent="0" algn="ctr">
-              <a:buNone/>
-            </a:pPr>
-            <a:r>
-              <a:rPr lang="en-US" sz="1100" b="1" dirty="0">
-                <a:solidFill>
-                  <a:srgbClr val="64748B"/>
-                </a:solidFill>
-                <a:latin typeface="Calibri" pitchFamily="34" charset="0"/>
-                <a:ea typeface="Calibri" pitchFamily="34" charset="-122"/>
-                <a:cs typeface="Calibri" pitchFamily="34" charset="-120"/>
-              </a:rPr>
-              <a:t>#2</a:t>
-            </a:r>
-            <a:endParaRPr lang="en-US" sz="1100" dirty="0"/>
-          </a:p>
-        </p:txBody>
-      </p:sp>
-      <p:sp>
-        <p:nvSpPr>
-          <p:cNvPr id="17" name="Shape 14"/>
-          <p:cNvSpPr/>
-          <p:nvPr/>
-        </p:nvSpPr>
-        <p:spPr>
-          <a:xfrm>
-            <a:off x="6903720" y="1723644"/>
-            <a:ext cx="128016" cy="128016"/>
-          </a:xfrm>
-          <a:prstGeom prst="ellipse">
-            <a:avLst/>
-          </a:prstGeom>
-          <a:solidFill>
-            <a:srgbClr val="1E40AF"/>
-          </a:solidFill>
-          <a:ln/>
-        </p:spPr>
-        <p:txBody>
-          <a:bodyPr/>
-          <a:lstStyle/>
-          <a:p>
-            <a:endParaRPr lang="en-US"/>
-          </a:p>
-        </p:txBody>
-      </p:sp>
-      <p:sp>
-        <p:nvSpPr>
-          <p:cNvPr id="18" name="Text 15"/>
-          <p:cNvSpPr/>
-          <p:nvPr/>
-        </p:nvSpPr>
-        <p:spPr>
-          <a:xfrm>
-            <a:off x="7068312" y="1632204"/>
-            <a:ext cx="1051560" cy="310896"/>
-          </a:xfrm>
-          <a:prstGeom prst="rect">
-            <a:avLst/>
-          </a:prstGeom>
-          <a:noFill/>
-          <a:ln/>
-        </p:spPr>
-        <p:txBody>
-          <a:bodyPr wrap="square" lIns="0" tIns="0" rIns="0" bIns="0" rtlCol="0" anchor="ctr"/>
-          <a:lstStyle/>
-          <a:p>
-            <a:pPr marL="0" indent="0" algn="l">
-              <a:buNone/>
-            </a:pPr>
-            <a:r>
-              <a:rPr lang="en-US" sz="1050" dirty="0">
-                <a:solidFill>
-                  <a:srgbClr val="1E293B"/>
-                </a:solidFill>
-                <a:latin typeface="Calibri" pitchFamily="34" charset="0"/>
-                <a:ea typeface="Calibri" pitchFamily="34" charset="-122"/>
-                <a:cs typeface="Calibri" pitchFamily="34" charset="-120"/>
-              </a:rPr>
-              <a:t>Qwen3</a:t>
-            </a:r>
-            <a:endParaRPr lang="en-US" sz="1050" dirty="0"/>
-          </a:p>
-        </p:txBody>
-      </p:sp>
-      <p:sp>
-        <p:nvSpPr>
-          <p:cNvPr id="19" name="Text 16"/>
-          <p:cNvSpPr/>
-          <p:nvPr/>
-        </p:nvSpPr>
-        <p:spPr>
-          <a:xfrm>
-            <a:off x="8138160" y="1632204"/>
-            <a:ext cx="457200" cy="310896"/>
-          </a:xfrm>
-          <a:prstGeom prst="rect">
-            <a:avLst/>
-          </a:prstGeom>
-          <a:noFill/>
-          <a:ln/>
-        </p:spPr>
-        <p:txBody>
-          <a:bodyPr wrap="square" lIns="0" tIns="0" rIns="0" bIns="0" rtlCol="0" anchor="ctr"/>
-          <a:lstStyle/>
-          <a:p>
-            <a:pPr marL="0" indent="0" algn="r">
-              <a:buNone/>
-            </a:pPr>
-            <a:r>
-              <a:rPr lang="en-US" sz="1050" b="1" dirty="0">
-                <a:solidFill>
-                  <a:srgbClr val="1E293B"/>
-                </a:solidFill>
-                <a:latin typeface="Consolas" pitchFamily="34" charset="0"/>
-                <a:ea typeface="Consolas" pitchFamily="34" charset="-122"/>
-                <a:cs typeface="Consolas" pitchFamily="34" charset="-120"/>
-              </a:rPr>
-              <a:t>0.4385</a:t>
-            </a:r>
-            <a:endParaRPr lang="en-US" sz="1050" dirty="0"/>
-          </a:p>
-        </p:txBody>
-      </p:sp>
-      <p:sp>
-        <p:nvSpPr>
-          <p:cNvPr id="20" name="Shape 17"/>
-          <p:cNvSpPr/>
-          <p:nvPr/>
-        </p:nvSpPr>
-        <p:spPr>
-          <a:xfrm>
-            <a:off x="6492240" y="1979676"/>
-            <a:ext cx="2103120" cy="256032"/>
-          </a:xfrm>
-          <a:prstGeom prst="rect">
-            <a:avLst/>
-          </a:prstGeom>
-          <a:solidFill>
-            <a:srgbClr val="FFFFFF"/>
-          </a:solidFill>
-          <a:ln/>
-        </p:spPr>
-        <p:txBody>
-          <a:bodyPr/>
-          <a:lstStyle/>
-          <a:p>
-            <a:endParaRPr lang="en-US"/>
-          </a:p>
-        </p:txBody>
-      </p:sp>
-      <p:sp>
-        <p:nvSpPr>
-          <p:cNvPr id="21" name="Text 18"/>
-          <p:cNvSpPr/>
-          <p:nvPr/>
-        </p:nvSpPr>
-        <p:spPr>
-          <a:xfrm>
-            <a:off x="6492240" y="1943100"/>
-            <a:ext cx="411480" cy="310896"/>
-          </a:xfrm>
-          <a:prstGeom prst="rect">
-            <a:avLst/>
-          </a:prstGeom>
-          <a:noFill/>
-          <a:ln/>
-        </p:spPr>
-        <p:txBody>
-          <a:bodyPr wrap="square" lIns="0" tIns="0" rIns="0" bIns="0" rtlCol="0" anchor="ctr"/>
-          <a:lstStyle/>
-          <a:p>
-            <a:pPr marL="0" indent="0" algn="ctr">
-              <a:buNone/>
-            </a:pPr>
-            <a:r>
-              <a:rPr lang="en-US" sz="1100" b="1" dirty="0">
-                <a:solidFill>
-                  <a:srgbClr val="64748B"/>
-                </a:solidFill>
-                <a:latin typeface="Calibri" pitchFamily="34" charset="0"/>
-                <a:ea typeface="Calibri" pitchFamily="34" charset="-122"/>
-                <a:cs typeface="Calibri" pitchFamily="34" charset="-120"/>
-              </a:rPr>
-              <a:t>#3</a:t>
-            </a:r>
-            <a:endParaRPr lang="en-US" sz="1100" dirty="0"/>
-          </a:p>
-        </p:txBody>
-      </p:sp>
-      <p:sp>
-        <p:nvSpPr>
-          <p:cNvPr id="22" name="Shape 19"/>
-          <p:cNvSpPr/>
-          <p:nvPr/>
-        </p:nvSpPr>
-        <p:spPr>
-          <a:xfrm>
-            <a:off x="6903720" y="2034540"/>
-            <a:ext cx="128016" cy="128016"/>
-          </a:xfrm>
-          <a:prstGeom prst="ellipse">
-            <a:avLst/>
-          </a:prstGeom>
-          <a:solidFill>
-            <a:srgbClr val="0891B2"/>
-          </a:solidFill>
-          <a:ln/>
-        </p:spPr>
-        <p:txBody>
-          <a:bodyPr/>
-          <a:lstStyle/>
-          <a:p>
-            <a:endParaRPr lang="en-US"/>
-          </a:p>
-        </p:txBody>
-      </p:sp>
-      <p:sp>
-        <p:nvSpPr>
-          <p:cNvPr id="23" name="Text 20"/>
-          <p:cNvSpPr/>
-          <p:nvPr/>
-        </p:nvSpPr>
-        <p:spPr>
-          <a:xfrm>
-            <a:off x="7068312" y="1943100"/>
-            <a:ext cx="1051560" cy="310896"/>
-          </a:xfrm>
-          <a:prstGeom prst="rect">
-            <a:avLst/>
-          </a:prstGeom>
-          <a:noFill/>
-          <a:ln/>
-        </p:spPr>
-        <p:txBody>
-          <a:bodyPr wrap="square" lIns="0" tIns="0" rIns="0" bIns="0" rtlCol="0" anchor="ctr"/>
-          <a:lstStyle/>
-          <a:p>
-            <a:pPr marL="0" indent="0" algn="l">
-              <a:buNone/>
-            </a:pPr>
-            <a:r>
-              <a:rPr lang="en-US" sz="1050" dirty="0">
-                <a:solidFill>
-                  <a:srgbClr val="1E293B"/>
-                </a:solidFill>
-                <a:latin typeface="Calibri" pitchFamily="34" charset="0"/>
-                <a:ea typeface="Calibri" pitchFamily="34" charset="-122"/>
-                <a:cs typeface="Calibri" pitchFamily="34" charset="-120"/>
-              </a:rPr>
-              <a:t>E5-base</a:t>
-            </a:r>
-            <a:endParaRPr lang="en-US" sz="1050" dirty="0"/>
-          </a:p>
-        </p:txBody>
-      </p:sp>
-      <p:sp>
-        <p:nvSpPr>
-          <p:cNvPr id="24" name="Text 21"/>
-          <p:cNvSpPr/>
-          <p:nvPr/>
-        </p:nvSpPr>
-        <p:spPr>
-          <a:xfrm>
-            <a:off x="8138160" y="1943100"/>
-            <a:ext cx="457200" cy="310896"/>
-          </a:xfrm>
-          <a:prstGeom prst="rect">
-            <a:avLst/>
-          </a:prstGeom>
-          <a:noFill/>
-          <a:ln/>
-        </p:spPr>
-        <p:txBody>
-          <a:bodyPr wrap="square" lIns="0" tIns="0" rIns="0" bIns="0" rtlCol="0" anchor="ctr"/>
-          <a:lstStyle/>
-          <a:p>
-            <a:pPr marL="0" indent="0" algn="r">
-              <a:buNone/>
-            </a:pPr>
-            <a:r>
-              <a:rPr lang="en-US" sz="1050" b="1" dirty="0">
-                <a:solidFill>
-                  <a:srgbClr val="1E293B"/>
-                </a:solidFill>
-                <a:latin typeface="Consolas" pitchFamily="34" charset="0"/>
-                <a:ea typeface="Consolas" pitchFamily="34" charset="-122"/>
-                <a:cs typeface="Consolas" pitchFamily="34" charset="-120"/>
-              </a:rPr>
-              <a:t>0.4199</a:t>
-            </a:r>
-            <a:endParaRPr lang="en-US" sz="1050" dirty="0"/>
-          </a:p>
-        </p:txBody>
-      </p:sp>
-      <p:sp>
-        <p:nvSpPr>
-          <p:cNvPr id="25" name="Shape 22"/>
-          <p:cNvSpPr/>
-          <p:nvPr/>
-        </p:nvSpPr>
-        <p:spPr>
-          <a:xfrm>
-            <a:off x="6492240" y="2290572"/>
-            <a:ext cx="2103120" cy="256032"/>
-          </a:xfrm>
-          <a:prstGeom prst="rect">
-            <a:avLst/>
-          </a:prstGeom>
-          <a:solidFill>
-            <a:srgbClr val="FFFFFF"/>
-          </a:solidFill>
-          <a:ln/>
-        </p:spPr>
-        <p:txBody>
-          <a:bodyPr/>
-          <a:lstStyle/>
-          <a:p>
-            <a:endParaRPr lang="en-US"/>
-          </a:p>
-        </p:txBody>
-      </p:sp>
-      <p:sp>
-        <p:nvSpPr>
-          <p:cNvPr id="26" name="Text 23"/>
-          <p:cNvSpPr/>
-          <p:nvPr/>
-        </p:nvSpPr>
-        <p:spPr>
-          <a:xfrm>
-            <a:off x="6492240" y="2253996"/>
-            <a:ext cx="411480" cy="310896"/>
-          </a:xfrm>
-          <a:prstGeom prst="rect">
-            <a:avLst/>
-          </a:prstGeom>
-          <a:noFill/>
-          <a:ln/>
-        </p:spPr>
-        <p:txBody>
-          <a:bodyPr wrap="square" lIns="0" tIns="0" rIns="0" bIns="0" rtlCol="0" anchor="ctr"/>
-          <a:lstStyle/>
-          <a:p>
-            <a:pPr marL="0" indent="0" algn="ctr">
-              <a:buNone/>
-            </a:pPr>
-            <a:r>
-              <a:rPr lang="en-US" sz="1100" b="1" dirty="0">
-                <a:solidFill>
-                  <a:srgbClr val="64748B"/>
-                </a:solidFill>
-                <a:latin typeface="Calibri" pitchFamily="34" charset="0"/>
-                <a:ea typeface="Calibri" pitchFamily="34" charset="-122"/>
-                <a:cs typeface="Calibri" pitchFamily="34" charset="-120"/>
-              </a:rPr>
-              <a:t>#4</a:t>
-            </a:r>
-            <a:endParaRPr lang="en-US" sz="1100" dirty="0"/>
-          </a:p>
-        </p:txBody>
-      </p:sp>
-      <p:sp>
-        <p:nvSpPr>
-          <p:cNvPr id="27" name="Shape 24"/>
-          <p:cNvSpPr/>
-          <p:nvPr/>
-        </p:nvSpPr>
-        <p:spPr>
-          <a:xfrm>
-            <a:off x="6903720" y="2345436"/>
-            <a:ext cx="128016" cy="128016"/>
-          </a:xfrm>
-          <a:prstGeom prst="ellipse">
-            <a:avLst/>
-          </a:prstGeom>
-          <a:solidFill>
-            <a:srgbClr val="64748B"/>
-          </a:solidFill>
-          <a:ln/>
-        </p:spPr>
-        <p:txBody>
-          <a:bodyPr/>
-          <a:lstStyle/>
-          <a:p>
-            <a:endParaRPr lang="en-US"/>
-          </a:p>
-        </p:txBody>
-      </p:sp>
-      <p:sp>
-        <p:nvSpPr>
-          <p:cNvPr id="28" name="Text 25"/>
-          <p:cNvSpPr/>
-          <p:nvPr/>
-        </p:nvSpPr>
-        <p:spPr>
-          <a:xfrm>
-            <a:off x="7068312" y="2253996"/>
-            <a:ext cx="1051560" cy="310896"/>
-          </a:xfrm>
-          <a:prstGeom prst="rect">
-            <a:avLst/>
-          </a:prstGeom>
-          <a:noFill/>
-          <a:ln/>
-        </p:spPr>
-        <p:txBody>
-          <a:bodyPr wrap="square" lIns="0" tIns="0" rIns="0" bIns="0" rtlCol="0" anchor="ctr"/>
-          <a:lstStyle/>
-          <a:p>
-            <a:pPr marL="0" indent="0" algn="l">
-              <a:buNone/>
-            </a:pPr>
-            <a:r>
-              <a:rPr lang="en-US" sz="1050" dirty="0">
-                <a:solidFill>
-                  <a:srgbClr val="1E293B"/>
-                </a:solidFill>
-                <a:latin typeface="Calibri" pitchFamily="34" charset="0"/>
-                <a:ea typeface="Calibri" pitchFamily="34" charset="-122"/>
-                <a:cs typeface="Calibri" pitchFamily="34" charset="-120"/>
-              </a:rPr>
-              <a:t>BM25</a:t>
-            </a:r>
-            <a:endParaRPr lang="en-US" sz="1050" dirty="0"/>
-          </a:p>
-        </p:txBody>
-      </p:sp>
-      <p:sp>
-        <p:nvSpPr>
-          <p:cNvPr id="29" name="Text 26"/>
-          <p:cNvSpPr/>
-          <p:nvPr/>
-        </p:nvSpPr>
-        <p:spPr>
-          <a:xfrm>
-            <a:off x="8138160" y="2253996"/>
-            <a:ext cx="457200" cy="310896"/>
-          </a:xfrm>
-          <a:prstGeom prst="rect">
-            <a:avLst/>
-          </a:prstGeom>
-          <a:noFill/>
-          <a:ln/>
-        </p:spPr>
-        <p:txBody>
-          <a:bodyPr wrap="square" lIns="0" tIns="0" rIns="0" bIns="0" rtlCol="0" anchor="ctr"/>
-          <a:lstStyle/>
-          <a:p>
-            <a:pPr marL="0" indent="0" algn="r">
-              <a:buNone/>
-            </a:pPr>
-            <a:r>
-              <a:rPr lang="en-US" sz="1050" b="1" dirty="0">
-                <a:solidFill>
-                  <a:srgbClr val="1E293B"/>
-                </a:solidFill>
-                <a:latin typeface="Consolas" pitchFamily="34" charset="0"/>
-                <a:ea typeface="Consolas" pitchFamily="34" charset="-122"/>
-                <a:cs typeface="Consolas" pitchFamily="34" charset="-120"/>
-              </a:rPr>
-              <a:t>0.3319</a:t>
-            </a:r>
-            <a:endParaRPr lang="en-US" sz="1050" dirty="0"/>
-          </a:p>
-        </p:txBody>
-      </p:sp>
-      <p:sp>
-        <p:nvSpPr>
-          <p:cNvPr id="30" name="Shape 27"/>
-          <p:cNvSpPr/>
-          <p:nvPr/>
-        </p:nvSpPr>
-        <p:spPr>
-          <a:xfrm>
-            <a:off x="6492240" y="2601468"/>
-            <a:ext cx="2103120" cy="256032"/>
-          </a:xfrm>
-          <a:prstGeom prst="rect">
-            <a:avLst/>
-          </a:prstGeom>
-          <a:solidFill>
-            <a:srgbClr val="FFFFFF"/>
-          </a:solidFill>
-          <a:ln/>
-        </p:spPr>
-        <p:txBody>
-          <a:bodyPr/>
-          <a:lstStyle/>
-          <a:p>
-            <a:endParaRPr lang="en-US"/>
-          </a:p>
-        </p:txBody>
-      </p:sp>
-      <p:sp>
-        <p:nvSpPr>
-          <p:cNvPr id="31" name="Text 28"/>
-          <p:cNvSpPr/>
-          <p:nvPr/>
-        </p:nvSpPr>
-        <p:spPr>
-          <a:xfrm>
-            <a:off x="6492240" y="2564892"/>
-            <a:ext cx="411480" cy="310896"/>
-          </a:xfrm>
-          <a:prstGeom prst="rect">
-            <a:avLst/>
-          </a:prstGeom>
-          <a:noFill/>
-          <a:ln/>
-        </p:spPr>
-        <p:txBody>
-          <a:bodyPr wrap="square" lIns="0" tIns="0" rIns="0" bIns="0" rtlCol="0" anchor="ctr"/>
-          <a:lstStyle/>
-          <a:p>
-            <a:pPr marL="0" indent="0" algn="ctr">
-              <a:buNone/>
-            </a:pPr>
-            <a:r>
-              <a:rPr lang="en-US" sz="1100" b="1" dirty="0">
-                <a:solidFill>
-                  <a:srgbClr val="64748B"/>
-                </a:solidFill>
-                <a:latin typeface="Calibri" pitchFamily="34" charset="0"/>
-                <a:ea typeface="Calibri" pitchFamily="34" charset="-122"/>
-                <a:cs typeface="Calibri" pitchFamily="34" charset="-120"/>
-              </a:rPr>
-              <a:t>#5</a:t>
-            </a:r>
-            <a:endParaRPr lang="en-US" sz="1100" dirty="0"/>
-          </a:p>
-        </p:txBody>
-      </p:sp>
-      <p:sp>
-        <p:nvSpPr>
-          <p:cNvPr id="32" name="Shape 29"/>
-          <p:cNvSpPr/>
-          <p:nvPr/>
-        </p:nvSpPr>
-        <p:spPr>
-          <a:xfrm>
-            <a:off x="6903720" y="2656332"/>
-            <a:ext cx="128016" cy="128016"/>
-          </a:xfrm>
-          <a:prstGeom prst="ellipse">
-            <a:avLst/>
-          </a:prstGeom>
-          <a:solidFill>
-            <a:srgbClr val="7C3AED"/>
-          </a:solidFill>
-          <a:ln/>
-        </p:spPr>
-        <p:txBody>
-          <a:bodyPr/>
-          <a:lstStyle/>
-          <a:p>
-            <a:endParaRPr lang="en-US"/>
-          </a:p>
-        </p:txBody>
-      </p:sp>
-      <p:sp>
-        <p:nvSpPr>
-          <p:cNvPr id="33" name="Text 30"/>
-          <p:cNvSpPr/>
-          <p:nvPr/>
-        </p:nvSpPr>
-        <p:spPr>
-          <a:xfrm>
-            <a:off x="7068312" y="2564892"/>
-            <a:ext cx="1051560" cy="310896"/>
-          </a:xfrm>
-          <a:prstGeom prst="rect">
-            <a:avLst/>
-          </a:prstGeom>
-          <a:noFill/>
-          <a:ln/>
-        </p:spPr>
-        <p:txBody>
-          <a:bodyPr wrap="square" lIns="0" tIns="0" rIns="0" bIns="0" rtlCol="0" anchor="ctr"/>
-          <a:lstStyle/>
-          <a:p>
-            <a:pPr marL="0" indent="0" algn="l">
-              <a:buNone/>
-            </a:pPr>
-            <a:r>
-              <a:rPr lang="en-US" sz="1050" dirty="0">
-                <a:solidFill>
-                  <a:srgbClr val="1E293B"/>
-                </a:solidFill>
-                <a:latin typeface="Calibri" pitchFamily="34" charset="0"/>
-                <a:ea typeface="Calibri" pitchFamily="34" charset="-122"/>
-                <a:cs typeface="Calibri" pitchFamily="34" charset="-120"/>
-              </a:rPr>
-              <a:t>nomic</a:t>
-            </a:r>
-            <a:endParaRPr lang="en-US" sz="1050" dirty="0"/>
-          </a:p>
-        </p:txBody>
-      </p:sp>
-      <p:sp>
-        <p:nvSpPr>
-          <p:cNvPr id="34" name="Text 31"/>
-          <p:cNvSpPr/>
-          <p:nvPr/>
-        </p:nvSpPr>
-        <p:spPr>
-          <a:xfrm>
-            <a:off x="8138160" y="2564892"/>
-            <a:ext cx="457200" cy="310896"/>
-          </a:xfrm>
-          <a:prstGeom prst="rect">
-            <a:avLst/>
-          </a:prstGeom>
-          <a:noFill/>
-          <a:ln/>
-        </p:spPr>
-        <p:txBody>
-          <a:bodyPr wrap="square" lIns="0" tIns="0" rIns="0" bIns="0" rtlCol="0" anchor="ctr"/>
-          <a:lstStyle/>
-          <a:p>
-            <a:pPr marL="0" indent="0" algn="r">
-              <a:buNone/>
-            </a:pPr>
-            <a:r>
-              <a:rPr lang="en-US" sz="1050" b="1" dirty="0">
-                <a:solidFill>
-                  <a:srgbClr val="1E293B"/>
-                </a:solidFill>
-                <a:latin typeface="Consolas" pitchFamily="34" charset="0"/>
-                <a:ea typeface="Consolas" pitchFamily="34" charset="-122"/>
-                <a:cs typeface="Consolas" pitchFamily="34" charset="-120"/>
-              </a:rPr>
-              <a:t>0.2128</a:t>
-            </a:r>
-            <a:endParaRPr lang="en-US" sz="1050" dirty="0"/>
-          </a:p>
-        </p:txBody>
-      </p:sp>
-      <p:sp>
-        <p:nvSpPr>
-          <p:cNvPr id="35" name="Shape 32"/>
-          <p:cNvSpPr/>
-          <p:nvPr/>
-        </p:nvSpPr>
-        <p:spPr>
-          <a:xfrm>
-            <a:off x="6355080" y="3017520"/>
-            <a:ext cx="2377440" cy="1600200"/>
-          </a:xfrm>
-          <a:prstGeom prst="roundRect">
-            <a:avLst>
-              <a:gd name="adj" fmla="val 3243"/>
-            </a:avLst>
-          </a:prstGeom>
-          <a:solidFill>
-            <a:srgbClr val="0F172A"/>
-          </a:solidFill>
-          <a:ln w="9525">
-            <a:solidFill>
-              <a:srgbClr val="0F172A"/>
-            </a:solidFill>
-            <a:prstDash val="solid"/>
-          </a:ln>
-          <a:effectLst>
-            <a:outerShdw blurRad="76200" dist="12700" dir="5400000" algn="bl" rotWithShape="0">
-              <a:srgbClr val="000000">
-                <a:alpha val="7000"/>
-              </a:srgbClr>
-            </a:outerShdw>
-          </a:effectLst>
-        </p:spPr>
-        <p:txBody>
-          <a:bodyPr/>
-          <a:lstStyle/>
-          <a:p>
-            <a:endParaRPr lang="en-US"/>
-          </a:p>
-        </p:txBody>
-      </p:sp>
-      <p:sp>
-        <p:nvSpPr>
-          <p:cNvPr id="36" name="Text 33"/>
-          <p:cNvSpPr/>
-          <p:nvPr/>
-        </p:nvSpPr>
-        <p:spPr>
-          <a:xfrm>
-            <a:off x="6492240" y="3108960"/>
-            <a:ext cx="2103120" cy="201168"/>
-          </a:xfrm>
-          <a:prstGeom prst="rect">
-            <a:avLst/>
-          </a:prstGeom>
-          <a:noFill/>
-          <a:ln/>
-        </p:spPr>
-        <p:txBody>
-          <a:bodyPr wrap="square" lIns="0" tIns="0" rIns="0" bIns="0" rtlCol="0" anchor="ctr"/>
-          <a:lstStyle/>
-          <a:p>
-            <a:pPr marL="0" indent="0" algn="l">
-              <a:buNone/>
-            </a:pPr>
-            <a:r>
-              <a:rPr lang="en-US" sz="850" b="1" kern="0" spc="200" dirty="0">
-                <a:solidFill>
-                  <a:srgbClr val="F59E0B"/>
-                </a:solidFill>
-                <a:latin typeface="Calibri" pitchFamily="34" charset="0"/>
-                <a:ea typeface="Calibri" pitchFamily="34" charset="-122"/>
-                <a:cs typeface="Calibri" pitchFamily="34" charset="-120"/>
-              </a:rPr>
-              <a:t>BOOTSTRAP 95% CI</a:t>
-            </a:r>
-            <a:endParaRPr lang="en-US" sz="850" dirty="0"/>
-          </a:p>
-        </p:txBody>
-      </p:sp>
-      <p:sp>
-        <p:nvSpPr>
-          <p:cNvPr id="37" name="Text 34"/>
-          <p:cNvSpPr/>
-          <p:nvPr/>
-        </p:nvSpPr>
-        <p:spPr>
-          <a:xfrm>
-            <a:off x="6492240" y="3310128"/>
-            <a:ext cx="2103120" cy="201168"/>
-          </a:xfrm>
-          <a:prstGeom prst="rect">
-            <a:avLst/>
-          </a:prstGeom>
-          <a:noFill/>
-          <a:ln/>
-        </p:spPr>
-        <p:txBody>
-          <a:bodyPr wrap="square" lIns="0" tIns="0" rIns="0" bIns="0" rtlCol="0" anchor="ctr"/>
-          <a:lstStyle/>
-          <a:p>
-            <a:pPr marL="0" indent="0" algn="l">
-              <a:buNone/>
-            </a:pPr>
-            <a:r>
-              <a:rPr lang="en-US" sz="900" dirty="0">
-                <a:solidFill>
-                  <a:srgbClr val="94A3B8"/>
-                </a:solidFill>
-                <a:latin typeface="Calibri" pitchFamily="34" charset="0"/>
-                <a:ea typeface="Calibri" pitchFamily="34" charset="-122"/>
-                <a:cs typeface="Calibri" pitchFamily="34" charset="-120"/>
-              </a:rPr>
-              <a:t>n = 2 000  ·  Технічний домен:</a:t>
-            </a:r>
-            <a:endParaRPr lang="en-US" sz="900" dirty="0"/>
-          </a:p>
-        </p:txBody>
-      </p:sp>
-      <p:sp>
-        <p:nvSpPr>
-          <p:cNvPr id="38" name="Text 35"/>
-          <p:cNvSpPr/>
-          <p:nvPr/>
-        </p:nvSpPr>
-        <p:spPr>
-          <a:xfrm>
-            <a:off x="6492240" y="3520440"/>
-            <a:ext cx="2103120" cy="594360"/>
-          </a:xfrm>
-          <a:prstGeom prst="rect">
-            <a:avLst/>
-          </a:prstGeom>
-          <a:noFill/>
-          <a:ln/>
-        </p:spPr>
-        <p:txBody>
-          <a:bodyPr wrap="square" lIns="0" tIns="0" rIns="0" bIns="0" rtlCol="0" anchor="t"/>
-          <a:lstStyle/>
-          <a:p>
-            <a:pPr marL="0" indent="0">
-              <a:spcAft>
-                <a:spcPts val="200"/>
-              </a:spcAft>
-              <a:buNone/>
-            </a:pPr>
-            <a:r>
-              <a:rPr lang="en-US" sz="1000" b="1" dirty="0">
-                <a:solidFill>
-                  <a:srgbClr val="F59E0B"/>
-                </a:solidFill>
-                <a:latin typeface="Calibri" pitchFamily="34" charset="0"/>
-                <a:ea typeface="Calibri" pitchFamily="34" charset="-122"/>
-                <a:cs typeface="Calibri" pitchFamily="34" charset="-120"/>
-              </a:rPr>
-              <a:t>BGE-M3:  </a:t>
-            </a:r>
-            <a:r>
-              <a:rPr lang="en-US" sz="1100" b="1" dirty="0">
-                <a:solidFill>
-                  <a:srgbClr val="F1F5F9"/>
-                </a:solidFill>
-                <a:latin typeface="Consolas" pitchFamily="34" charset="0"/>
-                <a:ea typeface="Consolas" pitchFamily="34" charset="-122"/>
-                <a:cs typeface="Consolas" pitchFamily="34" charset="-120"/>
-              </a:rPr>
-              <a:t>[0.606 ; 0.737]</a:t>
-            </a:r>
-            <a:endParaRPr lang="en-US" sz="1000" dirty="0"/>
-          </a:p>
-          <a:p>
-            <a:pPr marL="0" indent="0">
-              <a:spcAft>
-                <a:spcPts val="200"/>
-              </a:spcAft>
-              <a:buNone/>
-            </a:pPr>
-            <a:r>
-              <a:rPr lang="en-US" sz="1000" b="1" dirty="0">
-                <a:solidFill>
-                  <a:srgbClr val="94A3B8"/>
-                </a:solidFill>
-                <a:latin typeface="Calibri" pitchFamily="34" charset="0"/>
-                <a:ea typeface="Calibri" pitchFamily="34" charset="-122"/>
-                <a:cs typeface="Calibri" pitchFamily="34" charset="-120"/>
-              </a:rPr>
-              <a:t>BM25:    </a:t>
-            </a:r>
-            <a:r>
-              <a:rPr lang="en-US" sz="1100" b="1" dirty="0">
-                <a:solidFill>
-                  <a:srgbClr val="F1F5F9"/>
-                </a:solidFill>
-                <a:latin typeface="Consolas" pitchFamily="34" charset="0"/>
-                <a:ea typeface="Consolas" pitchFamily="34" charset="-122"/>
-                <a:cs typeface="Consolas" pitchFamily="34" charset="-120"/>
-              </a:rPr>
-              <a:t>[0.431 ; 0.541]</a:t>
-            </a:r>
-            <a:endParaRPr lang="en-US" sz="1000" dirty="0"/>
-          </a:p>
-        </p:txBody>
-      </p:sp>
-      <p:sp>
-        <p:nvSpPr>
-          <p:cNvPr id="39" name="Text 36"/>
-          <p:cNvSpPr/>
-          <p:nvPr/>
-        </p:nvSpPr>
-        <p:spPr>
-          <a:xfrm>
-            <a:off x="6492240" y="4046220"/>
-            <a:ext cx="2103120" cy="548640"/>
-          </a:xfrm>
-          <a:prstGeom prst="rect">
-            <a:avLst/>
-          </a:prstGeom>
-          <a:noFill/>
-          <a:ln/>
-        </p:spPr>
-        <p:txBody>
-          <a:bodyPr wrap="square" lIns="0" tIns="0" rIns="0" bIns="0" rtlCol="0" anchor="t"/>
-          <a:lstStyle/>
-          <a:p>
-            <a:pPr marL="0" indent="0" algn="l">
-              <a:buNone/>
-            </a:pPr>
-            <a:r>
-              <a:rPr lang="en-US" sz="900" i="1" dirty="0">
-                <a:solidFill>
-                  <a:srgbClr val="F59E0B"/>
-                </a:solidFill>
-                <a:latin typeface="Calibri" pitchFamily="34" charset="0"/>
-                <a:ea typeface="Calibri" pitchFamily="34" charset="-122"/>
-                <a:cs typeface="Calibri" pitchFamily="34" charset="-120"/>
-              </a:rPr>
-              <a:t>→ інтервали не перетинаються — статистично значуща перевага семантичного пошуку над лексичним</a:t>
-            </a:r>
-            <a:endParaRPr lang="en-US" sz="900" dirty="0"/>
-          </a:p>
-        </p:txBody>
-      </p:sp>
-      <p:pic>
-        <p:nvPicPr>
-          <p:cNvPr id="40" name="Image 0" descr="D:\repos\kb-semantic-search-benchmark\thesis\scripts\_logo_hex.png"/>
-          <p:cNvPicPr>
-            <a:picLocks noChangeAspect="1"/>
-          </p:cNvPicPr>
-          <p:nvPr/>
-        </p:nvPicPr>
-        <p:blipFill>
-          <a:blip r:embed="rId4"/>
-          <a:stretch>
-            <a:fillRect/>
-          </a:stretch>
-        </p:blipFill>
-        <p:spPr>
-          <a:xfrm>
-            <a:off x="411480" y="4686300"/>
-            <a:ext cx="502920" cy="338328"/>
-          </a:xfrm>
-          <a:prstGeom prst="rect">
-            <a:avLst/>
-          </a:prstGeom>
-        </p:spPr>
-      </p:pic>
-      <p:sp>
-        <p:nvSpPr>
-          <p:cNvPr id="41" name="Text 37"/>
-          <p:cNvSpPr/>
-          <p:nvPr/>
-        </p:nvSpPr>
-        <p:spPr>
-          <a:xfrm>
-            <a:off x="7955280" y="4850892"/>
-            <a:ext cx="960120" cy="228600"/>
-          </a:xfrm>
-          <a:prstGeom prst="rect">
-            <a:avLst/>
-          </a:prstGeom>
-          <a:noFill/>
-          <a:ln/>
-        </p:spPr>
-        <p:txBody>
-          <a:bodyPr wrap="square" lIns="0" tIns="0" rIns="0" bIns="0" rtlCol="0" anchor="ctr"/>
-          <a:lstStyle/>
-          <a:p>
-            <a:pPr marL="0" indent="0" algn="r">
-              <a:buNone/>
-            </a:pPr>
-            <a:r>
-              <a:rPr lang="en-US" sz="900" dirty="0">
-                <a:solidFill>
-                  <a:srgbClr val="64748B"/>
-                </a:solidFill>
-                <a:latin typeface="Calibri" pitchFamily="34" charset="0"/>
-                <a:ea typeface="Calibri" pitchFamily="34" charset="-122"/>
-                <a:cs typeface="Calibri" pitchFamily="34" charset="-120"/>
-              </a:rPr>
-              <a:t>13 / 18</a:t>
-            </a:r>
-            <a:endParaRPr lang="en-US" sz="900" dirty="0"/>
-          </a:p>
-        </p:txBody>
-      </p:sp>
-    </p:spTree>
-  </p:cSld>
-  <p:clrMapOvr>
-    <a:masterClrMapping/>
-  </p:clrMapOvr>
-</p:sld>
-</file>
-
-<file path=ppt/slides/slide14.xml><?xml version="1.0" encoding="utf-8"?>
 <p:sld xmlns:a="http://schemas.openxmlformats.org/drawingml/2006/main" xmlns:r="http://schemas.openxmlformats.org/officeDocument/2006/relationships" xmlns:p="http://schemas.openxmlformats.org/presentationml/2006/main">
   <p:cSld name="Slide 14">
     <p:bg>
@@ -15811,7 +14332,7 @@
                 <a:ea typeface="Calibri" pitchFamily="34" charset="-122"/>
                 <a:cs typeface="Calibri" pitchFamily="34" charset="-120"/>
               </a:rPr>
-              <a:t>14 / 18</a:t>
+              <a:t>13 / 17</a:t>
             </a:r>
             <a:endParaRPr lang="en-US" sz="900" dirty="0"/>
           </a:p>
@@ -15825,7 +14346,592 @@
 </p:sld>
 </file>
 
-<file path=ppt/slides/slide15.xml><?xml version="1.0" encoding="utf-8"?>
+<file path=ppt/slides/slide13.xml><?xml version="1.0" encoding="utf-8"?>
+<p:sld xmlns:a="http://schemas.openxmlformats.org/drawingml/2006/main" xmlns:r="http://schemas.openxmlformats.org/officeDocument/2006/relationships" xmlns:p="http://schemas.openxmlformats.org/presentationml/2006/main">
+  <p:cSld name="Slide 14">
+    <p:bg>
+      <p:bgPr>
+        <a:solidFill>
+          <a:srgbClr val="FFFFFF"/>
+        </a:solidFill>
+        <a:effectLst/>
+      </p:bgPr>
+    </p:bg>
+    <p:spTree>
+      <p:nvGrpSpPr>
+        <p:cNvPr id="1" name=""/>
+        <p:cNvGrpSpPr/>
+        <p:nvPr/>
+      </p:nvGrpSpPr>
+      <p:grpSpPr>
+        <a:xfrm>
+          <a:off x="0" y="0"/>
+          <a:ext cx="0" cy="0"/>
+          <a:chOff x="0" y="0"/>
+          <a:chExt cx="0" cy="0"/>
+        </a:xfrm>
+      </p:grpSpPr>
+      <p:sp>
+        <p:nvSpPr>
+          <p:cNvPr id="2" name="Text 0"/>
+          <p:cNvSpPr/>
+          <p:nvPr/>
+        </p:nvSpPr>
+        <p:spPr>
+          <a:xfrm>
+            <a:off x="411480" y="91440"/>
+            <a:ext cx="8321040" cy="182880"/>
+          </a:xfrm>
+          <a:prstGeom prst="rect">
+            <a:avLst/>
+          </a:prstGeom>
+          <a:noFill/>
+          <a:ln/>
+        </p:spPr>
+        <p:txBody>
+          <a:bodyPr wrap="square" lIns="0" tIns="0" rIns="0" bIns="0" rtlCol="0" anchor="ctr"/>
+          <a:lstStyle/>
+          <a:p>
+            <a:pPr marL="0" indent="0" algn="l">
+              <a:buNone/>
+            </a:pPr>
+            <a:r>
+              <a:rPr lang="en-US" sz="850" b="1" kern="0" spc="300" dirty="0">
+                <a:solidFill>
+                  <a:srgbClr val="64748B"/>
+                </a:solidFill>
+                <a:latin typeface="Calibri" pitchFamily="34" charset="0"/>
+                <a:ea typeface="Calibri" pitchFamily="34" charset="-122"/>
+                <a:cs typeface="Calibri" pitchFamily="34" charset="-120"/>
+              </a:rPr>
+              <a:t>РОЗДІЛ 8 · РЕЗУЛЬТАТИ ЕКСПЕРИМЕНТУ</a:t>
+            </a:r>
+            <a:endParaRPr lang="en-US" sz="850" dirty="0"/>
+          </a:p>
+        </p:txBody>
+      </p:sp>
+      <p:sp>
+        <p:nvSpPr>
+          <p:cNvPr id="3" name="Shape 1"/>
+          <p:cNvSpPr/>
+          <p:nvPr/>
+        </p:nvSpPr>
+        <p:spPr>
+          <a:xfrm>
+            <a:off x="411480" y="420624"/>
+            <a:ext cx="201168" cy="201168"/>
+          </a:xfrm>
+          <a:prstGeom prst="ellipse">
+            <a:avLst/>
+          </a:prstGeom>
+          <a:solidFill>
+            <a:srgbClr val="F59E0B"/>
+          </a:solidFill>
+          <a:ln/>
+        </p:spPr>
+        <p:txBody>
+          <a:bodyPr/>
+          <a:lstStyle/>
+          <a:p>
+            <a:endParaRPr lang="en-US"/>
+          </a:p>
+        </p:txBody>
+      </p:sp>
+      <p:sp>
+        <p:nvSpPr>
+          <p:cNvPr id="4" name="Text 2"/>
+          <p:cNvSpPr/>
+          <p:nvPr/>
+        </p:nvSpPr>
+        <p:spPr>
+          <a:xfrm>
+            <a:off x="722376" y="292608"/>
+            <a:ext cx="6858000" cy="502920"/>
+          </a:xfrm>
+          <a:prstGeom prst="rect">
+            <a:avLst/>
+          </a:prstGeom>
+          <a:noFill/>
+          <a:ln/>
+        </p:spPr>
+        <p:txBody>
+          <a:bodyPr wrap="square" lIns="0" tIns="0" rIns="0" bIns="0" rtlCol="0" anchor="ctr"/>
+          <a:lstStyle/>
+          <a:p>
+            <a:pPr marL="0" indent="0" algn="l">
+              <a:buNone/>
+            </a:pPr>
+            <a:r>
+              <a:rPr lang="en-US" sz="2200" b="1" dirty="0">
+                <a:solidFill>
+                  <a:srgbClr val="0F172A"/>
+                </a:solidFill>
+                <a:latin typeface="Calibri" pitchFamily="34" charset="0"/>
+                <a:ea typeface="Calibri" pitchFamily="34" charset="-122"/>
+                <a:cs typeface="Calibri" pitchFamily="34" charset="-120"/>
+              </a:rPr>
+              <a:t>Деталізовані метрики за доменами</a:t>
+            </a:r>
+            <a:endParaRPr lang="en-US" sz="2200" dirty="0"/>
+          </a:p>
+        </p:txBody>
+      </p:sp>
+      <p:sp>
+        <p:nvSpPr>
+          <p:cNvPr id="5" name="Shape 3"/>
+          <p:cNvSpPr/>
+          <p:nvPr/>
+        </p:nvSpPr>
+        <p:spPr>
+          <a:xfrm>
+            <a:off x="411480" y="960120"/>
+            <a:ext cx="4078224" cy="1815084"/>
+          </a:xfrm>
+          <a:prstGeom prst="roundRect">
+            <a:avLst>
+              <a:gd name="adj" fmla="val 3023"/>
+            </a:avLst>
+          </a:prstGeom>
+          <a:solidFill>
+            <a:srgbClr val="F8FAFC"/>
+          </a:solidFill>
+          <a:ln w="9525">
+            <a:solidFill>
+              <a:srgbClr val="E2E8F0"/>
+            </a:solidFill>
+            <a:prstDash val="solid"/>
+          </a:ln>
+          <a:effectLst>
+            <a:outerShdw blurRad="76200" dist="12700" dir="5400000" algn="bl" rotWithShape="0">
+              <a:srgbClr val="000000">
+                <a:alpha val="7000"/>
+              </a:srgbClr>
+            </a:outerShdw>
+          </a:effectLst>
+        </p:spPr>
+        <p:txBody>
+          <a:bodyPr/>
+          <a:lstStyle/>
+          <a:p>
+            <a:endParaRPr lang="en-US"/>
+          </a:p>
+        </p:txBody>
+      </p:sp>
+      <p:sp>
+        <p:nvSpPr>
+          <p:cNvPr id="6" name="Text 4"/>
+          <p:cNvSpPr/>
+          <p:nvPr/>
+        </p:nvSpPr>
+        <p:spPr>
+          <a:xfrm>
+            <a:off x="594360" y="1033272"/>
+            <a:ext cx="3712464" cy="228600"/>
+          </a:xfrm>
+          <a:prstGeom prst="rect">
+            <a:avLst/>
+          </a:prstGeom>
+          <a:noFill/>
+          <a:ln/>
+        </p:spPr>
+        <p:txBody>
+          <a:bodyPr wrap="square" lIns="0" tIns="0" rIns="0" bIns="0" rtlCol="0" anchor="ctr"/>
+          <a:lstStyle/>
+          <a:p>
+            <a:pPr marL="0" indent="0" algn="l">
+              <a:buNone/>
+            </a:pPr>
+            <a:r>
+              <a:rPr lang="en-US" sz="1100" b="1" kern="0" spc="150" dirty="0">
+                <a:solidFill>
+                  <a:srgbClr val="1E293B"/>
+                </a:solidFill>
+                <a:latin typeface="Calibri" pitchFamily="34" charset="0"/>
+                <a:ea typeface="Calibri" pitchFamily="34" charset="-122"/>
+                <a:cs typeface="Calibri" pitchFamily="34" charset="-120"/>
+              </a:rPr>
+              <a:t>nDCG@10</a:t>
+            </a:r>
+            <a:endParaRPr lang="en-US" sz="1100" dirty="0"/>
+          </a:p>
+        </p:txBody>
+      </p:sp>
+      <p:graphicFrame>
+        <p:nvGraphicFramePr>
+          <p:cNvPr id="7" name="Chart 0"/>
+          <p:cNvGraphicFramePr/>
+          <p:nvPr/>
+        </p:nvGraphicFramePr>
+        <p:xfrm>
+          <a:off x="502920" y="1271016"/>
+          <a:ext cx="3895344" cy="1403604"/>
+        </p:xfrm>
+        <a:graphic>
+          <a:graphicData uri="http://schemas.openxmlformats.org/drawingml/2006/chart">
+            <c:chart xmlns:c="http://schemas.openxmlformats.org/drawingml/2006/chart" xmlns:r="http://schemas.openxmlformats.org/officeDocument/2006/relationships" r:id="rId3"/>
+          </a:graphicData>
+        </a:graphic>
+      </p:graphicFrame>
+      <p:sp>
+        <p:nvSpPr>
+          <p:cNvPr id="8" name="Shape 5"/>
+          <p:cNvSpPr/>
+          <p:nvPr/>
+        </p:nvSpPr>
+        <p:spPr>
+          <a:xfrm>
+            <a:off x="4654296" y="960120"/>
+            <a:ext cx="4078224" cy="1815084"/>
+          </a:xfrm>
+          <a:prstGeom prst="roundRect">
+            <a:avLst>
+              <a:gd name="adj" fmla="val 3023"/>
+            </a:avLst>
+          </a:prstGeom>
+          <a:solidFill>
+            <a:srgbClr val="F8FAFC"/>
+          </a:solidFill>
+          <a:ln w="9525">
+            <a:solidFill>
+              <a:srgbClr val="E2E8F0"/>
+            </a:solidFill>
+            <a:prstDash val="solid"/>
+          </a:ln>
+          <a:effectLst>
+            <a:outerShdw blurRad="76200" dist="12700" dir="5400000" algn="bl" rotWithShape="0">
+              <a:srgbClr val="000000">
+                <a:alpha val="7000"/>
+              </a:srgbClr>
+            </a:outerShdw>
+          </a:effectLst>
+        </p:spPr>
+        <p:txBody>
+          <a:bodyPr/>
+          <a:lstStyle/>
+          <a:p>
+            <a:endParaRPr lang="en-US"/>
+          </a:p>
+        </p:txBody>
+      </p:sp>
+      <p:sp>
+        <p:nvSpPr>
+          <p:cNvPr id="9" name="Text 6"/>
+          <p:cNvSpPr/>
+          <p:nvPr/>
+        </p:nvSpPr>
+        <p:spPr>
+          <a:xfrm>
+            <a:off x="4837176" y="1033272"/>
+            <a:ext cx="3712464" cy="228600"/>
+          </a:xfrm>
+          <a:prstGeom prst="rect">
+            <a:avLst/>
+          </a:prstGeom>
+          <a:noFill/>
+          <a:ln/>
+        </p:spPr>
+        <p:txBody>
+          <a:bodyPr wrap="square" lIns="0" tIns="0" rIns="0" bIns="0" rtlCol="0" anchor="ctr"/>
+          <a:lstStyle/>
+          <a:p>
+            <a:pPr marL="0" indent="0" algn="l">
+              <a:buNone/>
+            </a:pPr>
+            <a:r>
+              <a:rPr lang="en-US" sz="1100" b="1" kern="0" spc="150" dirty="0">
+                <a:solidFill>
+                  <a:srgbClr val="1E293B"/>
+                </a:solidFill>
+                <a:latin typeface="Calibri" pitchFamily="34" charset="0"/>
+                <a:ea typeface="Calibri" pitchFamily="34" charset="-122"/>
+                <a:cs typeface="Calibri" pitchFamily="34" charset="-120"/>
+              </a:rPr>
+              <a:t>MRR@10</a:t>
+            </a:r>
+            <a:endParaRPr lang="en-US" sz="1100" dirty="0"/>
+          </a:p>
+        </p:txBody>
+      </p:sp>
+      <p:graphicFrame>
+        <p:nvGraphicFramePr>
+          <p:cNvPr id="10" name="Chart 1"/>
+          <p:cNvGraphicFramePr/>
+          <p:nvPr/>
+        </p:nvGraphicFramePr>
+        <p:xfrm>
+          <a:off x="4745736" y="1271016"/>
+          <a:ext cx="3895344" cy="1403604"/>
+        </p:xfrm>
+        <a:graphic>
+          <a:graphicData uri="http://schemas.openxmlformats.org/drawingml/2006/chart">
+            <c:chart xmlns:c="http://schemas.openxmlformats.org/drawingml/2006/chart" xmlns:r="http://schemas.openxmlformats.org/officeDocument/2006/relationships" r:id="rId4"/>
+          </a:graphicData>
+        </a:graphic>
+      </p:graphicFrame>
+      <p:sp>
+        <p:nvSpPr>
+          <p:cNvPr id="11" name="Shape 7"/>
+          <p:cNvSpPr/>
+          <p:nvPr/>
+        </p:nvSpPr>
+        <p:spPr>
+          <a:xfrm>
+            <a:off x="411480" y="2939796"/>
+            <a:ext cx="4078224" cy="1815084"/>
+          </a:xfrm>
+          <a:prstGeom prst="roundRect">
+            <a:avLst>
+              <a:gd name="adj" fmla="val 3023"/>
+            </a:avLst>
+          </a:prstGeom>
+          <a:solidFill>
+            <a:srgbClr val="F8FAFC"/>
+          </a:solidFill>
+          <a:ln w="9525">
+            <a:solidFill>
+              <a:srgbClr val="E2E8F0"/>
+            </a:solidFill>
+            <a:prstDash val="solid"/>
+          </a:ln>
+          <a:effectLst>
+            <a:outerShdw blurRad="76200" dist="12700" dir="5400000" algn="bl" rotWithShape="0">
+              <a:srgbClr val="000000">
+                <a:alpha val="7000"/>
+              </a:srgbClr>
+            </a:outerShdw>
+          </a:effectLst>
+        </p:spPr>
+        <p:txBody>
+          <a:bodyPr/>
+          <a:lstStyle/>
+          <a:p>
+            <a:endParaRPr lang="en-US"/>
+          </a:p>
+        </p:txBody>
+      </p:sp>
+      <p:sp>
+        <p:nvSpPr>
+          <p:cNvPr id="12" name="Text 8"/>
+          <p:cNvSpPr/>
+          <p:nvPr/>
+        </p:nvSpPr>
+        <p:spPr>
+          <a:xfrm>
+            <a:off x="594360" y="3012948"/>
+            <a:ext cx="3712464" cy="228600"/>
+          </a:xfrm>
+          <a:prstGeom prst="rect">
+            <a:avLst/>
+          </a:prstGeom>
+          <a:noFill/>
+          <a:ln/>
+        </p:spPr>
+        <p:txBody>
+          <a:bodyPr wrap="square" lIns="0" tIns="0" rIns="0" bIns="0" rtlCol="0" anchor="ctr"/>
+          <a:lstStyle/>
+          <a:p>
+            <a:pPr marL="0" indent="0" algn="l">
+              <a:buNone/>
+            </a:pPr>
+            <a:r>
+              <a:rPr lang="en-US" sz="1100" b="1" kern="0" spc="150" dirty="0">
+                <a:solidFill>
+                  <a:srgbClr val="1E293B"/>
+                </a:solidFill>
+                <a:latin typeface="Calibri" pitchFamily="34" charset="0"/>
+                <a:ea typeface="Calibri" pitchFamily="34" charset="-122"/>
+                <a:cs typeface="Calibri" pitchFamily="34" charset="-120"/>
+              </a:rPr>
+              <a:t>Recall@10</a:t>
+            </a:r>
+            <a:endParaRPr lang="en-US" sz="1100" dirty="0"/>
+          </a:p>
+        </p:txBody>
+      </p:sp>
+      <p:graphicFrame>
+        <p:nvGraphicFramePr>
+          <p:cNvPr id="13" name="Chart 2"/>
+          <p:cNvGraphicFramePr/>
+          <p:nvPr/>
+        </p:nvGraphicFramePr>
+        <p:xfrm>
+          <a:off x="502920" y="3250692"/>
+          <a:ext cx="3895344" cy="1403604"/>
+        </p:xfrm>
+        <a:graphic>
+          <a:graphicData uri="http://schemas.openxmlformats.org/drawingml/2006/chart">
+            <c:chart xmlns:c="http://schemas.openxmlformats.org/drawingml/2006/chart" xmlns:r="http://schemas.openxmlformats.org/officeDocument/2006/relationships" r:id="rId5"/>
+          </a:graphicData>
+        </a:graphic>
+      </p:graphicFrame>
+      <p:sp>
+        <p:nvSpPr>
+          <p:cNvPr id="14" name="Shape 9"/>
+          <p:cNvSpPr/>
+          <p:nvPr/>
+        </p:nvSpPr>
+        <p:spPr>
+          <a:xfrm>
+            <a:off x="4654296" y="2939796"/>
+            <a:ext cx="4078224" cy="1815084"/>
+          </a:xfrm>
+          <a:prstGeom prst="roundRect">
+            <a:avLst>
+              <a:gd name="adj" fmla="val 3023"/>
+            </a:avLst>
+          </a:prstGeom>
+          <a:solidFill>
+            <a:srgbClr val="F8FAFC"/>
+          </a:solidFill>
+          <a:ln w="9525">
+            <a:solidFill>
+              <a:srgbClr val="E2E8F0"/>
+            </a:solidFill>
+            <a:prstDash val="solid"/>
+          </a:ln>
+          <a:effectLst>
+            <a:outerShdw blurRad="76200" dist="12700" dir="5400000" algn="bl" rotWithShape="0">
+              <a:srgbClr val="000000">
+                <a:alpha val="7000"/>
+              </a:srgbClr>
+            </a:outerShdw>
+          </a:effectLst>
+        </p:spPr>
+        <p:txBody>
+          <a:bodyPr/>
+          <a:lstStyle/>
+          <a:p>
+            <a:endParaRPr lang="en-US"/>
+          </a:p>
+        </p:txBody>
+      </p:sp>
+      <p:sp>
+        <p:nvSpPr>
+          <p:cNvPr id="15" name="Text 10"/>
+          <p:cNvSpPr/>
+          <p:nvPr/>
+        </p:nvSpPr>
+        <p:spPr>
+          <a:xfrm>
+            <a:off x="4837176" y="3012948"/>
+            <a:ext cx="3712464" cy="228600"/>
+          </a:xfrm>
+          <a:prstGeom prst="rect">
+            <a:avLst/>
+          </a:prstGeom>
+          <a:noFill/>
+          <a:ln/>
+        </p:spPr>
+        <p:txBody>
+          <a:bodyPr wrap="square" lIns="0" tIns="0" rIns="0" bIns="0" rtlCol="0" anchor="ctr"/>
+          <a:lstStyle/>
+          <a:p>
+            <a:pPr marL="0" indent="0" algn="l">
+              <a:buNone/>
+            </a:pPr>
+            <a:r>
+              <a:rPr lang="en-US" sz="1100" b="1" kern="0" spc="150" dirty="0">
+                <a:solidFill>
+                  <a:srgbClr val="1E293B"/>
+                </a:solidFill>
+                <a:latin typeface="Calibri" pitchFamily="34" charset="0"/>
+                <a:ea typeface="Calibri" pitchFamily="34" charset="-122"/>
+                <a:cs typeface="Calibri" pitchFamily="34" charset="-120"/>
+              </a:rPr>
+              <a:t>P@10</a:t>
+            </a:r>
+            <a:endParaRPr lang="en-US" sz="1100" dirty="0"/>
+          </a:p>
+        </p:txBody>
+      </p:sp>
+      <p:graphicFrame>
+        <p:nvGraphicFramePr>
+          <p:cNvPr id="16" name="Chart 3"/>
+          <p:cNvGraphicFramePr/>
+          <p:nvPr/>
+        </p:nvGraphicFramePr>
+        <p:xfrm>
+          <a:off x="4745736" y="3250692"/>
+          <a:ext cx="3895344" cy="1403604"/>
+        </p:xfrm>
+        <a:graphic>
+          <a:graphicData uri="http://schemas.openxmlformats.org/drawingml/2006/chart">
+            <c:chart xmlns:c="http://schemas.openxmlformats.org/drawingml/2006/chart" xmlns:r="http://schemas.openxmlformats.org/officeDocument/2006/relationships" r:id="rId6"/>
+          </a:graphicData>
+        </a:graphic>
+      </p:graphicFrame>
+      <p:pic>
+        <p:nvPicPr>
+          <p:cNvPr id="17" name="Image 0" descr="D:\repos\kb-semantic-search-benchmark\thesis\scripts\_logo_hex.png"/>
+          <p:cNvPicPr>
+            <a:picLocks noChangeAspect="1"/>
+          </p:cNvPicPr>
+          <p:nvPr/>
+        </p:nvPicPr>
+        <p:blipFill>
+          <a:blip r:embed="rId7"/>
+          <a:stretch>
+            <a:fillRect/>
+          </a:stretch>
+        </p:blipFill>
+        <p:spPr>
+          <a:xfrm>
+            <a:off x="411480" y="4686300"/>
+            <a:ext cx="502920" cy="338328"/>
+          </a:xfrm>
+          <a:prstGeom prst="rect">
+            <a:avLst/>
+          </a:prstGeom>
+        </p:spPr>
+      </p:pic>
+      <p:sp>
+        <p:nvSpPr>
+          <p:cNvPr id="18" name="Text 11"/>
+          <p:cNvSpPr/>
+          <p:nvPr/>
+        </p:nvSpPr>
+        <p:spPr>
+          <a:xfrm>
+            <a:off x="7955280" y="4850892"/>
+            <a:ext cx="960120" cy="228600"/>
+          </a:xfrm>
+          <a:prstGeom prst="rect">
+            <a:avLst/>
+          </a:prstGeom>
+          <a:noFill/>
+          <a:ln/>
+        </p:spPr>
+        <p:txBody>
+          <a:bodyPr wrap="square" lIns="0" tIns="0" rIns="0" bIns="0" rtlCol="0" anchor="ctr"/>
+          <a:lstStyle/>
+          <a:p>
+            <a:pPr marL="0" indent="0" algn="r">
+              <a:buNone/>
+            </a:pPr>
+            <a:r>
+              <a:rPr lang="en-US" sz="900" dirty="0">
+                <a:solidFill>
+                  <a:srgbClr val="64748B"/>
+                </a:solidFill>
+                <a:latin typeface="Calibri" pitchFamily="34" charset="0"/>
+                <a:ea typeface="Calibri" pitchFamily="34" charset="-122"/>
+                <a:cs typeface="Calibri" pitchFamily="34" charset="-120"/>
+              </a:rPr>
+              <a:t>13 / 17</a:t>
+            </a:r>
+            <a:endParaRPr lang="en-US" sz="900" dirty="0"/>
+          </a:p>
+        </p:txBody>
+      </p:sp>
+    </p:spTree>
+  </p:cSld>
+  <p:clrMapOvr>
+    <a:masterClrMapping/>
+  </p:clrMapOvr>
+</p:sld>
+</file>
+
+<file path=ppt/slides/slide14.xml><?xml version="1.0" encoding="utf-8"?>
 <p:sld xmlns:a="http://schemas.openxmlformats.org/drawingml/2006/main" xmlns:r="http://schemas.openxmlformats.org/officeDocument/2006/relationships" xmlns:p="http://schemas.openxmlformats.org/presentationml/2006/main">
   <p:cSld name="Slide 15">
     <p:bg>
@@ -16856,7 +15962,7 @@
                 <a:ea typeface="Calibri" pitchFamily="34" charset="-122"/>
                 <a:cs typeface="Calibri" pitchFamily="34" charset="-120"/>
               </a:rPr>
-              <a:t>15 / 18</a:t>
+              <a:t>14 / 17</a:t>
             </a:r>
             <a:endParaRPr lang="en-US" sz="900" dirty="0"/>
           </a:p>
@@ -16870,7 +15976,7 @@
 </p:sld>
 </file>
 
-<file path=ppt/slides/slide16.xml><?xml version="1.0" encoding="utf-8"?>
+<file path=ppt/slides/slide15.xml><?xml version="1.0" encoding="utf-8"?>
 <p:sld xmlns:a="http://schemas.openxmlformats.org/drawingml/2006/main" xmlns:r="http://schemas.openxmlformats.org/officeDocument/2006/relationships" xmlns:p="http://schemas.openxmlformats.org/presentationml/2006/main">
   <p:cSld name="Slide 16">
     <p:bg>
@@ -18417,7 +17523,7 @@
                 <a:ea typeface="Calibri" pitchFamily="34" charset="-122"/>
                 <a:cs typeface="Calibri" pitchFamily="34" charset="-120"/>
               </a:rPr>
-              <a:t>16 / 18</a:t>
+              <a:t>15 / 17</a:t>
             </a:r>
             <a:endParaRPr lang="en-US" sz="900" dirty="0"/>
           </a:p>
@@ -18431,7 +17537,7 @@
 </p:sld>
 </file>
 
-<file path=ppt/slides/slide17.xml><?xml version="1.0" encoding="utf-8"?>
+<file path=ppt/slides/slide16.xml><?xml version="1.0" encoding="utf-8"?>
 <p:sld xmlns:a="http://schemas.openxmlformats.org/drawingml/2006/main" xmlns:r="http://schemas.openxmlformats.org/officeDocument/2006/relationships" xmlns:p="http://schemas.openxmlformats.org/presentationml/2006/main">
   <p:cSld name="Slide 18">
     <p:bg>
@@ -19694,7 +18800,7 @@
                 <a:ea typeface="Calibri" pitchFamily="34" charset="-122"/>
                 <a:cs typeface="Calibri" pitchFamily="34" charset="-120"/>
               </a:rPr>
-              <a:t>1</a:t>
+              <a:t>16 / 17</a:t>
             </a:r>
             <a:r>
               <a:rPr lang="uk-UA" sz="900" dirty="0">
@@ -19705,7 +18811,7 @@
                 <a:ea typeface="Calibri" pitchFamily="34" charset="-122"/>
                 <a:cs typeface="Calibri" pitchFamily="34" charset="-120"/>
               </a:rPr>
-              <a:t>7</a:t>
+              <a:t/>
             </a:r>
             <a:r>
               <a:rPr lang="en-US" sz="900" dirty="0">
@@ -19716,7 +18822,7 @@
                 <a:ea typeface="Calibri" pitchFamily="34" charset="-122"/>
                 <a:cs typeface="Calibri" pitchFamily="34" charset="-120"/>
               </a:rPr>
-              <a:t> / 18</a:t>
+              <a:t/>
             </a:r>
             <a:endParaRPr lang="en-US" sz="900" dirty="0"/>
           </a:p>
@@ -19735,7 +18841,7 @@
 </p:sld>
 </file>
 
-<file path=ppt/slides/slide18.xml><?xml version="1.0" encoding="utf-8"?>
+<file path=ppt/slides/slide17.xml><?xml version="1.0" encoding="utf-8"?>
 <p:sld xmlns:a="http://schemas.openxmlformats.org/drawingml/2006/main" xmlns:r="http://schemas.openxmlformats.org/officeDocument/2006/relationships" xmlns:p="http://schemas.openxmlformats.org/presentationml/2006/main">
   <p:cSld name="Slide 17">
     <p:bg>
@@ -20739,7 +19845,7 @@
                 <a:ea typeface="Calibri" pitchFamily="34" charset="-122"/>
                 <a:cs typeface="Calibri" pitchFamily="34" charset="-120"/>
               </a:rPr>
-              <a:t>1</a:t>
+              <a:t>17 / 17</a:t>
             </a:r>
             <a:r>
               <a:rPr lang="uk-UA" sz="900" dirty="0">
@@ -20750,7 +19856,7 @@
                 <a:ea typeface="Calibri" pitchFamily="34" charset="-122"/>
                 <a:cs typeface="Calibri" pitchFamily="34" charset="-120"/>
               </a:rPr>
-              <a:t>8</a:t>
+              <a:t/>
             </a:r>
             <a:r>
               <a:rPr lang="en-US" sz="900" dirty="0">
@@ -20761,7 +19867,7 @@
                 <a:ea typeface="Calibri" pitchFamily="34" charset="-122"/>
                 <a:cs typeface="Calibri" pitchFamily="34" charset="-120"/>
               </a:rPr>
-              <a:t> / 18</a:t>
+              <a:t/>
             </a:r>
             <a:endParaRPr lang="en-US" sz="900" dirty="0"/>
           </a:p>
@@ -22230,7 +21336,7 @@
                 <a:ea typeface="Calibri" pitchFamily="34" charset="-122"/>
                 <a:cs typeface="Calibri" pitchFamily="34" charset="-120"/>
               </a:rPr>
-              <a:t>02 / 18</a:t>
+              <a:t>02 / 17</a:t>
             </a:r>
             <a:endParaRPr lang="en-US" sz="900" dirty="0"/>
           </a:p>
@@ -23931,7 +23037,7 @@
                 <a:ea typeface="Calibri" pitchFamily="34" charset="-122"/>
                 <a:cs typeface="Calibri" pitchFamily="34" charset="-120"/>
               </a:rPr>
-              <a:t>03 / 18</a:t>
+              <a:t>03 / 17</a:t>
             </a:r>
             <a:endParaRPr lang="en-US" sz="900" dirty="0"/>
           </a:p>
@@ -25341,7 +24447,7 @@
                 <a:ea typeface="Calibri" pitchFamily="34" charset="-122"/>
                 <a:cs typeface="Calibri" pitchFamily="34" charset="-120"/>
               </a:rPr>
-              <a:t>04 / 18</a:t>
+              <a:t>04 / 17</a:t>
             </a:r>
             <a:endParaRPr lang="en-US" sz="900" dirty="0"/>
           </a:p>
@@ -25471,6 +24577,17 @@
               <a:buNone/>
             </a:pPr>
             <a:r>
+              <a:rPr lang="uk-UA" sz="2200" b="1" dirty="0">
+                <a:solidFill>
+                  <a:srgbClr val="0F172A"/>
+                </a:solidFill>
+                <a:latin typeface="Calibri" pitchFamily="34" charset="0"/>
+                <a:ea typeface="Calibri" pitchFamily="34" charset="-122"/>
+                <a:cs typeface="Calibri" pitchFamily="34" charset="-120"/>
+              </a:rPr>
+              <a:t>Обрані</a:t>
+            </a:r>
+            <a:r>
               <a:rPr lang="en-US" sz="2200" b="1" dirty="0">
                 <a:solidFill>
                   <a:srgbClr val="0F172A"/>
@@ -25479,7 +24596,7 @@
                 <a:ea typeface="Calibri" pitchFamily="34" charset="-122"/>
                 <a:cs typeface="Calibri" pitchFamily="34" charset="-120"/>
               </a:rPr>
-              <a:t>Сучасні моделі векторних ембеддінгів</a:t>
+              <a:t> моделі векторних ембеддінгів</a:t>
             </a:r>
             <a:endParaRPr lang="en-US" sz="2200" dirty="0"/>
           </a:p>
@@ -27375,7 +26492,7 @@
                 <a:ea typeface="Calibri" pitchFamily="34" charset="-122"/>
                 <a:cs typeface="Calibri" pitchFamily="34" charset="-120"/>
               </a:rPr>
-              <a:t>05 / 18</a:t>
+              <a:t>05 / 17</a:t>
             </a:r>
             <a:endParaRPr lang="en-US" sz="900" dirty="0"/>
           </a:p>
@@ -29166,7 +28283,7 @@
                 <a:ea typeface="Calibri" pitchFamily="34" charset="-122"/>
                 <a:cs typeface="Calibri" pitchFamily="34" charset="-120"/>
               </a:rPr>
-              <a:t>06 / 18</a:t>
+              <a:t>06 / 17</a:t>
             </a:r>
             <a:endParaRPr lang="en-US" sz="900" dirty="0"/>
           </a:p>
@@ -30603,7 +29720,7 @@
                 <a:ea typeface="Calibri" pitchFamily="34" charset="-122"/>
                 <a:cs typeface="Calibri" pitchFamily="34" charset="-120"/>
               </a:rPr>
-              <a:t>07 / 18</a:t>
+              <a:t>07 / 17</a:t>
             </a:r>
             <a:endParaRPr lang="en-US" sz="900" dirty="0"/>
           </a:p>
@@ -33422,7 +32539,7 @@
                 <a:ea typeface="Calibri" pitchFamily="34" charset="-122"/>
                 <a:cs typeface="Calibri" pitchFamily="34" charset="-120"/>
               </a:rPr>
-              <a:t>08 / 18</a:t>
+              <a:t>08 / 17</a:t>
             </a:r>
             <a:endParaRPr lang="en-US" sz="900" dirty="0"/>
           </a:p>
@@ -35194,7 +34311,7 @@
                 <a:ea typeface="Calibri" pitchFamily="34" charset="-122"/>
                 <a:cs typeface="Calibri" pitchFamily="34" charset="-120"/>
               </a:rPr>
-              <a:t>09 / 18</a:t>
+              <a:t>09 / 17</a:t>
             </a:r>
             <a:endParaRPr lang="en-US" sz="900" dirty="0"/>
           </a:p>

--- a/thesis/2026_М_ПІ_ІПЗм-24-1_Нестеренко_В_В.pptx
+++ b/thesis/2026_М_ПІ_ІПЗм-24-1_Нестеренко_В_В.pptx
@@ -1964,680 +1964,6 @@
             <a:defRPr sz="800">
               <a:solidFill>
                 <a:srgbClr val="475569"/>
-              </a:solidFill>
-              <a:latin typeface="Calibri"/>
-              <a:cs typeface="Calibri"/>
-            </a:defRPr>
-          </a:pPr>
-          <a:endParaRPr lang="en-US"/>
-        </a:p>
-      </c:txPr>
-    </c:legend>
-    <c:plotVisOnly val="1"/>
-    <c:dispBlanksAs val="span"/>
-    <c:showDLblsOverMax val="1"/>
-  </c:chart>
-  <c:spPr>
-    <a:solidFill>
-      <a:srgbClr val="F8FAFC"/>
-    </a:solidFill>
-    <a:ln>
-      <a:noFill/>
-    </a:ln>
-    <a:effectLst/>
-  </c:spPr>
-  <c:externalData r:id="rId1">
-    <c:autoUpdate val="0"/>
-  </c:externalData>
-</c:chartSpace>
-</file>
-
-<file path=ppt/charts/chart4.xml><?xml version="1.0" encoding="utf-8"?>
-<c:chartSpace xmlns:c="http://schemas.openxmlformats.org/drawingml/2006/chart" xmlns:a="http://schemas.openxmlformats.org/drawingml/2006/main" xmlns:r="http://schemas.openxmlformats.org/officeDocument/2006/relationships" xmlns:c16r2="http://schemas.microsoft.com/office/drawing/2015/06/chart">
-  <c:date1904 val="0"/>
-  <c:lang val="en-US"/>
-  <c:roundedCorners val="1"/>
-  <c:style val="2"/>
-  <c:chart>
-    <c:autoTitleDeleted val="1"/>
-    <c:plotArea>
-      <c:layout/>
-      <c:barChart>
-        <c:barDir val="col"/>
-        <c:grouping val="clustered"/>
-        <c:varyColors val="0"/>
-        <c:ser>
-          <c:idx val="0"/>
-          <c:order val="0"/>
-          <c:tx>
-            <c:strRef>
-              <c:f>Sheet1!$B$1</c:f>
-              <c:strCache>
-                <c:ptCount val="1"/>
-                <c:pt idx="0">
-                  <c:v>BGE-M3</c:v>
-                </c:pt>
-              </c:strCache>
-            </c:strRef>
-          </c:tx>
-          <c:spPr>
-            <a:solidFill>
-              <a:srgbClr val="F59E0B"/>
-            </a:solidFill>
-            <a:effectLst/>
-          </c:spPr>
-          <c:invertIfNegative val="0"/>
-          <c:dLbls>
-            <c:numFmt formatCode="0.000" sourceLinked="0"/>
-            <c:spPr>
-              <a:noFill/>
-              <a:ln>
-                <a:noFill/>
-              </a:ln>
-              <a:effectLst/>
-            </c:spPr>
-            <c:txPr>
-              <a:bodyPr/>
-              <a:lstStyle/>
-              <a:p>
-                <a:pPr>
-                  <a:defRPr sz="800" b="0" i="0" u="none" strike="noStrike">
-                    <a:solidFill>
-                      <a:srgbClr val="1E293B"/>
-                    </a:solidFill>
-                    <a:latin typeface="Calibri"/>
-                  </a:defRPr>
-                </a:pPr>
-                <a:endParaRPr lang="en-US"/>
-              </a:p>
-            </c:txPr>
-            <c:showLegendKey val="0"/>
-            <c:showVal val="1"/>
-            <c:showCatName val="0"/>
-            <c:showSerName val="0"/>
-            <c:showPercent val="0"/>
-            <c:showBubbleSize val="0"/>
-            <c:showLeaderLines val="0"/>
-            <c:extLst>
-              <c:ext xmlns:c15="http://schemas.microsoft.com/office/drawing/2012/chart" uri="{CE6537A1-D6FC-4f65-9D91-7224C49458BB}">
-                <c15:showLeaderLines val="0"/>
-              </c:ext>
-            </c:extLst>
-          </c:dLbls>
-          <c:cat>
-            <c:strRef>
-              <c:f>Sheet1!$A$2:$A$4</c:f>
-              <c:strCache>
-                <c:ptCount val="3"/>
-                <c:pt idx="0">
-                  <c:v>Технічний</c:v>
-                </c:pt>
-                <c:pt idx="1">
-                  <c:v>Юридичний</c:v>
-                </c:pt>
-                <c:pt idx="2">
-                  <c:v>Медичний</c:v>
-                </c:pt>
-              </c:strCache>
-            </c:strRef>
-          </c:cat>
-          <c:val>
-            <c:numRef>
-              <c:f>Sheet1!$B$2:$B$4</c:f>
-              <c:numCache>
-                <c:formatCode>General</c:formatCode>
-                <c:ptCount val="3"/>
-                <c:pt idx="0">
-                  <c:v>0.67220000000000002</c:v>
-                </c:pt>
-                <c:pt idx="1">
-                  <c:v>0.30649999999999999</c:v>
-                </c:pt>
-                <c:pt idx="2">
-                  <c:v>0.43390000000000001</c:v>
-                </c:pt>
-              </c:numCache>
-            </c:numRef>
-          </c:val>
-          <c:extLst>
-            <c:ext xmlns:c16="http://schemas.microsoft.com/office/drawing/2014/chart" uri="{C3380CC4-5D6E-409C-BE32-E72D297353CC}">
-              <c16:uniqueId val="{00000000-2943-4127-A631-8D360886C949}"/>
-            </c:ext>
-          </c:extLst>
-        </c:ser>
-        <c:ser>
-          <c:idx val="1"/>
-          <c:order val="1"/>
-          <c:tx>
-            <c:strRef>
-              <c:f>Sheet1!$C$1</c:f>
-              <c:strCache>
-                <c:ptCount val="1"/>
-                <c:pt idx="0">
-                  <c:v>Qwen3</c:v>
-                </c:pt>
-              </c:strCache>
-            </c:strRef>
-          </c:tx>
-          <c:spPr>
-            <a:solidFill>
-              <a:srgbClr val="1E40AF"/>
-            </a:solidFill>
-            <a:effectLst/>
-          </c:spPr>
-          <c:invertIfNegative val="0"/>
-          <c:dLbls>
-            <c:numFmt formatCode="0.000" sourceLinked="0"/>
-            <c:spPr>
-              <a:noFill/>
-              <a:ln>
-                <a:noFill/>
-              </a:ln>
-              <a:effectLst/>
-            </c:spPr>
-            <c:txPr>
-              <a:bodyPr/>
-              <a:lstStyle/>
-              <a:p>
-                <a:pPr>
-                  <a:defRPr sz="800" b="0" i="0" u="none" strike="noStrike">
-                    <a:solidFill>
-                      <a:srgbClr val="1E293B"/>
-                    </a:solidFill>
-                    <a:latin typeface="Calibri"/>
-                  </a:defRPr>
-                </a:pPr>
-                <a:endParaRPr lang="en-US"/>
-              </a:p>
-            </c:txPr>
-            <c:showLegendKey val="0"/>
-            <c:showVal val="1"/>
-            <c:showCatName val="0"/>
-            <c:showSerName val="0"/>
-            <c:showPercent val="0"/>
-            <c:showBubbleSize val="0"/>
-            <c:showLeaderLines val="0"/>
-            <c:extLst>
-              <c:ext xmlns:c15="http://schemas.microsoft.com/office/drawing/2012/chart" uri="{CE6537A1-D6FC-4f65-9D91-7224C49458BB}">
-                <c15:showLeaderLines val="0"/>
-              </c:ext>
-            </c:extLst>
-          </c:dLbls>
-          <c:cat>
-            <c:strRef>
-              <c:f>Sheet1!$A$2:$A$4</c:f>
-              <c:strCache>
-                <c:ptCount val="3"/>
-                <c:pt idx="0">
-                  <c:v>Технічний</c:v>
-                </c:pt>
-                <c:pt idx="1">
-                  <c:v>Юридичний</c:v>
-                </c:pt>
-                <c:pt idx="2">
-                  <c:v>Медичний</c:v>
-                </c:pt>
-              </c:strCache>
-            </c:strRef>
-          </c:cat>
-          <c:val>
-            <c:numRef>
-              <c:f>Sheet1!$C$2:$C$4</c:f>
-              <c:numCache>
-                <c:formatCode>General</c:formatCode>
-                <c:ptCount val="3"/>
-                <c:pt idx="0">
-                  <c:v>0.63249999999999995</c:v>
-                </c:pt>
-                <c:pt idx="1">
-                  <c:v>0.31990000000000002</c:v>
-                </c:pt>
-                <c:pt idx="2">
-                  <c:v>0.3629</c:v>
-                </c:pt>
-              </c:numCache>
-            </c:numRef>
-          </c:val>
-          <c:extLst>
-            <c:ext xmlns:c16="http://schemas.microsoft.com/office/drawing/2014/chart" uri="{C3380CC4-5D6E-409C-BE32-E72D297353CC}">
-              <c16:uniqueId val="{00000001-2943-4127-A631-8D360886C949}"/>
-            </c:ext>
-          </c:extLst>
-        </c:ser>
-        <c:ser>
-          <c:idx val="2"/>
-          <c:order val="2"/>
-          <c:tx>
-            <c:strRef>
-              <c:f>Sheet1!$D$1</c:f>
-              <c:strCache>
-                <c:ptCount val="1"/>
-                <c:pt idx="0">
-                  <c:v>E5-base</c:v>
-                </c:pt>
-              </c:strCache>
-            </c:strRef>
-          </c:tx>
-          <c:spPr>
-            <a:solidFill>
-              <a:srgbClr val="0891B2"/>
-            </a:solidFill>
-            <a:effectLst/>
-          </c:spPr>
-          <c:invertIfNegative val="0"/>
-          <c:dLbls>
-            <c:numFmt formatCode="0.000" sourceLinked="0"/>
-            <c:spPr>
-              <a:noFill/>
-              <a:ln>
-                <a:noFill/>
-              </a:ln>
-              <a:effectLst/>
-            </c:spPr>
-            <c:txPr>
-              <a:bodyPr/>
-              <a:lstStyle/>
-              <a:p>
-                <a:pPr>
-                  <a:defRPr sz="800" b="0" i="0" u="none" strike="noStrike">
-                    <a:solidFill>
-                      <a:srgbClr val="1E293B"/>
-                    </a:solidFill>
-                    <a:latin typeface="Calibri"/>
-                  </a:defRPr>
-                </a:pPr>
-                <a:endParaRPr lang="en-US"/>
-              </a:p>
-            </c:txPr>
-            <c:showLegendKey val="0"/>
-            <c:showVal val="1"/>
-            <c:showCatName val="0"/>
-            <c:showSerName val="0"/>
-            <c:showPercent val="0"/>
-            <c:showBubbleSize val="0"/>
-            <c:showLeaderLines val="0"/>
-            <c:extLst>
-              <c:ext xmlns:c15="http://schemas.microsoft.com/office/drawing/2012/chart" uri="{CE6537A1-D6FC-4f65-9D91-7224C49458BB}">
-                <c15:showLeaderLines val="0"/>
-              </c:ext>
-            </c:extLst>
-          </c:dLbls>
-          <c:cat>
-            <c:strRef>
-              <c:f>Sheet1!$A$2:$A$4</c:f>
-              <c:strCache>
-                <c:ptCount val="3"/>
-                <c:pt idx="0">
-                  <c:v>Технічний</c:v>
-                </c:pt>
-                <c:pt idx="1">
-                  <c:v>Юридичний</c:v>
-                </c:pt>
-                <c:pt idx="2">
-                  <c:v>Медичний</c:v>
-                </c:pt>
-              </c:strCache>
-            </c:strRef>
-          </c:cat>
-          <c:val>
-            <c:numRef>
-              <c:f>Sheet1!$D$2:$D$4</c:f>
-              <c:numCache>
-                <c:formatCode>General</c:formatCode>
-                <c:ptCount val="3"/>
-                <c:pt idx="0">
-                  <c:v>0.61209999999999998</c:v>
-                </c:pt>
-                <c:pt idx="1">
-                  <c:v>0.25669999999999998</c:v>
-                </c:pt>
-                <c:pt idx="2">
-                  <c:v>0.39090000000000003</c:v>
-                </c:pt>
-              </c:numCache>
-            </c:numRef>
-          </c:val>
-          <c:extLst>
-            <c:ext xmlns:c16="http://schemas.microsoft.com/office/drawing/2014/chart" uri="{C3380CC4-5D6E-409C-BE32-E72D297353CC}">
-              <c16:uniqueId val="{00000002-2943-4127-A631-8D360886C949}"/>
-            </c:ext>
-          </c:extLst>
-        </c:ser>
-        <c:ser>
-          <c:idx val="3"/>
-          <c:order val="3"/>
-          <c:tx>
-            <c:strRef>
-              <c:f>Sheet1!$E$1</c:f>
-              <c:strCache>
-                <c:ptCount val="1"/>
-                <c:pt idx="0">
-                  <c:v>BM25</c:v>
-                </c:pt>
-              </c:strCache>
-            </c:strRef>
-          </c:tx>
-          <c:spPr>
-            <a:solidFill>
-              <a:srgbClr val="64748B"/>
-            </a:solidFill>
-            <a:effectLst/>
-          </c:spPr>
-          <c:invertIfNegative val="0"/>
-          <c:dLbls>
-            <c:numFmt formatCode="0.000" sourceLinked="0"/>
-            <c:spPr>
-              <a:noFill/>
-              <a:ln>
-                <a:noFill/>
-              </a:ln>
-              <a:effectLst/>
-            </c:spPr>
-            <c:txPr>
-              <a:bodyPr/>
-              <a:lstStyle/>
-              <a:p>
-                <a:pPr>
-                  <a:defRPr sz="800" b="0" i="0" u="none" strike="noStrike">
-                    <a:solidFill>
-                      <a:srgbClr val="1E293B"/>
-                    </a:solidFill>
-                    <a:latin typeface="Calibri"/>
-                  </a:defRPr>
-                </a:pPr>
-                <a:endParaRPr lang="en-US"/>
-              </a:p>
-            </c:txPr>
-            <c:showLegendKey val="0"/>
-            <c:showVal val="1"/>
-            <c:showCatName val="0"/>
-            <c:showSerName val="0"/>
-            <c:showPercent val="0"/>
-            <c:showBubbleSize val="0"/>
-            <c:showLeaderLines val="0"/>
-            <c:extLst>
-              <c:ext xmlns:c15="http://schemas.microsoft.com/office/drawing/2012/chart" uri="{CE6537A1-D6FC-4f65-9D91-7224C49458BB}">
-                <c15:showLeaderLines val="0"/>
-              </c:ext>
-            </c:extLst>
-          </c:dLbls>
-          <c:cat>
-            <c:strRef>
-              <c:f>Sheet1!$A$2:$A$4</c:f>
-              <c:strCache>
-                <c:ptCount val="3"/>
-                <c:pt idx="0">
-                  <c:v>Технічний</c:v>
-                </c:pt>
-                <c:pt idx="1">
-                  <c:v>Юридичний</c:v>
-                </c:pt>
-                <c:pt idx="2">
-                  <c:v>Медичний</c:v>
-                </c:pt>
-              </c:strCache>
-            </c:strRef>
-          </c:cat>
-          <c:val>
-            <c:numRef>
-              <c:f>Sheet1!$E$2:$E$4</c:f>
-              <c:numCache>
-                <c:formatCode>General</c:formatCode>
-                <c:ptCount val="3"/>
-                <c:pt idx="0">
-                  <c:v>0.48609999999999998</c:v>
-                </c:pt>
-                <c:pt idx="1">
-                  <c:v>0.1875</c:v>
-                </c:pt>
-                <c:pt idx="2">
-                  <c:v>0.32219999999999999</c:v>
-                </c:pt>
-              </c:numCache>
-            </c:numRef>
-          </c:val>
-          <c:extLst>
-            <c:ext xmlns:c16="http://schemas.microsoft.com/office/drawing/2014/chart" uri="{C3380CC4-5D6E-409C-BE32-E72D297353CC}">
-              <c16:uniqueId val="{00000003-2943-4127-A631-8D360886C949}"/>
-            </c:ext>
-          </c:extLst>
-        </c:ser>
-        <c:ser>
-          <c:idx val="4"/>
-          <c:order val="4"/>
-          <c:tx>
-            <c:strRef>
-              <c:f>Sheet1!$F$1</c:f>
-              <c:strCache>
-                <c:ptCount val="1"/>
-                <c:pt idx="0">
-                  <c:v>nomic</c:v>
-                </c:pt>
-              </c:strCache>
-            </c:strRef>
-          </c:tx>
-          <c:spPr>
-            <a:solidFill>
-              <a:srgbClr val="7C3AED"/>
-            </a:solidFill>
-            <a:effectLst/>
-          </c:spPr>
-          <c:invertIfNegative val="0"/>
-          <c:dLbls>
-            <c:numFmt formatCode="0.000" sourceLinked="0"/>
-            <c:spPr>
-              <a:noFill/>
-              <a:ln>
-                <a:noFill/>
-              </a:ln>
-              <a:effectLst/>
-            </c:spPr>
-            <c:txPr>
-              <a:bodyPr/>
-              <a:lstStyle/>
-              <a:p>
-                <a:pPr>
-                  <a:defRPr sz="800" b="0" i="0" u="none" strike="noStrike">
-                    <a:solidFill>
-                      <a:srgbClr val="1E293B"/>
-                    </a:solidFill>
-                    <a:latin typeface="Calibri"/>
-                  </a:defRPr>
-                </a:pPr>
-                <a:endParaRPr lang="en-US"/>
-              </a:p>
-            </c:txPr>
-            <c:showLegendKey val="0"/>
-            <c:showVal val="1"/>
-            <c:showCatName val="0"/>
-            <c:showSerName val="0"/>
-            <c:showPercent val="0"/>
-            <c:showBubbleSize val="0"/>
-            <c:showLeaderLines val="0"/>
-            <c:extLst>
-              <c:ext xmlns:c15="http://schemas.microsoft.com/office/drawing/2012/chart" uri="{CE6537A1-D6FC-4f65-9D91-7224C49458BB}">
-                <c15:showLeaderLines val="0"/>
-              </c:ext>
-            </c:extLst>
-          </c:dLbls>
-          <c:cat>
-            <c:strRef>
-              <c:f>Sheet1!$A$2:$A$4</c:f>
-              <c:strCache>
-                <c:ptCount val="3"/>
-                <c:pt idx="0">
-                  <c:v>Технічний</c:v>
-                </c:pt>
-                <c:pt idx="1">
-                  <c:v>Юридичний</c:v>
-                </c:pt>
-                <c:pt idx="2">
-                  <c:v>Медичний</c:v>
-                </c:pt>
-              </c:strCache>
-            </c:strRef>
-          </c:cat>
-          <c:val>
-            <c:numRef>
-              <c:f>Sheet1!$F$2:$F$4</c:f>
-              <c:numCache>
-                <c:formatCode>General</c:formatCode>
-                <c:ptCount val="3"/>
-                <c:pt idx="0">
-                  <c:v>0.3765</c:v>
-                </c:pt>
-                <c:pt idx="1">
-                  <c:v>9.5100000000000004E-2</c:v>
-                </c:pt>
-                <c:pt idx="2">
-                  <c:v>0.1668</c:v>
-                </c:pt>
-              </c:numCache>
-            </c:numRef>
-          </c:val>
-          <c:extLst>
-            <c:ext xmlns:c16="http://schemas.microsoft.com/office/drawing/2014/chart" uri="{C3380CC4-5D6E-409C-BE32-E72D297353CC}">
-              <c16:uniqueId val="{00000004-2943-4127-A631-8D360886C949}"/>
-            </c:ext>
-          </c:extLst>
-        </c:ser>
-        <c:dLbls>
-          <c:showLegendKey val="0"/>
-          <c:showVal val="1"/>
-          <c:showCatName val="0"/>
-          <c:showSerName val="0"/>
-          <c:showPercent val="0"/>
-          <c:showBubbleSize val="0"/>
-        </c:dLbls>
-        <c:gapWidth val="150"/>
-        <c:axId val="2094734554"/>
-        <c:axId val="2094734552"/>
-      </c:barChart>
-      <c:catAx>
-        <c:axId val="2094734554"/>
-        <c:scaling>
-          <c:orientation val="minMax"/>
-        </c:scaling>
-        <c:delete val="0"/>
-        <c:axPos val="b"/>
-        <c:numFmt formatCode="General" sourceLinked="1"/>
-        <c:majorTickMark val="out"/>
-        <c:minorTickMark val="none"/>
-        <c:tickLblPos val="low"/>
-        <c:spPr>
-          <a:ln w="12700" cap="flat">
-            <a:solidFill>
-              <a:srgbClr val="888888"/>
-            </a:solidFill>
-            <a:prstDash val="solid"/>
-            <a:round/>
-          </a:ln>
-        </c:spPr>
-        <c:txPr>
-          <a:bodyPr/>
-          <a:lstStyle/>
-          <a:p>
-            <a:pPr>
-              <a:defRPr sz="1000" b="0" i="0" u="none" strike="noStrike">
-                <a:solidFill>
-                  <a:srgbClr val="1E293B"/>
-                </a:solidFill>
-                <a:latin typeface="Calibri"/>
-              </a:defRPr>
-            </a:pPr>
-            <a:endParaRPr lang="en-US"/>
-          </a:p>
-        </c:txPr>
-        <c:crossAx val="2094734552"/>
-        <c:crosses val="autoZero"/>
-        <c:auto val="1"/>
-        <c:lblAlgn val="ctr"/>
-        <c:lblOffset val="100"/>
-        <c:noMultiLvlLbl val="1"/>
-      </c:catAx>
-      <c:valAx>
-        <c:axId val="2094734552"/>
-        <c:scaling>
-          <c:orientation val="minMax"/>
-          <c:max val="0.75"/>
-          <c:min val="0"/>
-        </c:scaling>
-        <c:delete val="0"/>
-        <c:axPos val="l"/>
-        <c:majorGridlines>
-          <c:spPr>
-            <a:ln w="6350" cap="flat">
-              <a:solidFill>
-                <a:srgbClr val="E2E8F0"/>
-              </a:solidFill>
-              <a:prstDash val="solid"/>
-              <a:round/>
-            </a:ln>
-          </c:spPr>
-        </c:majorGridlines>
-        <c:numFmt formatCode="General" sourceLinked="0"/>
-        <c:majorTickMark val="out"/>
-        <c:minorTickMark val="none"/>
-        <c:tickLblPos val="nextTo"/>
-        <c:spPr>
-          <a:ln w="12700" cap="flat">
-            <a:solidFill>
-              <a:srgbClr val="888888"/>
-            </a:solidFill>
-            <a:prstDash val="solid"/>
-            <a:round/>
-          </a:ln>
-        </c:spPr>
-        <c:txPr>
-          <a:bodyPr/>
-          <a:lstStyle/>
-          <a:p>
-            <a:pPr>
-              <a:defRPr sz="900" b="0" i="0" u="none" strike="noStrike">
-                <a:solidFill>
-                  <a:srgbClr val="475569"/>
-                </a:solidFill>
-                <a:latin typeface="Calibri"/>
-              </a:defRPr>
-            </a:pPr>
-            <a:endParaRPr lang="en-US"/>
-          </a:p>
-        </c:txPr>
-        <c:crossAx val="2094734554"/>
-        <c:crosses val="autoZero"/>
-        <c:crossBetween val="between"/>
-      </c:valAx>
-      <c:spPr>
-        <a:solidFill>
-          <a:srgbClr val="F8FAFC"/>
-        </a:solidFill>
-        <a:ln>
-          <a:noFill/>
-        </a:ln>
-        <a:effectLst/>
-      </c:spPr>
-    </c:plotArea>
-    <c:legend>
-      <c:legendPos val="b"/>
-      <c:layout>
-        <c:manualLayout>
-          <c:xMode val="edge"/>
-          <c:yMode val="edge"/>
-          <c:x val="0.22877350372187083"/>
-          <c:y val="0.92613188976377958"/>
-          <c:w val="0.54245299255625834"/>
-          <c:h val="7.3868110236220474E-2"/>
-        </c:manualLayout>
-      </c:layout>
-      <c:overlay val="0"/>
-      <c:txPr>
-        <a:bodyPr/>
-        <a:lstStyle/>
-        <a:p>
-          <a:pPr>
-            <a:defRPr sz="1000">
-              <a:solidFill>
-                <a:srgbClr val="1E293B"/>
               </a:solidFill>
               <a:latin typeface="Calibri"/>
               <a:cs typeface="Calibri"/>
@@ -5704,111 +5030,6 @@
 </p:notes>
 </file>
 
-<file path=ppt/notesSlides/notesSlide13.xml><?xml version="1.0" encoding="utf-8"?>
-<p:notes xmlns:a="http://schemas.openxmlformats.org/drawingml/2006/main" xmlns:r="http://schemas.openxmlformats.org/officeDocument/2006/relationships" xmlns:p="http://schemas.openxmlformats.org/presentationml/2006/main">
-  <p:cSld>
-    <p:spTree>
-      <p:nvGrpSpPr>
-        <p:cNvPr id="1" name=""/>
-        <p:cNvGrpSpPr/>
-        <p:nvPr/>
-      </p:nvGrpSpPr>
-      <p:grpSpPr>
-        <a:xfrm>
-          <a:off x="0" y="0"/>
-          <a:ext cx="0" cy="0"/>
-          <a:chOff x="0" y="0"/>
-          <a:chExt cx="0" cy="0"/>
-        </a:xfrm>
-      </p:grpSpPr>
-      <p:sp>
-        <p:nvSpPr>
-          <p:cNvPr id="2" name="Slide Image Placeholder 1"/>
-          <p:cNvSpPr>
-            <a:spLocks noGrp="1" noRot="1" noChangeAspect="1"/>
-          </p:cNvSpPr>
-          <p:nvPr>
-            <p:ph type="sldImg"/>
-          </p:nvPr>
-        </p:nvSpPr>
-        <p:spPr/>
-      </p:sp>
-      <p:sp>
-        <p:nvSpPr>
-          <p:cNvPr id="3" name="Notes Placeholder 2"/>
-          <p:cNvSpPr>
-            <a:spLocks noGrp="1"/>
-          </p:cNvSpPr>
-          <p:nvPr>
-            <p:ph type="body" idx="1"/>
-          </p:nvPr>
-        </p:nvSpPr>
-        <p:spPr/>
-        <p:txBody>
-          <a:bodyPr/>
-          <a:lstStyle/>
-          <a:p>
-            <a:r>
-              <a:t>⏱ 6:15 – 6:59  ·  слайд 13/18</a:t>
-            </a:r>
-            <a:endParaRPr lang="en-US" dirty="0"/>
-          </a:p>
-          <a:p>
-            <a:endParaRPr lang="en-US" dirty="0"/>
-          </a:p>
-          <a:p>
-            <a:r>
-              <a:t>Що дав запуск benchmark на 300 запитах? Головні результати. У таблиці — середнє nDCG@10 по трьох доменах. Перше — BGE-M3 з 0.4708. Друге — Qwen3 з 0.4385. Третє — E5-base з 0.4199. Четверте — BM25 з 0.3319. Останнє — nomic з 0.2128, навіть нижче BM25.</a:t>
-            </a:r>
-          </a:p>
-          <a:p>
-            <a:r>
-              <a:t>Ключовий висновок: три з чотирьох embedding-моделей перевершують BM25.</a:t>
-            </a:r>
-          </a:p>
-          <a:p>
-            <a:r>
-              <a:t>Статистична значущість підтверджена бутстрепом (2000 вибірок). На технічному домені 95% CI для BGE-M3 — 0.606–0.737, для BM25 — 0.431–0.541. Інтервали не перетинаються — перевага семантичного пошуку статистично значуща.</a:t>
-            </a:r>
-          </a:p>
-        </p:txBody>
-      </p:sp>
-      <p:sp>
-        <p:nvSpPr>
-          <p:cNvPr id="4" name="Slide Number Placeholder 3"/>
-          <p:cNvSpPr>
-            <a:spLocks noGrp="1"/>
-          </p:cNvSpPr>
-          <p:nvPr>
-            <p:ph type="sldNum" sz="quarter" idx="10"/>
-          </p:nvPr>
-        </p:nvSpPr>
-        <p:spPr/>
-        <p:txBody>
-          <a:bodyPr/>
-          <a:lstStyle/>
-          <a:p>
-            <a:fld id="{F7021451-1387-4CA6-816F-3879F97B5CBC}" type="slidenum">
-              <a:rPr lang="en-US"/>
-              <a:t>13</a:t>
-            </a:fld>
-            <a:endParaRPr lang="en-US"/>
-          </a:p>
-        </p:txBody>
-      </p:sp>
-    </p:spTree>
-    <p:extLst>
-      <p:ext uri="{BB962C8B-B14F-4D97-AF65-F5344CB8AC3E}">
-        <p14:creationId xmlns:p14="http://schemas.microsoft.com/office/powerpoint/2010/main" val="1024086991"/>
-      </p:ext>
-    </p:extLst>
-  </p:cSld>
-  <p:clrMapOvr>
-    <a:masterClrMapping/>
-  </p:clrMapOvr>
-</p:notes>
-</file>
-
 <file path=ppt/notesSlides/notesSlide14.xml><?xml version="1.0" encoding="utf-8"?>
 <p:notes xmlns:a="http://schemas.openxmlformats.org/drawingml/2006/main" xmlns:r="http://schemas.openxmlformats.org/officeDocument/2006/relationships" xmlns:p="http://schemas.openxmlformats.org/presentationml/2006/main">
   <p:cSld>
@@ -14346,591 +13567,6 @@
 </p:sld>
 </file>
 
-<file path=ppt/slides/slide13.xml><?xml version="1.0" encoding="utf-8"?>
-<p:sld xmlns:a="http://schemas.openxmlformats.org/drawingml/2006/main" xmlns:r="http://schemas.openxmlformats.org/officeDocument/2006/relationships" xmlns:p="http://schemas.openxmlformats.org/presentationml/2006/main">
-  <p:cSld name="Slide 14">
-    <p:bg>
-      <p:bgPr>
-        <a:solidFill>
-          <a:srgbClr val="FFFFFF"/>
-        </a:solidFill>
-        <a:effectLst/>
-      </p:bgPr>
-    </p:bg>
-    <p:spTree>
-      <p:nvGrpSpPr>
-        <p:cNvPr id="1" name=""/>
-        <p:cNvGrpSpPr/>
-        <p:nvPr/>
-      </p:nvGrpSpPr>
-      <p:grpSpPr>
-        <a:xfrm>
-          <a:off x="0" y="0"/>
-          <a:ext cx="0" cy="0"/>
-          <a:chOff x="0" y="0"/>
-          <a:chExt cx="0" cy="0"/>
-        </a:xfrm>
-      </p:grpSpPr>
-      <p:sp>
-        <p:nvSpPr>
-          <p:cNvPr id="2" name="Text 0"/>
-          <p:cNvSpPr/>
-          <p:nvPr/>
-        </p:nvSpPr>
-        <p:spPr>
-          <a:xfrm>
-            <a:off x="411480" y="91440"/>
-            <a:ext cx="8321040" cy="182880"/>
-          </a:xfrm>
-          <a:prstGeom prst="rect">
-            <a:avLst/>
-          </a:prstGeom>
-          <a:noFill/>
-          <a:ln/>
-        </p:spPr>
-        <p:txBody>
-          <a:bodyPr wrap="square" lIns="0" tIns="0" rIns="0" bIns="0" rtlCol="0" anchor="ctr"/>
-          <a:lstStyle/>
-          <a:p>
-            <a:pPr marL="0" indent="0" algn="l">
-              <a:buNone/>
-            </a:pPr>
-            <a:r>
-              <a:rPr lang="en-US" sz="850" b="1" kern="0" spc="300" dirty="0">
-                <a:solidFill>
-                  <a:srgbClr val="64748B"/>
-                </a:solidFill>
-                <a:latin typeface="Calibri" pitchFamily="34" charset="0"/>
-                <a:ea typeface="Calibri" pitchFamily="34" charset="-122"/>
-                <a:cs typeface="Calibri" pitchFamily="34" charset="-120"/>
-              </a:rPr>
-              <a:t>РОЗДІЛ 8 · РЕЗУЛЬТАТИ ЕКСПЕРИМЕНТУ</a:t>
-            </a:r>
-            <a:endParaRPr lang="en-US" sz="850" dirty="0"/>
-          </a:p>
-        </p:txBody>
-      </p:sp>
-      <p:sp>
-        <p:nvSpPr>
-          <p:cNvPr id="3" name="Shape 1"/>
-          <p:cNvSpPr/>
-          <p:nvPr/>
-        </p:nvSpPr>
-        <p:spPr>
-          <a:xfrm>
-            <a:off x="411480" y="420624"/>
-            <a:ext cx="201168" cy="201168"/>
-          </a:xfrm>
-          <a:prstGeom prst="ellipse">
-            <a:avLst/>
-          </a:prstGeom>
-          <a:solidFill>
-            <a:srgbClr val="F59E0B"/>
-          </a:solidFill>
-          <a:ln/>
-        </p:spPr>
-        <p:txBody>
-          <a:bodyPr/>
-          <a:lstStyle/>
-          <a:p>
-            <a:endParaRPr lang="en-US"/>
-          </a:p>
-        </p:txBody>
-      </p:sp>
-      <p:sp>
-        <p:nvSpPr>
-          <p:cNvPr id="4" name="Text 2"/>
-          <p:cNvSpPr/>
-          <p:nvPr/>
-        </p:nvSpPr>
-        <p:spPr>
-          <a:xfrm>
-            <a:off x="722376" y="292608"/>
-            <a:ext cx="6858000" cy="502920"/>
-          </a:xfrm>
-          <a:prstGeom prst="rect">
-            <a:avLst/>
-          </a:prstGeom>
-          <a:noFill/>
-          <a:ln/>
-        </p:spPr>
-        <p:txBody>
-          <a:bodyPr wrap="square" lIns="0" tIns="0" rIns="0" bIns="0" rtlCol="0" anchor="ctr"/>
-          <a:lstStyle/>
-          <a:p>
-            <a:pPr marL="0" indent="0" algn="l">
-              <a:buNone/>
-            </a:pPr>
-            <a:r>
-              <a:rPr lang="en-US" sz="2200" b="1" dirty="0">
-                <a:solidFill>
-                  <a:srgbClr val="0F172A"/>
-                </a:solidFill>
-                <a:latin typeface="Calibri" pitchFamily="34" charset="0"/>
-                <a:ea typeface="Calibri" pitchFamily="34" charset="-122"/>
-                <a:cs typeface="Calibri" pitchFamily="34" charset="-120"/>
-              </a:rPr>
-              <a:t>Деталізовані метрики за доменами</a:t>
-            </a:r>
-            <a:endParaRPr lang="en-US" sz="2200" dirty="0"/>
-          </a:p>
-        </p:txBody>
-      </p:sp>
-      <p:sp>
-        <p:nvSpPr>
-          <p:cNvPr id="5" name="Shape 3"/>
-          <p:cNvSpPr/>
-          <p:nvPr/>
-        </p:nvSpPr>
-        <p:spPr>
-          <a:xfrm>
-            <a:off x="411480" y="960120"/>
-            <a:ext cx="4078224" cy="1815084"/>
-          </a:xfrm>
-          <a:prstGeom prst="roundRect">
-            <a:avLst>
-              <a:gd name="adj" fmla="val 3023"/>
-            </a:avLst>
-          </a:prstGeom>
-          <a:solidFill>
-            <a:srgbClr val="F8FAFC"/>
-          </a:solidFill>
-          <a:ln w="9525">
-            <a:solidFill>
-              <a:srgbClr val="E2E8F0"/>
-            </a:solidFill>
-            <a:prstDash val="solid"/>
-          </a:ln>
-          <a:effectLst>
-            <a:outerShdw blurRad="76200" dist="12700" dir="5400000" algn="bl" rotWithShape="0">
-              <a:srgbClr val="000000">
-                <a:alpha val="7000"/>
-              </a:srgbClr>
-            </a:outerShdw>
-          </a:effectLst>
-        </p:spPr>
-        <p:txBody>
-          <a:bodyPr/>
-          <a:lstStyle/>
-          <a:p>
-            <a:endParaRPr lang="en-US"/>
-          </a:p>
-        </p:txBody>
-      </p:sp>
-      <p:sp>
-        <p:nvSpPr>
-          <p:cNvPr id="6" name="Text 4"/>
-          <p:cNvSpPr/>
-          <p:nvPr/>
-        </p:nvSpPr>
-        <p:spPr>
-          <a:xfrm>
-            <a:off x="594360" y="1033272"/>
-            <a:ext cx="3712464" cy="228600"/>
-          </a:xfrm>
-          <a:prstGeom prst="rect">
-            <a:avLst/>
-          </a:prstGeom>
-          <a:noFill/>
-          <a:ln/>
-        </p:spPr>
-        <p:txBody>
-          <a:bodyPr wrap="square" lIns="0" tIns="0" rIns="0" bIns="0" rtlCol="0" anchor="ctr"/>
-          <a:lstStyle/>
-          <a:p>
-            <a:pPr marL="0" indent="0" algn="l">
-              <a:buNone/>
-            </a:pPr>
-            <a:r>
-              <a:rPr lang="en-US" sz="1100" b="1" kern="0" spc="150" dirty="0">
-                <a:solidFill>
-                  <a:srgbClr val="1E293B"/>
-                </a:solidFill>
-                <a:latin typeface="Calibri" pitchFamily="34" charset="0"/>
-                <a:ea typeface="Calibri" pitchFamily="34" charset="-122"/>
-                <a:cs typeface="Calibri" pitchFamily="34" charset="-120"/>
-              </a:rPr>
-              <a:t>nDCG@10</a:t>
-            </a:r>
-            <a:endParaRPr lang="en-US" sz="1100" dirty="0"/>
-          </a:p>
-        </p:txBody>
-      </p:sp>
-      <p:graphicFrame>
-        <p:nvGraphicFramePr>
-          <p:cNvPr id="7" name="Chart 0"/>
-          <p:cNvGraphicFramePr/>
-          <p:nvPr/>
-        </p:nvGraphicFramePr>
-        <p:xfrm>
-          <a:off x="502920" y="1271016"/>
-          <a:ext cx="3895344" cy="1403604"/>
-        </p:xfrm>
-        <a:graphic>
-          <a:graphicData uri="http://schemas.openxmlformats.org/drawingml/2006/chart">
-            <c:chart xmlns:c="http://schemas.openxmlformats.org/drawingml/2006/chart" xmlns:r="http://schemas.openxmlformats.org/officeDocument/2006/relationships" r:id="rId3"/>
-          </a:graphicData>
-        </a:graphic>
-      </p:graphicFrame>
-      <p:sp>
-        <p:nvSpPr>
-          <p:cNvPr id="8" name="Shape 5"/>
-          <p:cNvSpPr/>
-          <p:nvPr/>
-        </p:nvSpPr>
-        <p:spPr>
-          <a:xfrm>
-            <a:off x="4654296" y="960120"/>
-            <a:ext cx="4078224" cy="1815084"/>
-          </a:xfrm>
-          <a:prstGeom prst="roundRect">
-            <a:avLst>
-              <a:gd name="adj" fmla="val 3023"/>
-            </a:avLst>
-          </a:prstGeom>
-          <a:solidFill>
-            <a:srgbClr val="F8FAFC"/>
-          </a:solidFill>
-          <a:ln w="9525">
-            <a:solidFill>
-              <a:srgbClr val="E2E8F0"/>
-            </a:solidFill>
-            <a:prstDash val="solid"/>
-          </a:ln>
-          <a:effectLst>
-            <a:outerShdw blurRad="76200" dist="12700" dir="5400000" algn="bl" rotWithShape="0">
-              <a:srgbClr val="000000">
-                <a:alpha val="7000"/>
-              </a:srgbClr>
-            </a:outerShdw>
-          </a:effectLst>
-        </p:spPr>
-        <p:txBody>
-          <a:bodyPr/>
-          <a:lstStyle/>
-          <a:p>
-            <a:endParaRPr lang="en-US"/>
-          </a:p>
-        </p:txBody>
-      </p:sp>
-      <p:sp>
-        <p:nvSpPr>
-          <p:cNvPr id="9" name="Text 6"/>
-          <p:cNvSpPr/>
-          <p:nvPr/>
-        </p:nvSpPr>
-        <p:spPr>
-          <a:xfrm>
-            <a:off x="4837176" y="1033272"/>
-            <a:ext cx="3712464" cy="228600"/>
-          </a:xfrm>
-          <a:prstGeom prst="rect">
-            <a:avLst/>
-          </a:prstGeom>
-          <a:noFill/>
-          <a:ln/>
-        </p:spPr>
-        <p:txBody>
-          <a:bodyPr wrap="square" lIns="0" tIns="0" rIns="0" bIns="0" rtlCol="0" anchor="ctr"/>
-          <a:lstStyle/>
-          <a:p>
-            <a:pPr marL="0" indent="0" algn="l">
-              <a:buNone/>
-            </a:pPr>
-            <a:r>
-              <a:rPr lang="en-US" sz="1100" b="1" kern="0" spc="150" dirty="0">
-                <a:solidFill>
-                  <a:srgbClr val="1E293B"/>
-                </a:solidFill>
-                <a:latin typeface="Calibri" pitchFamily="34" charset="0"/>
-                <a:ea typeface="Calibri" pitchFamily="34" charset="-122"/>
-                <a:cs typeface="Calibri" pitchFamily="34" charset="-120"/>
-              </a:rPr>
-              <a:t>MRR@10</a:t>
-            </a:r>
-            <a:endParaRPr lang="en-US" sz="1100" dirty="0"/>
-          </a:p>
-        </p:txBody>
-      </p:sp>
-      <p:graphicFrame>
-        <p:nvGraphicFramePr>
-          <p:cNvPr id="10" name="Chart 1"/>
-          <p:cNvGraphicFramePr/>
-          <p:nvPr/>
-        </p:nvGraphicFramePr>
-        <p:xfrm>
-          <a:off x="4745736" y="1271016"/>
-          <a:ext cx="3895344" cy="1403604"/>
-        </p:xfrm>
-        <a:graphic>
-          <a:graphicData uri="http://schemas.openxmlformats.org/drawingml/2006/chart">
-            <c:chart xmlns:c="http://schemas.openxmlformats.org/drawingml/2006/chart" xmlns:r="http://schemas.openxmlformats.org/officeDocument/2006/relationships" r:id="rId4"/>
-          </a:graphicData>
-        </a:graphic>
-      </p:graphicFrame>
-      <p:sp>
-        <p:nvSpPr>
-          <p:cNvPr id="11" name="Shape 7"/>
-          <p:cNvSpPr/>
-          <p:nvPr/>
-        </p:nvSpPr>
-        <p:spPr>
-          <a:xfrm>
-            <a:off x="411480" y="2939796"/>
-            <a:ext cx="4078224" cy="1815084"/>
-          </a:xfrm>
-          <a:prstGeom prst="roundRect">
-            <a:avLst>
-              <a:gd name="adj" fmla="val 3023"/>
-            </a:avLst>
-          </a:prstGeom>
-          <a:solidFill>
-            <a:srgbClr val="F8FAFC"/>
-          </a:solidFill>
-          <a:ln w="9525">
-            <a:solidFill>
-              <a:srgbClr val="E2E8F0"/>
-            </a:solidFill>
-            <a:prstDash val="solid"/>
-          </a:ln>
-          <a:effectLst>
-            <a:outerShdw blurRad="76200" dist="12700" dir="5400000" algn="bl" rotWithShape="0">
-              <a:srgbClr val="000000">
-                <a:alpha val="7000"/>
-              </a:srgbClr>
-            </a:outerShdw>
-          </a:effectLst>
-        </p:spPr>
-        <p:txBody>
-          <a:bodyPr/>
-          <a:lstStyle/>
-          <a:p>
-            <a:endParaRPr lang="en-US"/>
-          </a:p>
-        </p:txBody>
-      </p:sp>
-      <p:sp>
-        <p:nvSpPr>
-          <p:cNvPr id="12" name="Text 8"/>
-          <p:cNvSpPr/>
-          <p:nvPr/>
-        </p:nvSpPr>
-        <p:spPr>
-          <a:xfrm>
-            <a:off x="594360" y="3012948"/>
-            <a:ext cx="3712464" cy="228600"/>
-          </a:xfrm>
-          <a:prstGeom prst="rect">
-            <a:avLst/>
-          </a:prstGeom>
-          <a:noFill/>
-          <a:ln/>
-        </p:spPr>
-        <p:txBody>
-          <a:bodyPr wrap="square" lIns="0" tIns="0" rIns="0" bIns="0" rtlCol="0" anchor="ctr"/>
-          <a:lstStyle/>
-          <a:p>
-            <a:pPr marL="0" indent="0" algn="l">
-              <a:buNone/>
-            </a:pPr>
-            <a:r>
-              <a:rPr lang="en-US" sz="1100" b="1" kern="0" spc="150" dirty="0">
-                <a:solidFill>
-                  <a:srgbClr val="1E293B"/>
-                </a:solidFill>
-                <a:latin typeface="Calibri" pitchFamily="34" charset="0"/>
-                <a:ea typeface="Calibri" pitchFamily="34" charset="-122"/>
-                <a:cs typeface="Calibri" pitchFamily="34" charset="-120"/>
-              </a:rPr>
-              <a:t>Recall@10</a:t>
-            </a:r>
-            <a:endParaRPr lang="en-US" sz="1100" dirty="0"/>
-          </a:p>
-        </p:txBody>
-      </p:sp>
-      <p:graphicFrame>
-        <p:nvGraphicFramePr>
-          <p:cNvPr id="13" name="Chart 2"/>
-          <p:cNvGraphicFramePr/>
-          <p:nvPr/>
-        </p:nvGraphicFramePr>
-        <p:xfrm>
-          <a:off x="502920" y="3250692"/>
-          <a:ext cx="3895344" cy="1403604"/>
-        </p:xfrm>
-        <a:graphic>
-          <a:graphicData uri="http://schemas.openxmlformats.org/drawingml/2006/chart">
-            <c:chart xmlns:c="http://schemas.openxmlformats.org/drawingml/2006/chart" xmlns:r="http://schemas.openxmlformats.org/officeDocument/2006/relationships" r:id="rId5"/>
-          </a:graphicData>
-        </a:graphic>
-      </p:graphicFrame>
-      <p:sp>
-        <p:nvSpPr>
-          <p:cNvPr id="14" name="Shape 9"/>
-          <p:cNvSpPr/>
-          <p:nvPr/>
-        </p:nvSpPr>
-        <p:spPr>
-          <a:xfrm>
-            <a:off x="4654296" y="2939796"/>
-            <a:ext cx="4078224" cy="1815084"/>
-          </a:xfrm>
-          <a:prstGeom prst="roundRect">
-            <a:avLst>
-              <a:gd name="adj" fmla="val 3023"/>
-            </a:avLst>
-          </a:prstGeom>
-          <a:solidFill>
-            <a:srgbClr val="F8FAFC"/>
-          </a:solidFill>
-          <a:ln w="9525">
-            <a:solidFill>
-              <a:srgbClr val="E2E8F0"/>
-            </a:solidFill>
-            <a:prstDash val="solid"/>
-          </a:ln>
-          <a:effectLst>
-            <a:outerShdw blurRad="76200" dist="12700" dir="5400000" algn="bl" rotWithShape="0">
-              <a:srgbClr val="000000">
-                <a:alpha val="7000"/>
-              </a:srgbClr>
-            </a:outerShdw>
-          </a:effectLst>
-        </p:spPr>
-        <p:txBody>
-          <a:bodyPr/>
-          <a:lstStyle/>
-          <a:p>
-            <a:endParaRPr lang="en-US"/>
-          </a:p>
-        </p:txBody>
-      </p:sp>
-      <p:sp>
-        <p:nvSpPr>
-          <p:cNvPr id="15" name="Text 10"/>
-          <p:cNvSpPr/>
-          <p:nvPr/>
-        </p:nvSpPr>
-        <p:spPr>
-          <a:xfrm>
-            <a:off x="4837176" y="3012948"/>
-            <a:ext cx="3712464" cy="228600"/>
-          </a:xfrm>
-          <a:prstGeom prst="rect">
-            <a:avLst/>
-          </a:prstGeom>
-          <a:noFill/>
-          <a:ln/>
-        </p:spPr>
-        <p:txBody>
-          <a:bodyPr wrap="square" lIns="0" tIns="0" rIns="0" bIns="0" rtlCol="0" anchor="ctr"/>
-          <a:lstStyle/>
-          <a:p>
-            <a:pPr marL="0" indent="0" algn="l">
-              <a:buNone/>
-            </a:pPr>
-            <a:r>
-              <a:rPr lang="en-US" sz="1100" b="1" kern="0" spc="150" dirty="0">
-                <a:solidFill>
-                  <a:srgbClr val="1E293B"/>
-                </a:solidFill>
-                <a:latin typeface="Calibri" pitchFamily="34" charset="0"/>
-                <a:ea typeface="Calibri" pitchFamily="34" charset="-122"/>
-                <a:cs typeface="Calibri" pitchFamily="34" charset="-120"/>
-              </a:rPr>
-              <a:t>P@10</a:t>
-            </a:r>
-            <a:endParaRPr lang="en-US" sz="1100" dirty="0"/>
-          </a:p>
-        </p:txBody>
-      </p:sp>
-      <p:graphicFrame>
-        <p:nvGraphicFramePr>
-          <p:cNvPr id="16" name="Chart 3"/>
-          <p:cNvGraphicFramePr/>
-          <p:nvPr/>
-        </p:nvGraphicFramePr>
-        <p:xfrm>
-          <a:off x="4745736" y="3250692"/>
-          <a:ext cx="3895344" cy="1403604"/>
-        </p:xfrm>
-        <a:graphic>
-          <a:graphicData uri="http://schemas.openxmlformats.org/drawingml/2006/chart">
-            <c:chart xmlns:c="http://schemas.openxmlformats.org/drawingml/2006/chart" xmlns:r="http://schemas.openxmlformats.org/officeDocument/2006/relationships" r:id="rId6"/>
-          </a:graphicData>
-        </a:graphic>
-      </p:graphicFrame>
-      <p:pic>
-        <p:nvPicPr>
-          <p:cNvPr id="17" name="Image 0" descr="D:\repos\kb-semantic-search-benchmark\thesis\scripts\_logo_hex.png"/>
-          <p:cNvPicPr>
-            <a:picLocks noChangeAspect="1"/>
-          </p:cNvPicPr>
-          <p:nvPr/>
-        </p:nvPicPr>
-        <p:blipFill>
-          <a:blip r:embed="rId7"/>
-          <a:stretch>
-            <a:fillRect/>
-          </a:stretch>
-        </p:blipFill>
-        <p:spPr>
-          <a:xfrm>
-            <a:off x="411480" y="4686300"/>
-            <a:ext cx="502920" cy="338328"/>
-          </a:xfrm>
-          <a:prstGeom prst="rect">
-            <a:avLst/>
-          </a:prstGeom>
-        </p:spPr>
-      </p:pic>
-      <p:sp>
-        <p:nvSpPr>
-          <p:cNvPr id="18" name="Text 11"/>
-          <p:cNvSpPr/>
-          <p:nvPr/>
-        </p:nvSpPr>
-        <p:spPr>
-          <a:xfrm>
-            <a:off x="7955280" y="4850892"/>
-            <a:ext cx="960120" cy="228600"/>
-          </a:xfrm>
-          <a:prstGeom prst="rect">
-            <a:avLst/>
-          </a:prstGeom>
-          <a:noFill/>
-          <a:ln/>
-        </p:spPr>
-        <p:txBody>
-          <a:bodyPr wrap="square" lIns="0" tIns="0" rIns="0" bIns="0" rtlCol="0" anchor="ctr"/>
-          <a:lstStyle/>
-          <a:p>
-            <a:pPr marL="0" indent="0" algn="r">
-              <a:buNone/>
-            </a:pPr>
-            <a:r>
-              <a:rPr lang="en-US" sz="900" dirty="0">
-                <a:solidFill>
-                  <a:srgbClr val="64748B"/>
-                </a:solidFill>
-                <a:latin typeface="Calibri" pitchFamily="34" charset="0"/>
-                <a:ea typeface="Calibri" pitchFamily="34" charset="-122"/>
-                <a:cs typeface="Calibri" pitchFamily="34" charset="-120"/>
-              </a:rPr>
-              <a:t>13 / 17</a:t>
-            </a:r>
-            <a:endParaRPr lang="en-US" sz="900" dirty="0"/>
-          </a:p>
-        </p:txBody>
-      </p:sp>
-    </p:spTree>
-  </p:cSld>
-  <p:clrMapOvr>
-    <a:masterClrMapping/>
-  </p:clrMapOvr>
-</p:sld>
-</file>
-
 <file path=ppt/slides/slide14.xml><?xml version="1.0" encoding="utf-8"?>
 <p:sld xmlns:a="http://schemas.openxmlformats.org/drawingml/2006/main" xmlns:r="http://schemas.openxmlformats.org/officeDocument/2006/relationships" xmlns:p="http://schemas.openxmlformats.org/presentationml/2006/main">
   <p:cSld name="Slide 15">
@@ -24577,7 +23213,7 @@
               <a:buNone/>
             </a:pPr>
             <a:r>
-              <a:rPr lang="uk-UA" sz="2200" b="1" dirty="0">
+              <a:rPr lang="en-US" sz="2200" b="1" dirty="0">
                 <a:solidFill>
                   <a:srgbClr val="0F172A"/>
                 </a:solidFill>
@@ -24585,18 +23221,7 @@
                 <a:ea typeface="Calibri" pitchFamily="34" charset="-122"/>
                 <a:cs typeface="Calibri" pitchFamily="34" charset="-120"/>
               </a:rPr>
-              <a:t>Обрані</a:t>
-            </a:r>
-            <a:r>
-              <a:rPr lang="en-US" sz="2200" b="1" dirty="0">
-                <a:solidFill>
-                  <a:srgbClr val="0F172A"/>
-                </a:solidFill>
-                <a:latin typeface="Calibri" pitchFamily="34" charset="0"/>
-                <a:ea typeface="Calibri" pitchFamily="34" charset="-122"/>
-                <a:cs typeface="Calibri" pitchFamily="34" charset="-120"/>
-              </a:rPr>
-              <a:t> моделі векторних ембеддінгів</a:t>
+              <a:t>Сучасні моделі векторних ембеддінгів</a:t>
             </a:r>
             <a:endParaRPr lang="en-US" sz="2200" dirty="0"/>
           </a:p>

--- a/thesis/2026_М_ПІ_ІПЗм-24-1_Нестеренко_В_В.pptx
+++ b/thesis/2026_М_ПІ_ІПЗм-24-1_Нестеренко_В_В.pptx
@@ -5,7 +5,7 @@
     <p:sldMasterId id="2147483648" r:id="rId1"/>
   </p:sldMasterIdLst>
   <p:notesMasterIdLst>
-    <p:notesMasterId r:id="rId20"/>
+    <p:notesMasterId r:id="rId19"/>
   </p:notesMasterIdLst>
   <p:sldIdLst>
     <p:sldId id="256" r:id="rId2"/>
@@ -20,11 +20,11 @@
     <p:sldId id="265" r:id="rId11"/>
     <p:sldId id="266" r:id="rId12"/>
     <p:sldId id="267" r:id="rId13"/>
-    <p:sldId id="269" r:id="rId15"/>
-    <p:sldId id="270" r:id="rId16"/>
-    <p:sldId id="271" r:id="rId17"/>
-    <p:sldId id="274" r:id="rId18"/>
-    <p:sldId id="272" r:id="rId19"/>
+    <p:sldId id="269" r:id="rId14"/>
+    <p:sldId id="270" r:id="rId15"/>
+    <p:sldId id="271" r:id="rId16"/>
+    <p:sldId id="274" r:id="rId17"/>
+    <p:sldId id="272" r:id="rId18"/>
   </p:sldIdLst>
   <p:sldSz cx="9144000" cy="5143500" type="screen16x9"/>
   <p:notesSz cx="5143500" cy="9144000"/>
@@ -659,329 +659,6 @@
 </c:chartSpace>
 </file>
 
-<file path=ppt/charts/chart10.xml><?xml version="1.0" encoding="utf-8"?>
-<c:chartSpace xmlns:c="http://schemas.openxmlformats.org/drawingml/2006/chart" xmlns:a="http://schemas.openxmlformats.org/drawingml/2006/main" xmlns:r="http://schemas.openxmlformats.org/officeDocument/2006/relationships" xmlns:c16r2="http://schemas.microsoft.com/office/drawing/2015/06/chart">
-  <c:date1904 val="0"/>
-  <c:lang val="en-US"/>
-  <c:roundedCorners val="1"/>
-  <c:style val="2"/>
-  <c:chart>
-    <c:autoTitleDeleted val="1"/>
-    <c:plotArea>
-      <c:layout/>
-      <c:scatterChart>
-        <c:scatterStyle val="lineMarker"/>
-        <c:varyColors val="0"/>
-        <c:ser>
-          <c:idx val="0"/>
-          <c:order val="0"/>
-          <c:tx>
-            <c:strRef>
-              <c:f>Sheet1!$B$1</c:f>
-              <c:strCache>
-                <c:ptCount val="1"/>
-                <c:pt idx="0">
-                  <c:v>nDCG@10</c:v>
-                </c:pt>
-              </c:strCache>
-            </c:strRef>
-          </c:tx>
-          <c:spPr>
-            <a:ln>
-              <a:noFill/>
-            </a:ln>
-            <a:effectLst/>
-          </c:spPr>
-          <c:marker>
-            <c:symbol val="circle"/>
-            <c:size val="14"/>
-            <c:spPr>
-              <a:solidFill>
-                <a:srgbClr val="1E40AF"/>
-              </a:solidFill>
-              <a:ln w="9525" cap="flat">
-                <a:solidFill>
-                  <a:srgbClr val="1E40AF"/>
-                </a:solidFill>
-                <a:prstDash val="solid"/>
-                <a:round/>
-              </a:ln>
-              <a:effectLst/>
-            </c:spPr>
-          </c:marker>
-          <c:xVal>
-            <c:numRef>
-              <c:f>Sheet1!$A$2:$A$6</c:f>
-              <c:numCache>
-                <c:formatCode>General</c:formatCode>
-                <c:ptCount val="5"/>
-                <c:pt idx="0">
-                  <c:v>0.4</c:v>
-                </c:pt>
-                <c:pt idx="1">
-                  <c:v>70.900000000000006</c:v>
-                </c:pt>
-                <c:pt idx="2">
-                  <c:v>124.8</c:v>
-                </c:pt>
-                <c:pt idx="3">
-                  <c:v>222.5</c:v>
-                </c:pt>
-                <c:pt idx="4">
-                  <c:v>463.4</c:v>
-                </c:pt>
-              </c:numCache>
-            </c:numRef>
-          </c:xVal>
-          <c:yVal>
-            <c:numRef>
-              <c:f>Sheet1!$B$2:$B$6</c:f>
-              <c:numCache>
-                <c:formatCode>General</c:formatCode>
-                <c:ptCount val="5"/>
-                <c:pt idx="0">
-                  <c:v>0.48609999999999998</c:v>
-                </c:pt>
-                <c:pt idx="1">
-                  <c:v>0.61209999999999998</c:v>
-                </c:pt>
-                <c:pt idx="2">
-                  <c:v>0.3765</c:v>
-                </c:pt>
-                <c:pt idx="3">
-                  <c:v>0.67220000000000002</c:v>
-                </c:pt>
-                <c:pt idx="4">
-                  <c:v>0.63249999999999995</c:v>
-                </c:pt>
-              </c:numCache>
-            </c:numRef>
-          </c:yVal>
-          <c:smooth val="0"/>
-          <c:extLst>
-            <c:ext xmlns:c16="http://schemas.microsoft.com/office/drawing/2014/chart" uri="{C3380CC4-5D6E-409C-BE32-E72D297353CC}">
-              <c16:uniqueId val="{00000000-2F12-4E1E-8CBB-62E4699DEDB3}"/>
-            </c:ext>
-          </c:extLst>
-        </c:ser>
-        <c:dLbls>
-          <c:showLegendKey val="0"/>
-          <c:showVal val="0"/>
-          <c:showCatName val="0"/>
-          <c:showSerName val="0"/>
-          <c:showPercent val="0"/>
-          <c:showBubbleSize val="0"/>
-        </c:dLbls>
-        <c:axId val="2094734554"/>
-        <c:axId val="2094734552"/>
-      </c:scatterChart>
-      <c:valAx>
-        <c:axId val="2094734554"/>
-        <c:scaling>
-          <c:orientation val="minMax"/>
-          <c:max val="500"/>
-          <c:min val="0"/>
-        </c:scaling>
-        <c:delete val="0"/>
-        <c:axPos val="b"/>
-        <c:majorGridlines>
-          <c:spPr>
-            <a:ln w="6350" cap="flat">
-              <a:solidFill>
-                <a:srgbClr val="E2E8F0"/>
-              </a:solidFill>
-              <a:prstDash val="solid"/>
-              <a:round/>
-            </a:ln>
-          </c:spPr>
-        </c:majorGridlines>
-        <c:title>
-          <c:tx>
-            <c:rich>
-              <a:bodyPr/>
-              <a:lstStyle/>
-              <a:p>
-                <a:pPr>
-                  <a:defRPr sz="900" b="0" i="0" u="none" strike="noStrike">
-                    <a:solidFill>
-                      <a:srgbClr val="475569"/>
-                    </a:solidFill>
-                    <a:latin typeface="Calibri"/>
-                  </a:defRPr>
-                </a:pPr>
-                <a:r>
-                  <a:rPr lang="en-US" sz="900" b="0" i="0" u="none" strike="noStrike">
-                    <a:solidFill>
-                      <a:srgbClr val="475569"/>
-                    </a:solidFill>
-                    <a:latin typeface="Calibri"/>
-                  </a:rPr>
-                  <a:t>ms / </a:t>
-                </a:r>
-                <a:r>
-                  <a:rPr lang="ru-RU" sz="900" b="0" i="0" u="none" strike="noStrike">
-                    <a:solidFill>
-                      <a:srgbClr val="475569"/>
-                    </a:solidFill>
-                    <a:latin typeface="Calibri"/>
-                  </a:rPr>
-                  <a:t>запит (нижче — краще)</a:t>
-                </a:r>
-              </a:p>
-            </c:rich>
-          </c:tx>
-          <c:overlay val="0"/>
-        </c:title>
-        <c:numFmt formatCode="General" sourceLinked="1"/>
-        <c:majorTickMark val="none"/>
-        <c:minorTickMark val="none"/>
-        <c:tickLblPos val="nextTo"/>
-        <c:spPr>
-          <a:ln w="12700" cap="flat">
-            <a:solidFill>
-              <a:srgbClr val="888888"/>
-            </a:solidFill>
-            <a:prstDash val="solid"/>
-            <a:round/>
-          </a:ln>
-        </c:spPr>
-        <c:txPr>
-          <a:bodyPr/>
-          <a:lstStyle/>
-          <a:p>
-            <a:pPr>
-              <a:defRPr sz="800" b="0" i="0" u="none" strike="noStrike">
-                <a:solidFill>
-                  <a:srgbClr val="475569"/>
-                </a:solidFill>
-                <a:latin typeface="Calibri"/>
-              </a:defRPr>
-            </a:pPr>
-            <a:endParaRPr lang="en-US"/>
-          </a:p>
-        </c:txPr>
-        <c:crossAx val="2094734552"/>
-        <c:crosses val="autoZero"/>
-        <c:crossBetween val="midCat"/>
-      </c:valAx>
-      <c:valAx>
-        <c:axId val="2094734552"/>
-        <c:scaling>
-          <c:orientation val="minMax"/>
-          <c:max val="0.8"/>
-          <c:min val="0"/>
-        </c:scaling>
-        <c:delete val="0"/>
-        <c:axPos val="l"/>
-        <c:majorGridlines>
-          <c:spPr>
-            <a:ln w="6350" cap="flat">
-              <a:solidFill>
-                <a:srgbClr val="E2E8F0"/>
-              </a:solidFill>
-              <a:prstDash val="solid"/>
-              <a:round/>
-            </a:ln>
-          </c:spPr>
-        </c:majorGridlines>
-        <c:title>
-          <c:tx>
-            <c:rich>
-              <a:bodyPr/>
-              <a:lstStyle/>
-              <a:p>
-                <a:pPr>
-                  <a:defRPr sz="900" b="0" i="0" u="none" strike="noStrike">
-                    <a:solidFill>
-                      <a:srgbClr val="475569"/>
-                    </a:solidFill>
-                    <a:latin typeface="Calibri"/>
-                  </a:defRPr>
-                </a:pPr>
-                <a:r>
-                  <a:rPr lang="en-US" sz="900" b="0" i="0" u="none" strike="noStrike">
-                    <a:solidFill>
-                      <a:srgbClr val="475569"/>
-                    </a:solidFill>
-                    <a:latin typeface="Calibri"/>
-                  </a:rPr>
-                  <a:t>nDCG@10 (</a:t>
-                </a:r>
-                <a:r>
-                  <a:rPr lang="ru-RU" sz="900" b="0" i="0" u="none" strike="noStrike">
-                    <a:solidFill>
-                      <a:srgbClr val="475569"/>
-                    </a:solidFill>
-                    <a:latin typeface="Calibri"/>
-                  </a:rPr>
-                  <a:t>вище — краще)</a:t>
-                </a:r>
-              </a:p>
-            </c:rich>
-          </c:tx>
-          <c:overlay val="0"/>
-        </c:title>
-        <c:numFmt formatCode="General" sourceLinked="0"/>
-        <c:majorTickMark val="none"/>
-        <c:minorTickMark val="none"/>
-        <c:tickLblPos val="nextTo"/>
-        <c:spPr>
-          <a:ln w="12700" cap="flat">
-            <a:solidFill>
-              <a:srgbClr val="888888"/>
-            </a:solidFill>
-            <a:prstDash val="solid"/>
-            <a:round/>
-          </a:ln>
-        </c:spPr>
-        <c:txPr>
-          <a:bodyPr/>
-          <a:lstStyle/>
-          <a:p>
-            <a:pPr>
-              <a:defRPr sz="800" b="0" i="0" u="none" strike="noStrike">
-                <a:solidFill>
-                  <a:srgbClr val="475569"/>
-                </a:solidFill>
-                <a:latin typeface="Calibri"/>
-              </a:defRPr>
-            </a:pPr>
-            <a:endParaRPr lang="en-US"/>
-          </a:p>
-        </c:txPr>
-        <c:crossAx val="2094734554"/>
-        <c:crosses val="autoZero"/>
-        <c:crossBetween val="midCat"/>
-      </c:valAx>
-      <c:spPr>
-        <a:solidFill>
-          <a:srgbClr val="F8FAFC"/>
-        </a:solidFill>
-        <a:ln>
-          <a:noFill/>
-        </a:ln>
-        <a:effectLst/>
-      </c:spPr>
-    </c:plotArea>
-    <c:plotVisOnly val="1"/>
-    <c:dispBlanksAs val="span"/>
-    <c:showDLblsOverMax val="1"/>
-  </c:chart>
-  <c:spPr>
-    <a:solidFill>
-      <a:srgbClr val="F8FAFC"/>
-    </a:solidFill>
-    <a:ln>
-      <a:noFill/>
-    </a:ln>
-    <a:effectLst/>
-  </c:spPr>
-  <c:externalData r:id="rId1">
-    <c:autoUpdate val="0"/>
-  </c:externalData>
-</c:chartSpace>
-</file>
-
 <file path=ppt/charts/chart2.xml><?xml version="1.0" encoding="utf-8"?>
 <c:chartSpace xmlns:c="http://schemas.openxmlformats.org/drawingml/2006/chart" xmlns:a="http://schemas.openxmlformats.org/drawingml/2006/main" xmlns:r="http://schemas.openxmlformats.org/officeDocument/2006/relationships" xmlns:c16r2="http://schemas.microsoft.com/office/drawing/2015/06/chart">
   <c:date1904 val="0"/>
@@ -1992,7 +1669,7 @@
 </c:chartSpace>
 </file>
 
-<file path=ppt/charts/chart5.xml><?xml version="1.0" encoding="utf-8"?>
+<file path=ppt/charts/chart4.xml><?xml version="1.0" encoding="utf-8"?>
 <c:chartSpace xmlns:c="http://schemas.openxmlformats.org/drawingml/2006/chart" xmlns:a="http://schemas.openxmlformats.org/drawingml/2006/main" xmlns:r="http://schemas.openxmlformats.org/officeDocument/2006/relationships" xmlns:c16r2="http://schemas.microsoft.com/office/drawing/2015/06/chart">
   <c:date1904 val="0"/>
   <c:lang val="en-US"/>
@@ -2471,7 +2148,7 @@
 </c:chartSpace>
 </file>
 
-<file path=ppt/charts/chart6.xml><?xml version="1.0" encoding="utf-8"?>
+<file path=ppt/charts/chart5.xml><?xml version="1.0" encoding="utf-8"?>
 <c:chartSpace xmlns:c="http://schemas.openxmlformats.org/drawingml/2006/chart" xmlns:a="http://schemas.openxmlformats.org/drawingml/2006/main" xmlns:r="http://schemas.openxmlformats.org/officeDocument/2006/relationships" xmlns:c16r2="http://schemas.microsoft.com/office/drawing/2015/06/chart">
   <c:date1904 val="0"/>
   <c:lang val="en-US"/>
@@ -2930,7 +2607,7 @@
 </c:chartSpace>
 </file>
 
-<file path=ppt/charts/chart7.xml><?xml version="1.0" encoding="utf-8"?>
+<file path=ppt/charts/chart6.xml><?xml version="1.0" encoding="utf-8"?>
 <c:chartSpace xmlns:c="http://schemas.openxmlformats.org/drawingml/2006/chart" xmlns:a="http://schemas.openxmlformats.org/drawingml/2006/main" xmlns:r="http://schemas.openxmlformats.org/officeDocument/2006/relationships" xmlns:c16r2="http://schemas.microsoft.com/office/drawing/2015/06/chart">
   <c:date1904 val="0"/>
   <c:lang val="en-US"/>
@@ -3389,7 +3066,7 @@
 </c:chartSpace>
 </file>
 
-<file path=ppt/charts/chart8.xml><?xml version="1.0" encoding="utf-8"?>
+<file path=ppt/charts/chart7.xml><?xml version="1.0" encoding="utf-8"?>
 <c:chartSpace xmlns:c="http://schemas.openxmlformats.org/drawingml/2006/chart" xmlns:a="http://schemas.openxmlformats.org/drawingml/2006/main" xmlns:r="http://schemas.openxmlformats.org/officeDocument/2006/relationships" xmlns:c16r2="http://schemas.microsoft.com/office/drawing/2015/06/chart">
   <c:date1904 val="0"/>
   <c:lang val="en-US"/>
@@ -3848,7 +3525,7 @@
 </c:chartSpace>
 </file>
 
-<file path=ppt/charts/chart9.xml><?xml version="1.0" encoding="utf-8"?>
+<file path=ppt/charts/chart8.xml><?xml version="1.0" encoding="utf-8"?>
 <c:chartSpace xmlns:c="http://schemas.openxmlformats.org/drawingml/2006/chart" xmlns:a="http://schemas.openxmlformats.org/drawingml/2006/main" xmlns:r="http://schemas.openxmlformats.org/officeDocument/2006/relationships" xmlns:c16r2="http://schemas.microsoft.com/office/drawing/2015/06/chart">
   <c:date1904 val="0"/>
   <c:lang val="en-US"/>
@@ -4522,6 +4199,329 @@
 </c:chartSpace>
 </file>
 
+<file path=ppt/charts/chart9.xml><?xml version="1.0" encoding="utf-8"?>
+<c:chartSpace xmlns:c="http://schemas.openxmlformats.org/drawingml/2006/chart" xmlns:a="http://schemas.openxmlformats.org/drawingml/2006/main" xmlns:r="http://schemas.openxmlformats.org/officeDocument/2006/relationships" xmlns:c16r2="http://schemas.microsoft.com/office/drawing/2015/06/chart">
+  <c:date1904 val="0"/>
+  <c:lang val="en-US"/>
+  <c:roundedCorners val="1"/>
+  <c:style val="2"/>
+  <c:chart>
+    <c:autoTitleDeleted val="1"/>
+    <c:plotArea>
+      <c:layout/>
+      <c:scatterChart>
+        <c:scatterStyle val="lineMarker"/>
+        <c:varyColors val="0"/>
+        <c:ser>
+          <c:idx val="0"/>
+          <c:order val="0"/>
+          <c:tx>
+            <c:strRef>
+              <c:f>Sheet1!$B$1</c:f>
+              <c:strCache>
+                <c:ptCount val="1"/>
+                <c:pt idx="0">
+                  <c:v>nDCG@10</c:v>
+                </c:pt>
+              </c:strCache>
+            </c:strRef>
+          </c:tx>
+          <c:spPr>
+            <a:ln>
+              <a:noFill/>
+            </a:ln>
+            <a:effectLst/>
+          </c:spPr>
+          <c:marker>
+            <c:symbol val="circle"/>
+            <c:size val="14"/>
+            <c:spPr>
+              <a:solidFill>
+                <a:srgbClr val="1E40AF"/>
+              </a:solidFill>
+              <a:ln w="9525" cap="flat">
+                <a:solidFill>
+                  <a:srgbClr val="1E40AF"/>
+                </a:solidFill>
+                <a:prstDash val="solid"/>
+                <a:round/>
+              </a:ln>
+              <a:effectLst/>
+            </c:spPr>
+          </c:marker>
+          <c:xVal>
+            <c:numRef>
+              <c:f>Sheet1!$A$2:$A$6</c:f>
+              <c:numCache>
+                <c:formatCode>General</c:formatCode>
+                <c:ptCount val="5"/>
+                <c:pt idx="0">
+                  <c:v>0.4</c:v>
+                </c:pt>
+                <c:pt idx="1">
+                  <c:v>70.900000000000006</c:v>
+                </c:pt>
+                <c:pt idx="2">
+                  <c:v>124.8</c:v>
+                </c:pt>
+                <c:pt idx="3">
+                  <c:v>222.5</c:v>
+                </c:pt>
+                <c:pt idx="4">
+                  <c:v>463.4</c:v>
+                </c:pt>
+              </c:numCache>
+            </c:numRef>
+          </c:xVal>
+          <c:yVal>
+            <c:numRef>
+              <c:f>Sheet1!$B$2:$B$6</c:f>
+              <c:numCache>
+                <c:formatCode>General</c:formatCode>
+                <c:ptCount val="5"/>
+                <c:pt idx="0">
+                  <c:v>0.48609999999999998</c:v>
+                </c:pt>
+                <c:pt idx="1">
+                  <c:v>0.61209999999999998</c:v>
+                </c:pt>
+                <c:pt idx="2">
+                  <c:v>0.3765</c:v>
+                </c:pt>
+                <c:pt idx="3">
+                  <c:v>0.67220000000000002</c:v>
+                </c:pt>
+                <c:pt idx="4">
+                  <c:v>0.63249999999999995</c:v>
+                </c:pt>
+              </c:numCache>
+            </c:numRef>
+          </c:yVal>
+          <c:smooth val="0"/>
+          <c:extLst>
+            <c:ext xmlns:c16="http://schemas.microsoft.com/office/drawing/2014/chart" uri="{C3380CC4-5D6E-409C-BE32-E72D297353CC}">
+              <c16:uniqueId val="{00000000-2F12-4E1E-8CBB-62E4699DEDB3}"/>
+            </c:ext>
+          </c:extLst>
+        </c:ser>
+        <c:dLbls>
+          <c:showLegendKey val="0"/>
+          <c:showVal val="0"/>
+          <c:showCatName val="0"/>
+          <c:showSerName val="0"/>
+          <c:showPercent val="0"/>
+          <c:showBubbleSize val="0"/>
+        </c:dLbls>
+        <c:axId val="2094734554"/>
+        <c:axId val="2094734552"/>
+      </c:scatterChart>
+      <c:valAx>
+        <c:axId val="2094734554"/>
+        <c:scaling>
+          <c:orientation val="minMax"/>
+          <c:max val="500"/>
+          <c:min val="0"/>
+        </c:scaling>
+        <c:delete val="0"/>
+        <c:axPos val="b"/>
+        <c:majorGridlines>
+          <c:spPr>
+            <a:ln w="6350" cap="flat">
+              <a:solidFill>
+                <a:srgbClr val="E2E8F0"/>
+              </a:solidFill>
+              <a:prstDash val="solid"/>
+              <a:round/>
+            </a:ln>
+          </c:spPr>
+        </c:majorGridlines>
+        <c:title>
+          <c:tx>
+            <c:rich>
+              <a:bodyPr/>
+              <a:lstStyle/>
+              <a:p>
+                <a:pPr>
+                  <a:defRPr sz="900" b="0" i="0" u="none" strike="noStrike">
+                    <a:solidFill>
+                      <a:srgbClr val="475569"/>
+                    </a:solidFill>
+                    <a:latin typeface="Calibri"/>
+                  </a:defRPr>
+                </a:pPr>
+                <a:r>
+                  <a:rPr lang="en-US" sz="900" b="0" i="0" u="none" strike="noStrike">
+                    <a:solidFill>
+                      <a:srgbClr val="475569"/>
+                    </a:solidFill>
+                    <a:latin typeface="Calibri"/>
+                  </a:rPr>
+                  <a:t>ms / </a:t>
+                </a:r>
+                <a:r>
+                  <a:rPr lang="ru-RU" sz="900" b="0" i="0" u="none" strike="noStrike">
+                    <a:solidFill>
+                      <a:srgbClr val="475569"/>
+                    </a:solidFill>
+                    <a:latin typeface="Calibri"/>
+                  </a:rPr>
+                  <a:t>запит (нижче — краще)</a:t>
+                </a:r>
+              </a:p>
+            </c:rich>
+          </c:tx>
+          <c:overlay val="0"/>
+        </c:title>
+        <c:numFmt formatCode="General" sourceLinked="1"/>
+        <c:majorTickMark val="none"/>
+        <c:minorTickMark val="none"/>
+        <c:tickLblPos val="nextTo"/>
+        <c:spPr>
+          <a:ln w="12700" cap="flat">
+            <a:solidFill>
+              <a:srgbClr val="888888"/>
+            </a:solidFill>
+            <a:prstDash val="solid"/>
+            <a:round/>
+          </a:ln>
+        </c:spPr>
+        <c:txPr>
+          <a:bodyPr/>
+          <a:lstStyle/>
+          <a:p>
+            <a:pPr>
+              <a:defRPr sz="800" b="0" i="0" u="none" strike="noStrike">
+                <a:solidFill>
+                  <a:srgbClr val="475569"/>
+                </a:solidFill>
+                <a:latin typeface="Calibri"/>
+              </a:defRPr>
+            </a:pPr>
+            <a:endParaRPr lang="en-US"/>
+          </a:p>
+        </c:txPr>
+        <c:crossAx val="2094734552"/>
+        <c:crosses val="autoZero"/>
+        <c:crossBetween val="midCat"/>
+      </c:valAx>
+      <c:valAx>
+        <c:axId val="2094734552"/>
+        <c:scaling>
+          <c:orientation val="minMax"/>
+          <c:max val="0.8"/>
+          <c:min val="0"/>
+        </c:scaling>
+        <c:delete val="0"/>
+        <c:axPos val="l"/>
+        <c:majorGridlines>
+          <c:spPr>
+            <a:ln w="6350" cap="flat">
+              <a:solidFill>
+                <a:srgbClr val="E2E8F0"/>
+              </a:solidFill>
+              <a:prstDash val="solid"/>
+              <a:round/>
+            </a:ln>
+          </c:spPr>
+        </c:majorGridlines>
+        <c:title>
+          <c:tx>
+            <c:rich>
+              <a:bodyPr/>
+              <a:lstStyle/>
+              <a:p>
+                <a:pPr>
+                  <a:defRPr sz="900" b="0" i="0" u="none" strike="noStrike">
+                    <a:solidFill>
+                      <a:srgbClr val="475569"/>
+                    </a:solidFill>
+                    <a:latin typeface="Calibri"/>
+                  </a:defRPr>
+                </a:pPr>
+                <a:r>
+                  <a:rPr lang="en-US" sz="900" b="0" i="0" u="none" strike="noStrike">
+                    <a:solidFill>
+                      <a:srgbClr val="475569"/>
+                    </a:solidFill>
+                    <a:latin typeface="Calibri"/>
+                  </a:rPr>
+                  <a:t>nDCG@10 (</a:t>
+                </a:r>
+                <a:r>
+                  <a:rPr lang="ru-RU" sz="900" b="0" i="0" u="none" strike="noStrike">
+                    <a:solidFill>
+                      <a:srgbClr val="475569"/>
+                    </a:solidFill>
+                    <a:latin typeface="Calibri"/>
+                  </a:rPr>
+                  <a:t>вище — краще)</a:t>
+                </a:r>
+              </a:p>
+            </c:rich>
+          </c:tx>
+          <c:overlay val="0"/>
+        </c:title>
+        <c:numFmt formatCode="General" sourceLinked="0"/>
+        <c:majorTickMark val="none"/>
+        <c:minorTickMark val="none"/>
+        <c:tickLblPos val="nextTo"/>
+        <c:spPr>
+          <a:ln w="12700" cap="flat">
+            <a:solidFill>
+              <a:srgbClr val="888888"/>
+            </a:solidFill>
+            <a:prstDash val="solid"/>
+            <a:round/>
+          </a:ln>
+        </c:spPr>
+        <c:txPr>
+          <a:bodyPr/>
+          <a:lstStyle/>
+          <a:p>
+            <a:pPr>
+              <a:defRPr sz="800" b="0" i="0" u="none" strike="noStrike">
+                <a:solidFill>
+                  <a:srgbClr val="475569"/>
+                </a:solidFill>
+                <a:latin typeface="Calibri"/>
+              </a:defRPr>
+            </a:pPr>
+            <a:endParaRPr lang="en-US"/>
+          </a:p>
+        </c:txPr>
+        <c:crossAx val="2094734554"/>
+        <c:crosses val="autoZero"/>
+        <c:crossBetween val="midCat"/>
+      </c:valAx>
+      <c:spPr>
+        <a:solidFill>
+          <a:srgbClr val="F8FAFC"/>
+        </a:solidFill>
+        <a:ln>
+          <a:noFill/>
+        </a:ln>
+        <a:effectLst/>
+      </c:spPr>
+    </c:plotArea>
+    <c:plotVisOnly val="1"/>
+    <c:dispBlanksAs val="span"/>
+    <c:showDLblsOverMax val="1"/>
+  </c:chart>
+  <c:spPr>
+    <a:solidFill>
+      <a:srgbClr val="F8FAFC"/>
+    </a:solidFill>
+    <a:ln>
+      <a:noFill/>
+    </a:ln>
+    <a:effectLst/>
+  </c:spPr>
+  <c:externalData r:id="rId1">
+    <c:autoUpdate val="0"/>
+  </c:externalData>
+</c:chartSpace>
+</file>
+
 <file path=ppt/notesMasters/notesMaster1.xml><?xml version="1.0" encoding="utf-8"?>
 <p:notesMaster xmlns:a="http://schemas.openxmlformats.org/drawingml/2006/main" xmlns:r="http://schemas.openxmlformats.org/officeDocument/2006/relationships" xmlns:p="http://schemas.openxmlformats.org/presentationml/2006/main">
   <p:cSld>
@@ -5030,6 +5030,98 @@
 </p:notes>
 </file>
 
+<file path=ppt/notesSlides/notesSlide13.xml><?xml version="1.0" encoding="utf-8"?>
+<p:notes xmlns:a="http://schemas.openxmlformats.org/drawingml/2006/main" xmlns:r="http://schemas.openxmlformats.org/officeDocument/2006/relationships" xmlns:p="http://schemas.openxmlformats.org/presentationml/2006/main">
+  <p:cSld>
+    <p:spTree>
+      <p:nvGrpSpPr>
+        <p:cNvPr id="1" name=""/>
+        <p:cNvGrpSpPr/>
+        <p:nvPr/>
+      </p:nvGrpSpPr>
+      <p:grpSpPr>
+        <a:xfrm>
+          <a:off x="0" y="0"/>
+          <a:ext cx="0" cy="0"/>
+          <a:chOff x="0" y="0"/>
+          <a:chExt cx="0" cy="0"/>
+        </a:xfrm>
+      </p:grpSpPr>
+      <p:sp>
+        <p:nvSpPr>
+          <p:cNvPr id="2" name="Slide Image Placeholder 1"/>
+          <p:cNvSpPr>
+            <a:spLocks noGrp="1" noRot="1" noChangeAspect="1"/>
+          </p:cNvSpPr>
+          <p:nvPr>
+            <p:ph type="sldImg"/>
+          </p:nvPr>
+        </p:nvSpPr>
+        <p:spPr/>
+      </p:sp>
+      <p:sp>
+        <p:nvSpPr>
+          <p:cNvPr id="3" name="Notes Placeholder 2"/>
+          <p:cNvSpPr>
+            <a:spLocks noGrp="1"/>
+          </p:cNvSpPr>
+          <p:nvPr>
+            <p:ph type="body" idx="1"/>
+          </p:nvPr>
+        </p:nvSpPr>
+        <p:spPr/>
+        <p:txBody>
+          <a:bodyPr/>
+          <a:lstStyle/>
+          <a:p>
+            <a:r>
+              <a:t>⏱ 6:45 – 7:11  ·  слайд 13/17</a:t>
+            </a:r>
+            <a:endParaRPr lang="en-US" dirty="0"/>
+          </a:p>
+          <a:p>
+            <a:r>
+              <a:t>За окремими доменами картина така. Деталізовані метрики у розрізі трьох доменів — nDCG, MRR, Recall, Precision. Лідерство BGE-M3 послідовне за всіма чотирма метриками — це підтверджує робастність результату. На юридичному домені усі моделі показують нижчі значення — він складніший через формальний стиль і вузькоспеціалізовану термінологію.</a:t>
+            </a:r>
+          </a:p>
+        </p:txBody>
+      </p:sp>
+      <p:sp>
+        <p:nvSpPr>
+          <p:cNvPr id="4" name="Slide Number Placeholder 3"/>
+          <p:cNvSpPr>
+            <a:spLocks noGrp="1"/>
+          </p:cNvSpPr>
+          <p:nvPr>
+            <p:ph type="sldNum" sz="quarter" idx="10"/>
+          </p:nvPr>
+        </p:nvSpPr>
+        <p:spPr/>
+        <p:txBody>
+          <a:bodyPr/>
+          <a:lstStyle/>
+          <a:p>
+            <a:fld id="{F7021451-1387-4CA6-816F-3879F97B5CBC}" type="slidenum">
+              <a:rPr lang="en-US"/>
+              <a:t>13</a:t>
+            </a:fld>
+            <a:endParaRPr lang="en-US"/>
+          </a:p>
+        </p:txBody>
+      </p:sp>
+    </p:spTree>
+    <p:extLst>
+      <p:ext uri="{BB962C8B-B14F-4D97-AF65-F5344CB8AC3E}">
+        <p14:creationId xmlns:p14="http://schemas.microsoft.com/office/powerpoint/2010/main" val="1024086991"/>
+      </p:ext>
+    </p:extLst>
+  </p:cSld>
+  <p:clrMapOvr>
+    <a:masterClrMapping/>
+  </p:clrMapOvr>
+</p:notes>
+</file>
+
 <file path=ppt/notesSlides/notesSlide14.xml><?xml version="1.0" encoding="utf-8"?>
 <p:notes xmlns:a="http://schemas.openxmlformats.org/drawingml/2006/main" xmlns:r="http://schemas.openxmlformats.org/officeDocument/2006/relationships" xmlns:p="http://schemas.openxmlformats.org/presentationml/2006/main">
   <p:cSld>
@@ -5075,13 +5167,13 @@
           <a:lstStyle/>
           <a:p>
             <a:r>
-              <a:t>⏱ 6:45 – 7:11  ·  слайд 13/17</a:t>
+              <a:t>⏱ 7:11 – 7:51  ·  слайд 14/17</a:t>
             </a:r>
             <a:endParaRPr lang="en-US" dirty="0"/>
           </a:p>
           <a:p>
             <a:r>
-              <a:t>За окремими доменами картина така. Деталізовані метрики у розрізі трьох доменів — nDCG, MRR, Recall, Precision. Лідерство BGE-M3 послідовне за всіма чотирма метриками — це підтверджує робастність результату. На юридичному домені усі моделі показують нижчі значення — він складніший через формальний стиль і вузькоспеціалізовану термінологію.</a:t>
+              <a:t>Переходимо до інтегральної оцінки. Результати багатокритеріального вибору. Парето-оптимальна множина — BGE-M3, E5-base та BM25: три з п'яти моделей не домінуються жодною. BGE-M3 — лідер за nDCG, MRR, Recall на технічному і медичному доменах. E5-base — швидка альтернатива: 70 мілісекунд проти 228 у BGE-M3, тобто у три рази швидше. Qwen3 — лідер на юридичному (nDCG 0.320), але удвічі повільніший. Nomic — найслабші результати, в окремих доменах поступається навіть BM25.</a:t>
             </a:r>
           </a:p>
         </p:txBody>
@@ -5167,13 +5259,33 @@
           <a:lstStyle/>
           <a:p>
             <a:r>
-              <a:t>⏱ 7:11 – 7:51  ·  слайд 14/17</a:t>
+              <a:t>⏱ 7:51 – 8:41  ·  слайд 15/17</a:t>
             </a:r>
             <a:endParaRPr lang="en-US" dirty="0"/>
           </a:p>
           <a:p>
             <a:r>
-              <a:t>Переходимо до інтегральної оцінки. Результати багатокритеріального вибору. Парето-оптимальна множина — BGE-M3, E5-base та BM25: три з п'яти моделей не домінуються жодною. BGE-M3 — лідер за nDCG, MRR, Recall на технічному і медичному доменах. E5-base — швидка альтернатива: 70 мілісекунд проти 228 у BGE-M3, тобто у три рази швидше. Qwen3 — лідер на юридичному (nDCG 0.320), але удвічі повільніший. Nomic — найслабші результати, в окремих доменах поступається навіть BM25.</a:t>
+              <a:t>Той самий аналіз — у вигляді графіка. Компроміс якості та швидкодії на технічному домені. По осі X — час відповіді, по осі Y — nDCG@10. Парето-фронт виділено пунктиром.</a:t>
+            </a:r>
+          </a:p>
+          <a:p>
+            <a:r>
+              <a:t>BGE-M3 — Парето-оптимальна, лідер якості: nDCG 0.672, ~228 мілісекунд. Основний вибір для впровадження.</a:t>
+            </a:r>
+          </a:p>
+          <a:p>
+            <a:r>
+              <a:t>E5-base — Парето-оптимальна: ~70 мілісекунд, утричі швидше за BGE-M3 при якості на ~10% нижчій.</a:t>
+            </a:r>
+          </a:p>
+          <a:p>
+            <a:r>
+              <a:t>BM25 — Парето-оптимальна як baseline: менше 3 мілісекунд, найвища nDCG — ~0.49.</a:t>
+            </a:r>
+          </a:p>
+          <a:p>
+            <a:r>
+              <a:t>Qwen3 домінується на tech, але кращий на legal. Nomic не рекомендується — повністю домінується, поступається BM25 за якістю.</a:t>
             </a:r>
           </a:p>
         </p:txBody>
@@ -5259,33 +5371,38 @@
           <a:lstStyle/>
           <a:p>
             <a:r>
-              <a:t>⏱ 7:51 – 8:41  ·  слайд 15/17</a:t>
+              <a:t>⏱ 8:41 – 9:28  ·  слайд 16/17</a:t>
             </a:r>
             <a:endParaRPr lang="en-US" dirty="0"/>
           </a:p>
           <a:p>
             <a:r>
-              <a:t>Той самий аналіз — у вигляді графіка. Компроміс якості та швидкодії на технічному домені. По осі X — час відповіді, по осі Y — nDCG@10. Парето-фронт виділено пунктиром.</a:t>
-            </a:r>
-          </a:p>
-          <a:p>
-            <a:r>
-              <a:t>BGE-M3 — Парето-оптимальна, лідер якості: nDCG 0.672, ~228 мілісекунд. Основний вибір для впровадження.</a:t>
-            </a:r>
-          </a:p>
-          <a:p>
-            <a:r>
-              <a:t>E5-base — Парето-оптимальна: ~70 мілісекунд, утричі швидше за BGE-M3 при якості на ~10% нижчій.</a:t>
-            </a:r>
-          </a:p>
-          <a:p>
-            <a:r>
-              <a:t>BM25 — Парето-оптимальна як baseline: менше 3 мілісекунд, найвища nDCG — ~0.49.</a:t>
-            </a:r>
-          </a:p>
-          <a:p>
-            <a:r>
-              <a:t>Qwen3 домінується на tech, але кращий на legal. Nomic не рекомендується — повністю домінується, поступається BM25 за якістю.</a:t>
+              <a:t>Підсумовуючи: на основі багатокритеріального аналізу обґрунтовано рекомендації щодо вибору embedding-моделі для україномовного семантичного пошуку у корпоративних базах знань.</a:t>
+            </a:r>
+          </a:p>
+          <a:p>
+            <a:r>
+              <a:t>BGE-M3 — основна модель для впровадження: найкраща якість і стабільність у різних доменах.</a:t>
+            </a:r>
+          </a:p>
+          <a:p>
+            <a:r>
+              <a:t>E5-base — швидка альтернатива: якість на ~10% нижча за BGE-M3, але утричі швидше.</a:t>
+            </a:r>
+          </a:p>
+          <a:p>
+            <a:r>
+              <a:t>Qwen3 — оптимальний вибір для юридичних колекцій, де він демонструє найвищу якість.</a:t>
+            </a:r>
+          </a:p>
+          <a:p>
+            <a:r>
+              <a:t>BM25 — залишається конкурентним опорним методом у певних доменах і за дуже жорстких вимог до швидкості.</a:t>
+            </a:r>
+          </a:p>
+          <a:p>
+            <a:r>
+              <a:t>Усі задачі, поставлені в роботі, виконано. Мета досягнута.</a:t>
             </a:r>
           </a:p>
         </p:txBody>
@@ -5371,38 +5488,13 @@
           <a:lstStyle/>
           <a:p>
             <a:r>
-              <a:t>⏱ 8:41 – 9:28  ·  слайд 16/17</a:t>
+              <a:t>⏱ 9:28 – 10:00  ·  слайд 17/17</a:t>
             </a:r>
             <a:endParaRPr lang="en-US" dirty="0"/>
           </a:p>
           <a:p>
             <a:r>
-              <a:t>Підсумовуючи: embedding-моделі статистично значуще переважають BM25 для україномовного семантичного пошуку. Сформульовано практичні рекомендації щодо вибору моделі під конкретні умови.</a:t>
-            </a:r>
-          </a:p>
-          <a:p>
-            <a:r>
-              <a:t>BGE-M3 — основна модель для впровадження: найкраща якість і стабільність у різних доменах.</a:t>
-            </a:r>
-          </a:p>
-          <a:p>
-            <a:r>
-              <a:t>E5-base — швидка альтернатива: якість на ~10% нижча за BGE-M3, але утричі швидше.</a:t>
-            </a:r>
-          </a:p>
-          <a:p>
-            <a:r>
-              <a:t>Qwen3 — оптимальний вибір для юридичних колекцій, де він демонструє найвищу якість.</a:t>
-            </a:r>
-          </a:p>
-          <a:p>
-            <a:r>
-              <a:t>BM25 — залишається конкурентним baseline у певних доменах і за дуже жорстких вимог до швидкості.</a:t>
-            </a:r>
-          </a:p>
-          <a:p>
-            <a:r>
-              <a:t>Усі задачі, поставлені в роботі, виконано. Мета досягнута.</a:t>
+              <a:t>Окремо — про апробацію результатів роботи. Апробація: опубліковано дві наукові праці у співавторстві з науковим керівником. Перша — стаття на 2-й конференції «Innovative Research in Science and Economy» з benchmark-методологією. Друга — тези на 30-му форумі «Радіоелектроніка та молодь у XXI столітті» в ХНУРЕ про підвищення якості retrieval. Загалом — два виступи на міжнародних конференціях.</a:t>
             </a:r>
           </a:p>
         </p:txBody>
@@ -5425,98 +5517,6 @@
             <a:fld id="{F7021451-1387-4CA6-816F-3879F97B5CBC}" type="slidenum">
               <a:rPr lang="en-US"/>
               <a:t>17</a:t>
-            </a:fld>
-            <a:endParaRPr lang="en-US"/>
-          </a:p>
-        </p:txBody>
-      </p:sp>
-    </p:spTree>
-    <p:extLst>
-      <p:ext uri="{BB962C8B-B14F-4D97-AF65-F5344CB8AC3E}">
-        <p14:creationId xmlns:p14="http://schemas.microsoft.com/office/powerpoint/2010/main" val="1024086991"/>
-      </p:ext>
-    </p:extLst>
-  </p:cSld>
-  <p:clrMapOvr>
-    <a:masterClrMapping/>
-  </p:clrMapOvr>
-</p:notes>
-</file>
-
-<file path=ppt/notesSlides/notesSlide18.xml><?xml version="1.0" encoding="utf-8"?>
-<p:notes xmlns:a="http://schemas.openxmlformats.org/drawingml/2006/main" xmlns:r="http://schemas.openxmlformats.org/officeDocument/2006/relationships" xmlns:p="http://schemas.openxmlformats.org/presentationml/2006/main">
-  <p:cSld>
-    <p:spTree>
-      <p:nvGrpSpPr>
-        <p:cNvPr id="1" name=""/>
-        <p:cNvGrpSpPr/>
-        <p:nvPr/>
-      </p:nvGrpSpPr>
-      <p:grpSpPr>
-        <a:xfrm>
-          <a:off x="0" y="0"/>
-          <a:ext cx="0" cy="0"/>
-          <a:chOff x="0" y="0"/>
-          <a:chExt cx="0" cy="0"/>
-        </a:xfrm>
-      </p:grpSpPr>
-      <p:sp>
-        <p:nvSpPr>
-          <p:cNvPr id="2" name="Slide Image Placeholder 1"/>
-          <p:cNvSpPr>
-            <a:spLocks noGrp="1" noRot="1" noChangeAspect="1"/>
-          </p:cNvSpPr>
-          <p:nvPr>
-            <p:ph type="sldImg"/>
-          </p:nvPr>
-        </p:nvSpPr>
-        <p:spPr/>
-      </p:sp>
-      <p:sp>
-        <p:nvSpPr>
-          <p:cNvPr id="3" name="Notes Placeholder 2"/>
-          <p:cNvSpPr>
-            <a:spLocks noGrp="1"/>
-          </p:cNvSpPr>
-          <p:nvPr>
-            <p:ph type="body" idx="1"/>
-          </p:nvPr>
-        </p:nvSpPr>
-        <p:spPr/>
-        <p:txBody>
-          <a:bodyPr/>
-          <a:lstStyle/>
-          <a:p>
-            <a:r>
-              <a:t>⏱ 9:28 – 10:00  ·  слайд 17/17</a:t>
-            </a:r>
-            <a:endParaRPr lang="en-US" dirty="0"/>
-          </a:p>
-          <a:p>
-            <a:r>
-              <a:t>Окремо — про апробацію результатів роботи. Апробація: опубліковано дві наукові праці у співавторстві з науковим керівником. Перша — стаття на 2-й конференції «Innovative Research in Science and Economy» з benchmark-методологією. Друга — тези на 30-му форумі «Радіоелектроніка та молодь у XXI столітті» в ХНУРЕ про підвищення якості retrieval. Загалом — два виступи на міжнародних конференціях.</a:t>
-            </a:r>
-          </a:p>
-        </p:txBody>
-      </p:sp>
-      <p:sp>
-        <p:nvSpPr>
-          <p:cNvPr id="4" name="Slide Number Placeholder 3"/>
-          <p:cNvSpPr>
-            <a:spLocks noGrp="1"/>
-          </p:cNvSpPr>
-          <p:nvPr>
-            <p:ph type="sldNum" sz="quarter" idx="10"/>
-          </p:nvPr>
-        </p:nvSpPr>
-        <p:spPr/>
-        <p:txBody>
-          <a:bodyPr/>
-          <a:lstStyle/>
-          <a:p>
-            <a:fld id="{F7021451-1387-4CA6-816F-3879F97B5CBC}" type="slidenum">
-              <a:rPr lang="en-US"/>
-              <a:t>18</a:t>
             </a:fld>
             <a:endParaRPr lang="en-US"/>
           </a:p>
@@ -16457,7 +16457,7 @@
                 <a:ea typeface="Calibri" pitchFamily="34" charset="-122"/>
                 <a:cs typeface="Calibri" pitchFamily="34" charset="-120"/>
               </a:rPr>
-              <a:t>Embedding-моделі статистично значуще переважають BM25 для україномовного семантичного пошуку</a:t>
+              <a:t>Обґрунтовано рекомендації щодо вибору embedding-моделі для україномовного семантичного пошуку у корпоративних базах знань методом багатокритеріального аналізу</a:t>
             </a:r>
             <a:endParaRPr lang="en-US" sz="1100" dirty="0"/>
           </a:p>
@@ -17437,28 +17437,6 @@
                 <a:cs typeface="Calibri" pitchFamily="34" charset="-120"/>
               </a:rPr>
               <a:t>16 / 17</a:t>
-            </a:r>
-            <a:r>
-              <a:rPr lang="uk-UA" sz="900" dirty="0">
-                <a:solidFill>
-                  <a:srgbClr val="64748B"/>
-                </a:solidFill>
-                <a:latin typeface="Calibri" pitchFamily="34" charset="0"/>
-                <a:ea typeface="Calibri" pitchFamily="34" charset="-122"/>
-                <a:cs typeface="Calibri" pitchFamily="34" charset="-120"/>
-              </a:rPr>
-              <a:t/>
-            </a:r>
-            <a:r>
-              <a:rPr lang="en-US" sz="900" dirty="0">
-                <a:solidFill>
-                  <a:srgbClr val="64748B"/>
-                </a:solidFill>
-                <a:latin typeface="Calibri" pitchFamily="34" charset="0"/>
-                <a:ea typeface="Calibri" pitchFamily="34" charset="-122"/>
-                <a:cs typeface="Calibri" pitchFamily="34" charset="-120"/>
-              </a:rPr>
-              <a:t/>
             </a:r>
             <a:endParaRPr lang="en-US" sz="900" dirty="0"/>
           </a:p>
@@ -18482,28 +18460,6 @@
                 <a:cs typeface="Calibri" pitchFamily="34" charset="-120"/>
               </a:rPr>
               <a:t>17 / 17</a:t>
-            </a:r>
-            <a:r>
-              <a:rPr lang="uk-UA" sz="900" dirty="0">
-                <a:solidFill>
-                  <a:srgbClr val="64748B"/>
-                </a:solidFill>
-                <a:latin typeface="Calibri" pitchFamily="34" charset="0"/>
-                <a:ea typeface="Calibri" pitchFamily="34" charset="-122"/>
-                <a:cs typeface="Calibri" pitchFamily="34" charset="-120"/>
-              </a:rPr>
-              <a:t/>
-            </a:r>
-            <a:r>
-              <a:rPr lang="en-US" sz="900" dirty="0">
-                <a:solidFill>
-                  <a:srgbClr val="64748B"/>
-                </a:solidFill>
-                <a:latin typeface="Calibri" pitchFamily="34" charset="0"/>
-                <a:ea typeface="Calibri" pitchFamily="34" charset="-122"/>
-                <a:cs typeface="Calibri" pitchFamily="34" charset="-120"/>
-              </a:rPr>
-              <a:t/>
             </a:r>
             <a:endParaRPr lang="en-US" sz="900" dirty="0"/>
           </a:p>

--- a/thesis/2026_М_ПІ_ІПЗм-24-1_Нестеренко_В_В.pptx
+++ b/thesis/2026_М_ПІ_ІПЗм-24-1_Нестеренко_В_В.pptx
@@ -5488,14 +5488,101 @@
           <a:lstStyle/>
           <a:p>
             <a:r>
-              <a:t>⏱ 9:28 – 10:00  ·  слайд 17/17</a:t>
+              <a:rPr dirty="0"/>
+              <a:t>⏱ 9:28 – 10:00  ·  </a:t>
+            </a:r>
+            <a:r>
+              <a:rPr dirty="0" err="1"/>
+              <a:t>слайд</a:t>
+            </a:r>
+            <a:r>
+              <a:rPr dirty="0"/>
+              <a:t> 17/17</a:t>
             </a:r>
             <a:endParaRPr lang="en-US" dirty="0"/>
           </a:p>
           <a:p>
             <a:r>
-              <a:t>Окремо — про апробацію результатів роботи. Апробація: опубліковано дві наукові праці у співавторстві з науковим керівником. Перша — стаття на 2-й конференції «Innovative Research in Science and Economy» з benchmark-методологією. Друга — тези на 30-му форумі «Радіоелектроніка та молодь у XXI столітті» в ХНУРЕ про підвищення якості retrieval. Загалом — два виступи на міжнародних конференціях.</a:t>
-            </a:r>
+              <a:rPr lang="ru-RU" dirty="0" err="1"/>
+              <a:t>Теоретичні</a:t>
+            </a:r>
+            <a:r>
+              <a:rPr lang="ru-RU" dirty="0"/>
+              <a:t> і </a:t>
+            </a:r>
+            <a:r>
+              <a:rPr lang="ru-RU" dirty="0" err="1"/>
+              <a:t>практичні</a:t>
+            </a:r>
+            <a:r>
+              <a:rPr lang="ru-RU" dirty="0"/>
+              <a:t> </a:t>
+            </a:r>
+            <a:r>
+              <a:rPr lang="ru-RU" dirty="0" err="1"/>
+              <a:t>результати</a:t>
+            </a:r>
+            <a:r>
+              <a:rPr lang="ru-RU" dirty="0"/>
+              <a:t> </a:t>
+            </a:r>
+            <a:r>
+              <a:rPr lang="ru-RU" dirty="0" err="1"/>
+              <a:t>апробовані</a:t>
+            </a:r>
+            <a:r>
+              <a:rPr lang="ru-RU" dirty="0"/>
+              <a:t> на </a:t>
+            </a:r>
+            <a:r>
+              <a:rPr lang="ru-RU" dirty="0" err="1"/>
+              <a:t>двох</a:t>
+            </a:r>
+            <a:r>
+              <a:rPr lang="ru-RU" dirty="0"/>
+              <a:t> </a:t>
+            </a:r>
+            <a:r>
+              <a:rPr lang="ru-RU" dirty="0" err="1"/>
+              <a:t>міжнародних</a:t>
+            </a:r>
+            <a:r>
+              <a:rPr lang="ru-RU" dirty="0"/>
+              <a:t> </a:t>
+            </a:r>
+            <a:r>
+              <a:rPr lang="ru-RU" dirty="0" err="1"/>
+              <a:t>конференціях</a:t>
+            </a:r>
+            <a:r>
+              <a:rPr lang="ru-RU" dirty="0"/>
+              <a:t> і </a:t>
+            </a:r>
+            <a:r>
+              <a:rPr lang="ru-RU" dirty="0" err="1"/>
+              <a:t>опубліковані</a:t>
+            </a:r>
+            <a:r>
+              <a:rPr lang="ru-RU" dirty="0"/>
+              <a:t> у </a:t>
+            </a:r>
+            <a:r>
+              <a:rPr lang="ru-RU" dirty="0" err="1"/>
+              <a:t>двох</a:t>
+            </a:r>
+            <a:r>
+              <a:rPr lang="ru-RU" dirty="0"/>
+              <a:t> </a:t>
+            </a:r>
+            <a:r>
+              <a:rPr lang="ru-RU" dirty="0" err="1"/>
+              <a:t>збірниках</a:t>
+            </a:r>
+            <a:r>
+              <a:rPr lang="ru-RU" dirty="0"/>
+              <a:t> тез.</a:t>
+            </a:r>
+            <a:endParaRPr dirty="0"/>
           </a:p>
         </p:txBody>
       </p:sp>
@@ -5584,7 +5671,9 @@
             </a:r>
             <a:endParaRPr lang="en-US" dirty="0"/>
           </a:p>
-          <a:p/>
+          <a:p>
+            <a:endParaRPr lang="en-US" dirty="0"/>
+          </a:p>
           <a:p>
             <a:r>
               <a:t>Розпочнемо з актуальності. Обсяги корпоративної текстової інформації стрімко зростають, а традиційний лексичний пошук погано працює з синонімією, перефразуванням і мультимовним контентом. Сучасні embedding-моделі дозволяють шукати за змістом, а не за збігом слів.</a:t>
@@ -5784,7 +5873,9 @@
             </a:r>
             <a:endParaRPr lang="en-US" dirty="0"/>
           </a:p>
-          <a:p/>
+          <a:p>
+            <a:endParaRPr lang="en-US" dirty="0"/>
+          </a:p>
           <a:p>
             <a:r>
               <a:t>Виявлена прогалина веде до постановки задачі. Постановка задачі: просто застосувати embedding-модель недостатньо — треба обґрунтовано обрати ту, що забезпечує баланс між якістю пошуку, швидкодією, ресурсами, мовною підтримкою та типом колекції.</a:t>
@@ -5974,7 +6065,9 @@
             </a:r>
             <a:endParaRPr lang="en-US" dirty="0"/>
           </a:p>
-          <a:p/>
+          <a:p>
+            <a:endParaRPr lang="en-US" dirty="0"/>
+          </a:p>
           <a:p>
             <a:r>
               <a:t>Як порівнюватимемо ці п'ять моделей? Оцінювання базується на чотирьох метриках retrieval-якості: nDCG@10 — якість ранжування; MRR@10 — позиція першого релевантного; Recall@10 — повнота; Precision@10 — точність. Окремо вимірюється швидкодія в мілісекундах.</a:t>
@@ -6256,7 +6349,9 @@
             </a:r>
             <a:endParaRPr lang="en-US" dirty="0"/>
           </a:p>
-          <a:p/>
+          <a:p>
+            <a:endParaRPr lang="en-US" dirty="0"/>
+          </a:p>
           <a:p>
             <a:r>
               <a:t>Як це реалізовано архітектурно? Архітектура у вигляді pipeline. На вході — PDF, DOCX, TXT або Markdown. Документи розбиваються на чанки ~600 слів з перекриттям. Далі чанк перетворюється на вектор однією з чотирьох embedding-моделей, L2-нормалізується та індексується у FAISS — точний IndexFlatIP, що для нормалізованих векторів еквівалентне косинусній мірі. Запит проходить ту саму обробку — повертаються топ-K найрелевантніших чанків. Усе обгорнуто у Flask. Основні модулі: build_index, evaluate_benchmark, embedding_models, app.</a:t>
@@ -15278,7 +15373,7 @@
                 <a:ea typeface="Calibri" pitchFamily="34" charset="-122"/>
                 <a:cs typeface="Calibri" pitchFamily="34" charset="-120"/>
               </a:rPr>
-              <a:t>Парето-оптимальна  ·  лідер якості</a:t>
+              <a:t>Парето-оптимальна  ·  найвища nDCG</a:t>
             </a:r>
             <a:endParaRPr lang="en-US" sz="850" dirty="0"/>
           </a:p>
@@ -15463,7 +15558,7 @@
                 <a:ea typeface="Calibri" pitchFamily="34" charset="-122"/>
                 <a:cs typeface="Calibri" pitchFamily="34" charset="-120"/>
               </a:rPr>
-              <a:t>Парето-оптимальна  ·  sweet spot</a:t>
+              <a:t>Парето-оптимальна  ·  ~3× швидше за BGE-M3</a:t>
             </a:r>
             <a:endParaRPr lang="en-US" sz="850" dirty="0"/>
           </a:p>
@@ -15648,7 +15743,7 @@
                 <a:ea typeface="Calibri" pitchFamily="34" charset="-122"/>
                 <a:cs typeface="Calibri" pitchFamily="34" charset="-120"/>
               </a:rPr>
-              <a:t>Парето-оптимальна  ·  baseline</a:t>
+              <a:t>Парето-оптимальна  ·  опорна модель</a:t>
             </a:r>
             <a:endParaRPr lang="en-US" sz="850" dirty="0"/>
           </a:p>
@@ -15833,7 +15928,7 @@
                 <a:ea typeface="Calibri" pitchFamily="34" charset="-122"/>
                 <a:cs typeface="Calibri" pitchFamily="34" charset="-120"/>
               </a:rPr>
-              <a:t>Спеціалізована  ·  лідер на Legal</a:t>
+              <a:t>Поза Парето на Tech  ·  лідер на Legal</a:t>
             </a:r>
             <a:endParaRPr lang="en-US" sz="850" dirty="0"/>
           </a:p>
@@ -15911,7 +16006,7 @@
                 <a:ea typeface="Calibri" pitchFamily="34" charset="-122"/>
                 <a:cs typeface="Calibri" pitchFamily="34" charset="-120"/>
               </a:rPr>
-              <a:t>0.320 на Legal  ·  на Tech домінується</a:t>
+              <a:t>0.320 на Legal  ·  на Tech повільніша і нижча nDCG</a:t>
             </a:r>
             <a:endParaRPr lang="en-US" sz="900" dirty="0"/>
           </a:p>
@@ -16018,7 +16113,7 @@
                 <a:ea typeface="Calibri" pitchFamily="34" charset="-122"/>
                 <a:cs typeface="Calibri" pitchFamily="34" charset="-120"/>
               </a:rPr>
-              <a:t>Не рекомендується  ·  домінується</a:t>
+              <a:t>Домінується іншими моделями</a:t>
             </a:r>
             <a:endParaRPr lang="en-US" sz="850" dirty="0"/>
           </a:p>
@@ -18308,97 +18403,6 @@
               <a:t>Подано підхід до підвищення якості retrieval у корпоративних базах знань на основі контрастивно-навчених embedding-моделей.</a:t>
             </a:r>
             <a:endParaRPr lang="en-US" sz="950" dirty="0"/>
-          </a:p>
-        </p:txBody>
-      </p:sp>
-      <p:sp>
-        <p:nvSpPr>
-          <p:cNvPr id="23" name="Shape 21"/>
-          <p:cNvSpPr/>
-          <p:nvPr/>
-        </p:nvSpPr>
-        <p:spPr>
-          <a:xfrm>
-            <a:off x="411480" y="4297680"/>
-            <a:ext cx="8321040" cy="457200"/>
-          </a:xfrm>
-          <a:prstGeom prst="roundRect">
-            <a:avLst>
-              <a:gd name="adj" fmla="val 12000"/>
-            </a:avLst>
-          </a:prstGeom>
-          <a:solidFill>
-            <a:srgbClr val="0F172A"/>
-          </a:solidFill>
-          <a:ln w="9525">
-            <a:solidFill>
-              <a:srgbClr val="0F172A"/>
-            </a:solidFill>
-            <a:prstDash val="solid"/>
-          </a:ln>
-          <a:effectLst>
-            <a:outerShdw blurRad="76200" dist="12700" dir="5400000" algn="bl" rotWithShape="0">
-              <a:srgbClr val="000000">
-                <a:alpha val="7000"/>
-              </a:srgbClr>
-            </a:outerShdw>
-          </a:effectLst>
-        </p:spPr>
-        <p:txBody>
-          <a:bodyPr/>
-          <a:lstStyle/>
-          <a:p>
-            <a:endParaRPr lang="en-US"/>
-          </a:p>
-        </p:txBody>
-      </p:sp>
-      <p:sp>
-        <p:nvSpPr>
-          <p:cNvPr id="24" name="Text 22"/>
-          <p:cNvSpPr/>
-          <p:nvPr/>
-        </p:nvSpPr>
-        <p:spPr>
-          <a:xfrm>
-            <a:off x="411480" y="4297680"/>
-            <a:ext cx="8321040" cy="457200"/>
-          </a:xfrm>
-          <a:prstGeom prst="rect">
-            <a:avLst/>
-          </a:prstGeom>
-          <a:noFill/>
-          <a:ln/>
-        </p:spPr>
-        <p:txBody>
-          <a:bodyPr wrap="square" lIns="0" tIns="0" rIns="0" bIns="0" rtlCol="0" anchor="ctr"/>
-          <a:lstStyle/>
-          <a:p>
-            <a:pPr marL="0" indent="0" algn="ctr">
-              <a:buNone/>
-            </a:pPr>
-            <a:r>
-              <a:rPr lang="en-US" sz="1000" b="1" kern="0" spc="200" dirty="0">
-                <a:solidFill>
-                  <a:srgbClr val="F59E0B"/>
-                </a:solidFill>
-                <a:latin typeface="Calibri" pitchFamily="34" charset="0"/>
-                <a:ea typeface="Calibri" pitchFamily="34" charset="-122"/>
-                <a:cs typeface="Calibri" pitchFamily="34" charset="-120"/>
-              </a:rPr>
-              <a:t>ЗАГАЛОМ:  </a:t>
-            </a:r>
-            <a:r>
-              <a:rPr lang="en-US" sz="1100" b="1" dirty="0">
-                <a:solidFill>
-                  <a:srgbClr val="F1F5F9"/>
-                </a:solidFill>
-                <a:latin typeface="Calibri" pitchFamily="34" charset="0"/>
-                <a:ea typeface="Calibri" pitchFamily="34" charset="-122"/>
-                <a:cs typeface="Calibri" pitchFamily="34" charset="-120"/>
-              </a:rPr>
-              <a:t>2 наукові праці   ·   2 виступи на міжнародних конференціях   ·   у співавторстві з науковим керівником   ·   ХНУРЕ, 2026</a:t>
-            </a:r>
-            <a:endParaRPr lang="en-US" sz="1000" dirty="0"/>
           </a:p>
         </p:txBody>
       </p:sp>

--- a/thesis/2026_М_ПІ_ІПЗм-24-1_Нестеренко_В_В.pptx
+++ b/thesis/2026_М_ПІ_ІПЗм-24-1_Нестеренко_В_В.pptx
@@ -15202,7 +15202,7 @@
         </p:nvSpPr>
         <p:spPr>
           <a:xfrm>
-            <a:off x="1188720" y="1307592"/>
+            <a:off x="1997872" y="1971130"/>
             <a:ext cx="1645920" cy="228600"/>
           </a:xfrm>
           <a:prstGeom prst="rect">
@@ -15365,7 +15365,7 @@
               <a:buNone/>
             </a:pPr>
             <a:r>
-              <a:rPr lang="en-US" sz="850" b="1" kern="0" spc="100" dirty="0">
+              <a:rPr lang="uk-UA" sz="850" b="1" kern="0" spc="100" dirty="0">
                 <a:solidFill>
                   <a:srgbClr val="64748B"/>
                 </a:solidFill>
@@ -15373,7 +15373,18 @@
                 <a:ea typeface="Calibri" pitchFamily="34" charset="-122"/>
                 <a:cs typeface="Calibri" pitchFamily="34" charset="-120"/>
               </a:rPr>
-              <a:t>Парето-оптимальна  ·  найвища nDCG</a:t>
+              <a:t>Найвища </a:t>
+            </a:r>
+            <a:r>
+              <a:rPr lang="en-US" sz="850" b="1" kern="0" spc="100" dirty="0" err="1">
+                <a:solidFill>
+                  <a:srgbClr val="64748B"/>
+                </a:solidFill>
+                <a:latin typeface="Calibri" pitchFamily="34" charset="0"/>
+                <a:ea typeface="Calibri" pitchFamily="34" charset="-122"/>
+                <a:cs typeface="Calibri" pitchFamily="34" charset="-120"/>
+              </a:rPr>
+              <a:t>nDCG</a:t>
             </a:r>
             <a:endParaRPr lang="en-US" sz="850" dirty="0"/>
           </a:p>
@@ -15558,7 +15569,7 @@
                 <a:ea typeface="Calibri" pitchFamily="34" charset="-122"/>
                 <a:cs typeface="Calibri" pitchFamily="34" charset="-120"/>
               </a:rPr>
-              <a:t>Парето-оптимальна  ·  ~3× швидше за BGE-M3</a:t>
+              <a:t>~3× швидше за BGE-M3</a:t>
             </a:r>
             <a:endParaRPr lang="en-US" sz="850" dirty="0"/>
           </a:p>
@@ -15735,6 +15746,17 @@
               <a:buNone/>
             </a:pPr>
             <a:r>
+              <a:rPr lang="uk-UA" sz="850" b="1" kern="0" spc="100" dirty="0">
+                <a:solidFill>
+                  <a:srgbClr val="64748B"/>
+                </a:solidFill>
+                <a:latin typeface="Calibri" pitchFamily="34" charset="0"/>
+                <a:ea typeface="Calibri" pitchFamily="34" charset="-122"/>
+                <a:cs typeface="Calibri" pitchFamily="34" charset="-120"/>
+              </a:rPr>
+              <a:t>Опорна</a:t>
+            </a:r>
+            <a:r>
               <a:rPr lang="en-US" sz="850" b="1" kern="0" spc="100" dirty="0">
                 <a:solidFill>
                   <a:srgbClr val="64748B"/>
@@ -15743,7 +15765,7 @@
                 <a:ea typeface="Calibri" pitchFamily="34" charset="-122"/>
                 <a:cs typeface="Calibri" pitchFamily="34" charset="-120"/>
               </a:rPr>
-              <a:t>Парето-оптимальна  ·  опорна модель</a:t>
+              <a:t> модель</a:t>
             </a:r>
             <a:endParaRPr lang="en-US" sz="850" dirty="0"/>
           </a:p>
@@ -15864,7 +15886,7 @@
           <a:bodyPr/>
           <a:lstStyle/>
           <a:p>
-            <a:endParaRPr lang="en-US"/>
+            <a:endParaRPr lang="en-US" dirty="0"/>
           </a:p>
         </p:txBody>
       </p:sp>
@@ -15920,6 +15942,17 @@
               <a:buNone/>
             </a:pPr>
             <a:r>
+              <a:rPr lang="uk-UA" sz="850" b="1" kern="0" spc="100" dirty="0">
+                <a:solidFill>
+                  <a:srgbClr val="64748B"/>
+                </a:solidFill>
+                <a:latin typeface="Calibri" pitchFamily="34" charset="0"/>
+                <a:ea typeface="Calibri" pitchFamily="34" charset="-122"/>
+                <a:cs typeface="Calibri" pitchFamily="34" charset="-120"/>
+              </a:rPr>
+              <a:t>Лідер</a:t>
+            </a:r>
+            <a:r>
               <a:rPr lang="en-US" sz="850" b="1" kern="0" spc="100" dirty="0">
                 <a:solidFill>
                   <a:srgbClr val="64748B"/>
@@ -15928,7 +15961,7 @@
                 <a:ea typeface="Calibri" pitchFamily="34" charset="-122"/>
                 <a:cs typeface="Calibri" pitchFamily="34" charset="-120"/>
               </a:rPr>
-              <a:t>Поза Парето на Tech  ·  лідер на Legal</a:t>
+              <a:t> на Legal</a:t>
             </a:r>
             <a:endParaRPr lang="en-US" sz="850" dirty="0"/>
           </a:p>
